--- a/decks/weekly-2026-W33.pptx
+++ b/decks/weekly-2026-W33.pptx
@@ -3139,7 +3139,7 @@
                 </a:solidFill>
                 <a:latin typeface="Arial"/>
               </a:rPr>
-              <a:t>2026-W33 · 2026-08-10 to 2026-08-16, week still running · UTC · first-pass yield, units in the box</a:t>
+              <a:t>2026-W33 · 2026-08-10 to 2026-08-16, week still running · UTC · first-pass yield and units, in the box</a:t>
             </a:r>
           </a:p>
         </p:txBody>
@@ -3196,8 +3196,8 @@
         </p:nvSpPr>
         <p:spPr>
           <a:xfrm>
-            <a:off x="384048" y="1280160"/>
-            <a:ext cx="2212848" cy="274320"/>
+            <a:off x="658368" y="1188720"/>
+            <a:ext cx="2743200" cy="237744"/>
           </a:xfrm>
           <a:prstGeom prst="rect">
             <a:avLst/>
@@ -3216,7 +3216,16 @@
               </a:spcAft>
             </a:pPr>
             <a:r>
-              <a:rPr sz="1200" b="1">
+              <a:rPr sz="1000" b="0">
+                <a:solidFill>
+                  <a:srgbClr val="6B6B6B"/>
+                </a:solidFill>
+                <a:latin typeface="Arial"/>
+              </a:rPr>
+              <a:t>@Sigurd   </a:t>
+            </a:r>
+            <a:r>
+              <a:rPr sz="1250" b="1">
                 <a:solidFill>
                   <a:srgbClr val="141414"/>
                 </a:solidFill>
@@ -3224,28 +3233,140 @@
               </a:rPr>
               <a:t>ASIC</a:t>
             </a:r>
-            <a:r>
-              <a:rPr sz="1000" b="0">
-                <a:solidFill>
-                  <a:srgbClr val="6B6B6B"/>
-                </a:solidFill>
-                <a:latin typeface="Arial"/>
-              </a:rPr>
-              <a:t>  @Sigurd</a:t>
-            </a:r>
-          </a:p>
-        </p:txBody>
-      </p:sp>
-      <p:sp>
-        <p:nvSpPr>
-          <p:cNvPr id="5" name="Rounded Rectangle 4"/>
+          </a:p>
+        </p:txBody>
+      </p:sp>
+      <p:cxnSp>
+        <p:nvCxnSpPr>
+          <p:cNvPr id="5" name="Connector 4"/>
+          <p:cNvCxnSpPr/>
+          <p:nvPr/>
+        </p:nvCxnSpPr>
+        <p:spPr>
+          <a:xfrm>
+            <a:off x="2212848" y="1133856"/>
+            <a:ext cx="0" cy="4672584"/>
+          </a:xfrm>
+          <a:prstGeom prst="line">
+            <a:avLst/>
+          </a:prstGeom>
+          <a:ln w="11430">
+            <a:solidFill>
+              <a:srgbClr val="B5B3AC"/>
+            </a:solidFill>
+            <a:prstDash val="dash"/>
+          </a:ln>
+        </p:spPr>
+        <p:style>
+          <a:lnRef idx="2">
+            <a:schemeClr val="accent1"/>
+          </a:lnRef>
+          <a:fillRef idx="0">
+            <a:schemeClr val="accent1"/>
+          </a:fillRef>
+          <a:effectRef idx="1">
+            <a:schemeClr val="accent1"/>
+          </a:effectRef>
+          <a:fontRef idx="minor">
+            <a:schemeClr val="tx1"/>
+          </a:fontRef>
+        </p:style>
+      </p:cxnSp>
+      <p:sp>
+        <p:nvSpPr>
+          <p:cNvPr id="6" name="Rounded Rectangle 5"/>
           <p:cNvSpPr/>
           <p:nvPr/>
         </p:nvSpPr>
         <p:spPr>
           <a:xfrm>
-            <a:off x="384048" y="1572768"/>
-            <a:ext cx="1847088" cy="786384"/>
+            <a:off x="658368" y="1481328"/>
+            <a:ext cx="1298448" cy="640080"/>
+          </a:xfrm>
+          <a:prstGeom prst="roundRect">
+            <a:avLst/>
+          </a:prstGeom>
+          <a:solidFill>
+            <a:srgbClr val="D9D9D9"/>
+          </a:solidFill>
+          <a:ln w="12700">
+            <a:solidFill>
+              <a:srgbClr val="A5A5A5"/>
+            </a:solidFill>
+          </a:ln>
+          <a:effectLst/>
+        </p:spPr>
+        <p:style>
+          <a:lnRef idx="1">
+            <a:schemeClr val="accent1"/>
+          </a:lnRef>
+          <a:fillRef idx="3">
+            <a:schemeClr val="accent1"/>
+          </a:fillRef>
+          <a:effectRef idx="2">
+            <a:schemeClr val="accent1"/>
+          </a:effectRef>
+          <a:fontRef idx="minor">
+            <a:schemeClr val="lt1"/>
+          </a:fontRef>
+        </p:style>
+        <p:txBody>
+          <a:bodyPr rtlCol="0" anchor="ctr"/>
+          <a:lstStyle/>
+          <a:p>
+            <a:pPr algn="ctr"/>
+          </a:p>
+        </p:txBody>
+      </p:sp>
+      <p:sp>
+        <p:nvSpPr>
+          <p:cNvPr id="7" name="TextBox 6"/>
+          <p:cNvSpPr txBox="1"/>
+          <p:nvPr/>
+        </p:nvSpPr>
+        <p:spPr>
+          <a:xfrm>
+            <a:off x="740664" y="1545336"/>
+            <a:ext cx="1133856" cy="530352"/>
+          </a:xfrm>
+          <a:prstGeom prst="rect">
+            <a:avLst/>
+          </a:prstGeom>
+          <a:noFill/>
+        </p:spPr>
+        <p:txBody>
+          <a:bodyPr wrap="square" lIns="0" rIns="0" tIns="0" bIns="0">
+            <a:spAutoFit/>
+          </a:bodyPr>
+          <a:lstStyle/>
+          <a:p>
+            <a:pPr algn="l">
+              <a:spcAft>
+                <a:spcPts val="100"/>
+              </a:spcAft>
+            </a:pPr>
+            <a:r>
+              <a:rPr sz="1250" b="0">
+                <a:solidFill>
+                  <a:srgbClr val="141414"/>
+                </a:solidFill>
+                <a:latin typeface="Arial"/>
+              </a:rPr>
+              <a:t>ASIC</a:t>
+            </a:r>
+          </a:p>
+        </p:txBody>
+      </p:sp>
+      <p:sp>
+        <p:nvSpPr>
+          <p:cNvPr id="8" name="Rounded Rectangle 7"/>
+          <p:cNvSpPr/>
+          <p:nvPr/>
+        </p:nvSpPr>
+        <p:spPr>
+          <a:xfrm>
+            <a:off x="658368" y="2322576"/>
+            <a:ext cx="1298448" cy="640080"/>
           </a:xfrm>
           <a:prstGeom prst="roundRect">
             <a:avLst/>
@@ -3275,7 +3396,7 @@
           </a:fontRef>
         </p:style>
         <p:txBody>
-          <a:bodyPr rtlCol="0" anchor="ctr" wrap="square"/>
+          <a:bodyPr rtlCol="0" anchor="ctr"/>
           <a:lstStyle/>
           <a:p>
             <a:pPr algn="ctr"/>
@@ -3284,14 +3405,14 @@
       </p:sp>
       <p:sp>
         <p:nvSpPr>
-          <p:cNvPr id="6" name="TextBox 5"/>
+          <p:cNvPr id="9" name="TextBox 8"/>
           <p:cNvSpPr txBox="1"/>
           <p:nvPr/>
         </p:nvSpPr>
         <p:spPr>
           <a:xfrm>
-            <a:off x="484632" y="1664208"/>
-            <a:ext cx="1645920" cy="640080"/>
+            <a:off x="740664" y="2386584"/>
+            <a:ext cx="1133856" cy="530352"/>
           </a:xfrm>
           <a:prstGeom prst="rect">
             <a:avLst/>
@@ -3310,7 +3431,7 @@
               </a:spcAft>
             </a:pPr>
             <a:r>
-              <a:rPr sz="1300" b="1">
+              <a:rPr sz="1250" b="1">
                 <a:solidFill>
                   <a:srgbClr val="141414"/>
                 </a:solidFill>
@@ -3335,7 +3456,7 @@
               <a:t>35.3%</a:t>
             </a:r>
             <a:r>
-              <a:rPr sz="850" b="0">
+              <a:rPr sz="800" b="0">
                 <a:solidFill>
                   <a:srgbClr val="6B6B6B"/>
                 </a:solidFill>
@@ -3348,14 +3469,14 @@
       </p:sp>
       <p:sp>
         <p:nvSpPr>
-          <p:cNvPr id="7" name="Rounded Rectangle 6"/>
+          <p:cNvPr id="10" name="Rounded Rectangle 9"/>
           <p:cNvSpPr/>
           <p:nvPr/>
         </p:nvSpPr>
         <p:spPr>
           <a:xfrm>
-            <a:off x="384048" y="2560320"/>
-            <a:ext cx="1847088" cy="786384"/>
+            <a:off x="658368" y="3163824"/>
+            <a:ext cx="1298448" cy="640080"/>
           </a:xfrm>
           <a:prstGeom prst="roundRect">
             <a:avLst/>
@@ -3385,7 +3506,7 @@
           </a:fontRef>
         </p:style>
         <p:txBody>
-          <a:bodyPr rtlCol="0" anchor="ctr" wrap="square"/>
+          <a:bodyPr rtlCol="0" anchor="ctr"/>
           <a:lstStyle/>
           <a:p>
             <a:pPr algn="ctr"/>
@@ -3394,14 +3515,14 @@
       </p:sp>
       <p:sp>
         <p:nvSpPr>
-          <p:cNvPr id="8" name="TextBox 7"/>
+          <p:cNvPr id="11" name="TextBox 10"/>
           <p:cNvSpPr txBox="1"/>
           <p:nvPr/>
         </p:nvSpPr>
         <p:spPr>
           <a:xfrm>
-            <a:off x="484632" y="2651760"/>
-            <a:ext cx="1645920" cy="640080"/>
+            <a:off x="740664" y="3227832"/>
+            <a:ext cx="1133856" cy="530352"/>
           </a:xfrm>
           <a:prstGeom prst="rect">
             <a:avLst/>
@@ -3420,7 +3541,7 @@
               </a:spcAft>
             </a:pPr>
             <a:r>
-              <a:rPr sz="1300" b="1">
+              <a:rPr sz="1250" b="1">
                 <a:solidFill>
                   <a:srgbClr val="141414"/>
                 </a:solidFill>
@@ -3445,35 +3566,185 @@
               <a:t>84.3%</a:t>
             </a:r>
             <a:r>
+              <a:rPr sz="800" b="0">
+                <a:solidFill>
+                  <a:srgbClr val="6B6B6B"/>
+                </a:solidFill>
+                <a:latin typeface="Arial"/>
+              </a:rPr>
+              <a:t>  reported</a:t>
+            </a:r>
+          </a:p>
+        </p:txBody>
+      </p:sp>
+      <p:sp>
+        <p:nvSpPr>
+          <p:cNvPr id="12" name="Rounded Rectangle 11"/>
+          <p:cNvSpPr/>
+          <p:nvPr/>
+        </p:nvSpPr>
+        <p:spPr>
+          <a:xfrm>
+            <a:off x="658368" y="4005072"/>
+            <a:ext cx="1298448" cy="640080"/>
+          </a:xfrm>
+          <a:prstGeom prst="roundRect">
+            <a:avLst/>
+          </a:prstGeom>
+          <a:solidFill>
+            <a:srgbClr val="D9D9D9"/>
+          </a:solidFill>
+          <a:ln w="12700">
+            <a:solidFill>
+              <a:srgbClr val="A5A5A5"/>
+            </a:solidFill>
+          </a:ln>
+          <a:effectLst/>
+        </p:spPr>
+        <p:style>
+          <a:lnRef idx="1">
+            <a:schemeClr val="accent1"/>
+          </a:lnRef>
+          <a:fillRef idx="3">
+            <a:schemeClr val="accent1"/>
+          </a:fillRef>
+          <a:effectRef idx="2">
+            <a:schemeClr val="accent1"/>
+          </a:effectRef>
+          <a:fontRef idx="minor">
+            <a:schemeClr val="lt1"/>
+          </a:fontRef>
+        </p:style>
+        <p:txBody>
+          <a:bodyPr rtlCol="0" anchor="ctr"/>
+          <a:lstStyle/>
+          <a:p>
+            <a:pPr algn="ctr"/>
+          </a:p>
+        </p:txBody>
+      </p:sp>
+      <p:sp>
+        <p:nvSpPr>
+          <p:cNvPr id="13" name="TextBox 12"/>
+          <p:cNvSpPr txBox="1"/>
+          <p:nvPr/>
+        </p:nvSpPr>
+        <p:spPr>
+          <a:xfrm>
+            <a:off x="740664" y="4069080"/>
+            <a:ext cx="1133856" cy="530352"/>
+          </a:xfrm>
+          <a:prstGeom prst="rect">
+            <a:avLst/>
+          </a:prstGeom>
+          <a:noFill/>
+        </p:spPr>
+        <p:txBody>
+          <a:bodyPr wrap="square" lIns="0" rIns="0" tIns="0" bIns="0">
+            <a:spAutoFit/>
+          </a:bodyPr>
+          <a:lstStyle/>
+          <a:p>
+            <a:pPr algn="l">
+              <a:spcAft>
+                <a:spcPts val="100"/>
+              </a:spcAft>
+            </a:pPr>
+            <a:r>
+              <a:rPr sz="1250" b="1">
+                <a:solidFill>
+                  <a:srgbClr val="141414"/>
+                </a:solidFill>
+                <a:latin typeface="Arial"/>
+              </a:rPr>
+              <a:t>SLT</a:t>
+            </a:r>
+          </a:p>
+          <a:p>
+            <a:pPr algn="l">
+              <a:spcAft>
+                <a:spcPts val="100"/>
+              </a:spcAft>
+            </a:pPr>
+            <a:r>
               <a:rPr sz="850" b="0">
                 <a:solidFill>
                   <a:srgbClr val="6B6B6B"/>
                 </a:solidFill>
                 <a:latin typeface="Arial"/>
               </a:rPr>
-              <a:t>  reported</a:t>
+              <a:t>at Sigurd</a:t>
+            </a:r>
+          </a:p>
+        </p:txBody>
+      </p:sp>
+      <p:sp>
+        <p:nvSpPr>
+          <p:cNvPr id="14" name="TextBox 13"/>
+          <p:cNvSpPr txBox="1"/>
+          <p:nvPr/>
+        </p:nvSpPr>
+        <p:spPr>
+          <a:xfrm>
+            <a:off x="2377440" y="1188720"/>
+            <a:ext cx="2743200" cy="237744"/>
+          </a:xfrm>
+          <a:prstGeom prst="rect">
+            <a:avLst/>
+          </a:prstGeom>
+          <a:noFill/>
+        </p:spPr>
+        <p:txBody>
+          <a:bodyPr wrap="square" lIns="0" rIns="0" tIns="0" bIns="0">
+            <a:spAutoFit/>
+          </a:bodyPr>
+          <a:lstStyle/>
+          <a:p>
+            <a:pPr algn="l">
+              <a:spcAft>
+                <a:spcPts val="0"/>
+              </a:spcAft>
+            </a:pPr>
+            <a:r>
+              <a:rPr sz="1000" b="0">
+                <a:solidFill>
+                  <a:srgbClr val="6B6B6B"/>
+                </a:solidFill>
+                <a:latin typeface="Arial"/>
+              </a:rPr>
+              <a:t>@Pega   </a:t>
+            </a:r>
+            <a:r>
+              <a:rPr sz="1250" b="1">
+                <a:solidFill>
+                  <a:srgbClr val="141414"/>
+                </a:solidFill>
+                <a:latin typeface="Arial"/>
+              </a:rPr>
+              <a:t>PCBA L6</a:t>
             </a:r>
           </a:p>
         </p:txBody>
       </p:sp>
       <p:cxnSp>
         <p:nvCxnSpPr>
-          <p:cNvPr id="9" name="Connector 8"/>
+          <p:cNvPr id="15" name="Connector 14"/>
           <p:cNvCxnSpPr/>
           <p:nvPr/>
         </p:nvCxnSpPr>
         <p:spPr>
           <a:xfrm>
-            <a:off x="1307592" y="2359152"/>
-            <a:ext cx="0" cy="201168"/>
+            <a:off x="5285232" y="1133856"/>
+            <a:ext cx="0" cy="4672584"/>
           </a:xfrm>
           <a:prstGeom prst="line">
             <a:avLst/>
           </a:prstGeom>
-          <a:ln w="13970">
+          <a:ln w="11430">
             <a:solidFill>
-              <a:srgbClr val="9A9992"/>
+              <a:srgbClr val="B5B3AC"/>
             </a:solidFill>
+            <a:prstDash val="dash"/>
           </a:ln>
         </p:spPr>
         <p:style>
@@ -3493,14 +3764,216 @@
       </p:cxnSp>
       <p:sp>
         <p:nvSpPr>
-          <p:cNvPr id="10" name="Rounded Rectangle 9"/>
+          <p:cNvPr id="16" name="Rounded Rectangle 15"/>
           <p:cNvSpPr/>
           <p:nvPr/>
         </p:nvSpPr>
         <p:spPr>
           <a:xfrm>
-            <a:off x="384048" y="3547872"/>
-            <a:ext cx="1847088" cy="786384"/>
+            <a:off x="2377440" y="1481328"/>
+            <a:ext cx="1298448" cy="640080"/>
+          </a:xfrm>
+          <a:prstGeom prst="roundRect">
+            <a:avLst/>
+          </a:prstGeom>
+          <a:solidFill>
+            <a:srgbClr val="D9D9D9"/>
+          </a:solidFill>
+          <a:ln w="12700">
+            <a:solidFill>
+              <a:srgbClr val="A5A5A5"/>
+            </a:solidFill>
+          </a:ln>
+          <a:effectLst/>
+        </p:spPr>
+        <p:style>
+          <a:lnRef idx="1">
+            <a:schemeClr val="accent1"/>
+          </a:lnRef>
+          <a:fillRef idx="3">
+            <a:schemeClr val="accent1"/>
+          </a:fillRef>
+          <a:effectRef idx="2">
+            <a:schemeClr val="accent1"/>
+          </a:effectRef>
+          <a:fontRef idx="minor">
+            <a:schemeClr val="lt1"/>
+          </a:fontRef>
+        </p:style>
+        <p:txBody>
+          <a:bodyPr rtlCol="0" anchor="ctr"/>
+          <a:lstStyle/>
+          <a:p>
+            <a:pPr algn="ctr"/>
+          </a:p>
+        </p:txBody>
+      </p:sp>
+      <p:sp>
+        <p:nvSpPr>
+          <p:cNvPr id="17" name="TextBox 16"/>
+          <p:cNvSpPr txBox="1"/>
+          <p:nvPr/>
+        </p:nvSpPr>
+        <p:spPr>
+          <a:xfrm>
+            <a:off x="2459736" y="1545336"/>
+            <a:ext cx="1133856" cy="530352"/>
+          </a:xfrm>
+          <a:prstGeom prst="rect">
+            <a:avLst/>
+          </a:prstGeom>
+          <a:noFill/>
+        </p:spPr>
+        <p:txBody>
+          <a:bodyPr wrap="square" lIns="0" rIns="0" tIns="0" bIns="0">
+            <a:spAutoFit/>
+          </a:bodyPr>
+          <a:lstStyle/>
+          <a:p>
+            <a:pPr algn="l">
+              <a:spcAft>
+                <a:spcPts val="100"/>
+              </a:spcAft>
+            </a:pPr>
+            <a:r>
+              <a:rPr sz="1250" b="0">
+                <a:solidFill>
+                  <a:srgbClr val="141414"/>
+                </a:solidFill>
+                <a:latin typeface="Arial"/>
+              </a:rPr>
+              <a:t>SMT / ICT</a:t>
+            </a:r>
+          </a:p>
+          <a:p>
+            <a:pPr algn="l">
+              <a:spcAft>
+                <a:spcPts val="100"/>
+              </a:spcAft>
+            </a:pPr>
+            <a:r>
+              <a:rPr sz="850" b="0">
+                <a:solidFill>
+                  <a:srgbClr val="6B6B6B"/>
+                </a:solidFill>
+                <a:latin typeface="Arial"/>
+              </a:rPr>
+              <a:t>HPB &amp; VBB &amp; PV1 &amp; PDB</a:t>
+            </a:r>
+          </a:p>
+        </p:txBody>
+      </p:sp>
+      <p:sp>
+        <p:nvSpPr>
+          <p:cNvPr id="18" name="Rounded Rectangle 17"/>
+          <p:cNvSpPr/>
+          <p:nvPr/>
+        </p:nvSpPr>
+        <p:spPr>
+          <a:xfrm>
+            <a:off x="2377440" y="4005072"/>
+            <a:ext cx="1298448" cy="640080"/>
+          </a:xfrm>
+          <a:prstGeom prst="roundRect">
+            <a:avLst/>
+          </a:prstGeom>
+          <a:solidFill>
+            <a:srgbClr val="E6D0DE"/>
+          </a:solidFill>
+          <a:ln w="12700">
+            <a:solidFill>
+              <a:srgbClr val="C29FB8"/>
+            </a:solidFill>
+          </a:ln>
+          <a:effectLst/>
+        </p:spPr>
+        <p:style>
+          <a:lnRef idx="1">
+            <a:schemeClr val="accent1"/>
+          </a:lnRef>
+          <a:fillRef idx="3">
+            <a:schemeClr val="accent1"/>
+          </a:fillRef>
+          <a:effectRef idx="2">
+            <a:schemeClr val="accent1"/>
+          </a:effectRef>
+          <a:fontRef idx="minor">
+            <a:schemeClr val="lt1"/>
+          </a:fontRef>
+        </p:style>
+        <p:txBody>
+          <a:bodyPr rtlCol="0" anchor="ctr"/>
+          <a:lstStyle/>
+          <a:p>
+            <a:pPr algn="ctr"/>
+          </a:p>
+        </p:txBody>
+      </p:sp>
+      <p:sp>
+        <p:nvSpPr>
+          <p:cNvPr id="19" name="TextBox 18"/>
+          <p:cNvSpPr txBox="1"/>
+          <p:nvPr/>
+        </p:nvSpPr>
+        <p:spPr>
+          <a:xfrm>
+            <a:off x="2459736" y="4069080"/>
+            <a:ext cx="1133856" cy="530352"/>
+          </a:xfrm>
+          <a:prstGeom prst="rect">
+            <a:avLst/>
+          </a:prstGeom>
+          <a:noFill/>
+        </p:spPr>
+        <p:txBody>
+          <a:bodyPr wrap="square" lIns="0" rIns="0" tIns="0" bIns="0">
+            <a:spAutoFit/>
+          </a:bodyPr>
+          <a:lstStyle/>
+          <a:p>
+            <a:pPr algn="l">
+              <a:spcAft>
+                <a:spcPts val="100"/>
+              </a:spcAft>
+            </a:pPr>
+            <a:r>
+              <a:rPr sz="1250" b="0">
+                <a:solidFill>
+                  <a:srgbClr val="141414"/>
+                </a:solidFill>
+                <a:latin typeface="Arial"/>
+              </a:rPr>
+              <a:t>Flash / BFT</a:t>
+            </a:r>
+          </a:p>
+          <a:p>
+            <a:pPr algn="l">
+              <a:spcAft>
+                <a:spcPts val="100"/>
+              </a:spcAft>
+            </a:pPr>
+            <a:r>
+              <a:rPr sz="850" b="0">
+                <a:solidFill>
+                  <a:srgbClr val="6B6B6B"/>
+                </a:solidFill>
+                <a:latin typeface="Arial"/>
+              </a:rPr>
+              <a:t>VBB — not in the yield view</a:t>
+            </a:r>
+          </a:p>
+        </p:txBody>
+      </p:sp>
+      <p:sp>
+        <p:nvSpPr>
+          <p:cNvPr id="20" name="Rounded Rectangle 19"/>
+          <p:cNvSpPr/>
+          <p:nvPr/>
+        </p:nvSpPr>
+        <p:spPr>
+          <a:xfrm>
+            <a:off x="3840480" y="1481328"/>
+            <a:ext cx="1298448" cy="640080"/>
           </a:xfrm>
           <a:prstGeom prst="roundRect">
             <a:avLst/>
@@ -3530,7 +4003,7 @@
           </a:fontRef>
         </p:style>
         <p:txBody>
-          <a:bodyPr rtlCol="0" anchor="ctr" wrap="square"/>
+          <a:bodyPr rtlCol="0" anchor="ctr"/>
           <a:lstStyle/>
           <a:p>
             <a:pPr algn="ctr"/>
@@ -3539,14 +4012,14 @@
       </p:sp>
       <p:sp>
         <p:nvSpPr>
-          <p:cNvPr id="11" name="TextBox 10"/>
+          <p:cNvPr id="21" name="TextBox 20"/>
           <p:cNvSpPr txBox="1"/>
           <p:nvPr/>
         </p:nvSpPr>
         <p:spPr>
           <a:xfrm>
-            <a:off x="484632" y="3639312"/>
-            <a:ext cx="1645920" cy="640080"/>
+            <a:off x="3922776" y="1545336"/>
+            <a:ext cx="1133856" cy="530352"/>
           </a:xfrm>
           <a:prstGeom prst="rect">
             <a:avLst/>
@@ -3565,13 +4038,13 @@
               </a:spcAft>
             </a:pPr>
             <a:r>
-              <a:rPr sz="1300" b="1">
+              <a:rPr sz="1250" b="1">
                 <a:solidFill>
                   <a:srgbClr val="141414"/>
                 </a:solidFill>
                 <a:latin typeface="Arial"/>
               </a:rPr>
-              <a:t>SLT</a:t>
+              <a:t>HTT</a:t>
             </a:r>
           </a:p>
           <a:p>
@@ -3581,97 +4054,82 @@
               </a:spcAft>
             </a:pPr>
             <a:r>
+              <a:rPr sz="1600" b="1">
+                <a:solidFill>
+                  <a:srgbClr val="B3281E"/>
+                </a:solidFill>
+                <a:latin typeface="Arial"/>
+              </a:rPr>
+              <a:t>54.3%</a:t>
+            </a:r>
+            <a:r>
               <a:rPr sz="900" b="0">
                 <a:solidFill>
                   <a:srgbClr val="6B6B6B"/>
                 </a:solidFill>
                 <a:latin typeface="Arial"/>
               </a:rPr>
-              <a:t>at Sigurd</a:t>
-            </a:r>
-          </a:p>
-        </p:txBody>
-      </p:sp>
-      <p:cxnSp>
-        <p:nvCxnSpPr>
-          <p:cNvPr id="12" name="Connector 11"/>
-          <p:cNvCxnSpPr/>
-          <p:nvPr/>
-        </p:nvCxnSpPr>
-        <p:spPr>
-          <a:xfrm>
-            <a:off x="1307592" y="3346704"/>
-            <a:ext cx="0" cy="201168"/>
-          </a:xfrm>
-          <a:prstGeom prst="line">
-            <a:avLst/>
-          </a:prstGeom>
-          <a:ln w="13970">
+              <a:t>  170u</a:t>
+            </a:r>
+          </a:p>
+        </p:txBody>
+      </p:sp>
+      <p:sp>
+        <p:nvSpPr>
+          <p:cNvPr id="22" name="Rounded Rectangle 21"/>
+          <p:cNvSpPr/>
+          <p:nvPr/>
+        </p:nvSpPr>
+        <p:spPr>
+          <a:xfrm>
+            <a:off x="3840480" y="2322576"/>
+            <a:ext cx="1298448" cy="640080"/>
+          </a:xfrm>
+          <a:prstGeom prst="roundRect">
+            <a:avLst/>
+          </a:prstGeom>
+          <a:solidFill>
+            <a:srgbClr val="D5E8D4"/>
+          </a:solidFill>
+          <a:ln w="12700">
             <a:solidFill>
-              <a:srgbClr val="9A9992"/>
+              <a:srgbClr val="82B366"/>
             </a:solidFill>
           </a:ln>
+          <a:effectLst/>
         </p:spPr>
         <p:style>
-          <a:lnRef idx="2">
+          <a:lnRef idx="1">
             <a:schemeClr val="accent1"/>
           </a:lnRef>
-          <a:fillRef idx="0">
+          <a:fillRef idx="3">
             <a:schemeClr val="accent1"/>
           </a:fillRef>
-          <a:effectRef idx="1">
+          <a:effectRef idx="2">
             <a:schemeClr val="accent1"/>
           </a:effectRef>
           <a:fontRef idx="minor">
-            <a:schemeClr val="tx1"/>
+            <a:schemeClr val="lt1"/>
           </a:fontRef>
         </p:style>
-      </p:cxnSp>
-      <p:cxnSp>
-        <p:nvCxnSpPr>
-          <p:cNvPr id="13" name="Connector 12"/>
-          <p:cNvCxnSpPr/>
-          <p:nvPr/>
-        </p:nvCxnSpPr>
-        <p:spPr>
-          <a:xfrm flipV="1">
-            <a:off x="2231136" y="1965960"/>
-            <a:ext cx="365760" cy="1975104"/>
-          </a:xfrm>
-          <a:prstGeom prst="line">
-            <a:avLst/>
-          </a:prstGeom>
-          <a:ln w="13970">
-            <a:solidFill>
-              <a:srgbClr val="9A9992"/>
-            </a:solidFill>
-          </a:ln>
-        </p:spPr>
-        <p:style>
-          <a:lnRef idx="2">
-            <a:schemeClr val="accent1"/>
-          </a:lnRef>
-          <a:fillRef idx="0">
-            <a:schemeClr val="accent1"/>
-          </a:fillRef>
-          <a:effectRef idx="1">
-            <a:schemeClr val="accent1"/>
-          </a:effectRef>
-          <a:fontRef idx="minor">
-            <a:schemeClr val="tx1"/>
-          </a:fontRef>
-        </p:style>
-      </p:cxnSp>
-      <p:sp>
-        <p:nvSpPr>
-          <p:cNvPr id="14" name="TextBox 13"/>
+        <p:txBody>
+          <a:bodyPr rtlCol="0" anchor="ctr"/>
+          <a:lstStyle/>
+          <a:p>
+            <a:pPr algn="ctr"/>
+          </a:p>
+        </p:txBody>
+      </p:sp>
+      <p:sp>
+        <p:nvSpPr>
+          <p:cNvPr id="23" name="TextBox 22"/>
           <p:cNvSpPr txBox="1"/>
           <p:nvPr/>
         </p:nvSpPr>
         <p:spPr>
           <a:xfrm>
-            <a:off x="2596896" y="1280160"/>
-            <a:ext cx="2212848" cy="274320"/>
+            <a:off x="3922776" y="2386584"/>
+            <a:ext cx="1133856" cy="530352"/>
           </a:xfrm>
           <a:prstGeom prst="rect">
             <a:avLst/>
@@ -3686,40 +4144,56 @@
           <a:p>
             <a:pPr algn="l">
               <a:spcAft>
-                <a:spcPts val="0"/>
-              </a:spcAft>
-            </a:pPr>
-            <a:r>
-              <a:rPr sz="1200" b="1">
+                <a:spcPts val="100"/>
+              </a:spcAft>
+            </a:pPr>
+            <a:r>
+              <a:rPr sz="1250" b="1">
                 <a:solidFill>
                   <a:srgbClr val="141414"/>
                 </a:solidFill>
                 <a:latin typeface="Arial"/>
               </a:rPr>
-              <a:t>PCBA L6</a:t>
-            </a:r>
-            <a:r>
-              <a:rPr sz="1000" b="0">
+              <a:t>MLT</a:t>
+            </a:r>
+          </a:p>
+          <a:p>
+            <a:pPr algn="l">
+              <a:spcAft>
+                <a:spcPts val="100"/>
+              </a:spcAft>
+            </a:pPr>
+            <a:r>
+              <a:rPr sz="1600" b="1">
+                <a:solidFill>
+                  <a:srgbClr val="B56B00"/>
+                </a:solidFill>
+                <a:latin typeface="Arial"/>
+              </a:rPr>
+              <a:t>65.5%</a:t>
+            </a:r>
+            <a:r>
+              <a:rPr sz="900" b="0">
                 <a:solidFill>
                   <a:srgbClr val="6B6B6B"/>
                 </a:solidFill>
                 <a:latin typeface="Arial"/>
               </a:rPr>
-              <a:t>  @Pega</a:t>
-            </a:r>
-          </a:p>
-        </p:txBody>
-      </p:sp>
-      <p:sp>
-        <p:nvSpPr>
-          <p:cNvPr id="15" name="Rounded Rectangle 14"/>
+              <a:t>  228u</a:t>
+            </a:r>
+          </a:p>
+        </p:txBody>
+      </p:sp>
+      <p:sp>
+        <p:nvSpPr>
+          <p:cNvPr id="24" name="Rounded Rectangle 23"/>
           <p:cNvSpPr/>
           <p:nvPr/>
         </p:nvSpPr>
         <p:spPr>
           <a:xfrm>
-            <a:off x="2596896" y="1572768"/>
-            <a:ext cx="1847088" cy="786384"/>
+            <a:off x="3840480" y="3163824"/>
+            <a:ext cx="1298448" cy="640080"/>
           </a:xfrm>
           <a:prstGeom prst="roundRect">
             <a:avLst/>
@@ -3749,7 +4223,7 @@
           </a:fontRef>
         </p:style>
         <p:txBody>
-          <a:bodyPr rtlCol="0" anchor="ctr" wrap="square"/>
+          <a:bodyPr rtlCol="0" anchor="ctr"/>
           <a:lstStyle/>
           <a:p>
             <a:pPr algn="ctr"/>
@@ -3758,14 +4232,14 @@
       </p:sp>
       <p:sp>
         <p:nvSpPr>
-          <p:cNvPr id="16" name="TextBox 15"/>
+          <p:cNvPr id="25" name="TextBox 24"/>
           <p:cNvSpPr txBox="1"/>
           <p:nvPr/>
         </p:nvSpPr>
         <p:spPr>
           <a:xfrm>
-            <a:off x="2697480" y="1664208"/>
-            <a:ext cx="1645920" cy="640080"/>
+            <a:off x="3922776" y="3227832"/>
+            <a:ext cx="1133856" cy="530352"/>
           </a:xfrm>
           <a:prstGeom prst="rect">
             <a:avLst/>
@@ -3784,27 +4258,111 @@
               </a:spcAft>
             </a:pPr>
             <a:r>
-              <a:rPr sz="1300" b="0">
+              <a:rPr sz="1250" b="0">
                 <a:solidFill>
                   <a:srgbClr val="141414"/>
                 </a:solidFill>
                 <a:latin typeface="Arial"/>
               </a:rPr>
-              <a:t>SMT / ICT</a:t>
-            </a:r>
-          </a:p>
-        </p:txBody>
-      </p:sp>
-      <p:sp>
-        <p:nvSpPr>
-          <p:cNvPr id="17" name="Rounded Rectangle 16"/>
+              <a:t>ASSY</a:t>
+            </a:r>
+          </a:p>
+        </p:txBody>
+      </p:sp>
+      <p:sp>
+        <p:nvSpPr>
+          <p:cNvPr id="26" name="TextBox 25"/>
+          <p:cNvSpPr txBox="1"/>
+          <p:nvPr/>
+        </p:nvSpPr>
+        <p:spPr>
+          <a:xfrm>
+            <a:off x="5358384" y="1188720"/>
+            <a:ext cx="2743200" cy="237744"/>
+          </a:xfrm>
+          <a:prstGeom prst="rect">
+            <a:avLst/>
+          </a:prstGeom>
+          <a:noFill/>
+        </p:spPr>
+        <p:txBody>
+          <a:bodyPr wrap="square" lIns="0" rIns="0" tIns="0" bIns="0">
+            <a:spAutoFit/>
+          </a:bodyPr>
+          <a:lstStyle/>
+          <a:p>
+            <a:pPr algn="l">
+              <a:spcAft>
+                <a:spcPts val="0"/>
+              </a:spcAft>
+            </a:pPr>
+            <a:r>
+              <a:rPr sz="1000" b="0">
+                <a:solidFill>
+                  <a:srgbClr val="6B6B6B"/>
+                </a:solidFill>
+                <a:latin typeface="Arial"/>
+              </a:rPr>
+              <a:t/>
+            </a:r>
+            <a:r>
+              <a:rPr sz="1250" b="1">
+                <a:solidFill>
+                  <a:srgbClr val="141414"/>
+                </a:solidFill>
+                <a:latin typeface="Arial"/>
+              </a:rPr>
+              <a:t>FATP L10 2U/4U</a:t>
+            </a:r>
+          </a:p>
+        </p:txBody>
+      </p:sp>
+      <p:cxnSp>
+        <p:nvCxnSpPr>
+          <p:cNvPr id="27" name="Connector 26"/>
+          <p:cNvCxnSpPr/>
+          <p:nvPr/>
+        </p:nvCxnSpPr>
+        <p:spPr>
+          <a:xfrm>
+            <a:off x="7059168" y="1133856"/>
+            <a:ext cx="0" cy="4672584"/>
+          </a:xfrm>
+          <a:prstGeom prst="line">
+            <a:avLst/>
+          </a:prstGeom>
+          <a:ln w="11430">
+            <a:solidFill>
+              <a:srgbClr val="B5B3AC"/>
+            </a:solidFill>
+            <a:prstDash val="dash"/>
+          </a:ln>
+        </p:spPr>
+        <p:style>
+          <a:lnRef idx="2">
+            <a:schemeClr val="accent1"/>
+          </a:lnRef>
+          <a:fillRef idx="0">
+            <a:schemeClr val="accent1"/>
+          </a:fillRef>
+          <a:effectRef idx="1">
+            <a:schemeClr val="accent1"/>
+          </a:effectRef>
+          <a:fontRef idx="minor">
+            <a:schemeClr val="tx1"/>
+          </a:fontRef>
+        </p:style>
+      </p:cxnSp>
+      <p:sp>
+        <p:nvSpPr>
+          <p:cNvPr id="28" name="Rounded Rectangle 27"/>
           <p:cNvSpPr/>
           <p:nvPr/>
         </p:nvSpPr>
         <p:spPr>
           <a:xfrm>
-            <a:off x="2596896" y="2560320"/>
-            <a:ext cx="1847088" cy="786384"/>
+            <a:off x="5358384" y="1481328"/>
+            <a:ext cx="1078992" cy="640080"/>
           </a:xfrm>
           <a:prstGeom prst="roundRect">
             <a:avLst/>
@@ -3834,7 +4392,7 @@
           </a:fontRef>
         </p:style>
         <p:txBody>
-          <a:bodyPr rtlCol="0" anchor="ctr" wrap="square"/>
+          <a:bodyPr rtlCol="0" anchor="ctr"/>
           <a:lstStyle/>
           <a:p>
             <a:pPr algn="ctr"/>
@@ -3843,14 +4401,14 @@
       </p:sp>
       <p:sp>
         <p:nvSpPr>
-          <p:cNvPr id="18" name="TextBox 17"/>
+          <p:cNvPr id="29" name="TextBox 28"/>
           <p:cNvSpPr txBox="1"/>
           <p:nvPr/>
         </p:nvSpPr>
         <p:spPr>
           <a:xfrm>
-            <a:off x="2697480" y="2651760"/>
-            <a:ext cx="1645920" cy="640080"/>
+            <a:off x="5440680" y="1545336"/>
+            <a:ext cx="914400" cy="530352"/>
           </a:xfrm>
           <a:prstGeom prst="rect">
             <a:avLst/>
@@ -3869,35 +4427,254 @@
               </a:spcAft>
             </a:pPr>
             <a:r>
-              <a:rPr sz="1300" b="0">
+              <a:rPr sz="1250" b="0">
                 <a:solidFill>
                   <a:srgbClr val="141414"/>
                 </a:solidFill>
                 <a:latin typeface="Arial"/>
               </a:rPr>
               <a:t>ASSY</a:t>
+            </a:r>
+          </a:p>
+        </p:txBody>
+      </p:sp>
+      <p:sp>
+        <p:nvSpPr>
+          <p:cNvPr id="30" name="Rectangle 29"/>
+          <p:cNvSpPr/>
+          <p:nvPr/>
+        </p:nvSpPr>
+        <p:spPr>
+          <a:xfrm>
+            <a:off x="6492240" y="1517904"/>
+            <a:ext cx="384048" cy="228600"/>
+          </a:xfrm>
+          <a:prstGeom prst="rect">
+            <a:avLst/>
+          </a:prstGeom>
+          <a:solidFill>
+            <a:srgbClr val="CFE2F3"/>
+          </a:solidFill>
+          <a:ln w="7620">
+            <a:solidFill>
+              <a:srgbClr val="8A8882"/>
+            </a:solidFill>
+          </a:ln>
+          <a:effectLst/>
+        </p:spPr>
+        <p:style>
+          <a:lnRef idx="1">
+            <a:schemeClr val="accent1"/>
+          </a:lnRef>
+          <a:fillRef idx="3">
+            <a:schemeClr val="accent1"/>
+          </a:fillRef>
+          <a:effectRef idx="2">
+            <a:schemeClr val="accent1"/>
+          </a:effectRef>
+          <a:fontRef idx="minor">
+            <a:schemeClr val="lt1"/>
+          </a:fontRef>
+        </p:style>
+        <p:txBody>
+          <a:bodyPr rtlCol="0" anchor="ctr"/>
+          <a:lstStyle/>
+          <a:p>
+            <a:pPr algn="ctr"/>
+          </a:p>
+        </p:txBody>
+      </p:sp>
+      <p:sp>
+        <p:nvSpPr>
+          <p:cNvPr id="31" name="TextBox 30"/>
+          <p:cNvSpPr txBox="1"/>
+          <p:nvPr/>
+        </p:nvSpPr>
+        <p:spPr>
+          <a:xfrm>
+            <a:off x="6492240" y="1545336"/>
+            <a:ext cx="384048" cy="182880"/>
+          </a:xfrm>
+          <a:prstGeom prst="rect">
+            <a:avLst/>
+          </a:prstGeom>
+          <a:noFill/>
+        </p:spPr>
+        <p:txBody>
+          <a:bodyPr wrap="square" lIns="0" rIns="0" tIns="0" bIns="0">
+            <a:spAutoFit/>
+          </a:bodyPr>
+          <a:lstStyle/>
+          <a:p>
+            <a:pPr algn="ctr">
+              <a:spcAft>
+                <a:spcPts val="0"/>
+              </a:spcAft>
+            </a:pPr>
+            <a:r>
+              <a:rPr sz="900" b="1">
+                <a:solidFill>
+                  <a:srgbClr val="141414"/>
+                </a:solidFill>
+                <a:latin typeface="Arial"/>
+              </a:rPr>
+              <a:t>4U</a:t>
+            </a:r>
+          </a:p>
+        </p:txBody>
+      </p:sp>
+      <p:sp>
+        <p:nvSpPr>
+          <p:cNvPr id="32" name="Rectangle 31"/>
+          <p:cNvSpPr/>
+          <p:nvPr/>
+        </p:nvSpPr>
+        <p:spPr>
+          <a:xfrm>
+            <a:off x="6492240" y="1801368"/>
+            <a:ext cx="384048" cy="228600"/>
+          </a:xfrm>
+          <a:prstGeom prst="rect">
+            <a:avLst/>
+          </a:prstGeom>
+          <a:solidFill>
+            <a:srgbClr val="FFF2CC"/>
+          </a:solidFill>
+          <a:ln w="7620">
+            <a:solidFill>
+              <a:srgbClr val="8A8882"/>
+            </a:solidFill>
+          </a:ln>
+          <a:effectLst/>
+        </p:spPr>
+        <p:style>
+          <a:lnRef idx="1">
+            <a:schemeClr val="accent1"/>
+          </a:lnRef>
+          <a:fillRef idx="3">
+            <a:schemeClr val="accent1"/>
+          </a:fillRef>
+          <a:effectRef idx="2">
+            <a:schemeClr val="accent1"/>
+          </a:effectRef>
+          <a:fontRef idx="minor">
+            <a:schemeClr val="lt1"/>
+          </a:fontRef>
+        </p:style>
+        <p:txBody>
+          <a:bodyPr rtlCol="0" anchor="ctr"/>
+          <a:lstStyle/>
+          <a:p>
+            <a:pPr algn="ctr"/>
+          </a:p>
+        </p:txBody>
+      </p:sp>
+      <p:sp>
+        <p:nvSpPr>
+          <p:cNvPr id="33" name="TextBox 32"/>
+          <p:cNvSpPr txBox="1"/>
+          <p:nvPr/>
+        </p:nvSpPr>
+        <p:spPr>
+          <a:xfrm>
+            <a:off x="6492240" y="1828800"/>
+            <a:ext cx="384048" cy="182880"/>
+          </a:xfrm>
+          <a:prstGeom prst="rect">
+            <a:avLst/>
+          </a:prstGeom>
+          <a:noFill/>
+        </p:spPr>
+        <p:txBody>
+          <a:bodyPr wrap="square" lIns="0" rIns="0" tIns="0" bIns="0">
+            <a:spAutoFit/>
+          </a:bodyPr>
+          <a:lstStyle/>
+          <a:p>
+            <a:pPr algn="ctr">
+              <a:spcAft>
+                <a:spcPts val="0"/>
+              </a:spcAft>
+            </a:pPr>
+            <a:r>
+              <a:rPr sz="900" b="1">
+                <a:solidFill>
+                  <a:srgbClr val="141414"/>
+                </a:solidFill>
+                <a:latin typeface="Arial"/>
+              </a:rPr>
+              <a:t>2U</a:t>
+            </a:r>
+          </a:p>
+        </p:txBody>
+      </p:sp>
+      <p:sp>
+        <p:nvSpPr>
+          <p:cNvPr id="34" name="TextBox 33"/>
+          <p:cNvSpPr txBox="1"/>
+          <p:nvPr/>
+        </p:nvSpPr>
+        <p:spPr>
+          <a:xfrm>
+            <a:off x="7242048" y="1188720"/>
+            <a:ext cx="2743200" cy="237744"/>
+          </a:xfrm>
+          <a:prstGeom prst="rect">
+            <a:avLst/>
+          </a:prstGeom>
+          <a:noFill/>
+        </p:spPr>
+        <p:txBody>
+          <a:bodyPr wrap="square" lIns="0" rIns="0" tIns="0" bIns="0">
+            <a:spAutoFit/>
+          </a:bodyPr>
+          <a:lstStyle/>
+          <a:p>
+            <a:pPr algn="l">
+              <a:spcAft>
+                <a:spcPts val="0"/>
+              </a:spcAft>
+            </a:pPr>
+            <a:r>
+              <a:rPr sz="1000" b="0">
+                <a:solidFill>
+                  <a:srgbClr val="6B6B6B"/>
+                </a:solidFill>
+                <a:latin typeface="Arial"/>
+              </a:rPr>
+              <a:t/>
+            </a:r>
+            <a:r>
+              <a:rPr sz="1250" b="1">
+                <a:solidFill>
+                  <a:srgbClr val="141414"/>
+                </a:solidFill>
+                <a:latin typeface="Arial"/>
+              </a:rPr>
+              <a:t>FATP L10 6U</a:t>
             </a:r>
           </a:p>
         </p:txBody>
       </p:sp>
       <p:cxnSp>
         <p:nvCxnSpPr>
-          <p:cNvPr id="19" name="Connector 18"/>
+          <p:cNvPr id="35" name="Connector 34"/>
           <p:cNvCxnSpPr/>
           <p:nvPr/>
         </p:nvCxnSpPr>
         <p:spPr>
           <a:xfrm>
-            <a:off x="3520440" y="2359152"/>
-            <a:ext cx="0" cy="201168"/>
+            <a:off x="10204704" y="1133856"/>
+            <a:ext cx="0" cy="4672584"/>
           </a:xfrm>
           <a:prstGeom prst="line">
             <a:avLst/>
           </a:prstGeom>
-          <a:ln w="13970">
+          <a:ln w="11430">
             <a:solidFill>
-              <a:srgbClr val="9A9992"/>
+              <a:srgbClr val="B5B3AC"/>
             </a:solidFill>
+            <a:prstDash val="dash"/>
           </a:ln>
         </p:spPr>
         <p:style>
@@ -3917,24 +4694,24 @@
       </p:cxnSp>
       <p:sp>
         <p:nvSpPr>
-          <p:cNvPr id="20" name="Rounded Rectangle 19"/>
+          <p:cNvPr id="36" name="Rounded Rectangle 35"/>
           <p:cNvSpPr/>
           <p:nvPr/>
         </p:nvSpPr>
         <p:spPr>
           <a:xfrm>
-            <a:off x="2596896" y="3547872"/>
-            <a:ext cx="1847088" cy="786384"/>
+            <a:off x="7242048" y="2322576"/>
+            <a:ext cx="1389888" cy="640080"/>
           </a:xfrm>
           <a:prstGeom prst="roundRect">
             <a:avLst/>
           </a:prstGeom>
           <a:solidFill>
-            <a:srgbClr val="D5E8D4"/>
+            <a:srgbClr val="F2ECD9"/>
           </a:solidFill>
           <a:ln w="12700">
             <a:solidFill>
-              <a:srgbClr val="82B366"/>
+              <a:srgbClr val="C9B46B"/>
             </a:solidFill>
           </a:ln>
           <a:effectLst/>
@@ -3954,7 +4731,7 @@
           </a:fontRef>
         </p:style>
         <p:txBody>
-          <a:bodyPr rtlCol="0" anchor="ctr" wrap="square"/>
+          <a:bodyPr rtlCol="0" anchor="ctr"/>
           <a:lstStyle/>
           <a:p>
             <a:pPr algn="ctr"/>
@@ -3963,14 +4740,14 @@
       </p:sp>
       <p:sp>
         <p:nvSpPr>
-          <p:cNvPr id="21" name="TextBox 20"/>
+          <p:cNvPr id="37" name="TextBox 36"/>
           <p:cNvSpPr txBox="1"/>
           <p:nvPr/>
         </p:nvSpPr>
         <p:spPr>
           <a:xfrm>
-            <a:off x="2697480" y="3639312"/>
-            <a:ext cx="1645920" cy="640080"/>
+            <a:off x="7324344" y="2386584"/>
+            <a:ext cx="1225296" cy="530352"/>
           </a:xfrm>
           <a:prstGeom prst="rect">
             <a:avLst/>
@@ -3989,13 +4766,13 @@
               </a:spcAft>
             </a:pPr>
             <a:r>
-              <a:rPr sz="1300" b="1">
+              <a:rPr sz="1250" b="1">
                 <a:solidFill>
                   <a:srgbClr val="141414"/>
                 </a:solidFill>
                 <a:latin typeface="Arial"/>
               </a:rPr>
-              <a:t>MLT</a:t>
+              <a:t>FAT / SFT</a:t>
             </a:r>
           </a:p>
           <a:p>
@@ -4005,81 +4782,53 @@
               </a:spcAft>
             </a:pPr>
             <a:r>
-              <a:rPr sz="1700" b="1">
-                <a:solidFill>
-                  <a:srgbClr val="B56B00"/>
-                </a:solidFill>
-                <a:latin typeface="Arial"/>
-              </a:rPr>
-              <a:t>65.5%</a:t>
-            </a:r>
-            <a:r>
-              <a:rPr sz="900" b="0">
+              <a:rPr sz="1100" b="1">
+                <a:solidFill>
+                  <a:srgbClr val="141414"/>
+                </a:solidFill>
+                <a:latin typeface="Arial"/>
+              </a:rPr>
+              <a:t>FAT 2u · SFT 1u</a:t>
+            </a:r>
+          </a:p>
+          <a:p>
+            <a:pPr algn="l">
+              <a:spcAft>
+                <a:spcPts val="100"/>
+              </a:spcAft>
+            </a:pPr>
+            <a:r>
+              <a:rPr sz="800" b="0">
                 <a:solidFill>
                   <a:srgbClr val="6B6B6B"/>
                 </a:solidFill>
                 <a:latin typeface="Arial"/>
               </a:rPr>
-              <a:t>   228 units</a:t>
-            </a:r>
-          </a:p>
-        </p:txBody>
-      </p:sp>
-      <p:cxnSp>
-        <p:nvCxnSpPr>
-          <p:cNvPr id="22" name="Connector 21"/>
-          <p:cNvCxnSpPr/>
-          <p:nvPr/>
-        </p:nvCxnSpPr>
-        <p:spPr>
-          <a:xfrm>
-            <a:off x="3520440" y="3346704"/>
-            <a:ext cx="0" cy="201168"/>
-          </a:xfrm>
-          <a:prstGeom prst="line">
-            <a:avLst/>
-          </a:prstGeom>
-          <a:ln w="13970">
-            <a:solidFill>
-              <a:srgbClr val="9A9992"/>
-            </a:solidFill>
-          </a:ln>
-        </p:spPr>
-        <p:style>
-          <a:lnRef idx="2">
-            <a:schemeClr val="accent1"/>
-          </a:lnRef>
-          <a:fillRef idx="0">
-            <a:schemeClr val="accent1"/>
-          </a:fillRef>
-          <a:effectRef idx="1">
-            <a:schemeClr val="accent1"/>
-          </a:effectRef>
-          <a:fontRef idx="minor">
-            <a:schemeClr val="tx1"/>
-          </a:fontRef>
-        </p:style>
-      </p:cxnSp>
-      <p:sp>
-        <p:nvSpPr>
-          <p:cNvPr id="23" name="Rounded Rectangle 22"/>
+              <a:t>quantity only</a:t>
+            </a:r>
+          </a:p>
+        </p:txBody>
+      </p:sp>
+      <p:sp>
+        <p:nvSpPr>
+          <p:cNvPr id="38" name="Rounded Rectangle 37"/>
           <p:cNvSpPr/>
           <p:nvPr/>
         </p:nvSpPr>
         <p:spPr>
           <a:xfrm>
-            <a:off x="2596896" y="4535424"/>
-            <a:ext cx="1847088" cy="786384"/>
+            <a:off x="7242048" y="3163824"/>
+            <a:ext cx="1389888" cy="640080"/>
           </a:xfrm>
           <a:prstGeom prst="roundRect">
             <a:avLst/>
           </a:prstGeom>
           <a:solidFill>
-            <a:srgbClr val="D5E8D4"/>
+            <a:srgbClr val="F2ECD9"/>
           </a:solidFill>
           <a:ln w="12700">
             <a:solidFill>
-              <a:srgbClr val="82B366"/>
+              <a:srgbClr val="C9B46B"/>
             </a:solidFill>
           </a:ln>
           <a:effectLst/>
@@ -4099,7 +4848,7 @@
           </a:fontRef>
         </p:style>
         <p:txBody>
-          <a:bodyPr rtlCol="0" anchor="ctr" wrap="square"/>
+          <a:bodyPr rtlCol="0" anchor="ctr"/>
           <a:lstStyle/>
           <a:p>
             <a:pPr algn="ctr"/>
@@ -4108,14 +4857,14 @@
       </p:sp>
       <p:sp>
         <p:nvSpPr>
-          <p:cNvPr id="24" name="TextBox 23"/>
+          <p:cNvPr id="39" name="TextBox 38"/>
           <p:cNvSpPr txBox="1"/>
           <p:nvPr/>
         </p:nvSpPr>
         <p:spPr>
           <a:xfrm>
-            <a:off x="2697480" y="4626864"/>
-            <a:ext cx="1645920" cy="640080"/>
+            <a:off x="7324344" y="3227832"/>
+            <a:ext cx="1225296" cy="530352"/>
           </a:xfrm>
           <a:prstGeom prst="rect">
             <a:avLst/>
@@ -4134,13 +4883,29 @@
               </a:spcAft>
             </a:pPr>
             <a:r>
+              <a:rPr sz="1250" b="1">
+                <a:solidFill>
+                  <a:srgbClr val="141414"/>
+                </a:solidFill>
+                <a:latin typeface="Arial"/>
+              </a:rPr>
+              <a:t>2U</a:t>
+            </a:r>
+          </a:p>
+          <a:p>
+            <a:pPr algn="l">
+              <a:spcAft>
+                <a:spcPts val="100"/>
+              </a:spcAft>
+            </a:pPr>
+            <a:r>
               <a:rPr sz="1300" b="1">
                 <a:solidFill>
                   <a:srgbClr val="141414"/>
                 </a:solidFill>
                 <a:latin typeface="Arial"/>
               </a:rPr>
-              <a:t>HTT</a:t>
+              <a:t>3 units</a:t>
             </a:r>
           </a:p>
           <a:p>
@@ -4150,154 +4915,27 @@
               </a:spcAft>
             </a:pPr>
             <a:r>
-              <a:rPr sz="1700" b="1">
-                <a:solidFill>
-                  <a:srgbClr val="B3281E"/>
-                </a:solidFill>
-                <a:latin typeface="Arial"/>
-              </a:rPr>
-              <a:t>54.3%</a:t>
-            </a:r>
-            <a:r>
-              <a:rPr sz="900" b="0">
+              <a:rPr sz="800" b="0">
                 <a:solidFill>
                   <a:srgbClr val="6B6B6B"/>
                 </a:solidFill>
                 <a:latin typeface="Arial"/>
               </a:rPr>
-              <a:t>   170 units</a:t>
-            </a:r>
-          </a:p>
-        </p:txBody>
-      </p:sp>
-      <p:cxnSp>
-        <p:nvCxnSpPr>
-          <p:cNvPr id="25" name="Connector 24"/>
-          <p:cNvCxnSpPr/>
-          <p:nvPr/>
-        </p:nvCxnSpPr>
-        <p:spPr>
-          <a:xfrm>
-            <a:off x="3520440" y="4334256"/>
-            <a:ext cx="0" cy="201168"/>
-          </a:xfrm>
-          <a:prstGeom prst="line">
-            <a:avLst/>
-          </a:prstGeom>
-          <a:ln w="13970">
-            <a:solidFill>
-              <a:srgbClr val="9A9992"/>
-            </a:solidFill>
-          </a:ln>
-        </p:spPr>
-        <p:style>
-          <a:lnRef idx="2">
-            <a:schemeClr val="accent1"/>
-          </a:lnRef>
-          <a:fillRef idx="0">
-            <a:schemeClr val="accent1"/>
-          </a:fillRef>
-          <a:effectRef idx="1">
-            <a:schemeClr val="accent1"/>
-          </a:effectRef>
-          <a:fontRef idx="minor">
-            <a:schemeClr val="tx1"/>
-          </a:fontRef>
-        </p:style>
-      </p:cxnSp>
-      <p:cxnSp>
-        <p:nvCxnSpPr>
-          <p:cNvPr id="26" name="Connector 25"/>
-          <p:cNvCxnSpPr/>
-          <p:nvPr/>
-        </p:nvCxnSpPr>
-        <p:spPr>
-          <a:xfrm flipV="1">
-            <a:off x="4443984" y="1965960"/>
-            <a:ext cx="365760" cy="2962656"/>
-          </a:xfrm>
-          <a:prstGeom prst="line">
-            <a:avLst/>
-          </a:prstGeom>
-          <a:ln w="13970">
-            <a:solidFill>
-              <a:srgbClr val="9A9992"/>
-            </a:solidFill>
-          </a:ln>
-        </p:spPr>
-        <p:style>
-          <a:lnRef idx="2">
-            <a:schemeClr val="accent1"/>
-          </a:lnRef>
-          <a:fillRef idx="0">
-            <a:schemeClr val="accent1"/>
-          </a:fillRef>
-          <a:effectRef idx="1">
-            <a:schemeClr val="accent1"/>
-          </a:effectRef>
-          <a:fontRef idx="minor">
-            <a:schemeClr val="tx1"/>
-          </a:fontRef>
-        </p:style>
-      </p:cxnSp>
-      <p:sp>
-        <p:nvSpPr>
-          <p:cNvPr id="27" name="TextBox 26"/>
-          <p:cNvSpPr txBox="1"/>
-          <p:nvPr/>
-        </p:nvSpPr>
-        <p:spPr>
-          <a:xfrm>
-            <a:off x="4809744" y="1280160"/>
-            <a:ext cx="2212848" cy="274320"/>
-          </a:xfrm>
-          <a:prstGeom prst="rect">
-            <a:avLst/>
-          </a:prstGeom>
-          <a:noFill/>
-        </p:spPr>
-        <p:txBody>
-          <a:bodyPr wrap="square" lIns="0" rIns="0" tIns="0" bIns="0">
-            <a:spAutoFit/>
-          </a:bodyPr>
-          <a:lstStyle/>
-          <a:p>
-            <a:pPr algn="l">
-              <a:spcAft>
-                <a:spcPts val="0"/>
-              </a:spcAft>
-            </a:pPr>
-            <a:r>
-              <a:rPr sz="1200" b="1">
-                <a:solidFill>
-                  <a:srgbClr val="141414"/>
-                </a:solidFill>
-                <a:latin typeface="Arial"/>
-              </a:rPr>
-              <a:t>FATP L10 2U/4U</a:t>
-            </a:r>
-            <a:r>
-              <a:rPr sz="1000" b="0">
-                <a:solidFill>
-                  <a:srgbClr val="6B6B6B"/>
-                </a:solidFill>
-                <a:latin typeface="Arial"/>
-              </a:rPr>
-              <a:t>  </a:t>
-            </a:r>
-          </a:p>
-        </p:txBody>
-      </p:sp>
-      <p:sp>
-        <p:nvSpPr>
-          <p:cNvPr id="28" name="Rounded Rectangle 27"/>
+              <a:t>quantity only</a:t>
+            </a:r>
+          </a:p>
+        </p:txBody>
+      </p:sp>
+      <p:sp>
+        <p:nvSpPr>
+          <p:cNvPr id="40" name="Rounded Rectangle 39"/>
           <p:cNvSpPr/>
           <p:nvPr/>
         </p:nvSpPr>
         <p:spPr>
           <a:xfrm>
-            <a:off x="4809744" y="1572768"/>
-            <a:ext cx="1847088" cy="786384"/>
+            <a:off x="7242048" y="4005072"/>
+            <a:ext cx="1389888" cy="640080"/>
           </a:xfrm>
           <a:prstGeom prst="roundRect">
             <a:avLst/>
@@ -4327,7 +4965,7 @@
           </a:fontRef>
         </p:style>
         <p:txBody>
-          <a:bodyPr rtlCol="0" anchor="ctr" wrap="square"/>
+          <a:bodyPr rtlCol="0" anchor="ctr"/>
           <a:lstStyle/>
           <a:p>
             <a:pPr algn="ctr"/>
@@ -4336,14 +4974,14 @@
       </p:sp>
       <p:sp>
         <p:nvSpPr>
-          <p:cNvPr id="29" name="TextBox 28"/>
+          <p:cNvPr id="41" name="TextBox 40"/>
           <p:cNvSpPr txBox="1"/>
           <p:nvPr/>
         </p:nvSpPr>
         <p:spPr>
           <a:xfrm>
-            <a:off x="4910328" y="1664208"/>
-            <a:ext cx="1645920" cy="640080"/>
+            <a:off x="7324344" y="4069080"/>
+            <a:ext cx="1225296" cy="530352"/>
           </a:xfrm>
           <a:prstGeom prst="rect">
             <a:avLst/>
@@ -4362,7 +5000,7 @@
               </a:spcAft>
             </a:pPr>
             <a:r>
-              <a:rPr sz="1300" b="0">
+              <a:rPr sz="1250" b="0">
                 <a:solidFill>
                   <a:srgbClr val="141414"/>
                 </a:solidFill>
@@ -4371,69 +5009,64 @@
               <a:t>ASSY</a:t>
             </a:r>
           </a:p>
-          <a:p>
-            <a:pPr algn="l">
-              <a:spcAft>
-                <a:spcPts val="100"/>
-              </a:spcAft>
-            </a:pPr>
-            <a:r>
-              <a:rPr sz="900" b="0">
-                <a:solidFill>
-                  <a:srgbClr val="6B6B6B"/>
-                </a:solidFill>
-                <a:latin typeface="Arial"/>
-              </a:rPr>
-              <a:t>4U / 2U</a:t>
-            </a:r>
-          </a:p>
-        </p:txBody>
-      </p:sp>
-      <p:cxnSp>
-        <p:nvCxnSpPr>
-          <p:cNvPr id="30" name="Connector 29"/>
-          <p:cNvCxnSpPr/>
-          <p:nvPr/>
-        </p:nvCxnSpPr>
-        <p:spPr>
-          <a:xfrm>
-            <a:off x="6656832" y="1965960"/>
-            <a:ext cx="365760" cy="0"/>
-          </a:xfrm>
-          <a:prstGeom prst="line">
-            <a:avLst/>
-          </a:prstGeom>
-          <a:ln w="13970">
+        </p:txBody>
+      </p:sp>
+      <p:sp>
+        <p:nvSpPr>
+          <p:cNvPr id="42" name="Rounded Rectangle 41"/>
+          <p:cNvSpPr/>
+          <p:nvPr/>
+        </p:nvSpPr>
+        <p:spPr>
+          <a:xfrm>
+            <a:off x="8741664" y="2322576"/>
+            <a:ext cx="1298448" cy="640080"/>
+          </a:xfrm>
+          <a:prstGeom prst="roundRect">
+            <a:avLst/>
+          </a:prstGeom>
+          <a:solidFill>
+            <a:srgbClr val="F2ECD9"/>
+          </a:solidFill>
+          <a:ln w="12700">
             <a:solidFill>
-              <a:srgbClr val="9A9992"/>
+              <a:srgbClr val="C9B46B"/>
             </a:solidFill>
           </a:ln>
+          <a:effectLst/>
         </p:spPr>
         <p:style>
-          <a:lnRef idx="2">
+          <a:lnRef idx="1">
             <a:schemeClr val="accent1"/>
           </a:lnRef>
-          <a:fillRef idx="0">
+          <a:fillRef idx="3">
             <a:schemeClr val="accent1"/>
           </a:fillRef>
-          <a:effectRef idx="1">
+          <a:effectRef idx="2">
             <a:schemeClr val="accent1"/>
           </a:effectRef>
           <a:fontRef idx="minor">
-            <a:schemeClr val="tx1"/>
+            <a:schemeClr val="lt1"/>
           </a:fontRef>
         </p:style>
-      </p:cxnSp>
-      <p:sp>
-        <p:nvSpPr>
-          <p:cNvPr id="31" name="TextBox 30"/>
+        <p:txBody>
+          <a:bodyPr rtlCol="0" anchor="ctr"/>
+          <a:lstStyle/>
+          <a:p>
+            <a:pPr algn="ctr"/>
+          </a:p>
+        </p:txBody>
+      </p:sp>
+      <p:sp>
+        <p:nvSpPr>
+          <p:cNvPr id="43" name="TextBox 42"/>
           <p:cNvSpPr txBox="1"/>
           <p:nvPr/>
         </p:nvSpPr>
         <p:spPr>
           <a:xfrm>
-            <a:off x="7022592" y="1280160"/>
-            <a:ext cx="2212848" cy="274320"/>
+            <a:off x="8823960" y="2386584"/>
+            <a:ext cx="1133856" cy="530352"/>
           </a:xfrm>
           <a:prstGeom prst="rect">
             <a:avLst/>
@@ -4448,40 +5081,111 @@
           <a:p>
             <a:pPr algn="l">
               <a:spcAft>
+                <a:spcPts val="100"/>
+              </a:spcAft>
+            </a:pPr>
+            <a:r>
+              <a:rPr sz="1250" b="1">
+                <a:solidFill>
+                  <a:srgbClr val="141414"/>
+                </a:solidFill>
+                <a:latin typeface="Arial"/>
+              </a:rPr>
+              <a:t>Runin</a:t>
+            </a:r>
+          </a:p>
+          <a:p>
+            <a:pPr algn="l">
+              <a:spcAft>
+                <a:spcPts val="100"/>
+              </a:spcAft>
+            </a:pPr>
+            <a:r>
+              <a:rPr sz="1300" b="1">
+                <a:solidFill>
+                  <a:srgbClr val="141414"/>
+                </a:solidFill>
+                <a:latin typeface="Arial"/>
+              </a:rPr>
+              <a:t>1 unit</a:t>
+            </a:r>
+          </a:p>
+          <a:p>
+            <a:pPr algn="l">
+              <a:spcAft>
+                <a:spcPts val="100"/>
+              </a:spcAft>
+            </a:pPr>
+            <a:r>
+              <a:rPr sz="800" b="0">
+                <a:solidFill>
+                  <a:srgbClr val="6B6B6B"/>
+                </a:solidFill>
+                <a:latin typeface="Arial"/>
+              </a:rPr>
+              <a:t>quantity only</a:t>
+            </a:r>
+          </a:p>
+        </p:txBody>
+      </p:sp>
+      <p:sp>
+        <p:nvSpPr>
+          <p:cNvPr id="44" name="TextBox 43"/>
+          <p:cNvSpPr txBox="1"/>
+          <p:nvPr/>
+        </p:nvSpPr>
+        <p:spPr>
+          <a:xfrm>
+            <a:off x="10369296" y="1188720"/>
+            <a:ext cx="1655064" cy="237744"/>
+          </a:xfrm>
+          <a:prstGeom prst="rect">
+            <a:avLst/>
+          </a:prstGeom>
+          <a:noFill/>
+        </p:spPr>
+        <p:txBody>
+          <a:bodyPr wrap="square" lIns="0" rIns="0" tIns="0" bIns="0">
+            <a:spAutoFit/>
+          </a:bodyPr>
+          <a:lstStyle/>
+          <a:p>
+            <a:pPr algn="l">
+              <a:spcAft>
                 <a:spcPts val="0"/>
               </a:spcAft>
             </a:pPr>
             <a:r>
-              <a:rPr sz="1200" b="1">
+              <a:rPr sz="1000" b="0">
+                <a:solidFill>
+                  <a:srgbClr val="6B6B6B"/>
+                </a:solidFill>
+                <a:latin typeface="Arial"/>
+              </a:rPr>
+              <a:t/>
+            </a:r>
+            <a:r>
+              <a:rPr sz="1250" b="1">
                 <a:solidFill>
                   <a:srgbClr val="141414"/>
                 </a:solidFill>
                 <a:latin typeface="Arial"/>
               </a:rPr>
-              <a:t>FATP L10 6U</a:t>
-            </a:r>
-            <a:r>
-              <a:rPr sz="1000" b="0">
-                <a:solidFill>
-                  <a:srgbClr val="6B6B6B"/>
-                </a:solidFill>
-                <a:latin typeface="Arial"/>
-              </a:rPr>
-              <a:t>  </a:t>
-            </a:r>
-          </a:p>
-        </p:txBody>
-      </p:sp>
-      <p:sp>
-        <p:nvSpPr>
-          <p:cNvPr id="32" name="Rounded Rectangle 31"/>
+              <a:t>Rack L11</a:t>
+            </a:r>
+          </a:p>
+        </p:txBody>
+      </p:sp>
+      <p:sp>
+        <p:nvSpPr>
+          <p:cNvPr id="45" name="Rounded Rectangle 44"/>
           <p:cNvSpPr/>
           <p:nvPr/>
         </p:nvSpPr>
         <p:spPr>
           <a:xfrm>
-            <a:off x="7022592" y="1572768"/>
-            <a:ext cx="1847088" cy="786384"/>
+            <a:off x="10369296" y="2322576"/>
+            <a:ext cx="1389888" cy="640080"/>
           </a:xfrm>
           <a:prstGeom prst="roundRect">
             <a:avLst/>
@@ -4511,7 +5215,7 @@
           </a:fontRef>
         </p:style>
         <p:txBody>
-          <a:bodyPr rtlCol="0" anchor="ctr" wrap="square"/>
+          <a:bodyPr rtlCol="0" anchor="ctr"/>
           <a:lstStyle/>
           <a:p>
             <a:pPr algn="ctr"/>
@@ -4520,14 +5224,14 @@
       </p:sp>
       <p:sp>
         <p:nvSpPr>
-          <p:cNvPr id="33" name="TextBox 32"/>
+          <p:cNvPr id="46" name="TextBox 45"/>
           <p:cNvSpPr txBox="1"/>
           <p:nvPr/>
         </p:nvSpPr>
         <p:spPr>
           <a:xfrm>
-            <a:off x="7123176" y="1664208"/>
-            <a:ext cx="1645920" cy="640080"/>
+            <a:off x="10451592" y="2386584"/>
+            <a:ext cx="1225296" cy="530352"/>
           </a:xfrm>
           <a:prstGeom prst="rect">
             <a:avLst/>
@@ -4546,7 +5250,7 @@
               </a:spcAft>
             </a:pPr>
             <a:r>
-              <a:rPr sz="1300" b="0">
+              <a:rPr sz="1250" b="0">
                 <a:solidFill>
                   <a:srgbClr val="141414"/>
                 </a:solidFill>
@@ -4559,14 +5263,14 @@
       </p:sp>
       <p:sp>
         <p:nvSpPr>
-          <p:cNvPr id="34" name="Rounded Rectangle 33"/>
+          <p:cNvPr id="47" name="Rounded Rectangle 46"/>
           <p:cNvSpPr/>
           <p:nvPr/>
         </p:nvSpPr>
         <p:spPr>
           <a:xfrm>
-            <a:off x="7022592" y="2560320"/>
-            <a:ext cx="1847088" cy="786384"/>
+            <a:off x="10369296" y="3163824"/>
+            <a:ext cx="1389888" cy="640080"/>
           </a:xfrm>
           <a:prstGeom prst="roundRect">
             <a:avLst/>
@@ -4596,7 +5300,7 @@
           </a:fontRef>
         </p:style>
         <p:txBody>
-          <a:bodyPr rtlCol="0" anchor="ctr" wrap="square"/>
+          <a:bodyPr rtlCol="0" anchor="ctr"/>
           <a:lstStyle/>
           <a:p>
             <a:pPr algn="ctr"/>
@@ -4605,14 +5309,14 @@
       </p:sp>
       <p:sp>
         <p:nvSpPr>
-          <p:cNvPr id="35" name="TextBox 34"/>
+          <p:cNvPr id="48" name="TextBox 47"/>
           <p:cNvSpPr txBox="1"/>
           <p:nvPr/>
         </p:nvSpPr>
         <p:spPr>
           <a:xfrm>
-            <a:off x="7123176" y="2651760"/>
-            <a:ext cx="1645920" cy="640080"/>
+            <a:off x="10451592" y="3227832"/>
+            <a:ext cx="1225296" cy="530352"/>
           </a:xfrm>
           <a:prstGeom prst="rect">
             <a:avLst/>
@@ -4631,13 +5335,29 @@
               </a:spcAft>
             </a:pPr>
             <a:r>
+              <a:rPr sz="1250" b="1">
+                <a:solidFill>
+                  <a:srgbClr val="141414"/>
+                </a:solidFill>
+                <a:latin typeface="Arial"/>
+              </a:rPr>
+              <a:t>FAT / SFT</a:t>
+            </a:r>
+          </a:p>
+          <a:p>
+            <a:pPr algn="l">
+              <a:spcAft>
+                <a:spcPts val="100"/>
+              </a:spcAft>
+            </a:pPr>
+            <a:r>
               <a:rPr sz="1300" b="1">
                 <a:solidFill>
                   <a:srgbClr val="141414"/>
                 </a:solidFill>
                 <a:latin typeface="Arial"/>
               </a:rPr>
-              <a:t>2U</a:t>
+              <a:t>2 units</a:t>
             </a:r>
           </a:p>
           <a:p>
@@ -4647,589 +5367,27 @@
               </a:spcAft>
             </a:pPr>
             <a:r>
-              <a:rPr sz="1200" b="1">
-                <a:solidFill>
-                  <a:srgbClr val="141414"/>
-                </a:solidFill>
-                <a:latin typeface="Arial"/>
-              </a:rPr>
-              <a:t>3 units</a:t>
-            </a:r>
-            <a:r>
-              <a:rPr sz="850" b="0">
+              <a:rPr sz="800" b="0">
                 <a:solidFill>
                   <a:srgbClr val="6B6B6B"/>
                 </a:solidFill>
                 <a:latin typeface="Arial"/>
               </a:rPr>
-              <a:t>  too few for a yield</a:t>
-            </a:r>
-          </a:p>
-        </p:txBody>
-      </p:sp>
-      <p:cxnSp>
-        <p:nvCxnSpPr>
-          <p:cNvPr id="36" name="Connector 35"/>
-          <p:cNvCxnSpPr/>
-          <p:nvPr/>
-        </p:nvCxnSpPr>
-        <p:spPr>
-          <a:xfrm>
-            <a:off x="7946136" y="2359152"/>
-            <a:ext cx="0" cy="201168"/>
-          </a:xfrm>
-          <a:prstGeom prst="line">
-            <a:avLst/>
-          </a:prstGeom>
-          <a:ln w="13970">
-            <a:solidFill>
-              <a:srgbClr val="9A9992"/>
-            </a:solidFill>
-          </a:ln>
-        </p:spPr>
-        <p:style>
-          <a:lnRef idx="2">
-            <a:schemeClr val="accent1"/>
-          </a:lnRef>
-          <a:fillRef idx="0">
-            <a:schemeClr val="accent1"/>
-          </a:fillRef>
-          <a:effectRef idx="1">
-            <a:schemeClr val="accent1"/>
-          </a:effectRef>
-          <a:fontRef idx="minor">
-            <a:schemeClr val="tx1"/>
-          </a:fontRef>
-        </p:style>
-      </p:cxnSp>
-      <p:sp>
-        <p:nvSpPr>
-          <p:cNvPr id="37" name="Rounded Rectangle 36"/>
+              <a:t>quantity only</a:t>
+            </a:r>
+          </a:p>
+        </p:txBody>
+      </p:sp>
+      <p:sp>
+        <p:nvSpPr>
+          <p:cNvPr id="49" name="Rounded Rectangle 48"/>
           <p:cNvSpPr/>
           <p:nvPr/>
         </p:nvSpPr>
         <p:spPr>
           <a:xfrm>
-            <a:off x="7022592" y="3547872"/>
-            <a:ext cx="1847088" cy="786384"/>
-          </a:xfrm>
-          <a:prstGeom prst="roundRect">
-            <a:avLst/>
-          </a:prstGeom>
-          <a:solidFill>
-            <a:srgbClr val="F2ECD9"/>
-          </a:solidFill>
-          <a:ln w="12700">
-            <a:solidFill>
-              <a:srgbClr val="C9B46B"/>
-            </a:solidFill>
-          </a:ln>
-          <a:effectLst/>
-        </p:spPr>
-        <p:style>
-          <a:lnRef idx="1">
-            <a:schemeClr val="accent1"/>
-          </a:lnRef>
-          <a:fillRef idx="3">
-            <a:schemeClr val="accent1"/>
-          </a:fillRef>
-          <a:effectRef idx="2">
-            <a:schemeClr val="accent1"/>
-          </a:effectRef>
-          <a:fontRef idx="minor">
-            <a:schemeClr val="lt1"/>
-          </a:fontRef>
-        </p:style>
-        <p:txBody>
-          <a:bodyPr rtlCol="0" anchor="ctr" wrap="square"/>
-          <a:lstStyle/>
-          <a:p>
-            <a:pPr algn="ctr"/>
-          </a:p>
-        </p:txBody>
-      </p:sp>
-      <p:sp>
-        <p:nvSpPr>
-          <p:cNvPr id="38" name="TextBox 37"/>
-          <p:cNvSpPr txBox="1"/>
-          <p:nvPr/>
-        </p:nvSpPr>
-        <p:spPr>
-          <a:xfrm>
-            <a:off x="7123176" y="3639312"/>
-            <a:ext cx="1645920" cy="640080"/>
-          </a:xfrm>
-          <a:prstGeom prst="rect">
-            <a:avLst/>
-          </a:prstGeom>
-          <a:noFill/>
-        </p:spPr>
-        <p:txBody>
-          <a:bodyPr wrap="square" lIns="0" rIns="0" tIns="0" bIns="0">
-            <a:spAutoFit/>
-          </a:bodyPr>
-          <a:lstStyle/>
-          <a:p>
-            <a:pPr algn="l">
-              <a:spcAft>
-                <a:spcPts val="100"/>
-              </a:spcAft>
-            </a:pPr>
-            <a:r>
-              <a:rPr sz="1300" b="1">
-                <a:solidFill>
-                  <a:srgbClr val="141414"/>
-                </a:solidFill>
-                <a:latin typeface="Arial"/>
-              </a:rPr>
-              <a:t>FAT</a:t>
-            </a:r>
-          </a:p>
-          <a:p>
-            <a:pPr algn="l">
-              <a:spcAft>
-                <a:spcPts val="100"/>
-              </a:spcAft>
-            </a:pPr>
-            <a:r>
-              <a:rPr sz="1200" b="1">
-                <a:solidFill>
-                  <a:srgbClr val="141414"/>
-                </a:solidFill>
-                <a:latin typeface="Arial"/>
-              </a:rPr>
-              <a:t>2 units</a:t>
-            </a:r>
-            <a:r>
-              <a:rPr sz="850" b="0">
-                <a:solidFill>
-                  <a:srgbClr val="6B6B6B"/>
-                </a:solidFill>
-                <a:latin typeface="Arial"/>
-              </a:rPr>
-              <a:t>  too few for a yield</a:t>
-            </a:r>
-          </a:p>
-        </p:txBody>
-      </p:sp>
-      <p:cxnSp>
-        <p:nvCxnSpPr>
-          <p:cNvPr id="39" name="Connector 38"/>
-          <p:cNvCxnSpPr/>
-          <p:nvPr/>
-        </p:nvCxnSpPr>
-        <p:spPr>
-          <a:xfrm>
-            <a:off x="7946136" y="3346704"/>
-            <a:ext cx="0" cy="201168"/>
-          </a:xfrm>
-          <a:prstGeom prst="line">
-            <a:avLst/>
-          </a:prstGeom>
-          <a:ln w="13970">
-            <a:solidFill>
-              <a:srgbClr val="9A9992"/>
-            </a:solidFill>
-          </a:ln>
-        </p:spPr>
-        <p:style>
-          <a:lnRef idx="2">
-            <a:schemeClr val="accent1"/>
-          </a:lnRef>
-          <a:fillRef idx="0">
-            <a:schemeClr val="accent1"/>
-          </a:fillRef>
-          <a:effectRef idx="1">
-            <a:schemeClr val="accent1"/>
-          </a:effectRef>
-          <a:fontRef idx="minor">
-            <a:schemeClr val="tx1"/>
-          </a:fontRef>
-        </p:style>
-      </p:cxnSp>
-      <p:sp>
-        <p:nvSpPr>
-          <p:cNvPr id="40" name="Rounded Rectangle 39"/>
-          <p:cNvSpPr/>
-          <p:nvPr/>
-        </p:nvSpPr>
-        <p:spPr>
-          <a:xfrm>
-            <a:off x="7022592" y="4535424"/>
-            <a:ext cx="1847088" cy="786384"/>
-          </a:xfrm>
-          <a:prstGeom prst="roundRect">
-            <a:avLst/>
-          </a:prstGeom>
-          <a:solidFill>
-            <a:srgbClr val="F2ECD9"/>
-          </a:solidFill>
-          <a:ln w="12700">
-            <a:solidFill>
-              <a:srgbClr val="C9B46B"/>
-            </a:solidFill>
-          </a:ln>
-          <a:effectLst/>
-        </p:spPr>
-        <p:style>
-          <a:lnRef idx="1">
-            <a:schemeClr val="accent1"/>
-          </a:lnRef>
-          <a:fillRef idx="3">
-            <a:schemeClr val="accent1"/>
-          </a:fillRef>
-          <a:effectRef idx="2">
-            <a:schemeClr val="accent1"/>
-          </a:effectRef>
-          <a:fontRef idx="minor">
-            <a:schemeClr val="lt1"/>
-          </a:fontRef>
-        </p:style>
-        <p:txBody>
-          <a:bodyPr rtlCol="0" anchor="ctr" wrap="square"/>
-          <a:lstStyle/>
-          <a:p>
-            <a:pPr algn="ctr"/>
-          </a:p>
-        </p:txBody>
-      </p:sp>
-      <p:sp>
-        <p:nvSpPr>
-          <p:cNvPr id="41" name="TextBox 40"/>
-          <p:cNvSpPr txBox="1"/>
-          <p:nvPr/>
-        </p:nvSpPr>
-        <p:spPr>
-          <a:xfrm>
-            <a:off x="7123176" y="4626864"/>
-            <a:ext cx="1645920" cy="640080"/>
-          </a:xfrm>
-          <a:prstGeom prst="rect">
-            <a:avLst/>
-          </a:prstGeom>
-          <a:noFill/>
-        </p:spPr>
-        <p:txBody>
-          <a:bodyPr wrap="square" lIns="0" rIns="0" tIns="0" bIns="0">
-            <a:spAutoFit/>
-          </a:bodyPr>
-          <a:lstStyle/>
-          <a:p>
-            <a:pPr algn="l">
-              <a:spcAft>
-                <a:spcPts val="100"/>
-              </a:spcAft>
-            </a:pPr>
-            <a:r>
-              <a:rPr sz="1300" b="1">
-                <a:solidFill>
-                  <a:srgbClr val="141414"/>
-                </a:solidFill>
-                <a:latin typeface="Arial"/>
-              </a:rPr>
-              <a:t>SFT</a:t>
-            </a:r>
-          </a:p>
-          <a:p>
-            <a:pPr algn="l">
-              <a:spcAft>
-                <a:spcPts val="100"/>
-              </a:spcAft>
-            </a:pPr>
-            <a:r>
-              <a:rPr sz="1200" b="1">
-                <a:solidFill>
-                  <a:srgbClr val="141414"/>
-                </a:solidFill>
-                <a:latin typeface="Arial"/>
-              </a:rPr>
-              <a:t>1 units</a:t>
-            </a:r>
-            <a:r>
-              <a:rPr sz="850" b="0">
-                <a:solidFill>
-                  <a:srgbClr val="6B6B6B"/>
-                </a:solidFill>
-                <a:latin typeface="Arial"/>
-              </a:rPr>
-              <a:t>  too few for a yield</a:t>
-            </a:r>
-          </a:p>
-        </p:txBody>
-      </p:sp>
-      <p:cxnSp>
-        <p:nvCxnSpPr>
-          <p:cNvPr id="42" name="Connector 41"/>
-          <p:cNvCxnSpPr/>
-          <p:nvPr/>
-        </p:nvCxnSpPr>
-        <p:spPr>
-          <a:xfrm>
-            <a:off x="7946136" y="4334256"/>
-            <a:ext cx="0" cy="201168"/>
-          </a:xfrm>
-          <a:prstGeom prst="line">
-            <a:avLst/>
-          </a:prstGeom>
-          <a:ln w="13970">
-            <a:solidFill>
-              <a:srgbClr val="9A9992"/>
-            </a:solidFill>
-          </a:ln>
-        </p:spPr>
-        <p:style>
-          <a:lnRef idx="2">
-            <a:schemeClr val="accent1"/>
-          </a:lnRef>
-          <a:fillRef idx="0">
-            <a:schemeClr val="accent1"/>
-          </a:fillRef>
-          <a:effectRef idx="1">
-            <a:schemeClr val="accent1"/>
-          </a:effectRef>
-          <a:fontRef idx="minor">
-            <a:schemeClr val="tx1"/>
-          </a:fontRef>
-        </p:style>
-      </p:cxnSp>
-      <p:sp>
-        <p:nvSpPr>
-          <p:cNvPr id="43" name="Rounded Rectangle 42"/>
-          <p:cNvSpPr/>
-          <p:nvPr/>
-        </p:nvSpPr>
-        <p:spPr>
-          <a:xfrm>
-            <a:off x="7022592" y="5522976"/>
-            <a:ext cx="1847088" cy="786384"/>
-          </a:xfrm>
-          <a:prstGeom prst="roundRect">
-            <a:avLst/>
-          </a:prstGeom>
-          <a:solidFill>
-            <a:srgbClr val="F2ECD9"/>
-          </a:solidFill>
-          <a:ln w="12700">
-            <a:solidFill>
-              <a:srgbClr val="C9B46B"/>
-            </a:solidFill>
-          </a:ln>
-          <a:effectLst/>
-        </p:spPr>
-        <p:style>
-          <a:lnRef idx="1">
-            <a:schemeClr val="accent1"/>
-          </a:lnRef>
-          <a:fillRef idx="3">
-            <a:schemeClr val="accent1"/>
-          </a:fillRef>
-          <a:effectRef idx="2">
-            <a:schemeClr val="accent1"/>
-          </a:effectRef>
-          <a:fontRef idx="minor">
-            <a:schemeClr val="lt1"/>
-          </a:fontRef>
-        </p:style>
-        <p:txBody>
-          <a:bodyPr rtlCol="0" anchor="ctr" wrap="square"/>
-          <a:lstStyle/>
-          <a:p>
-            <a:pPr algn="ctr"/>
-          </a:p>
-        </p:txBody>
-      </p:sp>
-      <p:sp>
-        <p:nvSpPr>
-          <p:cNvPr id="44" name="TextBox 43"/>
-          <p:cNvSpPr txBox="1"/>
-          <p:nvPr/>
-        </p:nvSpPr>
-        <p:spPr>
-          <a:xfrm>
-            <a:off x="7123176" y="5614416"/>
-            <a:ext cx="1645920" cy="640080"/>
-          </a:xfrm>
-          <a:prstGeom prst="rect">
-            <a:avLst/>
-          </a:prstGeom>
-          <a:noFill/>
-        </p:spPr>
-        <p:txBody>
-          <a:bodyPr wrap="square" lIns="0" rIns="0" tIns="0" bIns="0">
-            <a:spAutoFit/>
-          </a:bodyPr>
-          <a:lstStyle/>
-          <a:p>
-            <a:pPr algn="l">
-              <a:spcAft>
-                <a:spcPts val="100"/>
-              </a:spcAft>
-            </a:pPr>
-            <a:r>
-              <a:rPr sz="1300" b="1">
-                <a:solidFill>
-                  <a:srgbClr val="141414"/>
-                </a:solidFill>
-                <a:latin typeface="Arial"/>
-              </a:rPr>
-              <a:t>Runin</a:t>
-            </a:r>
-          </a:p>
-          <a:p>
-            <a:pPr algn="l">
-              <a:spcAft>
-                <a:spcPts val="100"/>
-              </a:spcAft>
-            </a:pPr>
-            <a:r>
-              <a:rPr sz="1200" b="1">
-                <a:solidFill>
-                  <a:srgbClr val="141414"/>
-                </a:solidFill>
-                <a:latin typeface="Arial"/>
-              </a:rPr>
-              <a:t>1 units</a:t>
-            </a:r>
-            <a:r>
-              <a:rPr sz="850" b="0">
-                <a:solidFill>
-                  <a:srgbClr val="6B6B6B"/>
-                </a:solidFill>
-                <a:latin typeface="Arial"/>
-              </a:rPr>
-              <a:t>  too few for a yield</a:t>
-            </a:r>
-          </a:p>
-        </p:txBody>
-      </p:sp>
-      <p:cxnSp>
-        <p:nvCxnSpPr>
-          <p:cNvPr id="45" name="Connector 44"/>
-          <p:cNvCxnSpPr/>
-          <p:nvPr/>
-        </p:nvCxnSpPr>
-        <p:spPr>
-          <a:xfrm>
-            <a:off x="7946136" y="5321808"/>
-            <a:ext cx="0" cy="201168"/>
-          </a:xfrm>
-          <a:prstGeom prst="line">
-            <a:avLst/>
-          </a:prstGeom>
-          <a:ln w="13970">
-            <a:solidFill>
-              <a:srgbClr val="9A9992"/>
-            </a:solidFill>
-          </a:ln>
-        </p:spPr>
-        <p:style>
-          <a:lnRef idx="2">
-            <a:schemeClr val="accent1"/>
-          </a:lnRef>
-          <a:fillRef idx="0">
-            <a:schemeClr val="accent1"/>
-          </a:fillRef>
-          <a:effectRef idx="1">
-            <a:schemeClr val="accent1"/>
-          </a:effectRef>
-          <a:fontRef idx="minor">
-            <a:schemeClr val="tx1"/>
-          </a:fontRef>
-        </p:style>
-      </p:cxnSp>
-      <p:cxnSp>
-        <p:nvCxnSpPr>
-          <p:cNvPr id="46" name="Connector 45"/>
-          <p:cNvCxnSpPr/>
-          <p:nvPr/>
-        </p:nvCxnSpPr>
-        <p:spPr>
-          <a:xfrm flipV="1">
-            <a:off x="8869680" y="1965960"/>
-            <a:ext cx="365760" cy="3950208"/>
-          </a:xfrm>
-          <a:prstGeom prst="line">
-            <a:avLst/>
-          </a:prstGeom>
-          <a:ln w="13970">
-            <a:solidFill>
-              <a:srgbClr val="9A9992"/>
-            </a:solidFill>
-          </a:ln>
-        </p:spPr>
-        <p:style>
-          <a:lnRef idx="2">
-            <a:schemeClr val="accent1"/>
-          </a:lnRef>
-          <a:fillRef idx="0">
-            <a:schemeClr val="accent1"/>
-          </a:fillRef>
-          <a:effectRef idx="1">
-            <a:schemeClr val="accent1"/>
-          </a:effectRef>
-          <a:fontRef idx="minor">
-            <a:schemeClr val="tx1"/>
-          </a:fontRef>
-        </p:style>
-      </p:cxnSp>
-      <p:sp>
-        <p:nvSpPr>
-          <p:cNvPr id="47" name="TextBox 46"/>
-          <p:cNvSpPr txBox="1"/>
-          <p:nvPr/>
-        </p:nvSpPr>
-        <p:spPr>
-          <a:xfrm>
-            <a:off x="9235440" y="1280160"/>
-            <a:ext cx="2212848" cy="274320"/>
-          </a:xfrm>
-          <a:prstGeom prst="rect">
-            <a:avLst/>
-          </a:prstGeom>
-          <a:noFill/>
-        </p:spPr>
-        <p:txBody>
-          <a:bodyPr wrap="square" lIns="0" rIns="0" tIns="0" bIns="0">
-            <a:spAutoFit/>
-          </a:bodyPr>
-          <a:lstStyle/>
-          <a:p>
-            <a:pPr algn="l">
-              <a:spcAft>
-                <a:spcPts val="0"/>
-              </a:spcAft>
-            </a:pPr>
-            <a:r>
-              <a:rPr sz="1200" b="1">
-                <a:solidFill>
-                  <a:srgbClr val="141414"/>
-                </a:solidFill>
-                <a:latin typeface="Arial"/>
-              </a:rPr>
-              <a:t>Rack L11</a:t>
-            </a:r>
-            <a:r>
-              <a:rPr sz="1000" b="0">
-                <a:solidFill>
-                  <a:srgbClr val="6B6B6B"/>
-                </a:solidFill>
-                <a:latin typeface="Arial"/>
-              </a:rPr>
-              <a:t>  </a:t>
-            </a:r>
-          </a:p>
-        </p:txBody>
-      </p:sp>
-      <p:sp>
-        <p:nvSpPr>
-          <p:cNvPr id="48" name="Rounded Rectangle 47"/>
-          <p:cNvSpPr/>
-          <p:nvPr/>
-        </p:nvSpPr>
-        <p:spPr>
-          <a:xfrm>
-            <a:off x="9235440" y="1572768"/>
-            <a:ext cx="1847088" cy="786384"/>
+            <a:off x="10369296" y="4005072"/>
+            <a:ext cx="1389888" cy="640080"/>
           </a:xfrm>
           <a:prstGeom prst="roundRect">
             <a:avLst/>
@@ -5259,7 +5417,7 @@
           </a:fontRef>
         </p:style>
         <p:txBody>
-          <a:bodyPr rtlCol="0" anchor="ctr" wrap="square"/>
+          <a:bodyPr rtlCol="0" anchor="ctr"/>
           <a:lstStyle/>
           <a:p>
             <a:pPr algn="ctr"/>
@@ -5268,14 +5426,14 @@
       </p:sp>
       <p:sp>
         <p:nvSpPr>
-          <p:cNvPr id="49" name="TextBox 48"/>
+          <p:cNvPr id="50" name="TextBox 49"/>
           <p:cNvSpPr txBox="1"/>
           <p:nvPr/>
         </p:nvSpPr>
         <p:spPr>
           <a:xfrm>
-            <a:off x="9336024" y="1664208"/>
-            <a:ext cx="1645920" cy="640080"/>
+            <a:off x="10451592" y="4069080"/>
+            <a:ext cx="1225296" cy="530352"/>
           </a:xfrm>
           <a:prstGeom prst="rect">
             <a:avLst/>
@@ -5294,292 +5452,43 @@
               </a:spcAft>
             </a:pPr>
             <a:r>
-              <a:rPr sz="1300" b="0">
+              <a:rPr sz="1250" b="1">
                 <a:solidFill>
                   <a:srgbClr val="141414"/>
                 </a:solidFill>
                 <a:latin typeface="Arial"/>
               </a:rPr>
-              <a:t>ASSY</a:t>
-            </a:r>
-          </a:p>
-        </p:txBody>
-      </p:sp>
-      <p:sp>
-        <p:nvSpPr>
-          <p:cNvPr id="50" name="Rounded Rectangle 49"/>
+              <a:t>Runin</a:t>
+            </a:r>
+          </a:p>
+          <a:p>
+            <a:pPr algn="l">
+              <a:spcAft>
+                <a:spcPts val="100"/>
+              </a:spcAft>
+            </a:pPr>
+            <a:r>
+              <a:rPr sz="850" b="0">
+                <a:solidFill>
+                  <a:srgbClr val="6B6B6B"/>
+                </a:solidFill>
+                <a:latin typeface="Arial"/>
+              </a:rPr>
+              <a:t>counted with FAT / SFT</a:t>
+            </a:r>
+          </a:p>
+        </p:txBody>
+      </p:sp>
+      <p:sp>
+        <p:nvSpPr>
+          <p:cNvPr id="51" name="Rounded Rectangle 50"/>
           <p:cNvSpPr/>
           <p:nvPr/>
         </p:nvSpPr>
         <p:spPr>
           <a:xfrm>
-            <a:off x="9235440" y="2560320"/>
-            <a:ext cx="1847088" cy="786384"/>
-          </a:xfrm>
-          <a:prstGeom prst="roundRect">
-            <a:avLst/>
-          </a:prstGeom>
-          <a:solidFill>
-            <a:srgbClr val="D5E8D4"/>
-          </a:solidFill>
-          <a:ln w="12700">
-            <a:solidFill>
-              <a:srgbClr val="82B366"/>
-            </a:solidFill>
-          </a:ln>
-          <a:effectLst/>
-        </p:spPr>
-        <p:style>
-          <a:lnRef idx="1">
-            <a:schemeClr val="accent1"/>
-          </a:lnRef>
-          <a:fillRef idx="3">
-            <a:schemeClr val="accent1"/>
-          </a:fillRef>
-          <a:effectRef idx="2">
-            <a:schemeClr val="accent1"/>
-          </a:effectRef>
-          <a:fontRef idx="minor">
-            <a:schemeClr val="lt1"/>
-          </a:fontRef>
-        </p:style>
-        <p:txBody>
-          <a:bodyPr rtlCol="0" anchor="ctr" wrap="square"/>
-          <a:lstStyle/>
-          <a:p>
-            <a:pPr algn="ctr"/>
-          </a:p>
-        </p:txBody>
-      </p:sp>
-      <p:sp>
-        <p:nvSpPr>
-          <p:cNvPr id="51" name="TextBox 50"/>
-          <p:cNvSpPr txBox="1"/>
-          <p:nvPr/>
-        </p:nvSpPr>
-        <p:spPr>
-          <a:xfrm>
-            <a:off x="9336024" y="2651760"/>
-            <a:ext cx="1645920" cy="640080"/>
-          </a:xfrm>
-          <a:prstGeom prst="rect">
-            <a:avLst/>
-          </a:prstGeom>
-          <a:noFill/>
-        </p:spPr>
-        <p:txBody>
-          <a:bodyPr wrap="square" lIns="0" rIns="0" tIns="0" bIns="0">
-            <a:spAutoFit/>
-          </a:bodyPr>
-          <a:lstStyle/>
-          <a:p>
-            <a:pPr algn="l">
-              <a:spcAft>
-                <a:spcPts val="100"/>
-              </a:spcAft>
-            </a:pPr>
-            <a:r>
-              <a:rPr sz="1300" b="1">
-                <a:solidFill>
-                  <a:srgbClr val="141414"/>
-                </a:solidFill>
-                <a:latin typeface="Arial"/>
-              </a:rPr>
-              <a:t>Provisioning</a:t>
-            </a:r>
-          </a:p>
-        </p:txBody>
-      </p:sp>
-      <p:cxnSp>
-        <p:nvCxnSpPr>
-          <p:cNvPr id="52" name="Connector 51"/>
-          <p:cNvCxnSpPr/>
-          <p:nvPr/>
-        </p:nvCxnSpPr>
-        <p:spPr>
-          <a:xfrm>
-            <a:off x="10158984" y="2359152"/>
-            <a:ext cx="0" cy="201168"/>
-          </a:xfrm>
-          <a:prstGeom prst="line">
-            <a:avLst/>
-          </a:prstGeom>
-          <a:ln w="13970">
-            <a:solidFill>
-              <a:srgbClr val="9A9992"/>
-            </a:solidFill>
-          </a:ln>
-        </p:spPr>
-        <p:style>
-          <a:lnRef idx="2">
-            <a:schemeClr val="accent1"/>
-          </a:lnRef>
-          <a:fillRef idx="0">
-            <a:schemeClr val="accent1"/>
-          </a:fillRef>
-          <a:effectRef idx="1">
-            <a:schemeClr val="accent1"/>
-          </a:effectRef>
-          <a:fontRef idx="minor">
-            <a:schemeClr val="tx1"/>
-          </a:fontRef>
-        </p:style>
-      </p:cxnSp>
-      <p:sp>
-        <p:nvSpPr>
-          <p:cNvPr id="53" name="Rounded Rectangle 52"/>
-          <p:cNvSpPr/>
-          <p:nvPr/>
-        </p:nvSpPr>
-        <p:spPr>
-          <a:xfrm>
-            <a:off x="9235440" y="3547872"/>
-            <a:ext cx="1847088" cy="786384"/>
-          </a:xfrm>
-          <a:prstGeom prst="roundRect">
-            <a:avLst/>
-          </a:prstGeom>
-          <a:solidFill>
-            <a:srgbClr val="F2ECD9"/>
-          </a:solidFill>
-          <a:ln w="12700">
-            <a:solidFill>
-              <a:srgbClr val="C9B46B"/>
-            </a:solidFill>
-          </a:ln>
-          <a:effectLst/>
-        </p:spPr>
-        <p:style>
-          <a:lnRef idx="1">
-            <a:schemeClr val="accent1"/>
-          </a:lnRef>
-          <a:fillRef idx="3">
-            <a:schemeClr val="accent1"/>
-          </a:fillRef>
-          <a:effectRef idx="2">
-            <a:schemeClr val="accent1"/>
-          </a:effectRef>
-          <a:fontRef idx="minor">
-            <a:schemeClr val="lt1"/>
-          </a:fontRef>
-        </p:style>
-        <p:txBody>
-          <a:bodyPr rtlCol="0" anchor="ctr" wrap="square"/>
-          <a:lstStyle/>
-          <a:p>
-            <a:pPr algn="ctr"/>
-          </a:p>
-        </p:txBody>
-      </p:sp>
-      <p:sp>
-        <p:nvSpPr>
-          <p:cNvPr id="54" name="TextBox 53"/>
-          <p:cNvSpPr txBox="1"/>
-          <p:nvPr/>
-        </p:nvSpPr>
-        <p:spPr>
-          <a:xfrm>
-            <a:off x="9336024" y="3639312"/>
-            <a:ext cx="1645920" cy="640080"/>
-          </a:xfrm>
-          <a:prstGeom prst="rect">
-            <a:avLst/>
-          </a:prstGeom>
-          <a:noFill/>
-        </p:spPr>
-        <p:txBody>
-          <a:bodyPr wrap="square" lIns="0" rIns="0" tIns="0" bIns="0">
-            <a:spAutoFit/>
-          </a:bodyPr>
-          <a:lstStyle/>
-          <a:p>
-            <a:pPr algn="l">
-              <a:spcAft>
-                <a:spcPts val="100"/>
-              </a:spcAft>
-            </a:pPr>
-            <a:r>
-              <a:rPr sz="1300" b="1">
-                <a:solidFill>
-                  <a:srgbClr val="141414"/>
-                </a:solidFill>
-                <a:latin typeface="Arial"/>
-              </a:rPr>
-              <a:t>SFT / Runin</a:t>
-            </a:r>
-          </a:p>
-          <a:p>
-            <a:pPr algn="l">
-              <a:spcAft>
-                <a:spcPts val="100"/>
-              </a:spcAft>
-            </a:pPr>
-            <a:r>
-              <a:rPr sz="1200" b="1">
-                <a:solidFill>
-                  <a:srgbClr val="141414"/>
-                </a:solidFill>
-                <a:latin typeface="Arial"/>
-              </a:rPr>
-              <a:t>2 units</a:t>
-            </a:r>
-            <a:r>
-              <a:rPr sz="850" b="0">
-                <a:solidFill>
-                  <a:srgbClr val="6B6B6B"/>
-                </a:solidFill>
-                <a:latin typeface="Arial"/>
-              </a:rPr>
-              <a:t>  too few for a yield</a:t>
-            </a:r>
-          </a:p>
-        </p:txBody>
-      </p:sp>
-      <p:cxnSp>
-        <p:nvCxnSpPr>
-          <p:cNvPr id="55" name="Connector 54"/>
-          <p:cNvCxnSpPr/>
-          <p:nvPr/>
-        </p:nvCxnSpPr>
-        <p:spPr>
-          <a:xfrm>
-            <a:off x="10158984" y="3346704"/>
-            <a:ext cx="0" cy="201168"/>
-          </a:xfrm>
-          <a:prstGeom prst="line">
-            <a:avLst/>
-          </a:prstGeom>
-          <a:ln w="13970">
-            <a:solidFill>
-              <a:srgbClr val="9A9992"/>
-            </a:solidFill>
-          </a:ln>
-        </p:spPr>
-        <p:style>
-          <a:lnRef idx="2">
-            <a:schemeClr val="accent1"/>
-          </a:lnRef>
-          <a:fillRef idx="0">
-            <a:schemeClr val="accent1"/>
-          </a:fillRef>
-          <a:effectRef idx="1">
-            <a:schemeClr val="accent1"/>
-          </a:effectRef>
-          <a:fontRef idx="minor">
-            <a:schemeClr val="tx1"/>
-          </a:fontRef>
-        </p:style>
-      </p:cxnSp>
-      <p:sp>
-        <p:nvSpPr>
-          <p:cNvPr id="56" name="Rounded Rectangle 55"/>
-          <p:cNvSpPr/>
-          <p:nvPr/>
-        </p:nvSpPr>
-        <p:spPr>
-          <a:xfrm>
-            <a:off x="9235440" y="4535424"/>
-            <a:ext cx="1847088" cy="786384"/>
+            <a:off x="10369296" y="4846320"/>
+            <a:ext cx="1389888" cy="640080"/>
           </a:xfrm>
           <a:prstGeom prst="roundRect">
             <a:avLst/>
@@ -5609,7 +5518,7 @@
           </a:fontRef>
         </p:style>
         <p:txBody>
-          <a:bodyPr rtlCol="0" anchor="ctr" wrap="square"/>
+          <a:bodyPr rtlCol="0" anchor="ctr"/>
           <a:lstStyle/>
           <a:p>
             <a:pPr algn="ctr"/>
@@ -5618,14 +5527,14 @@
       </p:sp>
       <p:sp>
         <p:nvSpPr>
-          <p:cNvPr id="57" name="TextBox 56"/>
+          <p:cNvPr id="52" name="TextBox 51"/>
           <p:cNvSpPr txBox="1"/>
           <p:nvPr/>
         </p:nvSpPr>
         <p:spPr>
           <a:xfrm>
-            <a:off x="9336024" y="4626864"/>
-            <a:ext cx="1645920" cy="640080"/>
+            <a:off x="10451592" y="4910328"/>
+            <a:ext cx="1225296" cy="530352"/>
           </a:xfrm>
           <a:prstGeom prst="rect">
             <a:avLst/>
@@ -5644,7 +5553,7 @@
               </a:spcAft>
             </a:pPr>
             <a:r>
-              <a:rPr sz="1300" b="0">
+              <a:rPr sz="1250" b="0">
                 <a:solidFill>
                   <a:srgbClr val="141414"/>
                 </a:solidFill>
@@ -5657,13 +5566,13 @@
       </p:sp>
       <p:cxnSp>
         <p:nvCxnSpPr>
-          <p:cNvPr id="58" name="Connector 57"/>
+          <p:cNvPr id="53" name="Connector 52"/>
           <p:cNvCxnSpPr/>
           <p:nvPr/>
         </p:nvCxnSpPr>
         <p:spPr>
           <a:xfrm>
-            <a:off x="10158984" y="4334256"/>
+            <a:off x="1307592" y="2121408"/>
             <a:ext cx="0" cy="201168"/>
           </a:xfrm>
           <a:prstGeom prst="line">
@@ -5671,8 +5580,9 @@
           </a:prstGeom>
           <a:ln w="13970">
             <a:solidFill>
-              <a:srgbClr val="9A9992"/>
+              <a:srgbClr val="8A8882"/>
             </a:solidFill>
+            <a:tailEnd type="triangle" w="sm" len="sm"/>
           </a:ln>
         </p:spPr>
         <p:style>
@@ -5690,6 +5600,185 @@
           </a:fontRef>
         </p:style>
       </p:cxnSp>
+      <p:cxnSp>
+        <p:nvCxnSpPr>
+          <p:cNvPr id="54" name="Connector 53"/>
+          <p:cNvCxnSpPr/>
+          <p:nvPr/>
+        </p:nvCxnSpPr>
+        <p:spPr>
+          <a:xfrm>
+            <a:off x="1307592" y="2962656"/>
+            <a:ext cx="0" cy="201168"/>
+          </a:xfrm>
+          <a:prstGeom prst="line">
+            <a:avLst/>
+          </a:prstGeom>
+          <a:ln w="13970">
+            <a:solidFill>
+              <a:srgbClr val="8A8882"/>
+            </a:solidFill>
+            <a:tailEnd type="triangle" w="sm" len="sm"/>
+          </a:ln>
+        </p:spPr>
+        <p:style>
+          <a:lnRef idx="2">
+            <a:schemeClr val="accent1"/>
+          </a:lnRef>
+          <a:fillRef idx="0">
+            <a:schemeClr val="accent1"/>
+          </a:fillRef>
+          <a:effectRef idx="1">
+            <a:schemeClr val="accent1"/>
+          </a:effectRef>
+          <a:fontRef idx="minor">
+            <a:schemeClr val="tx1"/>
+          </a:fontRef>
+        </p:style>
+      </p:cxnSp>
+      <p:cxnSp>
+        <p:nvCxnSpPr>
+          <p:cNvPr id="55" name="Connector 54"/>
+          <p:cNvCxnSpPr/>
+          <p:nvPr/>
+        </p:nvCxnSpPr>
+        <p:spPr>
+          <a:xfrm>
+            <a:off x="1307592" y="3803904"/>
+            <a:ext cx="0" cy="201168"/>
+          </a:xfrm>
+          <a:prstGeom prst="line">
+            <a:avLst/>
+          </a:prstGeom>
+          <a:ln w="13970">
+            <a:solidFill>
+              <a:srgbClr val="8A8882"/>
+            </a:solidFill>
+            <a:tailEnd type="triangle" w="sm" len="sm"/>
+          </a:ln>
+        </p:spPr>
+        <p:style>
+          <a:lnRef idx="2">
+            <a:schemeClr val="accent1"/>
+          </a:lnRef>
+          <a:fillRef idx="0">
+            <a:schemeClr val="accent1"/>
+          </a:fillRef>
+          <a:effectRef idx="1">
+            <a:schemeClr val="accent1"/>
+          </a:effectRef>
+          <a:fontRef idx="minor">
+            <a:schemeClr val="tx1"/>
+          </a:fontRef>
+        </p:style>
+      </p:cxnSp>
+      <p:cxnSp>
+        <p:nvCxnSpPr>
+          <p:cNvPr id="56" name="Connector 55"/>
+          <p:cNvCxnSpPr/>
+          <p:nvPr/>
+        </p:nvCxnSpPr>
+        <p:spPr>
+          <a:xfrm>
+            <a:off x="1956815" y="3483864"/>
+            <a:ext cx="1069849" cy="0"/>
+          </a:xfrm>
+          <a:prstGeom prst="line">
+            <a:avLst/>
+          </a:prstGeom>
+          <a:ln w="13970">
+            <a:solidFill>
+              <a:srgbClr val="8A8882"/>
+            </a:solidFill>
+          </a:ln>
+        </p:spPr>
+        <p:style>
+          <a:lnRef idx="2">
+            <a:schemeClr val="accent1"/>
+          </a:lnRef>
+          <a:fillRef idx="0">
+            <a:schemeClr val="accent1"/>
+          </a:fillRef>
+          <a:effectRef idx="1">
+            <a:schemeClr val="accent1"/>
+          </a:effectRef>
+          <a:fontRef idx="minor">
+            <a:schemeClr val="tx1"/>
+          </a:fontRef>
+        </p:style>
+      </p:cxnSp>
+      <p:cxnSp>
+        <p:nvCxnSpPr>
+          <p:cNvPr id="57" name="Connector 56"/>
+          <p:cNvCxnSpPr/>
+          <p:nvPr/>
+        </p:nvCxnSpPr>
+        <p:spPr>
+          <a:xfrm flipV="1">
+            <a:off x="3026664" y="2121408"/>
+            <a:ext cx="0" cy="1362456"/>
+          </a:xfrm>
+          <a:prstGeom prst="line">
+            <a:avLst/>
+          </a:prstGeom>
+          <a:ln w="13970">
+            <a:solidFill>
+              <a:srgbClr val="8A8882"/>
+            </a:solidFill>
+            <a:tailEnd type="triangle" w="sm" len="sm"/>
+          </a:ln>
+        </p:spPr>
+        <p:style>
+          <a:lnRef idx="2">
+            <a:schemeClr val="accent1"/>
+          </a:lnRef>
+          <a:fillRef idx="0">
+            <a:schemeClr val="accent1"/>
+          </a:fillRef>
+          <a:effectRef idx="1">
+            <a:schemeClr val="accent1"/>
+          </a:effectRef>
+          <a:fontRef idx="minor">
+            <a:schemeClr val="tx1"/>
+          </a:fontRef>
+        </p:style>
+      </p:cxnSp>
+      <p:cxnSp>
+        <p:nvCxnSpPr>
+          <p:cNvPr id="58" name="Connector 57"/>
+          <p:cNvCxnSpPr/>
+          <p:nvPr/>
+        </p:nvCxnSpPr>
+        <p:spPr>
+          <a:xfrm>
+            <a:off x="3026664" y="2121408"/>
+            <a:ext cx="0" cy="1883664"/>
+          </a:xfrm>
+          <a:prstGeom prst="line">
+            <a:avLst/>
+          </a:prstGeom>
+          <a:ln w="13970">
+            <a:solidFill>
+              <a:srgbClr val="8A8882"/>
+            </a:solidFill>
+            <a:tailEnd type="triangle" w="sm" len="sm"/>
+          </a:ln>
+        </p:spPr>
+        <p:style>
+          <a:lnRef idx="2">
+            <a:schemeClr val="accent1"/>
+          </a:lnRef>
+          <a:fillRef idx="0">
+            <a:schemeClr val="accent1"/>
+          </a:fillRef>
+          <a:effectRef idx="1">
+            <a:schemeClr val="accent1"/>
+          </a:effectRef>
+          <a:fontRef idx="minor">
+            <a:schemeClr val="tx1"/>
+          </a:fontRef>
+        </p:style>
+      </p:cxnSp>
       <p:sp>
         <p:nvSpPr>
           <p:cNvPr id="59" name="TextBox 58"/>
@@ -5698,8 +5787,8 @@
         </p:nvSpPr>
         <p:spPr>
           <a:xfrm>
-            <a:off x="384048" y="6053328"/>
-            <a:ext cx="11423599" cy="640080"/>
+            <a:off x="3072384" y="3822192"/>
+            <a:ext cx="822960" cy="182880"/>
           </a:xfrm>
           <a:prstGeom prst="rect">
             <a:avLst/>
@@ -5714,9 +5803,630 @@
           <a:p>
             <a:pPr algn="l">
               <a:spcAft>
-                <a:spcPts val="200"/>
-              </a:spcAft>
-            </a:pPr>
+                <a:spcPts val="0"/>
+              </a:spcAft>
+            </a:pPr>
+            <a:r>
+              <a:rPr sz="850" b="0">
+                <a:solidFill>
+                  <a:srgbClr val="6B6B6B"/>
+                </a:solidFill>
+                <a:latin typeface="Arial"/>
+              </a:rPr>
+              <a:t>VBB</a:t>
+            </a:r>
+          </a:p>
+        </p:txBody>
+      </p:sp>
+      <p:cxnSp>
+        <p:nvCxnSpPr>
+          <p:cNvPr id="60" name="Connector 59"/>
+          <p:cNvCxnSpPr/>
+          <p:nvPr/>
+        </p:nvCxnSpPr>
+        <p:spPr>
+          <a:xfrm>
+            <a:off x="3675887" y="4325112"/>
+            <a:ext cx="813817" cy="0"/>
+          </a:xfrm>
+          <a:prstGeom prst="line">
+            <a:avLst/>
+          </a:prstGeom>
+          <a:ln w="13970">
+            <a:solidFill>
+              <a:srgbClr val="8A8882"/>
+            </a:solidFill>
+          </a:ln>
+        </p:spPr>
+        <p:style>
+          <a:lnRef idx="2">
+            <a:schemeClr val="accent1"/>
+          </a:lnRef>
+          <a:fillRef idx="0">
+            <a:schemeClr val="accent1"/>
+          </a:fillRef>
+          <a:effectRef idx="1">
+            <a:schemeClr val="accent1"/>
+          </a:effectRef>
+          <a:fontRef idx="minor">
+            <a:schemeClr val="tx1"/>
+          </a:fontRef>
+        </p:style>
+      </p:cxnSp>
+      <p:cxnSp>
+        <p:nvCxnSpPr>
+          <p:cNvPr id="61" name="Connector 60"/>
+          <p:cNvCxnSpPr/>
+          <p:nvPr/>
+        </p:nvCxnSpPr>
+        <p:spPr>
+          <a:xfrm flipV="1">
+            <a:off x="4489704" y="3803904"/>
+            <a:ext cx="0" cy="521208"/>
+          </a:xfrm>
+          <a:prstGeom prst="line">
+            <a:avLst/>
+          </a:prstGeom>
+          <a:ln w="13970">
+            <a:solidFill>
+              <a:srgbClr val="8A8882"/>
+            </a:solidFill>
+            <a:tailEnd type="triangle" w="sm" len="sm"/>
+          </a:ln>
+        </p:spPr>
+        <p:style>
+          <a:lnRef idx="2">
+            <a:schemeClr val="accent1"/>
+          </a:lnRef>
+          <a:fillRef idx="0">
+            <a:schemeClr val="accent1"/>
+          </a:fillRef>
+          <a:effectRef idx="1">
+            <a:schemeClr val="accent1"/>
+          </a:effectRef>
+          <a:fontRef idx="minor">
+            <a:schemeClr val="tx1"/>
+          </a:fontRef>
+        </p:style>
+      </p:cxnSp>
+      <p:cxnSp>
+        <p:nvCxnSpPr>
+          <p:cNvPr id="62" name="Connector 61"/>
+          <p:cNvCxnSpPr/>
+          <p:nvPr/>
+        </p:nvCxnSpPr>
+        <p:spPr>
+          <a:xfrm flipV="1">
+            <a:off x="4489704" y="2962656"/>
+            <a:ext cx="0" cy="201168"/>
+          </a:xfrm>
+          <a:prstGeom prst="line">
+            <a:avLst/>
+          </a:prstGeom>
+          <a:ln w="13970">
+            <a:solidFill>
+              <a:srgbClr val="8A8882"/>
+            </a:solidFill>
+            <a:tailEnd type="triangle" w="sm" len="sm"/>
+          </a:ln>
+        </p:spPr>
+        <p:style>
+          <a:lnRef idx="2">
+            <a:schemeClr val="accent1"/>
+          </a:lnRef>
+          <a:fillRef idx="0">
+            <a:schemeClr val="accent1"/>
+          </a:fillRef>
+          <a:effectRef idx="1">
+            <a:schemeClr val="accent1"/>
+          </a:effectRef>
+          <a:fontRef idx="minor">
+            <a:schemeClr val="tx1"/>
+          </a:fontRef>
+        </p:style>
+      </p:cxnSp>
+      <p:cxnSp>
+        <p:nvCxnSpPr>
+          <p:cNvPr id="63" name="Connector 62"/>
+          <p:cNvCxnSpPr/>
+          <p:nvPr/>
+        </p:nvCxnSpPr>
+        <p:spPr>
+          <a:xfrm flipV="1">
+            <a:off x="4489704" y="2121408"/>
+            <a:ext cx="0" cy="201168"/>
+          </a:xfrm>
+          <a:prstGeom prst="line">
+            <a:avLst/>
+          </a:prstGeom>
+          <a:ln w="13970">
+            <a:solidFill>
+              <a:srgbClr val="8A8882"/>
+            </a:solidFill>
+            <a:tailEnd type="triangle" w="sm" len="sm"/>
+          </a:ln>
+        </p:spPr>
+        <p:style>
+          <a:lnRef idx="2">
+            <a:schemeClr val="accent1"/>
+          </a:lnRef>
+          <a:fillRef idx="0">
+            <a:schemeClr val="accent1"/>
+          </a:fillRef>
+          <a:effectRef idx="1">
+            <a:schemeClr val="accent1"/>
+          </a:effectRef>
+          <a:fontRef idx="minor">
+            <a:schemeClr val="tx1"/>
+          </a:fontRef>
+        </p:style>
+      </p:cxnSp>
+      <p:cxnSp>
+        <p:nvCxnSpPr>
+          <p:cNvPr id="64" name="Connector 63"/>
+          <p:cNvCxnSpPr/>
+          <p:nvPr/>
+        </p:nvCxnSpPr>
+        <p:spPr>
+          <a:xfrm>
+            <a:off x="5138928" y="1801368"/>
+            <a:ext cx="219456" cy="0"/>
+          </a:xfrm>
+          <a:prstGeom prst="line">
+            <a:avLst/>
+          </a:prstGeom>
+          <a:ln w="13970">
+            <a:solidFill>
+              <a:srgbClr val="8A8882"/>
+            </a:solidFill>
+            <a:tailEnd type="triangle" w="sm" len="sm"/>
+          </a:ln>
+        </p:spPr>
+        <p:style>
+          <a:lnRef idx="2">
+            <a:schemeClr val="accent1"/>
+          </a:lnRef>
+          <a:fillRef idx="0">
+            <a:schemeClr val="accent1"/>
+          </a:fillRef>
+          <a:effectRef idx="1">
+            <a:schemeClr val="accent1"/>
+          </a:effectRef>
+          <a:fontRef idx="minor">
+            <a:schemeClr val="tx1"/>
+          </a:fontRef>
+        </p:style>
+      </p:cxnSp>
+      <p:cxnSp>
+        <p:nvCxnSpPr>
+          <p:cNvPr id="65" name="Connector 64"/>
+          <p:cNvCxnSpPr/>
+          <p:nvPr/>
+        </p:nvCxnSpPr>
+        <p:spPr>
+          <a:xfrm>
+            <a:off x="6437376" y="1801368"/>
+            <a:ext cx="1499616" cy="0"/>
+          </a:xfrm>
+          <a:prstGeom prst="line">
+            <a:avLst/>
+          </a:prstGeom>
+          <a:ln w="13970">
+            <a:solidFill>
+              <a:srgbClr val="8A8882"/>
+            </a:solidFill>
+          </a:ln>
+        </p:spPr>
+        <p:style>
+          <a:lnRef idx="2">
+            <a:schemeClr val="accent1"/>
+          </a:lnRef>
+          <a:fillRef idx="0">
+            <a:schemeClr val="accent1"/>
+          </a:fillRef>
+          <a:effectRef idx="1">
+            <a:schemeClr val="accent1"/>
+          </a:effectRef>
+          <a:fontRef idx="minor">
+            <a:schemeClr val="tx1"/>
+          </a:fontRef>
+        </p:style>
+      </p:cxnSp>
+      <p:cxnSp>
+        <p:nvCxnSpPr>
+          <p:cNvPr id="66" name="Connector 65"/>
+          <p:cNvCxnSpPr/>
+          <p:nvPr/>
+        </p:nvCxnSpPr>
+        <p:spPr>
+          <a:xfrm>
+            <a:off x="7936992" y="1801368"/>
+            <a:ext cx="0" cy="521208"/>
+          </a:xfrm>
+          <a:prstGeom prst="line">
+            <a:avLst/>
+          </a:prstGeom>
+          <a:ln w="13970">
+            <a:solidFill>
+              <a:srgbClr val="8A8882"/>
+            </a:solidFill>
+            <a:tailEnd type="triangle" w="sm" len="sm"/>
+          </a:ln>
+        </p:spPr>
+        <p:style>
+          <a:lnRef idx="2">
+            <a:schemeClr val="accent1"/>
+          </a:lnRef>
+          <a:fillRef idx="0">
+            <a:schemeClr val="accent1"/>
+          </a:fillRef>
+          <a:effectRef idx="1">
+            <a:schemeClr val="accent1"/>
+          </a:effectRef>
+          <a:fontRef idx="minor">
+            <a:schemeClr val="tx1"/>
+          </a:fontRef>
+        </p:style>
+      </p:cxnSp>
+      <p:cxnSp>
+        <p:nvCxnSpPr>
+          <p:cNvPr id="67" name="Connector 66"/>
+          <p:cNvCxnSpPr/>
+          <p:nvPr/>
+        </p:nvCxnSpPr>
+        <p:spPr>
+          <a:xfrm>
+            <a:off x="5897880" y="2121408"/>
+            <a:ext cx="0" cy="2203704"/>
+          </a:xfrm>
+          <a:prstGeom prst="line">
+            <a:avLst/>
+          </a:prstGeom>
+          <a:ln w="13970">
+            <a:solidFill>
+              <a:srgbClr val="8A8882"/>
+            </a:solidFill>
+          </a:ln>
+        </p:spPr>
+        <p:style>
+          <a:lnRef idx="2">
+            <a:schemeClr val="accent1"/>
+          </a:lnRef>
+          <a:fillRef idx="0">
+            <a:schemeClr val="accent1"/>
+          </a:fillRef>
+          <a:effectRef idx="1">
+            <a:schemeClr val="accent1"/>
+          </a:effectRef>
+          <a:fontRef idx="minor">
+            <a:schemeClr val="tx1"/>
+          </a:fontRef>
+        </p:style>
+      </p:cxnSp>
+      <p:cxnSp>
+        <p:nvCxnSpPr>
+          <p:cNvPr id="68" name="Connector 67"/>
+          <p:cNvCxnSpPr/>
+          <p:nvPr/>
+        </p:nvCxnSpPr>
+        <p:spPr>
+          <a:xfrm>
+            <a:off x="5897880" y="4325112"/>
+            <a:ext cx="1344168" cy="0"/>
+          </a:xfrm>
+          <a:prstGeom prst="line">
+            <a:avLst/>
+          </a:prstGeom>
+          <a:ln w="13970">
+            <a:solidFill>
+              <a:srgbClr val="8A8882"/>
+            </a:solidFill>
+            <a:tailEnd type="triangle" w="sm" len="sm"/>
+          </a:ln>
+        </p:spPr>
+        <p:style>
+          <a:lnRef idx="2">
+            <a:schemeClr val="accent1"/>
+          </a:lnRef>
+          <a:fillRef idx="0">
+            <a:schemeClr val="accent1"/>
+          </a:fillRef>
+          <a:effectRef idx="1">
+            <a:schemeClr val="accent1"/>
+          </a:effectRef>
+          <a:fontRef idx="minor">
+            <a:schemeClr val="tx1"/>
+          </a:fontRef>
+        </p:style>
+      </p:cxnSp>
+      <p:cxnSp>
+        <p:nvCxnSpPr>
+          <p:cNvPr id="69" name="Connector 68"/>
+          <p:cNvCxnSpPr/>
+          <p:nvPr/>
+        </p:nvCxnSpPr>
+        <p:spPr>
+          <a:xfrm flipV="1">
+            <a:off x="7936992" y="3803904"/>
+            <a:ext cx="0" cy="201168"/>
+          </a:xfrm>
+          <a:prstGeom prst="line">
+            <a:avLst/>
+          </a:prstGeom>
+          <a:ln w="13970">
+            <a:solidFill>
+              <a:srgbClr val="8A8882"/>
+            </a:solidFill>
+            <a:tailEnd type="triangle" w="sm" len="sm"/>
+          </a:ln>
+        </p:spPr>
+        <p:style>
+          <a:lnRef idx="2">
+            <a:schemeClr val="accent1"/>
+          </a:lnRef>
+          <a:fillRef idx="0">
+            <a:schemeClr val="accent1"/>
+          </a:fillRef>
+          <a:effectRef idx="1">
+            <a:schemeClr val="accent1"/>
+          </a:effectRef>
+          <a:fontRef idx="minor">
+            <a:schemeClr val="tx1"/>
+          </a:fontRef>
+        </p:style>
+      </p:cxnSp>
+      <p:cxnSp>
+        <p:nvCxnSpPr>
+          <p:cNvPr id="70" name="Connector 69"/>
+          <p:cNvCxnSpPr/>
+          <p:nvPr/>
+        </p:nvCxnSpPr>
+        <p:spPr>
+          <a:xfrm flipV="1">
+            <a:off x="7936992" y="2962656"/>
+            <a:ext cx="0" cy="201168"/>
+          </a:xfrm>
+          <a:prstGeom prst="line">
+            <a:avLst/>
+          </a:prstGeom>
+          <a:ln w="13970">
+            <a:solidFill>
+              <a:srgbClr val="8A8882"/>
+            </a:solidFill>
+            <a:tailEnd type="triangle" w="sm" len="sm"/>
+          </a:ln>
+        </p:spPr>
+        <p:style>
+          <a:lnRef idx="2">
+            <a:schemeClr val="accent1"/>
+          </a:lnRef>
+          <a:fillRef idx="0">
+            <a:schemeClr val="accent1"/>
+          </a:fillRef>
+          <a:effectRef idx="1">
+            <a:schemeClr val="accent1"/>
+          </a:effectRef>
+          <a:fontRef idx="minor">
+            <a:schemeClr val="tx1"/>
+          </a:fontRef>
+        </p:style>
+      </p:cxnSp>
+      <p:cxnSp>
+        <p:nvCxnSpPr>
+          <p:cNvPr id="71" name="Connector 70"/>
+          <p:cNvCxnSpPr/>
+          <p:nvPr/>
+        </p:nvCxnSpPr>
+        <p:spPr>
+          <a:xfrm>
+            <a:off x="8631936" y="2642616"/>
+            <a:ext cx="109728" cy="0"/>
+          </a:xfrm>
+          <a:prstGeom prst="line">
+            <a:avLst/>
+          </a:prstGeom>
+          <a:ln w="13970">
+            <a:solidFill>
+              <a:srgbClr val="8A8882"/>
+            </a:solidFill>
+            <a:tailEnd type="triangle" w="sm" len="sm"/>
+          </a:ln>
+        </p:spPr>
+        <p:style>
+          <a:lnRef idx="2">
+            <a:schemeClr val="accent1"/>
+          </a:lnRef>
+          <a:fillRef idx="0">
+            <a:schemeClr val="accent1"/>
+          </a:fillRef>
+          <a:effectRef idx="1">
+            <a:schemeClr val="accent1"/>
+          </a:effectRef>
+          <a:fontRef idx="minor">
+            <a:schemeClr val="tx1"/>
+          </a:fontRef>
+        </p:style>
+      </p:cxnSp>
+      <p:cxnSp>
+        <p:nvCxnSpPr>
+          <p:cNvPr id="72" name="Connector 71"/>
+          <p:cNvCxnSpPr/>
+          <p:nvPr/>
+        </p:nvCxnSpPr>
+        <p:spPr>
+          <a:xfrm>
+            <a:off x="10040112" y="2642616"/>
+            <a:ext cx="329184" cy="0"/>
+          </a:xfrm>
+          <a:prstGeom prst="line">
+            <a:avLst/>
+          </a:prstGeom>
+          <a:ln w="13970">
+            <a:solidFill>
+              <a:srgbClr val="8A8882"/>
+            </a:solidFill>
+            <a:tailEnd type="triangle" w="sm" len="sm"/>
+          </a:ln>
+        </p:spPr>
+        <p:style>
+          <a:lnRef idx="2">
+            <a:schemeClr val="accent1"/>
+          </a:lnRef>
+          <a:fillRef idx="0">
+            <a:schemeClr val="accent1"/>
+          </a:fillRef>
+          <a:effectRef idx="1">
+            <a:schemeClr val="accent1"/>
+          </a:effectRef>
+          <a:fontRef idx="minor">
+            <a:schemeClr val="tx1"/>
+          </a:fontRef>
+        </p:style>
+      </p:cxnSp>
+      <p:cxnSp>
+        <p:nvCxnSpPr>
+          <p:cNvPr id="73" name="Connector 72"/>
+          <p:cNvCxnSpPr/>
+          <p:nvPr/>
+        </p:nvCxnSpPr>
+        <p:spPr>
+          <a:xfrm>
+            <a:off x="11064240" y="2962656"/>
+            <a:ext cx="0" cy="201168"/>
+          </a:xfrm>
+          <a:prstGeom prst="line">
+            <a:avLst/>
+          </a:prstGeom>
+          <a:ln w="13970">
+            <a:solidFill>
+              <a:srgbClr val="8A8882"/>
+            </a:solidFill>
+            <a:tailEnd type="triangle" w="sm" len="sm"/>
+          </a:ln>
+        </p:spPr>
+        <p:style>
+          <a:lnRef idx="2">
+            <a:schemeClr val="accent1"/>
+          </a:lnRef>
+          <a:fillRef idx="0">
+            <a:schemeClr val="accent1"/>
+          </a:fillRef>
+          <a:effectRef idx="1">
+            <a:schemeClr val="accent1"/>
+          </a:effectRef>
+          <a:fontRef idx="minor">
+            <a:schemeClr val="tx1"/>
+          </a:fontRef>
+        </p:style>
+      </p:cxnSp>
+      <p:cxnSp>
+        <p:nvCxnSpPr>
+          <p:cNvPr id="74" name="Connector 73"/>
+          <p:cNvCxnSpPr/>
+          <p:nvPr/>
+        </p:nvCxnSpPr>
+        <p:spPr>
+          <a:xfrm>
+            <a:off x="11064240" y="3803904"/>
+            <a:ext cx="0" cy="201168"/>
+          </a:xfrm>
+          <a:prstGeom prst="line">
+            <a:avLst/>
+          </a:prstGeom>
+          <a:ln w="13970">
+            <a:solidFill>
+              <a:srgbClr val="8A8882"/>
+            </a:solidFill>
+            <a:tailEnd type="triangle" w="sm" len="sm"/>
+          </a:ln>
+        </p:spPr>
+        <p:style>
+          <a:lnRef idx="2">
+            <a:schemeClr val="accent1"/>
+          </a:lnRef>
+          <a:fillRef idx="0">
+            <a:schemeClr val="accent1"/>
+          </a:fillRef>
+          <a:effectRef idx="1">
+            <a:schemeClr val="accent1"/>
+          </a:effectRef>
+          <a:fontRef idx="minor">
+            <a:schemeClr val="tx1"/>
+          </a:fontRef>
+        </p:style>
+      </p:cxnSp>
+      <p:cxnSp>
+        <p:nvCxnSpPr>
+          <p:cNvPr id="75" name="Connector 74"/>
+          <p:cNvCxnSpPr/>
+          <p:nvPr/>
+        </p:nvCxnSpPr>
+        <p:spPr>
+          <a:xfrm>
+            <a:off x="11064240" y="4645152"/>
+            <a:ext cx="0" cy="201168"/>
+          </a:xfrm>
+          <a:prstGeom prst="line">
+            <a:avLst/>
+          </a:prstGeom>
+          <a:ln w="13970">
+            <a:solidFill>
+              <a:srgbClr val="8A8882"/>
+            </a:solidFill>
+            <a:tailEnd type="triangle" w="sm" len="sm"/>
+          </a:ln>
+        </p:spPr>
+        <p:style>
+          <a:lnRef idx="2">
+            <a:schemeClr val="accent1"/>
+          </a:lnRef>
+          <a:fillRef idx="0">
+            <a:schemeClr val="accent1"/>
+          </a:fillRef>
+          <a:effectRef idx="1">
+            <a:schemeClr val="accent1"/>
+          </a:effectRef>
+          <a:fontRef idx="minor">
+            <a:schemeClr val="tx1"/>
+          </a:fontRef>
+        </p:style>
+      </p:cxnSp>
+      <p:sp>
+        <p:nvSpPr>
+          <p:cNvPr id="76" name="TextBox 75"/>
+          <p:cNvSpPr txBox="1"/>
+          <p:nvPr/>
+        </p:nvSpPr>
+        <p:spPr>
+          <a:xfrm>
+            <a:off x="658368" y="5989320"/>
+            <a:ext cx="10911535" cy="731520"/>
+          </a:xfrm>
+          <a:prstGeom prst="rect">
+            <a:avLst/>
+          </a:prstGeom>
+          <a:noFill/>
+        </p:spPr>
+        <p:txBody>
+          <a:bodyPr wrap="square" lIns="0" rIns="0" tIns="0" bIns="0">
+            <a:spAutoFit/>
+          </a:bodyPr>
+          <a:lstStyle/>
+          <a:p>
+            <a:pPr algn="l">
+              <a:spcAft>
+                <a:spcPts val="100"/>
+              </a:spcAft>
+            </a:pPr>
+            <a:r>
+              <a:rPr sz="950" b="1">
+                <a:solidFill>
+                  <a:srgbClr val="6B6B6B"/>
+                </a:solidFill>
+                <a:latin typeface="Arial"/>
+              </a:rPr>
+              <a:t>Green</a:t>
+            </a:r>
             <a:r>
               <a:rPr sz="950" b="0">
                 <a:solidFill>
@@ -5724,7 +6434,16 @@
                 </a:solidFill>
                 <a:latin typeface="Arial"/>
               </a:rPr>
-              <a:t>Green = the step yields and we measure it. </a:t>
+              <a:t> = yields, and we measure it.   </a:t>
+            </a:r>
+            <a:r>
+              <a:rPr sz="950" b="1">
+                <a:solidFill>
+                  <a:srgbClr val="6B6B6B"/>
+                </a:solidFill>
+                <a:latin typeface="Arial"/>
+              </a:rPr>
+              <a:t>Amber</a:t>
             </a:r>
             <a:r>
               <a:rPr sz="950" b="0">
@@ -5733,7 +6452,16 @@
                 </a:solidFill>
                 <a:latin typeface="Arial"/>
               </a:rPr>
-              <a:t>Amber = it ran, under 20 units, so no yield is reported — the count is. </a:t>
+              <a:t> = quantity only, no yield reported.   </a:t>
+            </a:r>
+            <a:r>
+              <a:rPr sz="950" b="1">
+                <a:solidFill>
+                  <a:srgbClr val="6B6B6B"/>
+                </a:solidFill>
+                <a:latin typeface="Arial"/>
+              </a:rPr>
+              <a:t>Grey</a:t>
             </a:r>
             <a:r>
               <a:rPr sz="950" b="0">
@@ -5742,23 +6470,39 @@
                 </a:solidFill>
                 <a:latin typeface="Arial"/>
               </a:rPr>
-              <a:t>Grey = builds or moves, no verdict.</a:t>
-            </a:r>
-          </a:p>
-          <a:p>
-            <a:pPr algn="l">
-              <a:spcAft>
-                <a:spcPts val="200"/>
-              </a:spcAft>
-            </a:pPr>
-            <a:r>
-              <a:rPr sz="900" b="0">
+              <a:t> = builds, moves, or measured elsewhere.</a:t>
+            </a:r>
+          </a:p>
+          <a:p>
+            <a:pPr algn="l">
+              <a:spcAft>
+                <a:spcPts val="100"/>
+              </a:spcAft>
+            </a:pPr>
+            <a:r>
+              <a:rPr sz="850" b="0">
                 <a:solidFill>
                   <a:srgbClr val="6B6B6B"/>
                 </a:solidFill>
                 <a:latin typeface="Arial"/>
               </a:rPr>
-              <a:t>Source: pega2 – pega5 (ESVM), one row per unit. WST and FT reported by Sigurd. VBB provisioning omitted — not part of the product test flow. Amber this week: L10 FAT (2u), L10 SFT (1u), L10 RIN (1u), L10 2U (3u), L11 Test (2u).</a:t>
+              <a:t>Quantity only: L10 FAT, L10 SFT, L10 RIN, L10 2U, L11 Test. L10 and L11 are chassis and rack level and in bring-up — a percentage over three chassis swings 33 points on one unit, so the counts are published and the yields are not.</a:t>
+            </a:r>
+          </a:p>
+          <a:p>
+            <a:pPr algn="l">
+              <a:spcAft>
+                <a:spcPts val="100"/>
+              </a:spcAft>
+            </a:pPr>
+            <a:r>
+              <a:rPr sz="850" b="0">
+                <a:solidFill>
+                  <a:srgbClr val="6B6B6B"/>
+                </a:solidFill>
+                <a:latin typeface="Arial"/>
+              </a:rPr>
+              <a:t>Source: pega2 – pega5 (ESVM), one row per unit. WST and FT reported by Sigurd. VBB provisioning drawn for the flow but left out of the yield view.</a:t>
             </a:r>
           </a:p>
         </p:txBody>
@@ -7161,7 +7905,7 @@
                 </a:solidFill>
                 <a:latin typeface="Arial"/>
               </a:rPr>
-              <a:t>not enough units</a:t>
+              <a:t>quantity only</a:t>
             </a:r>
           </a:p>
         </p:txBody>
@@ -7235,11 +7979,11 @@
             <a:r>
               <a:rPr sz="1400" b="1">
                 <a:solidFill>
-                  <a:srgbClr val="B3281E"/>
-                </a:solidFill>
-                <a:latin typeface="Arial"/>
-              </a:rPr>
-              <a:t>100.0%</a:t>
+                  <a:srgbClr val="141414"/>
+                </a:solidFill>
+                <a:latin typeface="Arial"/>
+              </a:rPr>
+              <a:t>—</a:t>
             </a:r>
           </a:p>
           <a:p>
@@ -7255,7 +7999,7 @@
                 </a:solidFill>
                 <a:latin typeface="Arial"/>
               </a:rPr>
-              <a:t>2 of 2 units re-run</a:t>
+              <a:t>chassis and rack level, in bring-up — quantity only</a:t>
             </a:r>
           </a:p>
         </p:txBody>
@@ -7459,7 +8203,7 @@
                 </a:solidFill>
                 <a:latin typeface="Arial"/>
               </a:rPr>
-              <a:t>not enough units</a:t>
+              <a:t>quantity only</a:t>
             </a:r>
           </a:p>
         </p:txBody>
@@ -7533,11 +8277,11 @@
             <a:r>
               <a:rPr sz="1400" b="1">
                 <a:solidFill>
-                  <a:srgbClr val="B3281E"/>
-                </a:solidFill>
-                <a:latin typeface="Arial"/>
-              </a:rPr>
-              <a:t>100.0%</a:t>
+                  <a:srgbClr val="141414"/>
+                </a:solidFill>
+                <a:latin typeface="Arial"/>
+              </a:rPr>
+              <a:t>—</a:t>
             </a:r>
           </a:p>
           <a:p>
@@ -7553,7 +8297,7 @@
                 </a:solidFill>
                 <a:latin typeface="Arial"/>
               </a:rPr>
-              <a:t>1 of 1 units re-run</a:t>
+              <a:t>chassis and rack level, in bring-up — quantity only</a:t>
             </a:r>
           </a:p>
         </p:txBody>
@@ -7757,7 +8501,7 @@
                 </a:solidFill>
                 <a:latin typeface="Arial"/>
               </a:rPr>
-              <a:t>not enough units</a:t>
+              <a:t>quantity only</a:t>
             </a:r>
           </a:p>
         </p:txBody>
@@ -7831,11 +8575,11 @@
             <a:r>
               <a:rPr sz="1400" b="1">
                 <a:solidFill>
-                  <a:srgbClr val="B3281E"/>
-                </a:solidFill>
-                <a:latin typeface="Arial"/>
-              </a:rPr>
-              <a:t>100.0%</a:t>
+                  <a:srgbClr val="141414"/>
+                </a:solidFill>
+                <a:latin typeface="Arial"/>
+              </a:rPr>
+              <a:t>—</a:t>
             </a:r>
           </a:p>
           <a:p>
@@ -7851,7 +8595,7 @@
                 </a:solidFill>
                 <a:latin typeface="Arial"/>
               </a:rPr>
-              <a:t>1 of 1 units re-run</a:t>
+              <a:t>chassis and rack level, in bring-up — quantity only</a:t>
             </a:r>
           </a:p>
         </p:txBody>
@@ -8055,7 +8799,7 @@
                 </a:solidFill>
                 <a:latin typeface="Arial"/>
               </a:rPr>
-              <a:t>not enough units</a:t>
+              <a:t>quantity only</a:t>
             </a:r>
           </a:p>
         </p:txBody>
@@ -8129,11 +8873,11 @@
             <a:r>
               <a:rPr sz="1400" b="1">
                 <a:solidFill>
-                  <a:srgbClr val="B3281E"/>
-                </a:solidFill>
-                <a:latin typeface="Arial"/>
-              </a:rPr>
-              <a:t>66.7%</a:t>
+                  <a:srgbClr val="141414"/>
+                </a:solidFill>
+                <a:latin typeface="Arial"/>
+              </a:rPr>
+              <a:t>—</a:t>
             </a:r>
           </a:p>
           <a:p>
@@ -8149,7 +8893,7 @@
                 </a:solidFill>
                 <a:latin typeface="Arial"/>
               </a:rPr>
-              <a:t>2 of 3 units re-run</a:t>
+              <a:t>chassis and rack level, in bring-up — quantity only</a:t>
             </a:r>
           </a:p>
         </p:txBody>
@@ -8353,7 +9097,7 @@
                 </a:solidFill>
                 <a:latin typeface="Arial"/>
               </a:rPr>
-              <a:t>not enough units</a:t>
+              <a:t>quantity only</a:t>
             </a:r>
           </a:p>
         </p:txBody>
@@ -8427,11 +9171,11 @@
             <a:r>
               <a:rPr sz="1400" b="1">
                 <a:solidFill>
-                  <a:srgbClr val="B3281E"/>
-                </a:solidFill>
-                <a:latin typeface="Arial"/>
-              </a:rPr>
-              <a:t>100.0%</a:t>
+                  <a:srgbClr val="141414"/>
+                </a:solidFill>
+                <a:latin typeface="Arial"/>
+              </a:rPr>
+              <a:t>—</a:t>
             </a:r>
           </a:p>
           <a:p>
@@ -8447,7 +9191,7 @@
                 </a:solidFill>
                 <a:latin typeface="Arial"/>
               </a:rPr>
-              <a:t>2 of 2 units re-run</a:t>
+              <a:t>chassis and rack level, in bring-up — quantity only</a:t>
             </a:r>
           </a:p>
         </p:txBody>

--- a/decks/weekly-2026-W33.pptx
+++ b/decks/weekly-2026-W33.pptx
@@ -7,6 +7,8 @@
   <p:sldIdLst>
     <p:sldId id="256" r:id="rId7"/>
     <p:sldId id="257" r:id="rId8"/>
+    <p:sldId id="258" r:id="rId9"/>
+    <p:sldId id="259" r:id="rId10"/>
   </p:sldIdLst>
   <p:sldSz cx="12191695" cy="6858000" type="screen4x3"/>
   <p:notesSz cx="6858000" cy="9144000"/>
@@ -3123,7 +3125,7 @@
                 </a:solidFill>
                 <a:latin typeface="Arial"/>
               </a:rPr>
-              <a:t>Production test flow — yield and quantity</a:t>
+              <a:t>How to read this</a:t>
             </a:r>
           </a:p>
           <a:p>
@@ -3139,7 +3141,7 @@
                 </a:solidFill>
                 <a:latin typeface="Arial"/>
               </a:rPr>
-              <a:t>2026-W33 · 2026-08-10 to 2026-08-16, week still running · UTC · first-pass yield and units, in the box</a:t>
+              <a:t>three numbers, and why the table on the next pages is broken out by test step</a:t>
             </a:r>
           </a:p>
         </p:txBody>
@@ -3196,8 +3198,63 @@
         </p:nvSpPr>
         <p:spPr>
           <a:xfrm>
-            <a:off x="658368" y="1188720"/>
-            <a:ext cx="2743200" cy="237744"/>
+            <a:off x="566928" y="1481328"/>
+            <a:ext cx="2331720" cy="1005840"/>
+          </a:xfrm>
+          <a:prstGeom prst="rect">
+            <a:avLst/>
+          </a:prstGeom>
+          <a:noFill/>
+        </p:spPr>
+        <p:txBody>
+          <a:bodyPr wrap="square" lIns="0" rIns="0" tIns="0" bIns="0">
+            <a:spAutoFit/>
+          </a:bodyPr>
+          <a:lstStyle/>
+          <a:p>
+            <a:pPr algn="l">
+              <a:spcAft>
+                <a:spcPts val="200"/>
+              </a:spcAft>
+            </a:pPr>
+            <a:r>
+              <a:rPr sz="1700" b="1">
+                <a:solidFill>
+                  <a:srgbClr val="141414"/>
+                </a:solidFill>
+                <a:latin typeface="Arial"/>
+              </a:rPr>
+              <a:t>1.  Capacity</a:t>
+            </a:r>
+          </a:p>
+          <a:p>
+            <a:pPr algn="l">
+              <a:spcAft>
+                <a:spcPts val="200"/>
+              </a:spcAft>
+            </a:pPr>
+            <a:r>
+              <a:rPr sz="1150" b="0">
+                <a:solidFill>
+                  <a:srgbClr val="6B6B6B"/>
+                </a:solidFill>
+                <a:latin typeface="Arial"/>
+              </a:rPr>
+              <a:t>How many units a step can put through in a week.</a:t>
+            </a:r>
+          </a:p>
+        </p:txBody>
+      </p:sp>
+      <p:sp>
+        <p:nvSpPr>
+          <p:cNvPr id="5" name="TextBox 4"/>
+          <p:cNvSpPr txBox="1"/>
+          <p:nvPr/>
+        </p:nvSpPr>
+        <p:spPr>
+          <a:xfrm>
+            <a:off x="3063240" y="1517904"/>
+            <a:ext cx="4206240" cy="1188720"/>
           </a:xfrm>
           <a:prstGeom prst="rect">
             <a:avLst/>
@@ -3216,83 +3273,368 @@
               </a:spcAft>
             </a:pPr>
             <a:r>
-              <a:rPr sz="1000" b="0">
+              <a:rPr sz="1200" b="0">
+                <a:solidFill>
+                  <a:srgbClr val="141414"/>
+                </a:solidFill>
+                <a:latin typeface="Arial"/>
+              </a:rPr>
+              <a:t>Counted here as units and runs at each step: 407 step-visits across 573 runs this week. Runs exceed visits because a unit can occupy a station more than once — which is why capacity and retest are the same conversation.</a:t>
+            </a:r>
+          </a:p>
+        </p:txBody>
+      </p:sp>
+      <p:sp>
+        <p:nvSpPr>
+          <p:cNvPr id="6" name="TextBox 5"/>
+          <p:cNvSpPr txBox="1"/>
+          <p:nvPr/>
+        </p:nvSpPr>
+        <p:spPr>
+          <a:xfrm>
+            <a:off x="7543800" y="1517904"/>
+            <a:ext cx="4114800" cy="1188720"/>
+          </a:xfrm>
+          <a:prstGeom prst="rect">
+            <a:avLst/>
+          </a:prstGeom>
+          <a:noFill/>
+        </p:spPr>
+        <p:txBody>
+          <a:bodyPr wrap="square" lIns="0" rIns="0" tIns="0" bIns="0">
+            <a:spAutoFit/>
+          </a:bodyPr>
+          <a:lstStyle/>
+          <a:p>
+            <a:pPr algn="l">
+              <a:spcAft>
+                <a:spcPts val="0"/>
+              </a:spcAft>
+            </a:pPr>
+            <a:r>
+              <a:rPr sz="1200" b="1">
+                <a:solidFill>
+                  <a:srgbClr val="141414"/>
+                </a:solidFill>
+                <a:latin typeface="Arial"/>
+              </a:rPr>
+              <a:t>Why it matters.  </a:t>
+            </a:r>
+            <a:r>
+              <a:rPr sz="1200" b="0">
+                <a:solidFill>
+                  <a:srgbClr val="141414"/>
+                </a:solidFill>
+                <a:latin typeface="Arial"/>
+              </a:rPr>
+              <a:t>It sets the schedule. A station cannot ship what it cannot test, and every re-run is a slot a new unit did not get.</a:t>
+            </a:r>
+          </a:p>
+        </p:txBody>
+      </p:sp>
+      <p:sp>
+        <p:nvSpPr>
+          <p:cNvPr id="7" name="TextBox 6"/>
+          <p:cNvSpPr txBox="1"/>
+          <p:nvPr/>
+        </p:nvSpPr>
+        <p:spPr>
+          <a:xfrm>
+            <a:off x="566928" y="2926080"/>
+            <a:ext cx="2331720" cy="1005840"/>
+          </a:xfrm>
+          <a:prstGeom prst="rect">
+            <a:avLst/>
+          </a:prstGeom>
+          <a:noFill/>
+        </p:spPr>
+        <p:txBody>
+          <a:bodyPr wrap="square" lIns="0" rIns="0" tIns="0" bIns="0">
+            <a:spAutoFit/>
+          </a:bodyPr>
+          <a:lstStyle/>
+          <a:p>
+            <a:pPr algn="l">
+              <a:spcAft>
+                <a:spcPts val="200"/>
+              </a:spcAft>
+            </a:pPr>
+            <a:r>
+              <a:rPr sz="1700" b="1">
+                <a:solidFill>
+                  <a:srgbClr val="141414"/>
+                </a:solidFill>
+                <a:latin typeface="Arial"/>
+              </a:rPr>
+              <a:t>2.  Yield</a:t>
+            </a:r>
+          </a:p>
+          <a:p>
+            <a:pPr algn="l">
+              <a:spcAft>
+                <a:spcPts val="200"/>
+              </a:spcAft>
+            </a:pPr>
+            <a:r>
+              <a:rPr sz="1150" b="0">
                 <a:solidFill>
                   <a:srgbClr val="6B6B6B"/>
                 </a:solidFill>
                 <a:latin typeface="Arial"/>
               </a:rPr>
-              <a:t>@Sigurd   </a:t>
-            </a:r>
-            <a:r>
-              <a:rPr sz="1250" b="1">
+              <a:t>The share of units that pass.</a:t>
+            </a:r>
+          </a:p>
+        </p:txBody>
+      </p:sp>
+      <p:sp>
+        <p:nvSpPr>
+          <p:cNvPr id="8" name="TextBox 7"/>
+          <p:cNvSpPr txBox="1"/>
+          <p:nvPr/>
+        </p:nvSpPr>
+        <p:spPr>
+          <a:xfrm>
+            <a:off x="3063240" y="2962656"/>
+            <a:ext cx="4206240" cy="1188720"/>
+          </a:xfrm>
+          <a:prstGeom prst="rect">
+            <a:avLst/>
+          </a:prstGeom>
+          <a:noFill/>
+        </p:spPr>
+        <p:txBody>
+          <a:bodyPr wrap="square" lIns="0" rIns="0" tIns="0" bIns="0">
+            <a:spAutoFit/>
+          </a:bodyPr>
+          <a:lstStyle/>
+          <a:p>
+            <a:pPr algn="l">
+              <a:spcAft>
+                <a:spcPts val="0"/>
+              </a:spcAft>
+            </a:pPr>
+            <a:r>
+              <a:rPr sz="1200" b="0">
                 <a:solidFill>
                   <a:srgbClr val="141414"/>
                 </a:solidFill>
                 <a:latin typeface="Arial"/>
               </a:rPr>
-              <a:t>ASIC</a:t>
-            </a:r>
-          </a:p>
-        </p:txBody>
-      </p:sp>
-      <p:cxnSp>
-        <p:nvCxnSpPr>
-          <p:cNvPr id="5" name="Connector 4"/>
-          <p:cNvCxnSpPr/>
-          <p:nvPr/>
-        </p:nvCxnSpPr>
-        <p:spPr>
-          <a:xfrm>
-            <a:off x="2212848" y="1133856"/>
-            <a:ext cx="0" cy="4672584"/>
-          </a:xfrm>
-          <a:prstGeom prst="line">
-            <a:avLst/>
-          </a:prstGeom>
-          <a:ln w="11430">
-            <a:solidFill>
-              <a:srgbClr val="B5B3AC"/>
-            </a:solidFill>
-            <a:prstDash val="dash"/>
-          </a:ln>
-        </p:spPr>
-        <p:style>
-          <a:lnRef idx="2">
-            <a:schemeClr val="accent1"/>
-          </a:lnRef>
-          <a:fillRef idx="0">
-            <a:schemeClr val="accent1"/>
-          </a:fillRef>
-          <a:effectRef idx="1">
-            <a:schemeClr val="accent1"/>
-          </a:effectRef>
-          <a:fontRef idx="minor">
-            <a:schemeClr val="tx1"/>
-          </a:fontRef>
-        </p:style>
-      </p:cxnSp>
-      <p:sp>
-        <p:nvSpPr>
-          <p:cNvPr id="6" name="Rounded Rectangle 5"/>
+              <a:t>First-pass yield counts units that passed on their first attempt (65.5% at MLT). Yield after retest counts units that passed eventually (74.6%). The gap between them is work done twice.</a:t>
+            </a:r>
+          </a:p>
+        </p:txBody>
+      </p:sp>
+      <p:sp>
+        <p:nvSpPr>
+          <p:cNvPr id="9" name="TextBox 8"/>
+          <p:cNvSpPr txBox="1"/>
+          <p:nvPr/>
+        </p:nvSpPr>
+        <p:spPr>
+          <a:xfrm>
+            <a:off x="7543800" y="2962656"/>
+            <a:ext cx="4114800" cy="1188720"/>
+          </a:xfrm>
+          <a:prstGeom prst="rect">
+            <a:avLst/>
+          </a:prstGeom>
+          <a:noFill/>
+        </p:spPr>
+        <p:txBody>
+          <a:bodyPr wrap="square" lIns="0" rIns="0" tIns="0" bIns="0">
+            <a:spAutoFit/>
+          </a:bodyPr>
+          <a:lstStyle/>
+          <a:p>
+            <a:pPr algn="l">
+              <a:spcAft>
+                <a:spcPts val="0"/>
+              </a:spcAft>
+            </a:pPr>
+            <a:r>
+              <a:rPr sz="1200" b="1">
+                <a:solidFill>
+                  <a:srgbClr val="141414"/>
+                </a:solidFill>
+                <a:latin typeface="Arial"/>
+              </a:rPr>
+              <a:t>Why it matters.  </a:t>
+            </a:r>
+            <a:r>
+              <a:rPr sz="1200" b="0">
+                <a:solidFill>
+                  <a:srgbClr val="141414"/>
+                </a:solidFill>
+                <a:latin typeface="Arial"/>
+              </a:rPr>
+              <a:t>It sets how many units you must start to ship one. At a rolled 35.6% through MLT and HTT, roughly three modules are started for every one that comes out clean first time.</a:t>
+            </a:r>
+          </a:p>
+        </p:txBody>
+      </p:sp>
+      <p:sp>
+        <p:nvSpPr>
+          <p:cNvPr id="10" name="TextBox 9"/>
+          <p:cNvSpPr txBox="1"/>
+          <p:nvPr/>
+        </p:nvSpPr>
+        <p:spPr>
+          <a:xfrm>
+            <a:off x="566928" y="4370832"/>
+            <a:ext cx="2331720" cy="1005840"/>
+          </a:xfrm>
+          <a:prstGeom prst="rect">
+            <a:avLst/>
+          </a:prstGeom>
+          <a:noFill/>
+        </p:spPr>
+        <p:txBody>
+          <a:bodyPr wrap="square" lIns="0" rIns="0" tIns="0" bIns="0">
+            <a:spAutoFit/>
+          </a:bodyPr>
+          <a:lstStyle/>
+          <a:p>
+            <a:pPr algn="l">
+              <a:spcAft>
+                <a:spcPts val="200"/>
+              </a:spcAft>
+            </a:pPr>
+            <a:r>
+              <a:rPr sz="1700" b="1">
+                <a:solidFill>
+                  <a:srgbClr val="141414"/>
+                </a:solidFill>
+                <a:latin typeface="Arial"/>
+              </a:rPr>
+              <a:t>3.  Retest</a:t>
+            </a:r>
+          </a:p>
+          <a:p>
+            <a:pPr algn="l">
+              <a:spcAft>
+                <a:spcPts val="200"/>
+              </a:spcAft>
+            </a:pPr>
+            <a:r>
+              <a:rPr sz="1150" b="0">
+                <a:solidFill>
+                  <a:srgbClr val="6B6B6B"/>
+                </a:solidFill>
+                <a:latin typeface="Arial"/>
+              </a:rPr>
+              <a:t>The share of units that had to be run again.</a:t>
+            </a:r>
+          </a:p>
+        </p:txBody>
+      </p:sp>
+      <p:sp>
+        <p:nvSpPr>
+          <p:cNvPr id="11" name="TextBox 10"/>
+          <p:cNvSpPr txBox="1"/>
+          <p:nvPr/>
+        </p:nvSpPr>
+        <p:spPr>
+          <a:xfrm>
+            <a:off x="3063240" y="4407408"/>
+            <a:ext cx="4206240" cy="1188720"/>
+          </a:xfrm>
+          <a:prstGeom prst="rect">
+            <a:avLst/>
+          </a:prstGeom>
+          <a:noFill/>
+        </p:spPr>
+        <p:txBody>
+          <a:bodyPr wrap="square" lIns="0" rIns="0" tIns="0" bIns="0">
+            <a:spAutoFit/>
+          </a:bodyPr>
+          <a:lstStyle/>
+          <a:p>
+            <a:pPr algn="l">
+              <a:spcAft>
+                <a:spcPts val="0"/>
+              </a:spcAft>
+            </a:pPr>
+            <a:r>
+              <a:rPr sz="1200" b="0">
+                <a:solidFill>
+                  <a:srgbClr val="141414"/>
+                </a:solidFill>
+                <a:latin typeface="Arial"/>
+              </a:rPr>
+              <a:t>19.7% of units at MLT and 27.6% at HTT came back for a second run — 45 and 47 units. Not the same as failures: a unit can be re-run and pass, and most are.</a:t>
+            </a:r>
+          </a:p>
+        </p:txBody>
+      </p:sp>
+      <p:sp>
+        <p:nvSpPr>
+          <p:cNvPr id="12" name="TextBox 11"/>
+          <p:cNvSpPr txBox="1"/>
+          <p:nvPr/>
+        </p:nvSpPr>
+        <p:spPr>
+          <a:xfrm>
+            <a:off x="7543800" y="4407408"/>
+            <a:ext cx="4114800" cy="1188720"/>
+          </a:xfrm>
+          <a:prstGeom prst="rect">
+            <a:avLst/>
+          </a:prstGeom>
+          <a:noFill/>
+        </p:spPr>
+        <p:txBody>
+          <a:bodyPr wrap="square" lIns="0" rIns="0" tIns="0" bIns="0">
+            <a:spAutoFit/>
+          </a:bodyPr>
+          <a:lstStyle/>
+          <a:p>
+            <a:pPr algn="l">
+              <a:spcAft>
+                <a:spcPts val="0"/>
+              </a:spcAft>
+            </a:pPr>
+            <a:r>
+              <a:rPr sz="1200" b="1">
+                <a:solidFill>
+                  <a:srgbClr val="141414"/>
+                </a:solidFill>
+                <a:latin typeface="Arial"/>
+              </a:rPr>
+              <a:t>Why it matters.  </a:t>
+            </a:r>
+            <a:r>
+              <a:rPr sz="1200" b="0">
+                <a:solidFill>
+                  <a:srgbClr val="141414"/>
+                </a:solidFill>
+                <a:latin typeface="Arial"/>
+              </a:rPr>
+              <a:t>It is where yield loss turns into capacity loss. Recovering a unit on the second try protects the shipment and costs the station time it will not get back.</a:t>
+            </a:r>
+          </a:p>
+        </p:txBody>
+      </p:sp>
+      <p:sp>
+        <p:nvSpPr>
+          <p:cNvPr id="13" name="Rectangle 12"/>
           <p:cNvSpPr/>
           <p:nvPr/>
         </p:nvSpPr>
         <p:spPr>
           <a:xfrm>
-            <a:off x="658368" y="1481328"/>
-            <a:ext cx="1298448" cy="640080"/>
-          </a:xfrm>
-          <a:prstGeom prst="roundRect">
+            <a:off x="566928" y="5779008"/>
+            <a:ext cx="11057839" cy="12700"/>
+          </a:xfrm>
+          <a:prstGeom prst="rect">
             <a:avLst/>
           </a:prstGeom>
           <a:solidFill>
-            <a:srgbClr val="D9D9D9"/>
+            <a:srgbClr val="D8D6CF"/>
           </a:solidFill>
-          <a:ln w="12700">
-            <a:solidFill>
-              <a:srgbClr val="A5A5A5"/>
-            </a:solidFill>
+          <a:ln>
+            <a:noFill/>
           </a:ln>
           <a:effectLst/>
         </p:spPr>
@@ -3320,3189 +3662,48 @@
       </p:sp>
       <p:sp>
         <p:nvSpPr>
-          <p:cNvPr id="7" name="TextBox 6"/>
-          <p:cNvSpPr txBox="1"/>
-          <p:nvPr/>
-        </p:nvSpPr>
-        <p:spPr>
-          <a:xfrm>
-            <a:off x="740664" y="1545336"/>
-            <a:ext cx="1133856" cy="530352"/>
-          </a:xfrm>
-          <a:prstGeom prst="rect">
-            <a:avLst/>
-          </a:prstGeom>
-          <a:noFill/>
-        </p:spPr>
-        <p:txBody>
-          <a:bodyPr wrap="square" lIns="0" rIns="0" tIns="0" bIns="0">
-            <a:spAutoFit/>
-          </a:bodyPr>
-          <a:lstStyle/>
-          <a:p>
-            <a:pPr algn="l">
-              <a:spcAft>
-                <a:spcPts val="100"/>
-              </a:spcAft>
-            </a:pPr>
-            <a:r>
-              <a:rPr sz="1250" b="0">
+          <p:cNvPr id="14" name="TextBox 13"/>
+          <p:cNvSpPr txBox="1"/>
+          <p:nvPr/>
+        </p:nvSpPr>
+        <p:spPr>
+          <a:xfrm>
+            <a:off x="566928" y="5943600"/>
+            <a:ext cx="11057839" cy="640080"/>
+          </a:xfrm>
+          <a:prstGeom prst="rect">
+            <a:avLst/>
+          </a:prstGeom>
+          <a:noFill/>
+        </p:spPr>
+        <p:txBody>
+          <a:bodyPr wrap="square" lIns="0" rIns="0" tIns="0" bIns="0">
+            <a:spAutoFit/>
+          </a:bodyPr>
+          <a:lstStyle/>
+          <a:p>
+            <a:pPr algn="l">
+              <a:spcAft>
+                <a:spcPts val="0"/>
+              </a:spcAft>
+            </a:pPr>
+            <a:r>
+              <a:rPr sz="1300" b="1">
                 <a:solidFill>
                   <a:srgbClr val="141414"/>
                 </a:solidFill>
                 <a:latin typeface="Arial"/>
               </a:rPr>
-              <a:t>ASIC</a:t>
-            </a:r>
-          </a:p>
-        </p:txBody>
-      </p:sp>
-      <p:sp>
-        <p:nvSpPr>
-          <p:cNvPr id="8" name="Rounded Rectangle 7"/>
-          <p:cNvSpPr/>
-          <p:nvPr/>
-        </p:nvSpPr>
-        <p:spPr>
-          <a:xfrm>
-            <a:off x="658368" y="2322576"/>
-            <a:ext cx="1298448" cy="640080"/>
-          </a:xfrm>
-          <a:prstGeom prst="roundRect">
-            <a:avLst/>
-          </a:prstGeom>
-          <a:solidFill>
-            <a:srgbClr val="D5E8D4"/>
-          </a:solidFill>
-          <a:ln w="12700">
-            <a:solidFill>
-              <a:srgbClr val="82B366"/>
-            </a:solidFill>
-          </a:ln>
-          <a:effectLst/>
-        </p:spPr>
-        <p:style>
-          <a:lnRef idx="1">
-            <a:schemeClr val="accent1"/>
-          </a:lnRef>
-          <a:fillRef idx="3">
-            <a:schemeClr val="accent1"/>
-          </a:fillRef>
-          <a:effectRef idx="2">
-            <a:schemeClr val="accent1"/>
-          </a:effectRef>
-          <a:fontRef idx="minor">
-            <a:schemeClr val="lt1"/>
-          </a:fontRef>
-        </p:style>
-        <p:txBody>
-          <a:bodyPr rtlCol="0" anchor="ctr"/>
-          <a:lstStyle/>
-          <a:p>
-            <a:pPr algn="ctr"/>
-          </a:p>
-        </p:txBody>
-      </p:sp>
-      <p:sp>
-        <p:nvSpPr>
-          <p:cNvPr id="9" name="TextBox 8"/>
-          <p:cNvSpPr txBox="1"/>
-          <p:nvPr/>
-        </p:nvSpPr>
-        <p:spPr>
-          <a:xfrm>
-            <a:off x="740664" y="2386584"/>
-            <a:ext cx="1133856" cy="530352"/>
-          </a:xfrm>
-          <a:prstGeom prst="rect">
-            <a:avLst/>
-          </a:prstGeom>
-          <a:noFill/>
-        </p:spPr>
-        <p:txBody>
-          <a:bodyPr wrap="square" lIns="0" rIns="0" tIns="0" bIns="0">
-            <a:spAutoFit/>
-          </a:bodyPr>
-          <a:lstStyle/>
-          <a:p>
-            <a:pPr algn="l">
-              <a:spcAft>
-                <a:spcPts val="100"/>
-              </a:spcAft>
-            </a:pPr>
-            <a:r>
-              <a:rPr sz="1250" b="1">
+              <a:t>Why it is broken out by test step:  </a:t>
+            </a:r>
+            <a:r>
+              <a:rPr sz="1300" b="0">
                 <a:solidFill>
                   <a:srgbClr val="141414"/>
                 </a:solidFill>
                 <a:latin typeface="Arial"/>
               </a:rPr>
-              <a:t>WST</a:t>
-            </a:r>
-          </a:p>
-          <a:p>
-            <a:pPr algn="l">
-              <a:spcAft>
-                <a:spcPts val="100"/>
-              </a:spcAft>
-            </a:pPr>
-            <a:r>
-              <a:rPr sz="1500" b="1">
-                <a:solidFill>
-                  <a:srgbClr val="B3281E"/>
-                </a:solidFill>
-                <a:latin typeface="Arial"/>
-              </a:rPr>
-              <a:t>35.3%</a:t>
-            </a:r>
-            <a:r>
-              <a:rPr sz="800" b="0">
-                <a:solidFill>
-                  <a:srgbClr val="6B6B6B"/>
-                </a:solidFill>
-                <a:latin typeface="Arial"/>
-              </a:rPr>
-              <a:t>  reported</a:t>
-            </a:r>
-          </a:p>
-        </p:txBody>
-      </p:sp>
-      <p:sp>
-        <p:nvSpPr>
-          <p:cNvPr id="10" name="Rounded Rectangle 9"/>
-          <p:cNvSpPr/>
-          <p:nvPr/>
-        </p:nvSpPr>
-        <p:spPr>
-          <a:xfrm>
-            <a:off x="658368" y="3163824"/>
-            <a:ext cx="1298448" cy="640080"/>
-          </a:xfrm>
-          <a:prstGeom prst="roundRect">
-            <a:avLst/>
-          </a:prstGeom>
-          <a:solidFill>
-            <a:srgbClr val="D5E8D4"/>
-          </a:solidFill>
-          <a:ln w="12700">
-            <a:solidFill>
-              <a:srgbClr val="82B366"/>
-            </a:solidFill>
-          </a:ln>
-          <a:effectLst/>
-        </p:spPr>
-        <p:style>
-          <a:lnRef idx="1">
-            <a:schemeClr val="accent1"/>
-          </a:lnRef>
-          <a:fillRef idx="3">
-            <a:schemeClr val="accent1"/>
-          </a:fillRef>
-          <a:effectRef idx="2">
-            <a:schemeClr val="accent1"/>
-          </a:effectRef>
-          <a:fontRef idx="minor">
-            <a:schemeClr val="lt1"/>
-          </a:fontRef>
-        </p:style>
-        <p:txBody>
-          <a:bodyPr rtlCol="0" anchor="ctr"/>
-          <a:lstStyle/>
-          <a:p>
-            <a:pPr algn="ctr"/>
-          </a:p>
-        </p:txBody>
-      </p:sp>
-      <p:sp>
-        <p:nvSpPr>
-          <p:cNvPr id="11" name="TextBox 10"/>
-          <p:cNvSpPr txBox="1"/>
-          <p:nvPr/>
-        </p:nvSpPr>
-        <p:spPr>
-          <a:xfrm>
-            <a:off x="740664" y="3227832"/>
-            <a:ext cx="1133856" cy="530352"/>
-          </a:xfrm>
-          <a:prstGeom prst="rect">
-            <a:avLst/>
-          </a:prstGeom>
-          <a:noFill/>
-        </p:spPr>
-        <p:txBody>
-          <a:bodyPr wrap="square" lIns="0" rIns="0" tIns="0" bIns="0">
-            <a:spAutoFit/>
-          </a:bodyPr>
-          <a:lstStyle/>
-          <a:p>
-            <a:pPr algn="l">
-              <a:spcAft>
-                <a:spcPts val="100"/>
-              </a:spcAft>
-            </a:pPr>
-            <a:r>
-              <a:rPr sz="1250" b="1">
-                <a:solidFill>
-                  <a:srgbClr val="141414"/>
-                </a:solidFill>
-                <a:latin typeface="Arial"/>
-              </a:rPr>
-              <a:t>FT</a:t>
-            </a:r>
-          </a:p>
-          <a:p>
-            <a:pPr algn="l">
-              <a:spcAft>
-                <a:spcPts val="100"/>
-              </a:spcAft>
-            </a:pPr>
-            <a:r>
-              <a:rPr sz="1500" b="1">
-                <a:solidFill>
-                  <a:srgbClr val="B56B00"/>
-                </a:solidFill>
-                <a:latin typeface="Arial"/>
-              </a:rPr>
-              <a:t>84.3%</a:t>
-            </a:r>
-            <a:r>
-              <a:rPr sz="800" b="0">
-                <a:solidFill>
-                  <a:srgbClr val="6B6B6B"/>
-                </a:solidFill>
-                <a:latin typeface="Arial"/>
-              </a:rPr>
-              <a:t>  reported</a:t>
-            </a:r>
-          </a:p>
-        </p:txBody>
-      </p:sp>
-      <p:sp>
-        <p:nvSpPr>
-          <p:cNvPr id="12" name="Rounded Rectangle 11"/>
-          <p:cNvSpPr/>
-          <p:nvPr/>
-        </p:nvSpPr>
-        <p:spPr>
-          <a:xfrm>
-            <a:off x="658368" y="4005072"/>
-            <a:ext cx="1298448" cy="640080"/>
-          </a:xfrm>
-          <a:prstGeom prst="roundRect">
-            <a:avLst/>
-          </a:prstGeom>
-          <a:solidFill>
-            <a:srgbClr val="D9D9D9"/>
-          </a:solidFill>
-          <a:ln w="12700">
-            <a:solidFill>
-              <a:srgbClr val="A5A5A5"/>
-            </a:solidFill>
-          </a:ln>
-          <a:effectLst/>
-        </p:spPr>
-        <p:style>
-          <a:lnRef idx="1">
-            <a:schemeClr val="accent1"/>
-          </a:lnRef>
-          <a:fillRef idx="3">
-            <a:schemeClr val="accent1"/>
-          </a:fillRef>
-          <a:effectRef idx="2">
-            <a:schemeClr val="accent1"/>
-          </a:effectRef>
-          <a:fontRef idx="minor">
-            <a:schemeClr val="lt1"/>
-          </a:fontRef>
-        </p:style>
-        <p:txBody>
-          <a:bodyPr rtlCol="0" anchor="ctr"/>
-          <a:lstStyle/>
-          <a:p>
-            <a:pPr algn="ctr"/>
-          </a:p>
-        </p:txBody>
-      </p:sp>
-      <p:sp>
-        <p:nvSpPr>
-          <p:cNvPr id="13" name="TextBox 12"/>
-          <p:cNvSpPr txBox="1"/>
-          <p:nvPr/>
-        </p:nvSpPr>
-        <p:spPr>
-          <a:xfrm>
-            <a:off x="740664" y="4069080"/>
-            <a:ext cx="1133856" cy="530352"/>
-          </a:xfrm>
-          <a:prstGeom prst="rect">
-            <a:avLst/>
-          </a:prstGeom>
-          <a:noFill/>
-        </p:spPr>
-        <p:txBody>
-          <a:bodyPr wrap="square" lIns="0" rIns="0" tIns="0" bIns="0">
-            <a:spAutoFit/>
-          </a:bodyPr>
-          <a:lstStyle/>
-          <a:p>
-            <a:pPr algn="l">
-              <a:spcAft>
-                <a:spcPts val="100"/>
-              </a:spcAft>
-            </a:pPr>
-            <a:r>
-              <a:rPr sz="1250" b="1">
-                <a:solidFill>
-                  <a:srgbClr val="141414"/>
-                </a:solidFill>
-                <a:latin typeface="Arial"/>
-              </a:rPr>
-              <a:t>SLT</a:t>
-            </a:r>
-          </a:p>
-          <a:p>
-            <a:pPr algn="l">
-              <a:spcAft>
-                <a:spcPts val="100"/>
-              </a:spcAft>
-            </a:pPr>
-            <a:r>
-              <a:rPr sz="850" b="0">
-                <a:solidFill>
-                  <a:srgbClr val="6B6B6B"/>
-                </a:solidFill>
-                <a:latin typeface="Arial"/>
-              </a:rPr>
-              <a:t>at Sigurd</a:t>
-            </a:r>
-          </a:p>
-        </p:txBody>
-      </p:sp>
-      <p:sp>
-        <p:nvSpPr>
-          <p:cNvPr id="14" name="TextBox 13"/>
-          <p:cNvSpPr txBox="1"/>
-          <p:nvPr/>
-        </p:nvSpPr>
-        <p:spPr>
-          <a:xfrm>
-            <a:off x="2377440" y="1188720"/>
-            <a:ext cx="2743200" cy="237744"/>
-          </a:xfrm>
-          <a:prstGeom prst="rect">
-            <a:avLst/>
-          </a:prstGeom>
-          <a:noFill/>
-        </p:spPr>
-        <p:txBody>
-          <a:bodyPr wrap="square" lIns="0" rIns="0" tIns="0" bIns="0">
-            <a:spAutoFit/>
-          </a:bodyPr>
-          <a:lstStyle/>
-          <a:p>
-            <a:pPr algn="l">
-              <a:spcAft>
-                <a:spcPts val="0"/>
-              </a:spcAft>
-            </a:pPr>
-            <a:r>
-              <a:rPr sz="1000" b="0">
-                <a:solidFill>
-                  <a:srgbClr val="6B6B6B"/>
-                </a:solidFill>
-                <a:latin typeface="Arial"/>
-              </a:rPr>
-              <a:t>@Pega   </a:t>
-            </a:r>
-            <a:r>
-              <a:rPr sz="1250" b="1">
-                <a:solidFill>
-                  <a:srgbClr val="141414"/>
-                </a:solidFill>
-                <a:latin typeface="Arial"/>
-              </a:rPr>
-              <a:t>PCBA L6</a:t>
-            </a:r>
-          </a:p>
-        </p:txBody>
-      </p:sp>
-      <p:cxnSp>
-        <p:nvCxnSpPr>
-          <p:cNvPr id="15" name="Connector 14"/>
-          <p:cNvCxnSpPr/>
-          <p:nvPr/>
-        </p:nvCxnSpPr>
-        <p:spPr>
-          <a:xfrm>
-            <a:off x="5285232" y="1133856"/>
-            <a:ext cx="0" cy="4672584"/>
-          </a:xfrm>
-          <a:prstGeom prst="line">
-            <a:avLst/>
-          </a:prstGeom>
-          <a:ln w="11430">
-            <a:solidFill>
-              <a:srgbClr val="B5B3AC"/>
-            </a:solidFill>
-            <a:prstDash val="dash"/>
-          </a:ln>
-        </p:spPr>
-        <p:style>
-          <a:lnRef idx="2">
-            <a:schemeClr val="accent1"/>
-          </a:lnRef>
-          <a:fillRef idx="0">
-            <a:schemeClr val="accent1"/>
-          </a:fillRef>
-          <a:effectRef idx="1">
-            <a:schemeClr val="accent1"/>
-          </a:effectRef>
-          <a:fontRef idx="minor">
-            <a:schemeClr val="tx1"/>
-          </a:fontRef>
-        </p:style>
-      </p:cxnSp>
-      <p:sp>
-        <p:nvSpPr>
-          <p:cNvPr id="16" name="Rounded Rectangle 15"/>
-          <p:cNvSpPr/>
-          <p:nvPr/>
-        </p:nvSpPr>
-        <p:spPr>
-          <a:xfrm>
-            <a:off x="2377440" y="1481328"/>
-            <a:ext cx="1298448" cy="640080"/>
-          </a:xfrm>
-          <a:prstGeom prst="roundRect">
-            <a:avLst/>
-          </a:prstGeom>
-          <a:solidFill>
-            <a:srgbClr val="D9D9D9"/>
-          </a:solidFill>
-          <a:ln w="12700">
-            <a:solidFill>
-              <a:srgbClr val="A5A5A5"/>
-            </a:solidFill>
-          </a:ln>
-          <a:effectLst/>
-        </p:spPr>
-        <p:style>
-          <a:lnRef idx="1">
-            <a:schemeClr val="accent1"/>
-          </a:lnRef>
-          <a:fillRef idx="3">
-            <a:schemeClr val="accent1"/>
-          </a:fillRef>
-          <a:effectRef idx="2">
-            <a:schemeClr val="accent1"/>
-          </a:effectRef>
-          <a:fontRef idx="minor">
-            <a:schemeClr val="lt1"/>
-          </a:fontRef>
-        </p:style>
-        <p:txBody>
-          <a:bodyPr rtlCol="0" anchor="ctr"/>
-          <a:lstStyle/>
-          <a:p>
-            <a:pPr algn="ctr"/>
-          </a:p>
-        </p:txBody>
-      </p:sp>
-      <p:sp>
-        <p:nvSpPr>
-          <p:cNvPr id="17" name="TextBox 16"/>
-          <p:cNvSpPr txBox="1"/>
-          <p:nvPr/>
-        </p:nvSpPr>
-        <p:spPr>
-          <a:xfrm>
-            <a:off x="2459736" y="1545336"/>
-            <a:ext cx="1133856" cy="530352"/>
-          </a:xfrm>
-          <a:prstGeom prst="rect">
-            <a:avLst/>
-          </a:prstGeom>
-          <a:noFill/>
-        </p:spPr>
-        <p:txBody>
-          <a:bodyPr wrap="square" lIns="0" rIns="0" tIns="0" bIns="0">
-            <a:spAutoFit/>
-          </a:bodyPr>
-          <a:lstStyle/>
-          <a:p>
-            <a:pPr algn="l">
-              <a:spcAft>
-                <a:spcPts val="100"/>
-              </a:spcAft>
-            </a:pPr>
-            <a:r>
-              <a:rPr sz="1250" b="0">
-                <a:solidFill>
-                  <a:srgbClr val="141414"/>
-                </a:solidFill>
-                <a:latin typeface="Arial"/>
-              </a:rPr>
-              <a:t>SMT / ICT</a:t>
-            </a:r>
-          </a:p>
-          <a:p>
-            <a:pPr algn="l">
-              <a:spcAft>
-                <a:spcPts val="100"/>
-              </a:spcAft>
-            </a:pPr>
-            <a:r>
-              <a:rPr sz="850" b="0">
-                <a:solidFill>
-                  <a:srgbClr val="6B6B6B"/>
-                </a:solidFill>
-                <a:latin typeface="Arial"/>
-              </a:rPr>
-              <a:t>HPB &amp; VBB &amp; PV1 &amp; PDB</a:t>
-            </a:r>
-          </a:p>
-        </p:txBody>
-      </p:sp>
-      <p:sp>
-        <p:nvSpPr>
-          <p:cNvPr id="18" name="Rounded Rectangle 17"/>
-          <p:cNvSpPr/>
-          <p:nvPr/>
-        </p:nvSpPr>
-        <p:spPr>
-          <a:xfrm>
-            <a:off x="2377440" y="4005072"/>
-            <a:ext cx="1298448" cy="640080"/>
-          </a:xfrm>
-          <a:prstGeom prst="roundRect">
-            <a:avLst/>
-          </a:prstGeom>
-          <a:solidFill>
-            <a:srgbClr val="E6D0DE"/>
-          </a:solidFill>
-          <a:ln w="12700">
-            <a:solidFill>
-              <a:srgbClr val="C29FB8"/>
-            </a:solidFill>
-          </a:ln>
-          <a:effectLst/>
-        </p:spPr>
-        <p:style>
-          <a:lnRef idx="1">
-            <a:schemeClr val="accent1"/>
-          </a:lnRef>
-          <a:fillRef idx="3">
-            <a:schemeClr val="accent1"/>
-          </a:fillRef>
-          <a:effectRef idx="2">
-            <a:schemeClr val="accent1"/>
-          </a:effectRef>
-          <a:fontRef idx="minor">
-            <a:schemeClr val="lt1"/>
-          </a:fontRef>
-        </p:style>
-        <p:txBody>
-          <a:bodyPr rtlCol="0" anchor="ctr"/>
-          <a:lstStyle/>
-          <a:p>
-            <a:pPr algn="ctr"/>
-          </a:p>
-        </p:txBody>
-      </p:sp>
-      <p:sp>
-        <p:nvSpPr>
-          <p:cNvPr id="19" name="TextBox 18"/>
-          <p:cNvSpPr txBox="1"/>
-          <p:nvPr/>
-        </p:nvSpPr>
-        <p:spPr>
-          <a:xfrm>
-            <a:off x="2459736" y="4069080"/>
-            <a:ext cx="1133856" cy="530352"/>
-          </a:xfrm>
-          <a:prstGeom prst="rect">
-            <a:avLst/>
-          </a:prstGeom>
-          <a:noFill/>
-        </p:spPr>
-        <p:txBody>
-          <a:bodyPr wrap="square" lIns="0" rIns="0" tIns="0" bIns="0">
-            <a:spAutoFit/>
-          </a:bodyPr>
-          <a:lstStyle/>
-          <a:p>
-            <a:pPr algn="l">
-              <a:spcAft>
-                <a:spcPts val="100"/>
-              </a:spcAft>
-            </a:pPr>
-            <a:r>
-              <a:rPr sz="1250" b="0">
-                <a:solidFill>
-                  <a:srgbClr val="141414"/>
-                </a:solidFill>
-                <a:latin typeface="Arial"/>
-              </a:rPr>
-              <a:t>Flash / BFT</a:t>
-            </a:r>
-          </a:p>
-          <a:p>
-            <a:pPr algn="l">
-              <a:spcAft>
-                <a:spcPts val="100"/>
-              </a:spcAft>
-            </a:pPr>
-            <a:r>
-              <a:rPr sz="850" b="0">
-                <a:solidFill>
-                  <a:srgbClr val="6B6B6B"/>
-                </a:solidFill>
-                <a:latin typeface="Arial"/>
-              </a:rPr>
-              <a:t>VBB — not in the yield view</a:t>
-            </a:r>
-          </a:p>
-        </p:txBody>
-      </p:sp>
-      <p:sp>
-        <p:nvSpPr>
-          <p:cNvPr id="20" name="Rounded Rectangle 19"/>
-          <p:cNvSpPr/>
-          <p:nvPr/>
-        </p:nvSpPr>
-        <p:spPr>
-          <a:xfrm>
-            <a:off x="3840480" y="1481328"/>
-            <a:ext cx="1298448" cy="640080"/>
-          </a:xfrm>
-          <a:prstGeom prst="roundRect">
-            <a:avLst/>
-          </a:prstGeom>
-          <a:solidFill>
-            <a:srgbClr val="D5E8D4"/>
-          </a:solidFill>
-          <a:ln w="12700">
-            <a:solidFill>
-              <a:srgbClr val="82B366"/>
-            </a:solidFill>
-          </a:ln>
-          <a:effectLst/>
-        </p:spPr>
-        <p:style>
-          <a:lnRef idx="1">
-            <a:schemeClr val="accent1"/>
-          </a:lnRef>
-          <a:fillRef idx="3">
-            <a:schemeClr val="accent1"/>
-          </a:fillRef>
-          <a:effectRef idx="2">
-            <a:schemeClr val="accent1"/>
-          </a:effectRef>
-          <a:fontRef idx="minor">
-            <a:schemeClr val="lt1"/>
-          </a:fontRef>
-        </p:style>
-        <p:txBody>
-          <a:bodyPr rtlCol="0" anchor="ctr"/>
-          <a:lstStyle/>
-          <a:p>
-            <a:pPr algn="ctr"/>
-          </a:p>
-        </p:txBody>
-      </p:sp>
-      <p:sp>
-        <p:nvSpPr>
-          <p:cNvPr id="21" name="TextBox 20"/>
-          <p:cNvSpPr txBox="1"/>
-          <p:nvPr/>
-        </p:nvSpPr>
-        <p:spPr>
-          <a:xfrm>
-            <a:off x="3922776" y="1545336"/>
-            <a:ext cx="1133856" cy="530352"/>
-          </a:xfrm>
-          <a:prstGeom prst="rect">
-            <a:avLst/>
-          </a:prstGeom>
-          <a:noFill/>
-        </p:spPr>
-        <p:txBody>
-          <a:bodyPr wrap="square" lIns="0" rIns="0" tIns="0" bIns="0">
-            <a:spAutoFit/>
-          </a:bodyPr>
-          <a:lstStyle/>
-          <a:p>
-            <a:pPr algn="l">
-              <a:spcAft>
-                <a:spcPts val="100"/>
-              </a:spcAft>
-            </a:pPr>
-            <a:r>
-              <a:rPr sz="1250" b="1">
-                <a:solidFill>
-                  <a:srgbClr val="141414"/>
-                </a:solidFill>
-                <a:latin typeface="Arial"/>
-              </a:rPr>
-              <a:t>HTT</a:t>
-            </a:r>
-          </a:p>
-          <a:p>
-            <a:pPr algn="l">
-              <a:spcAft>
-                <a:spcPts val="100"/>
-              </a:spcAft>
-            </a:pPr>
-            <a:r>
-              <a:rPr sz="1600" b="1">
-                <a:solidFill>
-                  <a:srgbClr val="B3281E"/>
-                </a:solidFill>
-                <a:latin typeface="Arial"/>
-              </a:rPr>
-              <a:t>54.3%</a:t>
-            </a:r>
-            <a:r>
-              <a:rPr sz="900" b="0">
-                <a:solidFill>
-                  <a:srgbClr val="6B6B6B"/>
-                </a:solidFill>
-                <a:latin typeface="Arial"/>
-              </a:rPr>
-              <a:t>  170u</a:t>
-            </a:r>
-          </a:p>
-        </p:txBody>
-      </p:sp>
-      <p:sp>
-        <p:nvSpPr>
-          <p:cNvPr id="22" name="Rounded Rectangle 21"/>
-          <p:cNvSpPr/>
-          <p:nvPr/>
-        </p:nvSpPr>
-        <p:spPr>
-          <a:xfrm>
-            <a:off x="3840480" y="2322576"/>
-            <a:ext cx="1298448" cy="640080"/>
-          </a:xfrm>
-          <a:prstGeom prst="roundRect">
-            <a:avLst/>
-          </a:prstGeom>
-          <a:solidFill>
-            <a:srgbClr val="D5E8D4"/>
-          </a:solidFill>
-          <a:ln w="12700">
-            <a:solidFill>
-              <a:srgbClr val="82B366"/>
-            </a:solidFill>
-          </a:ln>
-          <a:effectLst/>
-        </p:spPr>
-        <p:style>
-          <a:lnRef idx="1">
-            <a:schemeClr val="accent1"/>
-          </a:lnRef>
-          <a:fillRef idx="3">
-            <a:schemeClr val="accent1"/>
-          </a:fillRef>
-          <a:effectRef idx="2">
-            <a:schemeClr val="accent1"/>
-          </a:effectRef>
-          <a:fontRef idx="minor">
-            <a:schemeClr val="lt1"/>
-          </a:fontRef>
-        </p:style>
-        <p:txBody>
-          <a:bodyPr rtlCol="0" anchor="ctr"/>
-          <a:lstStyle/>
-          <a:p>
-            <a:pPr algn="ctr"/>
-          </a:p>
-        </p:txBody>
-      </p:sp>
-      <p:sp>
-        <p:nvSpPr>
-          <p:cNvPr id="23" name="TextBox 22"/>
-          <p:cNvSpPr txBox="1"/>
-          <p:nvPr/>
-        </p:nvSpPr>
-        <p:spPr>
-          <a:xfrm>
-            <a:off x="3922776" y="2386584"/>
-            <a:ext cx="1133856" cy="530352"/>
-          </a:xfrm>
-          <a:prstGeom prst="rect">
-            <a:avLst/>
-          </a:prstGeom>
-          <a:noFill/>
-        </p:spPr>
-        <p:txBody>
-          <a:bodyPr wrap="square" lIns="0" rIns="0" tIns="0" bIns="0">
-            <a:spAutoFit/>
-          </a:bodyPr>
-          <a:lstStyle/>
-          <a:p>
-            <a:pPr algn="l">
-              <a:spcAft>
-                <a:spcPts val="100"/>
-              </a:spcAft>
-            </a:pPr>
-            <a:r>
-              <a:rPr sz="1250" b="1">
-                <a:solidFill>
-                  <a:srgbClr val="141414"/>
-                </a:solidFill>
-                <a:latin typeface="Arial"/>
-              </a:rPr>
-              <a:t>MLT</a:t>
-            </a:r>
-          </a:p>
-          <a:p>
-            <a:pPr algn="l">
-              <a:spcAft>
-                <a:spcPts val="100"/>
-              </a:spcAft>
-            </a:pPr>
-            <a:r>
-              <a:rPr sz="1600" b="1">
-                <a:solidFill>
-                  <a:srgbClr val="B56B00"/>
-                </a:solidFill>
-                <a:latin typeface="Arial"/>
-              </a:rPr>
-              <a:t>65.5%</a:t>
-            </a:r>
-            <a:r>
-              <a:rPr sz="900" b="0">
-                <a:solidFill>
-                  <a:srgbClr val="6B6B6B"/>
-                </a:solidFill>
-                <a:latin typeface="Arial"/>
-              </a:rPr>
-              <a:t>  228u</a:t>
-            </a:r>
-          </a:p>
-        </p:txBody>
-      </p:sp>
-      <p:sp>
-        <p:nvSpPr>
-          <p:cNvPr id="24" name="Rounded Rectangle 23"/>
-          <p:cNvSpPr/>
-          <p:nvPr/>
-        </p:nvSpPr>
-        <p:spPr>
-          <a:xfrm>
-            <a:off x="3840480" y="3163824"/>
-            <a:ext cx="1298448" cy="640080"/>
-          </a:xfrm>
-          <a:prstGeom prst="roundRect">
-            <a:avLst/>
-          </a:prstGeom>
-          <a:solidFill>
-            <a:srgbClr val="D9D9D9"/>
-          </a:solidFill>
-          <a:ln w="12700">
-            <a:solidFill>
-              <a:srgbClr val="A5A5A5"/>
-            </a:solidFill>
-          </a:ln>
-          <a:effectLst/>
-        </p:spPr>
-        <p:style>
-          <a:lnRef idx="1">
-            <a:schemeClr val="accent1"/>
-          </a:lnRef>
-          <a:fillRef idx="3">
-            <a:schemeClr val="accent1"/>
-          </a:fillRef>
-          <a:effectRef idx="2">
-            <a:schemeClr val="accent1"/>
-          </a:effectRef>
-          <a:fontRef idx="minor">
-            <a:schemeClr val="lt1"/>
-          </a:fontRef>
-        </p:style>
-        <p:txBody>
-          <a:bodyPr rtlCol="0" anchor="ctr"/>
-          <a:lstStyle/>
-          <a:p>
-            <a:pPr algn="ctr"/>
-          </a:p>
-        </p:txBody>
-      </p:sp>
-      <p:sp>
-        <p:nvSpPr>
-          <p:cNvPr id="25" name="TextBox 24"/>
-          <p:cNvSpPr txBox="1"/>
-          <p:nvPr/>
-        </p:nvSpPr>
-        <p:spPr>
-          <a:xfrm>
-            <a:off x="3922776" y="3227832"/>
-            <a:ext cx="1133856" cy="530352"/>
-          </a:xfrm>
-          <a:prstGeom prst="rect">
-            <a:avLst/>
-          </a:prstGeom>
-          <a:noFill/>
-        </p:spPr>
-        <p:txBody>
-          <a:bodyPr wrap="square" lIns="0" rIns="0" tIns="0" bIns="0">
-            <a:spAutoFit/>
-          </a:bodyPr>
-          <a:lstStyle/>
-          <a:p>
-            <a:pPr algn="l">
-              <a:spcAft>
-                <a:spcPts val="100"/>
-              </a:spcAft>
-            </a:pPr>
-            <a:r>
-              <a:rPr sz="1250" b="0">
-                <a:solidFill>
-                  <a:srgbClr val="141414"/>
-                </a:solidFill>
-                <a:latin typeface="Arial"/>
-              </a:rPr>
-              <a:t>ASSY</a:t>
-            </a:r>
-          </a:p>
-        </p:txBody>
-      </p:sp>
-      <p:sp>
-        <p:nvSpPr>
-          <p:cNvPr id="26" name="TextBox 25"/>
-          <p:cNvSpPr txBox="1"/>
-          <p:nvPr/>
-        </p:nvSpPr>
-        <p:spPr>
-          <a:xfrm>
-            <a:off x="5358384" y="1188720"/>
-            <a:ext cx="2743200" cy="237744"/>
-          </a:xfrm>
-          <a:prstGeom prst="rect">
-            <a:avLst/>
-          </a:prstGeom>
-          <a:noFill/>
-        </p:spPr>
-        <p:txBody>
-          <a:bodyPr wrap="square" lIns="0" rIns="0" tIns="0" bIns="0">
-            <a:spAutoFit/>
-          </a:bodyPr>
-          <a:lstStyle/>
-          <a:p>
-            <a:pPr algn="l">
-              <a:spcAft>
-                <a:spcPts val="0"/>
-              </a:spcAft>
-            </a:pPr>
-            <a:r>
-              <a:rPr sz="1000" b="0">
-                <a:solidFill>
-                  <a:srgbClr val="6B6B6B"/>
-                </a:solidFill>
-                <a:latin typeface="Arial"/>
-              </a:rPr>
-              <a:t/>
-            </a:r>
-            <a:r>
-              <a:rPr sz="1250" b="1">
-                <a:solidFill>
-                  <a:srgbClr val="141414"/>
-                </a:solidFill>
-                <a:latin typeface="Arial"/>
-              </a:rPr>
-              <a:t>FATP L10 2U/4U</a:t>
-            </a:r>
-          </a:p>
-        </p:txBody>
-      </p:sp>
-      <p:cxnSp>
-        <p:nvCxnSpPr>
-          <p:cNvPr id="27" name="Connector 26"/>
-          <p:cNvCxnSpPr/>
-          <p:nvPr/>
-        </p:nvCxnSpPr>
-        <p:spPr>
-          <a:xfrm>
-            <a:off x="7059168" y="1133856"/>
-            <a:ext cx="0" cy="4672584"/>
-          </a:xfrm>
-          <a:prstGeom prst="line">
-            <a:avLst/>
-          </a:prstGeom>
-          <a:ln w="11430">
-            <a:solidFill>
-              <a:srgbClr val="B5B3AC"/>
-            </a:solidFill>
-            <a:prstDash val="dash"/>
-          </a:ln>
-        </p:spPr>
-        <p:style>
-          <a:lnRef idx="2">
-            <a:schemeClr val="accent1"/>
-          </a:lnRef>
-          <a:fillRef idx="0">
-            <a:schemeClr val="accent1"/>
-          </a:fillRef>
-          <a:effectRef idx="1">
-            <a:schemeClr val="accent1"/>
-          </a:effectRef>
-          <a:fontRef idx="minor">
-            <a:schemeClr val="tx1"/>
-          </a:fontRef>
-        </p:style>
-      </p:cxnSp>
-      <p:sp>
-        <p:nvSpPr>
-          <p:cNvPr id="28" name="Rounded Rectangle 27"/>
-          <p:cNvSpPr/>
-          <p:nvPr/>
-        </p:nvSpPr>
-        <p:spPr>
-          <a:xfrm>
-            <a:off x="5358384" y="1481328"/>
-            <a:ext cx="1078992" cy="640080"/>
-          </a:xfrm>
-          <a:prstGeom prst="roundRect">
-            <a:avLst/>
-          </a:prstGeom>
-          <a:solidFill>
-            <a:srgbClr val="D9D9D9"/>
-          </a:solidFill>
-          <a:ln w="12700">
-            <a:solidFill>
-              <a:srgbClr val="A5A5A5"/>
-            </a:solidFill>
-          </a:ln>
-          <a:effectLst/>
-        </p:spPr>
-        <p:style>
-          <a:lnRef idx="1">
-            <a:schemeClr val="accent1"/>
-          </a:lnRef>
-          <a:fillRef idx="3">
-            <a:schemeClr val="accent1"/>
-          </a:fillRef>
-          <a:effectRef idx="2">
-            <a:schemeClr val="accent1"/>
-          </a:effectRef>
-          <a:fontRef idx="minor">
-            <a:schemeClr val="lt1"/>
-          </a:fontRef>
-        </p:style>
-        <p:txBody>
-          <a:bodyPr rtlCol="0" anchor="ctr"/>
-          <a:lstStyle/>
-          <a:p>
-            <a:pPr algn="ctr"/>
-          </a:p>
-        </p:txBody>
-      </p:sp>
-      <p:sp>
-        <p:nvSpPr>
-          <p:cNvPr id="29" name="TextBox 28"/>
-          <p:cNvSpPr txBox="1"/>
-          <p:nvPr/>
-        </p:nvSpPr>
-        <p:spPr>
-          <a:xfrm>
-            <a:off x="5440680" y="1545336"/>
-            <a:ext cx="914400" cy="530352"/>
-          </a:xfrm>
-          <a:prstGeom prst="rect">
-            <a:avLst/>
-          </a:prstGeom>
-          <a:noFill/>
-        </p:spPr>
-        <p:txBody>
-          <a:bodyPr wrap="square" lIns="0" rIns="0" tIns="0" bIns="0">
-            <a:spAutoFit/>
-          </a:bodyPr>
-          <a:lstStyle/>
-          <a:p>
-            <a:pPr algn="l">
-              <a:spcAft>
-                <a:spcPts val="100"/>
-              </a:spcAft>
-            </a:pPr>
-            <a:r>
-              <a:rPr sz="1250" b="0">
-                <a:solidFill>
-                  <a:srgbClr val="141414"/>
-                </a:solidFill>
-                <a:latin typeface="Arial"/>
-              </a:rPr>
-              <a:t>ASSY</a:t>
-            </a:r>
-          </a:p>
-        </p:txBody>
-      </p:sp>
-      <p:sp>
-        <p:nvSpPr>
-          <p:cNvPr id="30" name="Rectangle 29"/>
-          <p:cNvSpPr/>
-          <p:nvPr/>
-        </p:nvSpPr>
-        <p:spPr>
-          <a:xfrm>
-            <a:off x="6492240" y="1517904"/>
-            <a:ext cx="384048" cy="228600"/>
-          </a:xfrm>
-          <a:prstGeom prst="rect">
-            <a:avLst/>
-          </a:prstGeom>
-          <a:solidFill>
-            <a:srgbClr val="CFE2F3"/>
-          </a:solidFill>
-          <a:ln w="7620">
-            <a:solidFill>
-              <a:srgbClr val="8A8882"/>
-            </a:solidFill>
-          </a:ln>
-          <a:effectLst/>
-        </p:spPr>
-        <p:style>
-          <a:lnRef idx="1">
-            <a:schemeClr val="accent1"/>
-          </a:lnRef>
-          <a:fillRef idx="3">
-            <a:schemeClr val="accent1"/>
-          </a:fillRef>
-          <a:effectRef idx="2">
-            <a:schemeClr val="accent1"/>
-          </a:effectRef>
-          <a:fontRef idx="minor">
-            <a:schemeClr val="lt1"/>
-          </a:fontRef>
-        </p:style>
-        <p:txBody>
-          <a:bodyPr rtlCol="0" anchor="ctr"/>
-          <a:lstStyle/>
-          <a:p>
-            <a:pPr algn="ctr"/>
-          </a:p>
-        </p:txBody>
-      </p:sp>
-      <p:sp>
-        <p:nvSpPr>
-          <p:cNvPr id="31" name="TextBox 30"/>
-          <p:cNvSpPr txBox="1"/>
-          <p:nvPr/>
-        </p:nvSpPr>
-        <p:spPr>
-          <a:xfrm>
-            <a:off x="6492240" y="1545336"/>
-            <a:ext cx="384048" cy="182880"/>
-          </a:xfrm>
-          <a:prstGeom prst="rect">
-            <a:avLst/>
-          </a:prstGeom>
-          <a:noFill/>
-        </p:spPr>
-        <p:txBody>
-          <a:bodyPr wrap="square" lIns="0" rIns="0" tIns="0" bIns="0">
-            <a:spAutoFit/>
-          </a:bodyPr>
-          <a:lstStyle/>
-          <a:p>
-            <a:pPr algn="ctr">
-              <a:spcAft>
-                <a:spcPts val="0"/>
-              </a:spcAft>
-            </a:pPr>
-            <a:r>
-              <a:rPr sz="900" b="1">
-                <a:solidFill>
-                  <a:srgbClr val="141414"/>
-                </a:solidFill>
-                <a:latin typeface="Arial"/>
-              </a:rPr>
-              <a:t>4U</a:t>
-            </a:r>
-          </a:p>
-        </p:txBody>
-      </p:sp>
-      <p:sp>
-        <p:nvSpPr>
-          <p:cNvPr id="32" name="Rectangle 31"/>
-          <p:cNvSpPr/>
-          <p:nvPr/>
-        </p:nvSpPr>
-        <p:spPr>
-          <a:xfrm>
-            <a:off x="6492240" y="1801368"/>
-            <a:ext cx="384048" cy="228600"/>
-          </a:xfrm>
-          <a:prstGeom prst="rect">
-            <a:avLst/>
-          </a:prstGeom>
-          <a:solidFill>
-            <a:srgbClr val="FFF2CC"/>
-          </a:solidFill>
-          <a:ln w="7620">
-            <a:solidFill>
-              <a:srgbClr val="8A8882"/>
-            </a:solidFill>
-          </a:ln>
-          <a:effectLst/>
-        </p:spPr>
-        <p:style>
-          <a:lnRef idx="1">
-            <a:schemeClr val="accent1"/>
-          </a:lnRef>
-          <a:fillRef idx="3">
-            <a:schemeClr val="accent1"/>
-          </a:fillRef>
-          <a:effectRef idx="2">
-            <a:schemeClr val="accent1"/>
-          </a:effectRef>
-          <a:fontRef idx="minor">
-            <a:schemeClr val="lt1"/>
-          </a:fontRef>
-        </p:style>
-        <p:txBody>
-          <a:bodyPr rtlCol="0" anchor="ctr"/>
-          <a:lstStyle/>
-          <a:p>
-            <a:pPr algn="ctr"/>
-          </a:p>
-        </p:txBody>
-      </p:sp>
-      <p:sp>
-        <p:nvSpPr>
-          <p:cNvPr id="33" name="TextBox 32"/>
-          <p:cNvSpPr txBox="1"/>
-          <p:nvPr/>
-        </p:nvSpPr>
-        <p:spPr>
-          <a:xfrm>
-            <a:off x="6492240" y="1828800"/>
-            <a:ext cx="384048" cy="182880"/>
-          </a:xfrm>
-          <a:prstGeom prst="rect">
-            <a:avLst/>
-          </a:prstGeom>
-          <a:noFill/>
-        </p:spPr>
-        <p:txBody>
-          <a:bodyPr wrap="square" lIns="0" rIns="0" tIns="0" bIns="0">
-            <a:spAutoFit/>
-          </a:bodyPr>
-          <a:lstStyle/>
-          <a:p>
-            <a:pPr algn="ctr">
-              <a:spcAft>
-                <a:spcPts val="0"/>
-              </a:spcAft>
-            </a:pPr>
-            <a:r>
-              <a:rPr sz="900" b="1">
-                <a:solidFill>
-                  <a:srgbClr val="141414"/>
-                </a:solidFill>
-                <a:latin typeface="Arial"/>
-              </a:rPr>
-              <a:t>2U</a:t>
-            </a:r>
-          </a:p>
-        </p:txBody>
-      </p:sp>
-      <p:sp>
-        <p:nvSpPr>
-          <p:cNvPr id="34" name="TextBox 33"/>
-          <p:cNvSpPr txBox="1"/>
-          <p:nvPr/>
-        </p:nvSpPr>
-        <p:spPr>
-          <a:xfrm>
-            <a:off x="7242048" y="1188720"/>
-            <a:ext cx="2743200" cy="237744"/>
-          </a:xfrm>
-          <a:prstGeom prst="rect">
-            <a:avLst/>
-          </a:prstGeom>
-          <a:noFill/>
-        </p:spPr>
-        <p:txBody>
-          <a:bodyPr wrap="square" lIns="0" rIns="0" tIns="0" bIns="0">
-            <a:spAutoFit/>
-          </a:bodyPr>
-          <a:lstStyle/>
-          <a:p>
-            <a:pPr algn="l">
-              <a:spcAft>
-                <a:spcPts val="0"/>
-              </a:spcAft>
-            </a:pPr>
-            <a:r>
-              <a:rPr sz="1000" b="0">
-                <a:solidFill>
-                  <a:srgbClr val="6B6B6B"/>
-                </a:solidFill>
-                <a:latin typeface="Arial"/>
-              </a:rPr>
-              <a:t/>
-            </a:r>
-            <a:r>
-              <a:rPr sz="1250" b="1">
-                <a:solidFill>
-                  <a:srgbClr val="141414"/>
-                </a:solidFill>
-                <a:latin typeface="Arial"/>
-              </a:rPr>
-              <a:t>FATP L10 6U</a:t>
-            </a:r>
-          </a:p>
-        </p:txBody>
-      </p:sp>
-      <p:cxnSp>
-        <p:nvCxnSpPr>
-          <p:cNvPr id="35" name="Connector 34"/>
-          <p:cNvCxnSpPr/>
-          <p:nvPr/>
-        </p:nvCxnSpPr>
-        <p:spPr>
-          <a:xfrm>
-            <a:off x="10204704" y="1133856"/>
-            <a:ext cx="0" cy="4672584"/>
-          </a:xfrm>
-          <a:prstGeom prst="line">
-            <a:avLst/>
-          </a:prstGeom>
-          <a:ln w="11430">
-            <a:solidFill>
-              <a:srgbClr val="B5B3AC"/>
-            </a:solidFill>
-            <a:prstDash val="dash"/>
-          </a:ln>
-        </p:spPr>
-        <p:style>
-          <a:lnRef idx="2">
-            <a:schemeClr val="accent1"/>
-          </a:lnRef>
-          <a:fillRef idx="0">
-            <a:schemeClr val="accent1"/>
-          </a:fillRef>
-          <a:effectRef idx="1">
-            <a:schemeClr val="accent1"/>
-          </a:effectRef>
-          <a:fontRef idx="minor">
-            <a:schemeClr val="tx1"/>
-          </a:fontRef>
-        </p:style>
-      </p:cxnSp>
-      <p:sp>
-        <p:nvSpPr>
-          <p:cNvPr id="36" name="Rounded Rectangle 35"/>
-          <p:cNvSpPr/>
-          <p:nvPr/>
-        </p:nvSpPr>
-        <p:spPr>
-          <a:xfrm>
-            <a:off x="7242048" y="2322576"/>
-            <a:ext cx="1389888" cy="640080"/>
-          </a:xfrm>
-          <a:prstGeom prst="roundRect">
-            <a:avLst/>
-          </a:prstGeom>
-          <a:solidFill>
-            <a:srgbClr val="F2ECD9"/>
-          </a:solidFill>
-          <a:ln w="12700">
-            <a:solidFill>
-              <a:srgbClr val="C9B46B"/>
-            </a:solidFill>
-          </a:ln>
-          <a:effectLst/>
-        </p:spPr>
-        <p:style>
-          <a:lnRef idx="1">
-            <a:schemeClr val="accent1"/>
-          </a:lnRef>
-          <a:fillRef idx="3">
-            <a:schemeClr val="accent1"/>
-          </a:fillRef>
-          <a:effectRef idx="2">
-            <a:schemeClr val="accent1"/>
-          </a:effectRef>
-          <a:fontRef idx="minor">
-            <a:schemeClr val="lt1"/>
-          </a:fontRef>
-        </p:style>
-        <p:txBody>
-          <a:bodyPr rtlCol="0" anchor="ctr"/>
-          <a:lstStyle/>
-          <a:p>
-            <a:pPr algn="ctr"/>
-          </a:p>
-        </p:txBody>
-      </p:sp>
-      <p:sp>
-        <p:nvSpPr>
-          <p:cNvPr id="37" name="TextBox 36"/>
-          <p:cNvSpPr txBox="1"/>
-          <p:nvPr/>
-        </p:nvSpPr>
-        <p:spPr>
-          <a:xfrm>
-            <a:off x="7324344" y="2386584"/>
-            <a:ext cx="1225296" cy="530352"/>
-          </a:xfrm>
-          <a:prstGeom prst="rect">
-            <a:avLst/>
-          </a:prstGeom>
-          <a:noFill/>
-        </p:spPr>
-        <p:txBody>
-          <a:bodyPr wrap="square" lIns="0" rIns="0" tIns="0" bIns="0">
-            <a:spAutoFit/>
-          </a:bodyPr>
-          <a:lstStyle/>
-          <a:p>
-            <a:pPr algn="l">
-              <a:spcAft>
-                <a:spcPts val="100"/>
-              </a:spcAft>
-            </a:pPr>
-            <a:r>
-              <a:rPr sz="1250" b="1">
-                <a:solidFill>
-                  <a:srgbClr val="141414"/>
-                </a:solidFill>
-                <a:latin typeface="Arial"/>
-              </a:rPr>
-              <a:t>FAT / SFT</a:t>
-            </a:r>
-          </a:p>
-          <a:p>
-            <a:pPr algn="l">
-              <a:spcAft>
-                <a:spcPts val="100"/>
-              </a:spcAft>
-            </a:pPr>
-            <a:r>
-              <a:rPr sz="1100" b="1">
-                <a:solidFill>
-                  <a:srgbClr val="141414"/>
-                </a:solidFill>
-                <a:latin typeface="Arial"/>
-              </a:rPr>
-              <a:t>FAT 2u · SFT 1u</a:t>
-            </a:r>
-          </a:p>
-          <a:p>
-            <a:pPr algn="l">
-              <a:spcAft>
-                <a:spcPts val="100"/>
-              </a:spcAft>
-            </a:pPr>
-            <a:r>
-              <a:rPr sz="800" b="0">
-                <a:solidFill>
-                  <a:srgbClr val="6B6B6B"/>
-                </a:solidFill>
-                <a:latin typeface="Arial"/>
-              </a:rPr>
-              <a:t>quantity only</a:t>
-            </a:r>
-          </a:p>
-        </p:txBody>
-      </p:sp>
-      <p:sp>
-        <p:nvSpPr>
-          <p:cNvPr id="38" name="Rounded Rectangle 37"/>
-          <p:cNvSpPr/>
-          <p:nvPr/>
-        </p:nvSpPr>
-        <p:spPr>
-          <a:xfrm>
-            <a:off x="7242048" y="3163824"/>
-            <a:ext cx="1389888" cy="640080"/>
-          </a:xfrm>
-          <a:prstGeom prst="roundRect">
-            <a:avLst/>
-          </a:prstGeom>
-          <a:solidFill>
-            <a:srgbClr val="F2ECD9"/>
-          </a:solidFill>
-          <a:ln w="12700">
-            <a:solidFill>
-              <a:srgbClr val="C9B46B"/>
-            </a:solidFill>
-          </a:ln>
-          <a:effectLst/>
-        </p:spPr>
-        <p:style>
-          <a:lnRef idx="1">
-            <a:schemeClr val="accent1"/>
-          </a:lnRef>
-          <a:fillRef idx="3">
-            <a:schemeClr val="accent1"/>
-          </a:fillRef>
-          <a:effectRef idx="2">
-            <a:schemeClr val="accent1"/>
-          </a:effectRef>
-          <a:fontRef idx="minor">
-            <a:schemeClr val="lt1"/>
-          </a:fontRef>
-        </p:style>
-        <p:txBody>
-          <a:bodyPr rtlCol="0" anchor="ctr"/>
-          <a:lstStyle/>
-          <a:p>
-            <a:pPr algn="ctr"/>
-          </a:p>
-        </p:txBody>
-      </p:sp>
-      <p:sp>
-        <p:nvSpPr>
-          <p:cNvPr id="39" name="TextBox 38"/>
-          <p:cNvSpPr txBox="1"/>
-          <p:nvPr/>
-        </p:nvSpPr>
-        <p:spPr>
-          <a:xfrm>
-            <a:off x="7324344" y="3227832"/>
-            <a:ext cx="1225296" cy="530352"/>
-          </a:xfrm>
-          <a:prstGeom prst="rect">
-            <a:avLst/>
-          </a:prstGeom>
-          <a:noFill/>
-        </p:spPr>
-        <p:txBody>
-          <a:bodyPr wrap="square" lIns="0" rIns="0" tIns="0" bIns="0">
-            <a:spAutoFit/>
-          </a:bodyPr>
-          <a:lstStyle/>
-          <a:p>
-            <a:pPr algn="l">
-              <a:spcAft>
-                <a:spcPts val="100"/>
-              </a:spcAft>
-            </a:pPr>
-            <a:r>
-              <a:rPr sz="1250" b="1">
-                <a:solidFill>
-                  <a:srgbClr val="141414"/>
-                </a:solidFill>
-                <a:latin typeface="Arial"/>
-              </a:rPr>
-              <a:t>2U</a:t>
-            </a:r>
-          </a:p>
-          <a:p>
-            <a:pPr algn="l">
-              <a:spcAft>
-                <a:spcPts val="100"/>
-              </a:spcAft>
-            </a:pPr>
-            <a:r>
-              <a:rPr sz="1300" b="1">
-                <a:solidFill>
-                  <a:srgbClr val="141414"/>
-                </a:solidFill>
-                <a:latin typeface="Arial"/>
-              </a:rPr>
-              <a:t>3 units</a:t>
-            </a:r>
-          </a:p>
-          <a:p>
-            <a:pPr algn="l">
-              <a:spcAft>
-                <a:spcPts val="100"/>
-              </a:spcAft>
-            </a:pPr>
-            <a:r>
-              <a:rPr sz="800" b="0">
-                <a:solidFill>
-                  <a:srgbClr val="6B6B6B"/>
-                </a:solidFill>
-                <a:latin typeface="Arial"/>
-              </a:rPr>
-              <a:t>quantity only</a:t>
-            </a:r>
-          </a:p>
-        </p:txBody>
-      </p:sp>
-      <p:sp>
-        <p:nvSpPr>
-          <p:cNvPr id="40" name="Rounded Rectangle 39"/>
-          <p:cNvSpPr/>
-          <p:nvPr/>
-        </p:nvSpPr>
-        <p:spPr>
-          <a:xfrm>
-            <a:off x="7242048" y="4005072"/>
-            <a:ext cx="1389888" cy="640080"/>
-          </a:xfrm>
-          <a:prstGeom prst="roundRect">
-            <a:avLst/>
-          </a:prstGeom>
-          <a:solidFill>
-            <a:srgbClr val="D9D9D9"/>
-          </a:solidFill>
-          <a:ln w="12700">
-            <a:solidFill>
-              <a:srgbClr val="A5A5A5"/>
-            </a:solidFill>
-          </a:ln>
-          <a:effectLst/>
-        </p:spPr>
-        <p:style>
-          <a:lnRef idx="1">
-            <a:schemeClr val="accent1"/>
-          </a:lnRef>
-          <a:fillRef idx="3">
-            <a:schemeClr val="accent1"/>
-          </a:fillRef>
-          <a:effectRef idx="2">
-            <a:schemeClr val="accent1"/>
-          </a:effectRef>
-          <a:fontRef idx="minor">
-            <a:schemeClr val="lt1"/>
-          </a:fontRef>
-        </p:style>
-        <p:txBody>
-          <a:bodyPr rtlCol="0" anchor="ctr"/>
-          <a:lstStyle/>
-          <a:p>
-            <a:pPr algn="ctr"/>
-          </a:p>
-        </p:txBody>
-      </p:sp>
-      <p:sp>
-        <p:nvSpPr>
-          <p:cNvPr id="41" name="TextBox 40"/>
-          <p:cNvSpPr txBox="1"/>
-          <p:nvPr/>
-        </p:nvSpPr>
-        <p:spPr>
-          <a:xfrm>
-            <a:off x="7324344" y="4069080"/>
-            <a:ext cx="1225296" cy="530352"/>
-          </a:xfrm>
-          <a:prstGeom prst="rect">
-            <a:avLst/>
-          </a:prstGeom>
-          <a:noFill/>
-        </p:spPr>
-        <p:txBody>
-          <a:bodyPr wrap="square" lIns="0" rIns="0" tIns="0" bIns="0">
-            <a:spAutoFit/>
-          </a:bodyPr>
-          <a:lstStyle/>
-          <a:p>
-            <a:pPr algn="l">
-              <a:spcAft>
-                <a:spcPts val="100"/>
-              </a:spcAft>
-            </a:pPr>
-            <a:r>
-              <a:rPr sz="1250" b="0">
-                <a:solidFill>
-                  <a:srgbClr val="141414"/>
-                </a:solidFill>
-                <a:latin typeface="Arial"/>
-              </a:rPr>
-              <a:t>ASSY</a:t>
-            </a:r>
-          </a:p>
-        </p:txBody>
-      </p:sp>
-      <p:sp>
-        <p:nvSpPr>
-          <p:cNvPr id="42" name="Rounded Rectangle 41"/>
-          <p:cNvSpPr/>
-          <p:nvPr/>
-        </p:nvSpPr>
-        <p:spPr>
-          <a:xfrm>
-            <a:off x="8741664" y="2322576"/>
-            <a:ext cx="1298448" cy="640080"/>
-          </a:xfrm>
-          <a:prstGeom prst="roundRect">
-            <a:avLst/>
-          </a:prstGeom>
-          <a:solidFill>
-            <a:srgbClr val="F2ECD9"/>
-          </a:solidFill>
-          <a:ln w="12700">
-            <a:solidFill>
-              <a:srgbClr val="C9B46B"/>
-            </a:solidFill>
-          </a:ln>
-          <a:effectLst/>
-        </p:spPr>
-        <p:style>
-          <a:lnRef idx="1">
-            <a:schemeClr val="accent1"/>
-          </a:lnRef>
-          <a:fillRef idx="3">
-            <a:schemeClr val="accent1"/>
-          </a:fillRef>
-          <a:effectRef idx="2">
-            <a:schemeClr val="accent1"/>
-          </a:effectRef>
-          <a:fontRef idx="minor">
-            <a:schemeClr val="lt1"/>
-          </a:fontRef>
-        </p:style>
-        <p:txBody>
-          <a:bodyPr rtlCol="0" anchor="ctr"/>
-          <a:lstStyle/>
-          <a:p>
-            <a:pPr algn="ctr"/>
-          </a:p>
-        </p:txBody>
-      </p:sp>
-      <p:sp>
-        <p:nvSpPr>
-          <p:cNvPr id="43" name="TextBox 42"/>
-          <p:cNvSpPr txBox="1"/>
-          <p:nvPr/>
-        </p:nvSpPr>
-        <p:spPr>
-          <a:xfrm>
-            <a:off x="8823960" y="2386584"/>
-            <a:ext cx="1133856" cy="530352"/>
-          </a:xfrm>
-          <a:prstGeom prst="rect">
-            <a:avLst/>
-          </a:prstGeom>
-          <a:noFill/>
-        </p:spPr>
-        <p:txBody>
-          <a:bodyPr wrap="square" lIns="0" rIns="0" tIns="0" bIns="0">
-            <a:spAutoFit/>
-          </a:bodyPr>
-          <a:lstStyle/>
-          <a:p>
-            <a:pPr algn="l">
-              <a:spcAft>
-                <a:spcPts val="100"/>
-              </a:spcAft>
-            </a:pPr>
-            <a:r>
-              <a:rPr sz="1250" b="1">
-                <a:solidFill>
-                  <a:srgbClr val="141414"/>
-                </a:solidFill>
-                <a:latin typeface="Arial"/>
-              </a:rPr>
-              <a:t>Runin</a:t>
-            </a:r>
-          </a:p>
-          <a:p>
-            <a:pPr algn="l">
-              <a:spcAft>
-                <a:spcPts val="100"/>
-              </a:spcAft>
-            </a:pPr>
-            <a:r>
-              <a:rPr sz="1300" b="1">
-                <a:solidFill>
-                  <a:srgbClr val="141414"/>
-                </a:solidFill>
-                <a:latin typeface="Arial"/>
-              </a:rPr>
-              <a:t>1 unit</a:t>
-            </a:r>
-          </a:p>
-          <a:p>
-            <a:pPr algn="l">
-              <a:spcAft>
-                <a:spcPts val="100"/>
-              </a:spcAft>
-            </a:pPr>
-            <a:r>
-              <a:rPr sz="800" b="0">
-                <a:solidFill>
-                  <a:srgbClr val="6B6B6B"/>
-                </a:solidFill>
-                <a:latin typeface="Arial"/>
-              </a:rPr>
-              <a:t>quantity only</a:t>
-            </a:r>
-          </a:p>
-        </p:txBody>
-      </p:sp>
-      <p:sp>
-        <p:nvSpPr>
-          <p:cNvPr id="44" name="TextBox 43"/>
-          <p:cNvSpPr txBox="1"/>
-          <p:nvPr/>
-        </p:nvSpPr>
-        <p:spPr>
-          <a:xfrm>
-            <a:off x="10369296" y="1188720"/>
-            <a:ext cx="1655064" cy="237744"/>
-          </a:xfrm>
-          <a:prstGeom prst="rect">
-            <a:avLst/>
-          </a:prstGeom>
-          <a:noFill/>
-        </p:spPr>
-        <p:txBody>
-          <a:bodyPr wrap="square" lIns="0" rIns="0" tIns="0" bIns="0">
-            <a:spAutoFit/>
-          </a:bodyPr>
-          <a:lstStyle/>
-          <a:p>
-            <a:pPr algn="l">
-              <a:spcAft>
-                <a:spcPts val="0"/>
-              </a:spcAft>
-            </a:pPr>
-            <a:r>
-              <a:rPr sz="1000" b="0">
-                <a:solidFill>
-                  <a:srgbClr val="6B6B6B"/>
-                </a:solidFill>
-                <a:latin typeface="Arial"/>
-              </a:rPr>
-              <a:t/>
-            </a:r>
-            <a:r>
-              <a:rPr sz="1250" b="1">
-                <a:solidFill>
-                  <a:srgbClr val="141414"/>
-                </a:solidFill>
-                <a:latin typeface="Arial"/>
-              </a:rPr>
-              <a:t>Rack L11</a:t>
-            </a:r>
-          </a:p>
-        </p:txBody>
-      </p:sp>
-      <p:sp>
-        <p:nvSpPr>
-          <p:cNvPr id="45" name="Rounded Rectangle 44"/>
-          <p:cNvSpPr/>
-          <p:nvPr/>
-        </p:nvSpPr>
-        <p:spPr>
-          <a:xfrm>
-            <a:off x="10369296" y="2322576"/>
-            <a:ext cx="1389888" cy="640080"/>
-          </a:xfrm>
-          <a:prstGeom prst="roundRect">
-            <a:avLst/>
-          </a:prstGeom>
-          <a:solidFill>
-            <a:srgbClr val="D9D9D9"/>
-          </a:solidFill>
-          <a:ln w="12700">
-            <a:solidFill>
-              <a:srgbClr val="A5A5A5"/>
-            </a:solidFill>
-          </a:ln>
-          <a:effectLst/>
-        </p:spPr>
-        <p:style>
-          <a:lnRef idx="1">
-            <a:schemeClr val="accent1"/>
-          </a:lnRef>
-          <a:fillRef idx="3">
-            <a:schemeClr val="accent1"/>
-          </a:fillRef>
-          <a:effectRef idx="2">
-            <a:schemeClr val="accent1"/>
-          </a:effectRef>
-          <a:fontRef idx="minor">
-            <a:schemeClr val="lt1"/>
-          </a:fontRef>
-        </p:style>
-        <p:txBody>
-          <a:bodyPr rtlCol="0" anchor="ctr"/>
-          <a:lstStyle/>
-          <a:p>
-            <a:pPr algn="ctr"/>
-          </a:p>
-        </p:txBody>
-      </p:sp>
-      <p:sp>
-        <p:nvSpPr>
-          <p:cNvPr id="46" name="TextBox 45"/>
-          <p:cNvSpPr txBox="1"/>
-          <p:nvPr/>
-        </p:nvSpPr>
-        <p:spPr>
-          <a:xfrm>
-            <a:off x="10451592" y="2386584"/>
-            <a:ext cx="1225296" cy="530352"/>
-          </a:xfrm>
-          <a:prstGeom prst="rect">
-            <a:avLst/>
-          </a:prstGeom>
-          <a:noFill/>
-        </p:spPr>
-        <p:txBody>
-          <a:bodyPr wrap="square" lIns="0" rIns="0" tIns="0" bIns="0">
-            <a:spAutoFit/>
-          </a:bodyPr>
-          <a:lstStyle/>
-          <a:p>
-            <a:pPr algn="l">
-              <a:spcAft>
-                <a:spcPts val="100"/>
-              </a:spcAft>
-            </a:pPr>
-            <a:r>
-              <a:rPr sz="1250" b="0">
-                <a:solidFill>
-                  <a:srgbClr val="141414"/>
-                </a:solidFill>
-                <a:latin typeface="Arial"/>
-              </a:rPr>
-              <a:t>ASSY</a:t>
-            </a:r>
-          </a:p>
-        </p:txBody>
-      </p:sp>
-      <p:sp>
-        <p:nvSpPr>
-          <p:cNvPr id="47" name="Rounded Rectangle 46"/>
-          <p:cNvSpPr/>
-          <p:nvPr/>
-        </p:nvSpPr>
-        <p:spPr>
-          <a:xfrm>
-            <a:off x="10369296" y="3163824"/>
-            <a:ext cx="1389888" cy="640080"/>
-          </a:xfrm>
-          <a:prstGeom prst="roundRect">
-            <a:avLst/>
-          </a:prstGeom>
-          <a:solidFill>
-            <a:srgbClr val="F2ECD9"/>
-          </a:solidFill>
-          <a:ln w="12700">
-            <a:solidFill>
-              <a:srgbClr val="C9B46B"/>
-            </a:solidFill>
-          </a:ln>
-          <a:effectLst/>
-        </p:spPr>
-        <p:style>
-          <a:lnRef idx="1">
-            <a:schemeClr val="accent1"/>
-          </a:lnRef>
-          <a:fillRef idx="3">
-            <a:schemeClr val="accent1"/>
-          </a:fillRef>
-          <a:effectRef idx="2">
-            <a:schemeClr val="accent1"/>
-          </a:effectRef>
-          <a:fontRef idx="minor">
-            <a:schemeClr val="lt1"/>
-          </a:fontRef>
-        </p:style>
-        <p:txBody>
-          <a:bodyPr rtlCol="0" anchor="ctr"/>
-          <a:lstStyle/>
-          <a:p>
-            <a:pPr algn="ctr"/>
-          </a:p>
-        </p:txBody>
-      </p:sp>
-      <p:sp>
-        <p:nvSpPr>
-          <p:cNvPr id="48" name="TextBox 47"/>
-          <p:cNvSpPr txBox="1"/>
-          <p:nvPr/>
-        </p:nvSpPr>
-        <p:spPr>
-          <a:xfrm>
-            <a:off x="10451592" y="3227832"/>
-            <a:ext cx="1225296" cy="530352"/>
-          </a:xfrm>
-          <a:prstGeom prst="rect">
-            <a:avLst/>
-          </a:prstGeom>
-          <a:noFill/>
-        </p:spPr>
-        <p:txBody>
-          <a:bodyPr wrap="square" lIns="0" rIns="0" tIns="0" bIns="0">
-            <a:spAutoFit/>
-          </a:bodyPr>
-          <a:lstStyle/>
-          <a:p>
-            <a:pPr algn="l">
-              <a:spcAft>
-                <a:spcPts val="100"/>
-              </a:spcAft>
-            </a:pPr>
-            <a:r>
-              <a:rPr sz="1250" b="1">
-                <a:solidFill>
-                  <a:srgbClr val="141414"/>
-                </a:solidFill>
-                <a:latin typeface="Arial"/>
-              </a:rPr>
-              <a:t>FAT / SFT</a:t>
-            </a:r>
-          </a:p>
-          <a:p>
-            <a:pPr algn="l">
-              <a:spcAft>
-                <a:spcPts val="100"/>
-              </a:spcAft>
-            </a:pPr>
-            <a:r>
-              <a:rPr sz="1300" b="1">
-                <a:solidFill>
-                  <a:srgbClr val="141414"/>
-                </a:solidFill>
-                <a:latin typeface="Arial"/>
-              </a:rPr>
-              <a:t>2 units</a:t>
-            </a:r>
-          </a:p>
-          <a:p>
-            <a:pPr algn="l">
-              <a:spcAft>
-                <a:spcPts val="100"/>
-              </a:spcAft>
-            </a:pPr>
-            <a:r>
-              <a:rPr sz="800" b="0">
-                <a:solidFill>
-                  <a:srgbClr val="6B6B6B"/>
-                </a:solidFill>
-                <a:latin typeface="Arial"/>
-              </a:rPr>
-              <a:t>quantity only</a:t>
-            </a:r>
-          </a:p>
-        </p:txBody>
-      </p:sp>
-      <p:sp>
-        <p:nvSpPr>
-          <p:cNvPr id="49" name="Rounded Rectangle 48"/>
-          <p:cNvSpPr/>
-          <p:nvPr/>
-        </p:nvSpPr>
-        <p:spPr>
-          <a:xfrm>
-            <a:off x="10369296" y="4005072"/>
-            <a:ext cx="1389888" cy="640080"/>
-          </a:xfrm>
-          <a:prstGeom prst="roundRect">
-            <a:avLst/>
-          </a:prstGeom>
-          <a:solidFill>
-            <a:srgbClr val="D9D9D9"/>
-          </a:solidFill>
-          <a:ln w="12700">
-            <a:solidFill>
-              <a:srgbClr val="A5A5A5"/>
-            </a:solidFill>
-          </a:ln>
-          <a:effectLst/>
-        </p:spPr>
-        <p:style>
-          <a:lnRef idx="1">
-            <a:schemeClr val="accent1"/>
-          </a:lnRef>
-          <a:fillRef idx="3">
-            <a:schemeClr val="accent1"/>
-          </a:fillRef>
-          <a:effectRef idx="2">
-            <a:schemeClr val="accent1"/>
-          </a:effectRef>
-          <a:fontRef idx="minor">
-            <a:schemeClr val="lt1"/>
-          </a:fontRef>
-        </p:style>
-        <p:txBody>
-          <a:bodyPr rtlCol="0" anchor="ctr"/>
-          <a:lstStyle/>
-          <a:p>
-            <a:pPr algn="ctr"/>
-          </a:p>
-        </p:txBody>
-      </p:sp>
-      <p:sp>
-        <p:nvSpPr>
-          <p:cNvPr id="50" name="TextBox 49"/>
-          <p:cNvSpPr txBox="1"/>
-          <p:nvPr/>
-        </p:nvSpPr>
-        <p:spPr>
-          <a:xfrm>
-            <a:off x="10451592" y="4069080"/>
-            <a:ext cx="1225296" cy="530352"/>
-          </a:xfrm>
-          <a:prstGeom prst="rect">
-            <a:avLst/>
-          </a:prstGeom>
-          <a:noFill/>
-        </p:spPr>
-        <p:txBody>
-          <a:bodyPr wrap="square" lIns="0" rIns="0" tIns="0" bIns="0">
-            <a:spAutoFit/>
-          </a:bodyPr>
-          <a:lstStyle/>
-          <a:p>
-            <a:pPr algn="l">
-              <a:spcAft>
-                <a:spcPts val="100"/>
-              </a:spcAft>
-            </a:pPr>
-            <a:r>
-              <a:rPr sz="1250" b="1">
-                <a:solidFill>
-                  <a:srgbClr val="141414"/>
-                </a:solidFill>
-                <a:latin typeface="Arial"/>
-              </a:rPr>
-              <a:t>Runin</a:t>
-            </a:r>
-          </a:p>
-          <a:p>
-            <a:pPr algn="l">
-              <a:spcAft>
-                <a:spcPts val="100"/>
-              </a:spcAft>
-            </a:pPr>
-            <a:r>
-              <a:rPr sz="850" b="0">
-                <a:solidFill>
-                  <a:srgbClr val="6B6B6B"/>
-                </a:solidFill>
-                <a:latin typeface="Arial"/>
-              </a:rPr>
-              <a:t>counted with FAT / SFT</a:t>
-            </a:r>
-          </a:p>
-        </p:txBody>
-      </p:sp>
-      <p:sp>
-        <p:nvSpPr>
-          <p:cNvPr id="51" name="Rounded Rectangle 50"/>
-          <p:cNvSpPr/>
-          <p:nvPr/>
-        </p:nvSpPr>
-        <p:spPr>
-          <a:xfrm>
-            <a:off x="10369296" y="4846320"/>
-            <a:ext cx="1389888" cy="640080"/>
-          </a:xfrm>
-          <a:prstGeom prst="roundRect">
-            <a:avLst/>
-          </a:prstGeom>
-          <a:solidFill>
-            <a:srgbClr val="DAE8FC"/>
-          </a:solidFill>
-          <a:ln w="12700">
-            <a:solidFill>
-              <a:srgbClr val="7EA6D9"/>
-            </a:solidFill>
-          </a:ln>
-          <a:effectLst/>
-        </p:spPr>
-        <p:style>
-          <a:lnRef idx="1">
-            <a:schemeClr val="accent1"/>
-          </a:lnRef>
-          <a:fillRef idx="3">
-            <a:schemeClr val="accent1"/>
-          </a:fillRef>
-          <a:effectRef idx="2">
-            <a:schemeClr val="accent1"/>
-          </a:effectRef>
-          <a:fontRef idx="minor">
-            <a:schemeClr val="lt1"/>
-          </a:fontRef>
-        </p:style>
-        <p:txBody>
-          <a:bodyPr rtlCol="0" anchor="ctr"/>
-          <a:lstStyle/>
-          <a:p>
-            <a:pPr algn="ctr"/>
-          </a:p>
-        </p:txBody>
-      </p:sp>
-      <p:sp>
-        <p:nvSpPr>
-          <p:cNvPr id="52" name="TextBox 51"/>
-          <p:cNvSpPr txBox="1"/>
-          <p:nvPr/>
-        </p:nvSpPr>
-        <p:spPr>
-          <a:xfrm>
-            <a:off x="10451592" y="4910328"/>
-            <a:ext cx="1225296" cy="530352"/>
-          </a:xfrm>
-          <a:prstGeom prst="rect">
-            <a:avLst/>
-          </a:prstGeom>
-          <a:noFill/>
-        </p:spPr>
-        <p:txBody>
-          <a:bodyPr wrap="square" lIns="0" rIns="0" tIns="0" bIns="0">
-            <a:spAutoFit/>
-          </a:bodyPr>
-          <a:lstStyle/>
-          <a:p>
-            <a:pPr algn="l">
-              <a:spcAft>
-                <a:spcPts val="100"/>
-              </a:spcAft>
-            </a:pPr>
-            <a:r>
-              <a:rPr sz="1250" b="0">
-                <a:solidFill>
-                  <a:srgbClr val="141414"/>
-                </a:solidFill>
-                <a:latin typeface="Arial"/>
-              </a:rPr>
-              <a:t>Pack</a:t>
-            </a:r>
-          </a:p>
-        </p:txBody>
-      </p:sp>
-      <p:cxnSp>
-        <p:nvCxnSpPr>
-          <p:cNvPr id="53" name="Connector 52"/>
-          <p:cNvCxnSpPr/>
-          <p:nvPr/>
-        </p:nvCxnSpPr>
-        <p:spPr>
-          <a:xfrm>
-            <a:off x="1307592" y="2121408"/>
-            <a:ext cx="0" cy="201168"/>
-          </a:xfrm>
-          <a:prstGeom prst="line">
-            <a:avLst/>
-          </a:prstGeom>
-          <a:ln w="13970">
-            <a:solidFill>
-              <a:srgbClr val="8A8882"/>
-            </a:solidFill>
-            <a:tailEnd type="triangle" w="sm" len="sm"/>
-          </a:ln>
-        </p:spPr>
-        <p:style>
-          <a:lnRef idx="2">
-            <a:schemeClr val="accent1"/>
-          </a:lnRef>
-          <a:fillRef idx="0">
-            <a:schemeClr val="accent1"/>
-          </a:fillRef>
-          <a:effectRef idx="1">
-            <a:schemeClr val="accent1"/>
-          </a:effectRef>
-          <a:fontRef idx="minor">
-            <a:schemeClr val="tx1"/>
-          </a:fontRef>
-        </p:style>
-      </p:cxnSp>
-      <p:cxnSp>
-        <p:nvCxnSpPr>
-          <p:cNvPr id="54" name="Connector 53"/>
-          <p:cNvCxnSpPr/>
-          <p:nvPr/>
-        </p:nvCxnSpPr>
-        <p:spPr>
-          <a:xfrm>
-            <a:off x="1307592" y="2962656"/>
-            <a:ext cx="0" cy="201168"/>
-          </a:xfrm>
-          <a:prstGeom prst="line">
-            <a:avLst/>
-          </a:prstGeom>
-          <a:ln w="13970">
-            <a:solidFill>
-              <a:srgbClr val="8A8882"/>
-            </a:solidFill>
-            <a:tailEnd type="triangle" w="sm" len="sm"/>
-          </a:ln>
-        </p:spPr>
-        <p:style>
-          <a:lnRef idx="2">
-            <a:schemeClr val="accent1"/>
-          </a:lnRef>
-          <a:fillRef idx="0">
-            <a:schemeClr val="accent1"/>
-          </a:fillRef>
-          <a:effectRef idx="1">
-            <a:schemeClr val="accent1"/>
-          </a:effectRef>
-          <a:fontRef idx="minor">
-            <a:schemeClr val="tx1"/>
-          </a:fontRef>
-        </p:style>
-      </p:cxnSp>
-      <p:cxnSp>
-        <p:nvCxnSpPr>
-          <p:cNvPr id="55" name="Connector 54"/>
-          <p:cNvCxnSpPr/>
-          <p:nvPr/>
-        </p:nvCxnSpPr>
-        <p:spPr>
-          <a:xfrm>
-            <a:off x="1307592" y="3803904"/>
-            <a:ext cx="0" cy="201168"/>
-          </a:xfrm>
-          <a:prstGeom prst="line">
-            <a:avLst/>
-          </a:prstGeom>
-          <a:ln w="13970">
-            <a:solidFill>
-              <a:srgbClr val="8A8882"/>
-            </a:solidFill>
-            <a:tailEnd type="triangle" w="sm" len="sm"/>
-          </a:ln>
-        </p:spPr>
-        <p:style>
-          <a:lnRef idx="2">
-            <a:schemeClr val="accent1"/>
-          </a:lnRef>
-          <a:fillRef idx="0">
-            <a:schemeClr val="accent1"/>
-          </a:fillRef>
-          <a:effectRef idx="1">
-            <a:schemeClr val="accent1"/>
-          </a:effectRef>
-          <a:fontRef idx="minor">
-            <a:schemeClr val="tx1"/>
-          </a:fontRef>
-        </p:style>
-      </p:cxnSp>
-      <p:cxnSp>
-        <p:nvCxnSpPr>
-          <p:cNvPr id="56" name="Connector 55"/>
-          <p:cNvCxnSpPr/>
-          <p:nvPr/>
-        </p:nvCxnSpPr>
-        <p:spPr>
-          <a:xfrm>
-            <a:off x="1956815" y="3483864"/>
-            <a:ext cx="1069849" cy="0"/>
-          </a:xfrm>
-          <a:prstGeom prst="line">
-            <a:avLst/>
-          </a:prstGeom>
-          <a:ln w="13970">
-            <a:solidFill>
-              <a:srgbClr val="8A8882"/>
-            </a:solidFill>
-          </a:ln>
-        </p:spPr>
-        <p:style>
-          <a:lnRef idx="2">
-            <a:schemeClr val="accent1"/>
-          </a:lnRef>
-          <a:fillRef idx="0">
-            <a:schemeClr val="accent1"/>
-          </a:fillRef>
-          <a:effectRef idx="1">
-            <a:schemeClr val="accent1"/>
-          </a:effectRef>
-          <a:fontRef idx="minor">
-            <a:schemeClr val="tx1"/>
-          </a:fontRef>
-        </p:style>
-      </p:cxnSp>
-      <p:cxnSp>
-        <p:nvCxnSpPr>
-          <p:cNvPr id="57" name="Connector 56"/>
-          <p:cNvCxnSpPr/>
-          <p:nvPr/>
-        </p:nvCxnSpPr>
-        <p:spPr>
-          <a:xfrm flipV="1">
-            <a:off x="3026664" y="2121408"/>
-            <a:ext cx="0" cy="1362456"/>
-          </a:xfrm>
-          <a:prstGeom prst="line">
-            <a:avLst/>
-          </a:prstGeom>
-          <a:ln w="13970">
-            <a:solidFill>
-              <a:srgbClr val="8A8882"/>
-            </a:solidFill>
-            <a:tailEnd type="triangle" w="sm" len="sm"/>
-          </a:ln>
-        </p:spPr>
-        <p:style>
-          <a:lnRef idx="2">
-            <a:schemeClr val="accent1"/>
-          </a:lnRef>
-          <a:fillRef idx="0">
-            <a:schemeClr val="accent1"/>
-          </a:fillRef>
-          <a:effectRef idx="1">
-            <a:schemeClr val="accent1"/>
-          </a:effectRef>
-          <a:fontRef idx="minor">
-            <a:schemeClr val="tx1"/>
-          </a:fontRef>
-        </p:style>
-      </p:cxnSp>
-      <p:cxnSp>
-        <p:nvCxnSpPr>
-          <p:cNvPr id="58" name="Connector 57"/>
-          <p:cNvCxnSpPr/>
-          <p:nvPr/>
-        </p:nvCxnSpPr>
-        <p:spPr>
-          <a:xfrm>
-            <a:off x="3026664" y="2121408"/>
-            <a:ext cx="0" cy="1883664"/>
-          </a:xfrm>
-          <a:prstGeom prst="line">
-            <a:avLst/>
-          </a:prstGeom>
-          <a:ln w="13970">
-            <a:solidFill>
-              <a:srgbClr val="8A8882"/>
-            </a:solidFill>
-            <a:tailEnd type="triangle" w="sm" len="sm"/>
-          </a:ln>
-        </p:spPr>
-        <p:style>
-          <a:lnRef idx="2">
-            <a:schemeClr val="accent1"/>
-          </a:lnRef>
-          <a:fillRef idx="0">
-            <a:schemeClr val="accent1"/>
-          </a:fillRef>
-          <a:effectRef idx="1">
-            <a:schemeClr val="accent1"/>
-          </a:effectRef>
-          <a:fontRef idx="minor">
-            <a:schemeClr val="tx1"/>
-          </a:fontRef>
-        </p:style>
-      </p:cxnSp>
-      <p:sp>
-        <p:nvSpPr>
-          <p:cNvPr id="59" name="TextBox 58"/>
-          <p:cNvSpPr txBox="1"/>
-          <p:nvPr/>
-        </p:nvSpPr>
-        <p:spPr>
-          <a:xfrm>
-            <a:off x="3072384" y="3822192"/>
-            <a:ext cx="822960" cy="182880"/>
-          </a:xfrm>
-          <a:prstGeom prst="rect">
-            <a:avLst/>
-          </a:prstGeom>
-          <a:noFill/>
-        </p:spPr>
-        <p:txBody>
-          <a:bodyPr wrap="square" lIns="0" rIns="0" tIns="0" bIns="0">
-            <a:spAutoFit/>
-          </a:bodyPr>
-          <a:lstStyle/>
-          <a:p>
-            <a:pPr algn="l">
-              <a:spcAft>
-                <a:spcPts val="0"/>
-              </a:spcAft>
-            </a:pPr>
-            <a:r>
-              <a:rPr sz="850" b="0">
-                <a:solidFill>
-                  <a:srgbClr val="6B6B6B"/>
-                </a:solidFill>
-                <a:latin typeface="Arial"/>
-              </a:rPr>
-              <a:t>VBB</a:t>
-            </a:r>
-          </a:p>
-        </p:txBody>
-      </p:sp>
-      <p:cxnSp>
-        <p:nvCxnSpPr>
-          <p:cNvPr id="60" name="Connector 59"/>
-          <p:cNvCxnSpPr/>
-          <p:nvPr/>
-        </p:nvCxnSpPr>
-        <p:spPr>
-          <a:xfrm>
-            <a:off x="3675887" y="4325112"/>
-            <a:ext cx="813817" cy="0"/>
-          </a:xfrm>
-          <a:prstGeom prst="line">
-            <a:avLst/>
-          </a:prstGeom>
-          <a:ln w="13970">
-            <a:solidFill>
-              <a:srgbClr val="8A8882"/>
-            </a:solidFill>
-          </a:ln>
-        </p:spPr>
-        <p:style>
-          <a:lnRef idx="2">
-            <a:schemeClr val="accent1"/>
-          </a:lnRef>
-          <a:fillRef idx="0">
-            <a:schemeClr val="accent1"/>
-          </a:fillRef>
-          <a:effectRef idx="1">
-            <a:schemeClr val="accent1"/>
-          </a:effectRef>
-          <a:fontRef idx="minor">
-            <a:schemeClr val="tx1"/>
-          </a:fontRef>
-        </p:style>
-      </p:cxnSp>
-      <p:cxnSp>
-        <p:nvCxnSpPr>
-          <p:cNvPr id="61" name="Connector 60"/>
-          <p:cNvCxnSpPr/>
-          <p:nvPr/>
-        </p:nvCxnSpPr>
-        <p:spPr>
-          <a:xfrm flipV="1">
-            <a:off x="4489704" y="3803904"/>
-            <a:ext cx="0" cy="521208"/>
-          </a:xfrm>
-          <a:prstGeom prst="line">
-            <a:avLst/>
-          </a:prstGeom>
-          <a:ln w="13970">
-            <a:solidFill>
-              <a:srgbClr val="8A8882"/>
-            </a:solidFill>
-            <a:tailEnd type="triangle" w="sm" len="sm"/>
-          </a:ln>
-        </p:spPr>
-        <p:style>
-          <a:lnRef idx="2">
-            <a:schemeClr val="accent1"/>
-          </a:lnRef>
-          <a:fillRef idx="0">
-            <a:schemeClr val="accent1"/>
-          </a:fillRef>
-          <a:effectRef idx="1">
-            <a:schemeClr val="accent1"/>
-          </a:effectRef>
-          <a:fontRef idx="minor">
-            <a:schemeClr val="tx1"/>
-          </a:fontRef>
-        </p:style>
-      </p:cxnSp>
-      <p:cxnSp>
-        <p:nvCxnSpPr>
-          <p:cNvPr id="62" name="Connector 61"/>
-          <p:cNvCxnSpPr/>
-          <p:nvPr/>
-        </p:nvCxnSpPr>
-        <p:spPr>
-          <a:xfrm flipV="1">
-            <a:off x="4489704" y="2962656"/>
-            <a:ext cx="0" cy="201168"/>
-          </a:xfrm>
-          <a:prstGeom prst="line">
-            <a:avLst/>
-          </a:prstGeom>
-          <a:ln w="13970">
-            <a:solidFill>
-              <a:srgbClr val="8A8882"/>
-            </a:solidFill>
-            <a:tailEnd type="triangle" w="sm" len="sm"/>
-          </a:ln>
-        </p:spPr>
-        <p:style>
-          <a:lnRef idx="2">
-            <a:schemeClr val="accent1"/>
-          </a:lnRef>
-          <a:fillRef idx="0">
-            <a:schemeClr val="accent1"/>
-          </a:fillRef>
-          <a:effectRef idx="1">
-            <a:schemeClr val="accent1"/>
-          </a:effectRef>
-          <a:fontRef idx="minor">
-            <a:schemeClr val="tx1"/>
-          </a:fontRef>
-        </p:style>
-      </p:cxnSp>
-      <p:cxnSp>
-        <p:nvCxnSpPr>
-          <p:cNvPr id="63" name="Connector 62"/>
-          <p:cNvCxnSpPr/>
-          <p:nvPr/>
-        </p:nvCxnSpPr>
-        <p:spPr>
-          <a:xfrm flipV="1">
-            <a:off x="4489704" y="2121408"/>
-            <a:ext cx="0" cy="201168"/>
-          </a:xfrm>
-          <a:prstGeom prst="line">
-            <a:avLst/>
-          </a:prstGeom>
-          <a:ln w="13970">
-            <a:solidFill>
-              <a:srgbClr val="8A8882"/>
-            </a:solidFill>
-            <a:tailEnd type="triangle" w="sm" len="sm"/>
-          </a:ln>
-        </p:spPr>
-        <p:style>
-          <a:lnRef idx="2">
-            <a:schemeClr val="accent1"/>
-          </a:lnRef>
-          <a:fillRef idx="0">
-            <a:schemeClr val="accent1"/>
-          </a:fillRef>
-          <a:effectRef idx="1">
-            <a:schemeClr val="accent1"/>
-          </a:effectRef>
-          <a:fontRef idx="minor">
-            <a:schemeClr val="tx1"/>
-          </a:fontRef>
-        </p:style>
-      </p:cxnSp>
-      <p:cxnSp>
-        <p:nvCxnSpPr>
-          <p:cNvPr id="64" name="Connector 63"/>
-          <p:cNvCxnSpPr/>
-          <p:nvPr/>
-        </p:nvCxnSpPr>
-        <p:spPr>
-          <a:xfrm>
-            <a:off x="5138928" y="1801368"/>
-            <a:ext cx="219456" cy="0"/>
-          </a:xfrm>
-          <a:prstGeom prst="line">
-            <a:avLst/>
-          </a:prstGeom>
-          <a:ln w="13970">
-            <a:solidFill>
-              <a:srgbClr val="8A8882"/>
-            </a:solidFill>
-            <a:tailEnd type="triangle" w="sm" len="sm"/>
-          </a:ln>
-        </p:spPr>
-        <p:style>
-          <a:lnRef idx="2">
-            <a:schemeClr val="accent1"/>
-          </a:lnRef>
-          <a:fillRef idx="0">
-            <a:schemeClr val="accent1"/>
-          </a:fillRef>
-          <a:effectRef idx="1">
-            <a:schemeClr val="accent1"/>
-          </a:effectRef>
-          <a:fontRef idx="minor">
-            <a:schemeClr val="tx1"/>
-          </a:fontRef>
-        </p:style>
-      </p:cxnSp>
-      <p:cxnSp>
-        <p:nvCxnSpPr>
-          <p:cNvPr id="65" name="Connector 64"/>
-          <p:cNvCxnSpPr/>
-          <p:nvPr/>
-        </p:nvCxnSpPr>
-        <p:spPr>
-          <a:xfrm>
-            <a:off x="6437376" y="1801368"/>
-            <a:ext cx="1499616" cy="0"/>
-          </a:xfrm>
-          <a:prstGeom prst="line">
-            <a:avLst/>
-          </a:prstGeom>
-          <a:ln w="13970">
-            <a:solidFill>
-              <a:srgbClr val="8A8882"/>
-            </a:solidFill>
-          </a:ln>
-        </p:spPr>
-        <p:style>
-          <a:lnRef idx="2">
-            <a:schemeClr val="accent1"/>
-          </a:lnRef>
-          <a:fillRef idx="0">
-            <a:schemeClr val="accent1"/>
-          </a:fillRef>
-          <a:effectRef idx="1">
-            <a:schemeClr val="accent1"/>
-          </a:effectRef>
-          <a:fontRef idx="minor">
-            <a:schemeClr val="tx1"/>
-          </a:fontRef>
-        </p:style>
-      </p:cxnSp>
-      <p:cxnSp>
-        <p:nvCxnSpPr>
-          <p:cNvPr id="66" name="Connector 65"/>
-          <p:cNvCxnSpPr/>
-          <p:nvPr/>
-        </p:nvCxnSpPr>
-        <p:spPr>
-          <a:xfrm>
-            <a:off x="7936992" y="1801368"/>
-            <a:ext cx="0" cy="521208"/>
-          </a:xfrm>
-          <a:prstGeom prst="line">
-            <a:avLst/>
-          </a:prstGeom>
-          <a:ln w="13970">
-            <a:solidFill>
-              <a:srgbClr val="8A8882"/>
-            </a:solidFill>
-            <a:tailEnd type="triangle" w="sm" len="sm"/>
-          </a:ln>
-        </p:spPr>
-        <p:style>
-          <a:lnRef idx="2">
-            <a:schemeClr val="accent1"/>
-          </a:lnRef>
-          <a:fillRef idx="0">
-            <a:schemeClr val="accent1"/>
-          </a:fillRef>
-          <a:effectRef idx="1">
-            <a:schemeClr val="accent1"/>
-          </a:effectRef>
-          <a:fontRef idx="minor">
-            <a:schemeClr val="tx1"/>
-          </a:fontRef>
-        </p:style>
-      </p:cxnSp>
-      <p:cxnSp>
-        <p:nvCxnSpPr>
-          <p:cNvPr id="67" name="Connector 66"/>
-          <p:cNvCxnSpPr/>
-          <p:nvPr/>
-        </p:nvCxnSpPr>
-        <p:spPr>
-          <a:xfrm>
-            <a:off x="5897880" y="2121408"/>
-            <a:ext cx="0" cy="2203704"/>
-          </a:xfrm>
-          <a:prstGeom prst="line">
-            <a:avLst/>
-          </a:prstGeom>
-          <a:ln w="13970">
-            <a:solidFill>
-              <a:srgbClr val="8A8882"/>
-            </a:solidFill>
-          </a:ln>
-        </p:spPr>
-        <p:style>
-          <a:lnRef idx="2">
-            <a:schemeClr val="accent1"/>
-          </a:lnRef>
-          <a:fillRef idx="0">
-            <a:schemeClr val="accent1"/>
-          </a:fillRef>
-          <a:effectRef idx="1">
-            <a:schemeClr val="accent1"/>
-          </a:effectRef>
-          <a:fontRef idx="minor">
-            <a:schemeClr val="tx1"/>
-          </a:fontRef>
-        </p:style>
-      </p:cxnSp>
-      <p:cxnSp>
-        <p:nvCxnSpPr>
-          <p:cNvPr id="68" name="Connector 67"/>
-          <p:cNvCxnSpPr/>
-          <p:nvPr/>
-        </p:nvCxnSpPr>
-        <p:spPr>
-          <a:xfrm>
-            <a:off x="5897880" y="4325112"/>
-            <a:ext cx="1344168" cy="0"/>
-          </a:xfrm>
-          <a:prstGeom prst="line">
-            <a:avLst/>
-          </a:prstGeom>
-          <a:ln w="13970">
-            <a:solidFill>
-              <a:srgbClr val="8A8882"/>
-            </a:solidFill>
-            <a:tailEnd type="triangle" w="sm" len="sm"/>
-          </a:ln>
-        </p:spPr>
-        <p:style>
-          <a:lnRef idx="2">
-            <a:schemeClr val="accent1"/>
-          </a:lnRef>
-          <a:fillRef idx="0">
-            <a:schemeClr val="accent1"/>
-          </a:fillRef>
-          <a:effectRef idx="1">
-            <a:schemeClr val="accent1"/>
-          </a:effectRef>
-          <a:fontRef idx="minor">
-            <a:schemeClr val="tx1"/>
-          </a:fontRef>
-        </p:style>
-      </p:cxnSp>
-      <p:cxnSp>
-        <p:nvCxnSpPr>
-          <p:cNvPr id="69" name="Connector 68"/>
-          <p:cNvCxnSpPr/>
-          <p:nvPr/>
-        </p:nvCxnSpPr>
-        <p:spPr>
-          <a:xfrm flipV="1">
-            <a:off x="7936992" y="3803904"/>
-            <a:ext cx="0" cy="201168"/>
-          </a:xfrm>
-          <a:prstGeom prst="line">
-            <a:avLst/>
-          </a:prstGeom>
-          <a:ln w="13970">
-            <a:solidFill>
-              <a:srgbClr val="8A8882"/>
-            </a:solidFill>
-            <a:tailEnd type="triangle" w="sm" len="sm"/>
-          </a:ln>
-        </p:spPr>
-        <p:style>
-          <a:lnRef idx="2">
-            <a:schemeClr val="accent1"/>
-          </a:lnRef>
-          <a:fillRef idx="0">
-            <a:schemeClr val="accent1"/>
-          </a:fillRef>
-          <a:effectRef idx="1">
-            <a:schemeClr val="accent1"/>
-          </a:effectRef>
-          <a:fontRef idx="minor">
-            <a:schemeClr val="tx1"/>
-          </a:fontRef>
-        </p:style>
-      </p:cxnSp>
-      <p:cxnSp>
-        <p:nvCxnSpPr>
-          <p:cNvPr id="70" name="Connector 69"/>
-          <p:cNvCxnSpPr/>
-          <p:nvPr/>
-        </p:nvCxnSpPr>
-        <p:spPr>
-          <a:xfrm flipV="1">
-            <a:off x="7936992" y="2962656"/>
-            <a:ext cx="0" cy="201168"/>
-          </a:xfrm>
-          <a:prstGeom prst="line">
-            <a:avLst/>
-          </a:prstGeom>
-          <a:ln w="13970">
-            <a:solidFill>
-              <a:srgbClr val="8A8882"/>
-            </a:solidFill>
-            <a:tailEnd type="triangle" w="sm" len="sm"/>
-          </a:ln>
-        </p:spPr>
-        <p:style>
-          <a:lnRef idx="2">
-            <a:schemeClr val="accent1"/>
-          </a:lnRef>
-          <a:fillRef idx="0">
-            <a:schemeClr val="accent1"/>
-          </a:fillRef>
-          <a:effectRef idx="1">
-            <a:schemeClr val="accent1"/>
-          </a:effectRef>
-          <a:fontRef idx="minor">
-            <a:schemeClr val="tx1"/>
-          </a:fontRef>
-        </p:style>
-      </p:cxnSp>
-      <p:cxnSp>
-        <p:nvCxnSpPr>
-          <p:cNvPr id="71" name="Connector 70"/>
-          <p:cNvCxnSpPr/>
-          <p:nvPr/>
-        </p:nvCxnSpPr>
-        <p:spPr>
-          <a:xfrm>
-            <a:off x="8631936" y="2642616"/>
-            <a:ext cx="109728" cy="0"/>
-          </a:xfrm>
-          <a:prstGeom prst="line">
-            <a:avLst/>
-          </a:prstGeom>
-          <a:ln w="13970">
-            <a:solidFill>
-              <a:srgbClr val="8A8882"/>
-            </a:solidFill>
-            <a:tailEnd type="triangle" w="sm" len="sm"/>
-          </a:ln>
-        </p:spPr>
-        <p:style>
-          <a:lnRef idx="2">
-            <a:schemeClr val="accent1"/>
-          </a:lnRef>
-          <a:fillRef idx="0">
-            <a:schemeClr val="accent1"/>
-          </a:fillRef>
-          <a:effectRef idx="1">
-            <a:schemeClr val="accent1"/>
-          </a:effectRef>
-          <a:fontRef idx="minor">
-            <a:schemeClr val="tx1"/>
-          </a:fontRef>
-        </p:style>
-      </p:cxnSp>
-      <p:cxnSp>
-        <p:nvCxnSpPr>
-          <p:cNvPr id="72" name="Connector 71"/>
-          <p:cNvCxnSpPr/>
-          <p:nvPr/>
-        </p:nvCxnSpPr>
-        <p:spPr>
-          <a:xfrm>
-            <a:off x="10040112" y="2642616"/>
-            <a:ext cx="329184" cy="0"/>
-          </a:xfrm>
-          <a:prstGeom prst="line">
-            <a:avLst/>
-          </a:prstGeom>
-          <a:ln w="13970">
-            <a:solidFill>
-              <a:srgbClr val="8A8882"/>
-            </a:solidFill>
-            <a:tailEnd type="triangle" w="sm" len="sm"/>
-          </a:ln>
-        </p:spPr>
-        <p:style>
-          <a:lnRef idx="2">
-            <a:schemeClr val="accent1"/>
-          </a:lnRef>
-          <a:fillRef idx="0">
-            <a:schemeClr val="accent1"/>
-          </a:fillRef>
-          <a:effectRef idx="1">
-            <a:schemeClr val="accent1"/>
-          </a:effectRef>
-          <a:fontRef idx="minor">
-            <a:schemeClr val="tx1"/>
-          </a:fontRef>
-        </p:style>
-      </p:cxnSp>
-      <p:cxnSp>
-        <p:nvCxnSpPr>
-          <p:cNvPr id="73" name="Connector 72"/>
-          <p:cNvCxnSpPr/>
-          <p:nvPr/>
-        </p:nvCxnSpPr>
-        <p:spPr>
-          <a:xfrm>
-            <a:off x="11064240" y="2962656"/>
-            <a:ext cx="0" cy="201168"/>
-          </a:xfrm>
-          <a:prstGeom prst="line">
-            <a:avLst/>
-          </a:prstGeom>
-          <a:ln w="13970">
-            <a:solidFill>
-              <a:srgbClr val="8A8882"/>
-            </a:solidFill>
-            <a:tailEnd type="triangle" w="sm" len="sm"/>
-          </a:ln>
-        </p:spPr>
-        <p:style>
-          <a:lnRef idx="2">
-            <a:schemeClr val="accent1"/>
-          </a:lnRef>
-          <a:fillRef idx="0">
-            <a:schemeClr val="accent1"/>
-          </a:fillRef>
-          <a:effectRef idx="1">
-            <a:schemeClr val="accent1"/>
-          </a:effectRef>
-          <a:fontRef idx="minor">
-            <a:schemeClr val="tx1"/>
-          </a:fontRef>
-        </p:style>
-      </p:cxnSp>
-      <p:cxnSp>
-        <p:nvCxnSpPr>
-          <p:cNvPr id="74" name="Connector 73"/>
-          <p:cNvCxnSpPr/>
-          <p:nvPr/>
-        </p:nvCxnSpPr>
-        <p:spPr>
-          <a:xfrm>
-            <a:off x="11064240" y="3803904"/>
-            <a:ext cx="0" cy="201168"/>
-          </a:xfrm>
-          <a:prstGeom prst="line">
-            <a:avLst/>
-          </a:prstGeom>
-          <a:ln w="13970">
-            <a:solidFill>
-              <a:srgbClr val="8A8882"/>
-            </a:solidFill>
-            <a:tailEnd type="triangle" w="sm" len="sm"/>
-          </a:ln>
-        </p:spPr>
-        <p:style>
-          <a:lnRef idx="2">
-            <a:schemeClr val="accent1"/>
-          </a:lnRef>
-          <a:fillRef idx="0">
-            <a:schemeClr val="accent1"/>
-          </a:fillRef>
-          <a:effectRef idx="1">
-            <a:schemeClr val="accent1"/>
-          </a:effectRef>
-          <a:fontRef idx="minor">
-            <a:schemeClr val="tx1"/>
-          </a:fontRef>
-        </p:style>
-      </p:cxnSp>
-      <p:cxnSp>
-        <p:nvCxnSpPr>
-          <p:cNvPr id="75" name="Connector 74"/>
-          <p:cNvCxnSpPr/>
-          <p:nvPr/>
-        </p:nvCxnSpPr>
-        <p:spPr>
-          <a:xfrm>
-            <a:off x="11064240" y="4645152"/>
-            <a:ext cx="0" cy="201168"/>
-          </a:xfrm>
-          <a:prstGeom prst="line">
-            <a:avLst/>
-          </a:prstGeom>
-          <a:ln w="13970">
-            <a:solidFill>
-              <a:srgbClr val="8A8882"/>
-            </a:solidFill>
-            <a:tailEnd type="triangle" w="sm" len="sm"/>
-          </a:ln>
-        </p:spPr>
-        <p:style>
-          <a:lnRef idx="2">
-            <a:schemeClr val="accent1"/>
-          </a:lnRef>
-          <a:fillRef idx="0">
-            <a:schemeClr val="accent1"/>
-          </a:fillRef>
-          <a:effectRef idx="1">
-            <a:schemeClr val="accent1"/>
-          </a:effectRef>
-          <a:fontRef idx="minor">
-            <a:schemeClr val="tx1"/>
-          </a:fontRef>
-        </p:style>
-      </p:cxnSp>
-      <p:sp>
-        <p:nvSpPr>
-          <p:cNvPr id="76" name="TextBox 75"/>
-          <p:cNvSpPr txBox="1"/>
-          <p:nvPr/>
-        </p:nvSpPr>
-        <p:spPr>
-          <a:xfrm>
-            <a:off x="658368" y="5989320"/>
-            <a:ext cx="10911535" cy="731520"/>
-          </a:xfrm>
-          <a:prstGeom prst="rect">
-            <a:avLst/>
-          </a:prstGeom>
-          <a:noFill/>
-        </p:spPr>
-        <p:txBody>
-          <a:bodyPr wrap="square" lIns="0" rIns="0" tIns="0" bIns="0">
-            <a:spAutoFit/>
-          </a:bodyPr>
-          <a:lstStyle/>
-          <a:p>
-            <a:pPr algn="l">
-              <a:spcAft>
-                <a:spcPts val="100"/>
-              </a:spcAft>
-            </a:pPr>
-            <a:r>
-              <a:rPr sz="950" b="1">
-                <a:solidFill>
-                  <a:srgbClr val="6B6B6B"/>
-                </a:solidFill>
-                <a:latin typeface="Arial"/>
-              </a:rPr>
-              <a:t>Green</a:t>
-            </a:r>
-            <a:r>
-              <a:rPr sz="950" b="0">
-                <a:solidFill>
-                  <a:srgbClr val="6B6B6B"/>
-                </a:solidFill>
-                <a:latin typeface="Arial"/>
-              </a:rPr>
-              <a:t> = yields, and we measure it.   </a:t>
-            </a:r>
-            <a:r>
-              <a:rPr sz="950" b="1">
-                <a:solidFill>
-                  <a:srgbClr val="6B6B6B"/>
-                </a:solidFill>
-                <a:latin typeface="Arial"/>
-              </a:rPr>
-              <a:t>Amber</a:t>
-            </a:r>
-            <a:r>
-              <a:rPr sz="950" b="0">
-                <a:solidFill>
-                  <a:srgbClr val="6B6B6B"/>
-                </a:solidFill>
-                <a:latin typeface="Arial"/>
-              </a:rPr>
-              <a:t> = quantity only, no yield reported.   </a:t>
-            </a:r>
-            <a:r>
-              <a:rPr sz="950" b="1">
-                <a:solidFill>
-                  <a:srgbClr val="6B6B6B"/>
-                </a:solidFill>
-                <a:latin typeface="Arial"/>
-              </a:rPr>
-              <a:t>Grey</a:t>
-            </a:r>
-            <a:r>
-              <a:rPr sz="950" b="0">
-                <a:solidFill>
-                  <a:srgbClr val="6B6B6B"/>
-                </a:solidFill>
-                <a:latin typeface="Arial"/>
-              </a:rPr>
-              <a:t> = builds, moves, or measured elsewhere.</a:t>
-            </a:r>
-          </a:p>
-          <a:p>
-            <a:pPr algn="l">
-              <a:spcAft>
-                <a:spcPts val="100"/>
-              </a:spcAft>
-            </a:pPr>
-            <a:r>
-              <a:rPr sz="850" b="0">
-                <a:solidFill>
-                  <a:srgbClr val="6B6B6B"/>
-                </a:solidFill>
-                <a:latin typeface="Arial"/>
-              </a:rPr>
-              <a:t>Quantity only: L10 FAT, L10 SFT, L10 RIN, L10 2U, L11 Test. L10 and L11 are chassis and rack level and in bring-up — a percentage over three chassis swings 33 points on one unit, so the counts are published and the yields are not.</a:t>
-            </a:r>
-          </a:p>
-          <a:p>
-            <a:pPr algn="l">
-              <a:spcAft>
-                <a:spcPts val="100"/>
-              </a:spcAft>
-            </a:pPr>
-            <a:r>
-              <a:rPr sz="850" b="0">
-                <a:solidFill>
-                  <a:srgbClr val="6B6B6B"/>
-                </a:solidFill>
-                <a:latin typeface="Arial"/>
-              </a:rPr>
-              <a:t>Source: pega2 – pega5 (ESVM), one row per unit. WST and FT reported by Sigurd. VBB provisioning drawn for the flow but left out of the yield view.</a:t>
+              <a:t>a line ships at the rate of its worst step, not its average — so the only useful version of these three numbers is one per step, in the order a unit travels.</a:t>
             </a:r>
           </a:p>
         </p:txBody>
@@ -6559,7 +3760,7 @@
                 </a:solidFill>
                 <a:latin typeface="Arial"/>
               </a:rPr>
-              <a:t>Every step, with the retest rate</a:t>
+              <a:t>Production test flow — yield and quantity</a:t>
             </a:r>
           </a:p>
           <a:p>
@@ -6575,7 +3776,7 @@
                 </a:solidFill>
                 <a:latin typeface="Arial"/>
               </a:rPr>
-              <a:t>2026-W33 · retest rate is the share of units that had to be run again</a:t>
+              <a:t>2026-W33 · 2026-08-10 to 2026-08-16, week still running · UTC · first-pass yield and units, in the box</a:t>
             </a:r>
           </a:p>
         </p:txBody>
@@ -6632,6 +3833,3442 @@
         </p:nvSpPr>
         <p:spPr>
           <a:xfrm>
+            <a:off x="658368" y="1188720"/>
+            <a:ext cx="2743200" cy="237744"/>
+          </a:xfrm>
+          <a:prstGeom prst="rect">
+            <a:avLst/>
+          </a:prstGeom>
+          <a:noFill/>
+        </p:spPr>
+        <p:txBody>
+          <a:bodyPr wrap="square" lIns="0" rIns="0" tIns="0" bIns="0">
+            <a:spAutoFit/>
+          </a:bodyPr>
+          <a:lstStyle/>
+          <a:p>
+            <a:pPr algn="l">
+              <a:spcAft>
+                <a:spcPts val="0"/>
+              </a:spcAft>
+            </a:pPr>
+            <a:r>
+              <a:rPr sz="1000" b="0">
+                <a:solidFill>
+                  <a:srgbClr val="6B6B6B"/>
+                </a:solidFill>
+                <a:latin typeface="Arial"/>
+              </a:rPr>
+              <a:t>@Sigurd   </a:t>
+            </a:r>
+            <a:r>
+              <a:rPr sz="1250" b="1">
+                <a:solidFill>
+                  <a:srgbClr val="141414"/>
+                </a:solidFill>
+                <a:latin typeface="Arial"/>
+              </a:rPr>
+              <a:t>ASIC</a:t>
+            </a:r>
+          </a:p>
+        </p:txBody>
+      </p:sp>
+      <p:cxnSp>
+        <p:nvCxnSpPr>
+          <p:cNvPr id="5" name="Connector 4"/>
+          <p:cNvCxnSpPr/>
+          <p:nvPr/>
+        </p:nvCxnSpPr>
+        <p:spPr>
+          <a:xfrm>
+            <a:off x="2212848" y="1133856"/>
+            <a:ext cx="0" cy="4672584"/>
+          </a:xfrm>
+          <a:prstGeom prst="line">
+            <a:avLst/>
+          </a:prstGeom>
+          <a:ln w="11430">
+            <a:solidFill>
+              <a:srgbClr val="B5B3AC"/>
+            </a:solidFill>
+            <a:prstDash val="dash"/>
+          </a:ln>
+        </p:spPr>
+        <p:style>
+          <a:lnRef idx="2">
+            <a:schemeClr val="accent1"/>
+          </a:lnRef>
+          <a:fillRef idx="0">
+            <a:schemeClr val="accent1"/>
+          </a:fillRef>
+          <a:effectRef idx="1">
+            <a:schemeClr val="accent1"/>
+          </a:effectRef>
+          <a:fontRef idx="minor">
+            <a:schemeClr val="tx1"/>
+          </a:fontRef>
+        </p:style>
+      </p:cxnSp>
+      <p:sp>
+        <p:nvSpPr>
+          <p:cNvPr id="6" name="Rounded Rectangle 5"/>
+          <p:cNvSpPr/>
+          <p:nvPr/>
+        </p:nvSpPr>
+        <p:spPr>
+          <a:xfrm>
+            <a:off x="658368" y="1481328"/>
+            <a:ext cx="1298448" cy="640080"/>
+          </a:xfrm>
+          <a:prstGeom prst="roundRect">
+            <a:avLst/>
+          </a:prstGeom>
+          <a:solidFill>
+            <a:srgbClr val="D9D9D9"/>
+          </a:solidFill>
+          <a:ln w="12700">
+            <a:solidFill>
+              <a:srgbClr val="A5A5A5"/>
+            </a:solidFill>
+          </a:ln>
+          <a:effectLst/>
+        </p:spPr>
+        <p:style>
+          <a:lnRef idx="1">
+            <a:schemeClr val="accent1"/>
+          </a:lnRef>
+          <a:fillRef idx="3">
+            <a:schemeClr val="accent1"/>
+          </a:fillRef>
+          <a:effectRef idx="2">
+            <a:schemeClr val="accent1"/>
+          </a:effectRef>
+          <a:fontRef idx="minor">
+            <a:schemeClr val="lt1"/>
+          </a:fontRef>
+        </p:style>
+        <p:txBody>
+          <a:bodyPr rtlCol="0" anchor="ctr"/>
+          <a:lstStyle/>
+          <a:p>
+            <a:pPr algn="ctr"/>
+          </a:p>
+        </p:txBody>
+      </p:sp>
+      <p:sp>
+        <p:nvSpPr>
+          <p:cNvPr id="7" name="TextBox 6"/>
+          <p:cNvSpPr txBox="1"/>
+          <p:nvPr/>
+        </p:nvSpPr>
+        <p:spPr>
+          <a:xfrm>
+            <a:off x="740664" y="1545336"/>
+            <a:ext cx="1133856" cy="530352"/>
+          </a:xfrm>
+          <a:prstGeom prst="rect">
+            <a:avLst/>
+          </a:prstGeom>
+          <a:noFill/>
+        </p:spPr>
+        <p:txBody>
+          <a:bodyPr wrap="square" lIns="0" rIns="0" tIns="0" bIns="0">
+            <a:spAutoFit/>
+          </a:bodyPr>
+          <a:lstStyle/>
+          <a:p>
+            <a:pPr algn="l">
+              <a:spcAft>
+                <a:spcPts val="100"/>
+              </a:spcAft>
+            </a:pPr>
+            <a:r>
+              <a:rPr sz="1250" b="0">
+                <a:solidFill>
+                  <a:srgbClr val="141414"/>
+                </a:solidFill>
+                <a:latin typeface="Arial"/>
+              </a:rPr>
+              <a:t>ASIC</a:t>
+            </a:r>
+          </a:p>
+        </p:txBody>
+      </p:sp>
+      <p:sp>
+        <p:nvSpPr>
+          <p:cNvPr id="8" name="Rounded Rectangle 7"/>
+          <p:cNvSpPr/>
+          <p:nvPr/>
+        </p:nvSpPr>
+        <p:spPr>
+          <a:xfrm>
+            <a:off x="658368" y="2322576"/>
+            <a:ext cx="1298448" cy="640080"/>
+          </a:xfrm>
+          <a:prstGeom prst="roundRect">
+            <a:avLst/>
+          </a:prstGeom>
+          <a:solidFill>
+            <a:srgbClr val="D5E8D4"/>
+          </a:solidFill>
+          <a:ln w="12700">
+            <a:solidFill>
+              <a:srgbClr val="82B366"/>
+            </a:solidFill>
+          </a:ln>
+          <a:effectLst/>
+        </p:spPr>
+        <p:style>
+          <a:lnRef idx="1">
+            <a:schemeClr val="accent1"/>
+          </a:lnRef>
+          <a:fillRef idx="3">
+            <a:schemeClr val="accent1"/>
+          </a:fillRef>
+          <a:effectRef idx="2">
+            <a:schemeClr val="accent1"/>
+          </a:effectRef>
+          <a:fontRef idx="minor">
+            <a:schemeClr val="lt1"/>
+          </a:fontRef>
+        </p:style>
+        <p:txBody>
+          <a:bodyPr rtlCol="0" anchor="ctr"/>
+          <a:lstStyle/>
+          <a:p>
+            <a:pPr algn="ctr"/>
+          </a:p>
+        </p:txBody>
+      </p:sp>
+      <p:sp>
+        <p:nvSpPr>
+          <p:cNvPr id="9" name="TextBox 8"/>
+          <p:cNvSpPr txBox="1"/>
+          <p:nvPr/>
+        </p:nvSpPr>
+        <p:spPr>
+          <a:xfrm>
+            <a:off x="740664" y="2386584"/>
+            <a:ext cx="1133856" cy="530352"/>
+          </a:xfrm>
+          <a:prstGeom prst="rect">
+            <a:avLst/>
+          </a:prstGeom>
+          <a:noFill/>
+        </p:spPr>
+        <p:txBody>
+          <a:bodyPr wrap="square" lIns="0" rIns="0" tIns="0" bIns="0">
+            <a:spAutoFit/>
+          </a:bodyPr>
+          <a:lstStyle/>
+          <a:p>
+            <a:pPr algn="l">
+              <a:spcAft>
+                <a:spcPts val="100"/>
+              </a:spcAft>
+            </a:pPr>
+            <a:r>
+              <a:rPr sz="1250" b="1">
+                <a:solidFill>
+                  <a:srgbClr val="141414"/>
+                </a:solidFill>
+                <a:latin typeface="Arial"/>
+              </a:rPr>
+              <a:t>WST</a:t>
+            </a:r>
+          </a:p>
+          <a:p>
+            <a:pPr algn="l">
+              <a:spcAft>
+                <a:spcPts val="100"/>
+              </a:spcAft>
+            </a:pPr>
+            <a:r>
+              <a:rPr sz="1500" b="1">
+                <a:solidFill>
+                  <a:srgbClr val="B3281E"/>
+                </a:solidFill>
+                <a:latin typeface="Arial"/>
+              </a:rPr>
+              <a:t>35.3%</a:t>
+            </a:r>
+            <a:r>
+              <a:rPr sz="800" b="0">
+                <a:solidFill>
+                  <a:srgbClr val="6B6B6B"/>
+                </a:solidFill>
+                <a:latin typeface="Arial"/>
+              </a:rPr>
+              <a:t>  reported</a:t>
+            </a:r>
+          </a:p>
+        </p:txBody>
+      </p:sp>
+      <p:sp>
+        <p:nvSpPr>
+          <p:cNvPr id="10" name="Rounded Rectangle 9"/>
+          <p:cNvSpPr/>
+          <p:nvPr/>
+        </p:nvSpPr>
+        <p:spPr>
+          <a:xfrm>
+            <a:off x="658368" y="3163824"/>
+            <a:ext cx="1298448" cy="640080"/>
+          </a:xfrm>
+          <a:prstGeom prst="roundRect">
+            <a:avLst/>
+          </a:prstGeom>
+          <a:solidFill>
+            <a:srgbClr val="D5E8D4"/>
+          </a:solidFill>
+          <a:ln w="12700">
+            <a:solidFill>
+              <a:srgbClr val="82B366"/>
+            </a:solidFill>
+          </a:ln>
+          <a:effectLst/>
+        </p:spPr>
+        <p:style>
+          <a:lnRef idx="1">
+            <a:schemeClr val="accent1"/>
+          </a:lnRef>
+          <a:fillRef idx="3">
+            <a:schemeClr val="accent1"/>
+          </a:fillRef>
+          <a:effectRef idx="2">
+            <a:schemeClr val="accent1"/>
+          </a:effectRef>
+          <a:fontRef idx="minor">
+            <a:schemeClr val="lt1"/>
+          </a:fontRef>
+        </p:style>
+        <p:txBody>
+          <a:bodyPr rtlCol="0" anchor="ctr"/>
+          <a:lstStyle/>
+          <a:p>
+            <a:pPr algn="ctr"/>
+          </a:p>
+        </p:txBody>
+      </p:sp>
+      <p:sp>
+        <p:nvSpPr>
+          <p:cNvPr id="11" name="TextBox 10"/>
+          <p:cNvSpPr txBox="1"/>
+          <p:nvPr/>
+        </p:nvSpPr>
+        <p:spPr>
+          <a:xfrm>
+            <a:off x="740664" y="3227832"/>
+            <a:ext cx="1133856" cy="530352"/>
+          </a:xfrm>
+          <a:prstGeom prst="rect">
+            <a:avLst/>
+          </a:prstGeom>
+          <a:noFill/>
+        </p:spPr>
+        <p:txBody>
+          <a:bodyPr wrap="square" lIns="0" rIns="0" tIns="0" bIns="0">
+            <a:spAutoFit/>
+          </a:bodyPr>
+          <a:lstStyle/>
+          <a:p>
+            <a:pPr algn="l">
+              <a:spcAft>
+                <a:spcPts val="100"/>
+              </a:spcAft>
+            </a:pPr>
+            <a:r>
+              <a:rPr sz="1250" b="1">
+                <a:solidFill>
+                  <a:srgbClr val="141414"/>
+                </a:solidFill>
+                <a:latin typeface="Arial"/>
+              </a:rPr>
+              <a:t>FT</a:t>
+            </a:r>
+          </a:p>
+          <a:p>
+            <a:pPr algn="l">
+              <a:spcAft>
+                <a:spcPts val="100"/>
+              </a:spcAft>
+            </a:pPr>
+            <a:r>
+              <a:rPr sz="1500" b="1">
+                <a:solidFill>
+                  <a:srgbClr val="B56B00"/>
+                </a:solidFill>
+                <a:latin typeface="Arial"/>
+              </a:rPr>
+              <a:t>84.3%</a:t>
+            </a:r>
+            <a:r>
+              <a:rPr sz="800" b="0">
+                <a:solidFill>
+                  <a:srgbClr val="6B6B6B"/>
+                </a:solidFill>
+                <a:latin typeface="Arial"/>
+              </a:rPr>
+              <a:t>  reported</a:t>
+            </a:r>
+          </a:p>
+        </p:txBody>
+      </p:sp>
+      <p:sp>
+        <p:nvSpPr>
+          <p:cNvPr id="12" name="Rounded Rectangle 11"/>
+          <p:cNvSpPr/>
+          <p:nvPr/>
+        </p:nvSpPr>
+        <p:spPr>
+          <a:xfrm>
+            <a:off x="658368" y="4005072"/>
+            <a:ext cx="1298448" cy="640080"/>
+          </a:xfrm>
+          <a:prstGeom prst="roundRect">
+            <a:avLst/>
+          </a:prstGeom>
+          <a:solidFill>
+            <a:srgbClr val="D9D9D9"/>
+          </a:solidFill>
+          <a:ln w="12700">
+            <a:solidFill>
+              <a:srgbClr val="A5A5A5"/>
+            </a:solidFill>
+          </a:ln>
+          <a:effectLst/>
+        </p:spPr>
+        <p:style>
+          <a:lnRef idx="1">
+            <a:schemeClr val="accent1"/>
+          </a:lnRef>
+          <a:fillRef idx="3">
+            <a:schemeClr val="accent1"/>
+          </a:fillRef>
+          <a:effectRef idx="2">
+            <a:schemeClr val="accent1"/>
+          </a:effectRef>
+          <a:fontRef idx="minor">
+            <a:schemeClr val="lt1"/>
+          </a:fontRef>
+        </p:style>
+        <p:txBody>
+          <a:bodyPr rtlCol="0" anchor="ctr"/>
+          <a:lstStyle/>
+          <a:p>
+            <a:pPr algn="ctr"/>
+          </a:p>
+        </p:txBody>
+      </p:sp>
+      <p:sp>
+        <p:nvSpPr>
+          <p:cNvPr id="13" name="TextBox 12"/>
+          <p:cNvSpPr txBox="1"/>
+          <p:nvPr/>
+        </p:nvSpPr>
+        <p:spPr>
+          <a:xfrm>
+            <a:off x="740664" y="4069080"/>
+            <a:ext cx="1133856" cy="530352"/>
+          </a:xfrm>
+          <a:prstGeom prst="rect">
+            <a:avLst/>
+          </a:prstGeom>
+          <a:noFill/>
+        </p:spPr>
+        <p:txBody>
+          <a:bodyPr wrap="square" lIns="0" rIns="0" tIns="0" bIns="0">
+            <a:spAutoFit/>
+          </a:bodyPr>
+          <a:lstStyle/>
+          <a:p>
+            <a:pPr algn="l">
+              <a:spcAft>
+                <a:spcPts val="100"/>
+              </a:spcAft>
+            </a:pPr>
+            <a:r>
+              <a:rPr sz="1250" b="1">
+                <a:solidFill>
+                  <a:srgbClr val="141414"/>
+                </a:solidFill>
+                <a:latin typeface="Arial"/>
+              </a:rPr>
+              <a:t>SLT</a:t>
+            </a:r>
+          </a:p>
+          <a:p>
+            <a:pPr algn="l">
+              <a:spcAft>
+                <a:spcPts val="100"/>
+              </a:spcAft>
+            </a:pPr>
+            <a:r>
+              <a:rPr sz="850" b="0">
+                <a:solidFill>
+                  <a:srgbClr val="6B6B6B"/>
+                </a:solidFill>
+                <a:latin typeface="Arial"/>
+              </a:rPr>
+              <a:t>at Sigurd</a:t>
+            </a:r>
+          </a:p>
+        </p:txBody>
+      </p:sp>
+      <p:sp>
+        <p:nvSpPr>
+          <p:cNvPr id="14" name="TextBox 13"/>
+          <p:cNvSpPr txBox="1"/>
+          <p:nvPr/>
+        </p:nvSpPr>
+        <p:spPr>
+          <a:xfrm>
+            <a:off x="2377440" y="1188720"/>
+            <a:ext cx="2743200" cy="237744"/>
+          </a:xfrm>
+          <a:prstGeom prst="rect">
+            <a:avLst/>
+          </a:prstGeom>
+          <a:noFill/>
+        </p:spPr>
+        <p:txBody>
+          <a:bodyPr wrap="square" lIns="0" rIns="0" tIns="0" bIns="0">
+            <a:spAutoFit/>
+          </a:bodyPr>
+          <a:lstStyle/>
+          <a:p>
+            <a:pPr algn="l">
+              <a:spcAft>
+                <a:spcPts val="0"/>
+              </a:spcAft>
+            </a:pPr>
+            <a:r>
+              <a:rPr sz="1000" b="0">
+                <a:solidFill>
+                  <a:srgbClr val="6B6B6B"/>
+                </a:solidFill>
+                <a:latin typeface="Arial"/>
+              </a:rPr>
+              <a:t>@Pega   </a:t>
+            </a:r>
+            <a:r>
+              <a:rPr sz="1250" b="1">
+                <a:solidFill>
+                  <a:srgbClr val="141414"/>
+                </a:solidFill>
+                <a:latin typeface="Arial"/>
+              </a:rPr>
+              <a:t>PCBA L6</a:t>
+            </a:r>
+          </a:p>
+        </p:txBody>
+      </p:sp>
+      <p:cxnSp>
+        <p:nvCxnSpPr>
+          <p:cNvPr id="15" name="Connector 14"/>
+          <p:cNvCxnSpPr/>
+          <p:nvPr/>
+        </p:nvCxnSpPr>
+        <p:spPr>
+          <a:xfrm>
+            <a:off x="5285232" y="1133856"/>
+            <a:ext cx="0" cy="4672584"/>
+          </a:xfrm>
+          <a:prstGeom prst="line">
+            <a:avLst/>
+          </a:prstGeom>
+          <a:ln w="11430">
+            <a:solidFill>
+              <a:srgbClr val="B5B3AC"/>
+            </a:solidFill>
+            <a:prstDash val="dash"/>
+          </a:ln>
+        </p:spPr>
+        <p:style>
+          <a:lnRef idx="2">
+            <a:schemeClr val="accent1"/>
+          </a:lnRef>
+          <a:fillRef idx="0">
+            <a:schemeClr val="accent1"/>
+          </a:fillRef>
+          <a:effectRef idx="1">
+            <a:schemeClr val="accent1"/>
+          </a:effectRef>
+          <a:fontRef idx="minor">
+            <a:schemeClr val="tx1"/>
+          </a:fontRef>
+        </p:style>
+      </p:cxnSp>
+      <p:sp>
+        <p:nvSpPr>
+          <p:cNvPr id="16" name="Rounded Rectangle 15"/>
+          <p:cNvSpPr/>
+          <p:nvPr/>
+        </p:nvSpPr>
+        <p:spPr>
+          <a:xfrm>
+            <a:off x="2377440" y="1481328"/>
+            <a:ext cx="1298448" cy="640080"/>
+          </a:xfrm>
+          <a:prstGeom prst="roundRect">
+            <a:avLst/>
+          </a:prstGeom>
+          <a:solidFill>
+            <a:srgbClr val="D9D9D9"/>
+          </a:solidFill>
+          <a:ln w="12700">
+            <a:solidFill>
+              <a:srgbClr val="A5A5A5"/>
+            </a:solidFill>
+          </a:ln>
+          <a:effectLst/>
+        </p:spPr>
+        <p:style>
+          <a:lnRef idx="1">
+            <a:schemeClr val="accent1"/>
+          </a:lnRef>
+          <a:fillRef idx="3">
+            <a:schemeClr val="accent1"/>
+          </a:fillRef>
+          <a:effectRef idx="2">
+            <a:schemeClr val="accent1"/>
+          </a:effectRef>
+          <a:fontRef idx="minor">
+            <a:schemeClr val="lt1"/>
+          </a:fontRef>
+        </p:style>
+        <p:txBody>
+          <a:bodyPr rtlCol="0" anchor="ctr"/>
+          <a:lstStyle/>
+          <a:p>
+            <a:pPr algn="ctr"/>
+          </a:p>
+        </p:txBody>
+      </p:sp>
+      <p:sp>
+        <p:nvSpPr>
+          <p:cNvPr id="17" name="TextBox 16"/>
+          <p:cNvSpPr txBox="1"/>
+          <p:nvPr/>
+        </p:nvSpPr>
+        <p:spPr>
+          <a:xfrm>
+            <a:off x="2459736" y="1545336"/>
+            <a:ext cx="1133856" cy="530352"/>
+          </a:xfrm>
+          <a:prstGeom prst="rect">
+            <a:avLst/>
+          </a:prstGeom>
+          <a:noFill/>
+        </p:spPr>
+        <p:txBody>
+          <a:bodyPr wrap="square" lIns="0" rIns="0" tIns="0" bIns="0">
+            <a:spAutoFit/>
+          </a:bodyPr>
+          <a:lstStyle/>
+          <a:p>
+            <a:pPr algn="l">
+              <a:spcAft>
+                <a:spcPts val="100"/>
+              </a:spcAft>
+            </a:pPr>
+            <a:r>
+              <a:rPr sz="1250" b="0">
+                <a:solidFill>
+                  <a:srgbClr val="141414"/>
+                </a:solidFill>
+                <a:latin typeface="Arial"/>
+              </a:rPr>
+              <a:t>SMT / ICT</a:t>
+            </a:r>
+          </a:p>
+          <a:p>
+            <a:pPr algn="l">
+              <a:spcAft>
+                <a:spcPts val="100"/>
+              </a:spcAft>
+            </a:pPr>
+            <a:r>
+              <a:rPr sz="850" b="0">
+                <a:solidFill>
+                  <a:srgbClr val="6B6B6B"/>
+                </a:solidFill>
+                <a:latin typeface="Arial"/>
+              </a:rPr>
+              <a:t>HPB &amp; VBB &amp; PV1 &amp; PDB</a:t>
+            </a:r>
+          </a:p>
+        </p:txBody>
+      </p:sp>
+      <p:sp>
+        <p:nvSpPr>
+          <p:cNvPr id="18" name="Rounded Rectangle 17"/>
+          <p:cNvSpPr/>
+          <p:nvPr/>
+        </p:nvSpPr>
+        <p:spPr>
+          <a:xfrm>
+            <a:off x="2377440" y="4005072"/>
+            <a:ext cx="1298448" cy="640080"/>
+          </a:xfrm>
+          <a:prstGeom prst="roundRect">
+            <a:avLst/>
+          </a:prstGeom>
+          <a:solidFill>
+            <a:srgbClr val="E6D0DE"/>
+          </a:solidFill>
+          <a:ln w="12700">
+            <a:solidFill>
+              <a:srgbClr val="C29FB8"/>
+            </a:solidFill>
+          </a:ln>
+          <a:effectLst/>
+        </p:spPr>
+        <p:style>
+          <a:lnRef idx="1">
+            <a:schemeClr val="accent1"/>
+          </a:lnRef>
+          <a:fillRef idx="3">
+            <a:schemeClr val="accent1"/>
+          </a:fillRef>
+          <a:effectRef idx="2">
+            <a:schemeClr val="accent1"/>
+          </a:effectRef>
+          <a:fontRef idx="minor">
+            <a:schemeClr val="lt1"/>
+          </a:fontRef>
+        </p:style>
+        <p:txBody>
+          <a:bodyPr rtlCol="0" anchor="ctr"/>
+          <a:lstStyle/>
+          <a:p>
+            <a:pPr algn="ctr"/>
+          </a:p>
+        </p:txBody>
+      </p:sp>
+      <p:sp>
+        <p:nvSpPr>
+          <p:cNvPr id="19" name="TextBox 18"/>
+          <p:cNvSpPr txBox="1"/>
+          <p:nvPr/>
+        </p:nvSpPr>
+        <p:spPr>
+          <a:xfrm>
+            <a:off x="2459736" y="4069080"/>
+            <a:ext cx="1133856" cy="530352"/>
+          </a:xfrm>
+          <a:prstGeom prst="rect">
+            <a:avLst/>
+          </a:prstGeom>
+          <a:noFill/>
+        </p:spPr>
+        <p:txBody>
+          <a:bodyPr wrap="square" lIns="0" rIns="0" tIns="0" bIns="0">
+            <a:spAutoFit/>
+          </a:bodyPr>
+          <a:lstStyle/>
+          <a:p>
+            <a:pPr algn="l">
+              <a:spcAft>
+                <a:spcPts val="100"/>
+              </a:spcAft>
+            </a:pPr>
+            <a:r>
+              <a:rPr sz="1250" b="0">
+                <a:solidFill>
+                  <a:srgbClr val="141414"/>
+                </a:solidFill>
+                <a:latin typeface="Arial"/>
+              </a:rPr>
+              <a:t>Flash / BFT</a:t>
+            </a:r>
+          </a:p>
+          <a:p>
+            <a:pPr algn="l">
+              <a:spcAft>
+                <a:spcPts val="100"/>
+              </a:spcAft>
+            </a:pPr>
+            <a:r>
+              <a:rPr sz="850" b="0">
+                <a:solidFill>
+                  <a:srgbClr val="6B6B6B"/>
+                </a:solidFill>
+                <a:latin typeface="Arial"/>
+              </a:rPr>
+              <a:t>VBB — not in the yield view</a:t>
+            </a:r>
+          </a:p>
+        </p:txBody>
+      </p:sp>
+      <p:sp>
+        <p:nvSpPr>
+          <p:cNvPr id="20" name="Rounded Rectangle 19"/>
+          <p:cNvSpPr/>
+          <p:nvPr/>
+        </p:nvSpPr>
+        <p:spPr>
+          <a:xfrm>
+            <a:off x="3840480" y="1481328"/>
+            <a:ext cx="1298448" cy="640080"/>
+          </a:xfrm>
+          <a:prstGeom prst="roundRect">
+            <a:avLst/>
+          </a:prstGeom>
+          <a:solidFill>
+            <a:srgbClr val="D5E8D4"/>
+          </a:solidFill>
+          <a:ln w="12700">
+            <a:solidFill>
+              <a:srgbClr val="82B366"/>
+            </a:solidFill>
+          </a:ln>
+          <a:effectLst/>
+        </p:spPr>
+        <p:style>
+          <a:lnRef idx="1">
+            <a:schemeClr val="accent1"/>
+          </a:lnRef>
+          <a:fillRef idx="3">
+            <a:schemeClr val="accent1"/>
+          </a:fillRef>
+          <a:effectRef idx="2">
+            <a:schemeClr val="accent1"/>
+          </a:effectRef>
+          <a:fontRef idx="minor">
+            <a:schemeClr val="lt1"/>
+          </a:fontRef>
+        </p:style>
+        <p:txBody>
+          <a:bodyPr rtlCol="0" anchor="ctr"/>
+          <a:lstStyle/>
+          <a:p>
+            <a:pPr algn="ctr"/>
+          </a:p>
+        </p:txBody>
+      </p:sp>
+      <p:sp>
+        <p:nvSpPr>
+          <p:cNvPr id="21" name="TextBox 20"/>
+          <p:cNvSpPr txBox="1"/>
+          <p:nvPr/>
+        </p:nvSpPr>
+        <p:spPr>
+          <a:xfrm>
+            <a:off x="3922776" y="1545336"/>
+            <a:ext cx="1133856" cy="530352"/>
+          </a:xfrm>
+          <a:prstGeom prst="rect">
+            <a:avLst/>
+          </a:prstGeom>
+          <a:noFill/>
+        </p:spPr>
+        <p:txBody>
+          <a:bodyPr wrap="square" lIns="0" rIns="0" tIns="0" bIns="0">
+            <a:spAutoFit/>
+          </a:bodyPr>
+          <a:lstStyle/>
+          <a:p>
+            <a:pPr algn="l">
+              <a:spcAft>
+                <a:spcPts val="100"/>
+              </a:spcAft>
+            </a:pPr>
+            <a:r>
+              <a:rPr sz="1250" b="1">
+                <a:solidFill>
+                  <a:srgbClr val="141414"/>
+                </a:solidFill>
+                <a:latin typeface="Arial"/>
+              </a:rPr>
+              <a:t>HTT</a:t>
+            </a:r>
+          </a:p>
+          <a:p>
+            <a:pPr algn="l">
+              <a:spcAft>
+                <a:spcPts val="100"/>
+              </a:spcAft>
+            </a:pPr>
+            <a:r>
+              <a:rPr sz="1600" b="1">
+                <a:solidFill>
+                  <a:srgbClr val="B3281E"/>
+                </a:solidFill>
+                <a:latin typeface="Arial"/>
+              </a:rPr>
+              <a:t>54.3%</a:t>
+            </a:r>
+            <a:r>
+              <a:rPr sz="900" b="0">
+                <a:solidFill>
+                  <a:srgbClr val="6B6B6B"/>
+                </a:solidFill>
+                <a:latin typeface="Arial"/>
+              </a:rPr>
+              <a:t>  170u</a:t>
+            </a:r>
+          </a:p>
+        </p:txBody>
+      </p:sp>
+      <p:sp>
+        <p:nvSpPr>
+          <p:cNvPr id="22" name="Rounded Rectangle 21"/>
+          <p:cNvSpPr/>
+          <p:nvPr/>
+        </p:nvSpPr>
+        <p:spPr>
+          <a:xfrm>
+            <a:off x="3840480" y="2322576"/>
+            <a:ext cx="1298448" cy="640080"/>
+          </a:xfrm>
+          <a:prstGeom prst="roundRect">
+            <a:avLst/>
+          </a:prstGeom>
+          <a:solidFill>
+            <a:srgbClr val="D5E8D4"/>
+          </a:solidFill>
+          <a:ln w="12700">
+            <a:solidFill>
+              <a:srgbClr val="82B366"/>
+            </a:solidFill>
+          </a:ln>
+          <a:effectLst/>
+        </p:spPr>
+        <p:style>
+          <a:lnRef idx="1">
+            <a:schemeClr val="accent1"/>
+          </a:lnRef>
+          <a:fillRef idx="3">
+            <a:schemeClr val="accent1"/>
+          </a:fillRef>
+          <a:effectRef idx="2">
+            <a:schemeClr val="accent1"/>
+          </a:effectRef>
+          <a:fontRef idx="minor">
+            <a:schemeClr val="lt1"/>
+          </a:fontRef>
+        </p:style>
+        <p:txBody>
+          <a:bodyPr rtlCol="0" anchor="ctr"/>
+          <a:lstStyle/>
+          <a:p>
+            <a:pPr algn="ctr"/>
+          </a:p>
+        </p:txBody>
+      </p:sp>
+      <p:sp>
+        <p:nvSpPr>
+          <p:cNvPr id="23" name="TextBox 22"/>
+          <p:cNvSpPr txBox="1"/>
+          <p:nvPr/>
+        </p:nvSpPr>
+        <p:spPr>
+          <a:xfrm>
+            <a:off x="3922776" y="2386584"/>
+            <a:ext cx="1133856" cy="530352"/>
+          </a:xfrm>
+          <a:prstGeom prst="rect">
+            <a:avLst/>
+          </a:prstGeom>
+          <a:noFill/>
+        </p:spPr>
+        <p:txBody>
+          <a:bodyPr wrap="square" lIns="0" rIns="0" tIns="0" bIns="0">
+            <a:spAutoFit/>
+          </a:bodyPr>
+          <a:lstStyle/>
+          <a:p>
+            <a:pPr algn="l">
+              <a:spcAft>
+                <a:spcPts val="100"/>
+              </a:spcAft>
+            </a:pPr>
+            <a:r>
+              <a:rPr sz="1250" b="1">
+                <a:solidFill>
+                  <a:srgbClr val="141414"/>
+                </a:solidFill>
+                <a:latin typeface="Arial"/>
+              </a:rPr>
+              <a:t>MLT</a:t>
+            </a:r>
+          </a:p>
+          <a:p>
+            <a:pPr algn="l">
+              <a:spcAft>
+                <a:spcPts val="100"/>
+              </a:spcAft>
+            </a:pPr>
+            <a:r>
+              <a:rPr sz="1600" b="1">
+                <a:solidFill>
+                  <a:srgbClr val="B56B00"/>
+                </a:solidFill>
+                <a:latin typeface="Arial"/>
+              </a:rPr>
+              <a:t>65.5%</a:t>
+            </a:r>
+            <a:r>
+              <a:rPr sz="900" b="0">
+                <a:solidFill>
+                  <a:srgbClr val="6B6B6B"/>
+                </a:solidFill>
+                <a:latin typeface="Arial"/>
+              </a:rPr>
+              <a:t>  228u</a:t>
+            </a:r>
+          </a:p>
+        </p:txBody>
+      </p:sp>
+      <p:sp>
+        <p:nvSpPr>
+          <p:cNvPr id="24" name="Rounded Rectangle 23"/>
+          <p:cNvSpPr/>
+          <p:nvPr/>
+        </p:nvSpPr>
+        <p:spPr>
+          <a:xfrm>
+            <a:off x="3840480" y="3163824"/>
+            <a:ext cx="1298448" cy="640080"/>
+          </a:xfrm>
+          <a:prstGeom prst="roundRect">
+            <a:avLst/>
+          </a:prstGeom>
+          <a:solidFill>
+            <a:srgbClr val="D9D9D9"/>
+          </a:solidFill>
+          <a:ln w="12700">
+            <a:solidFill>
+              <a:srgbClr val="A5A5A5"/>
+            </a:solidFill>
+          </a:ln>
+          <a:effectLst/>
+        </p:spPr>
+        <p:style>
+          <a:lnRef idx="1">
+            <a:schemeClr val="accent1"/>
+          </a:lnRef>
+          <a:fillRef idx="3">
+            <a:schemeClr val="accent1"/>
+          </a:fillRef>
+          <a:effectRef idx="2">
+            <a:schemeClr val="accent1"/>
+          </a:effectRef>
+          <a:fontRef idx="minor">
+            <a:schemeClr val="lt1"/>
+          </a:fontRef>
+        </p:style>
+        <p:txBody>
+          <a:bodyPr rtlCol="0" anchor="ctr"/>
+          <a:lstStyle/>
+          <a:p>
+            <a:pPr algn="ctr"/>
+          </a:p>
+        </p:txBody>
+      </p:sp>
+      <p:sp>
+        <p:nvSpPr>
+          <p:cNvPr id="25" name="TextBox 24"/>
+          <p:cNvSpPr txBox="1"/>
+          <p:nvPr/>
+        </p:nvSpPr>
+        <p:spPr>
+          <a:xfrm>
+            <a:off x="3922776" y="3227832"/>
+            <a:ext cx="1133856" cy="530352"/>
+          </a:xfrm>
+          <a:prstGeom prst="rect">
+            <a:avLst/>
+          </a:prstGeom>
+          <a:noFill/>
+        </p:spPr>
+        <p:txBody>
+          <a:bodyPr wrap="square" lIns="0" rIns="0" tIns="0" bIns="0">
+            <a:spAutoFit/>
+          </a:bodyPr>
+          <a:lstStyle/>
+          <a:p>
+            <a:pPr algn="l">
+              <a:spcAft>
+                <a:spcPts val="100"/>
+              </a:spcAft>
+            </a:pPr>
+            <a:r>
+              <a:rPr sz="1250" b="0">
+                <a:solidFill>
+                  <a:srgbClr val="141414"/>
+                </a:solidFill>
+                <a:latin typeface="Arial"/>
+              </a:rPr>
+              <a:t>ASSY</a:t>
+            </a:r>
+          </a:p>
+        </p:txBody>
+      </p:sp>
+      <p:sp>
+        <p:nvSpPr>
+          <p:cNvPr id="26" name="TextBox 25"/>
+          <p:cNvSpPr txBox="1"/>
+          <p:nvPr/>
+        </p:nvSpPr>
+        <p:spPr>
+          <a:xfrm>
+            <a:off x="5358384" y="1188720"/>
+            <a:ext cx="2743200" cy="237744"/>
+          </a:xfrm>
+          <a:prstGeom prst="rect">
+            <a:avLst/>
+          </a:prstGeom>
+          <a:noFill/>
+        </p:spPr>
+        <p:txBody>
+          <a:bodyPr wrap="square" lIns="0" rIns="0" tIns="0" bIns="0">
+            <a:spAutoFit/>
+          </a:bodyPr>
+          <a:lstStyle/>
+          <a:p>
+            <a:pPr algn="l">
+              <a:spcAft>
+                <a:spcPts val="0"/>
+              </a:spcAft>
+            </a:pPr>
+            <a:r>
+              <a:rPr sz="1000" b="0">
+                <a:solidFill>
+                  <a:srgbClr val="6B6B6B"/>
+                </a:solidFill>
+                <a:latin typeface="Arial"/>
+              </a:rPr>
+              <a:t/>
+            </a:r>
+            <a:r>
+              <a:rPr sz="1250" b="1">
+                <a:solidFill>
+                  <a:srgbClr val="141414"/>
+                </a:solidFill>
+                <a:latin typeface="Arial"/>
+              </a:rPr>
+              <a:t>FATP L10 2U/4U</a:t>
+            </a:r>
+          </a:p>
+        </p:txBody>
+      </p:sp>
+      <p:cxnSp>
+        <p:nvCxnSpPr>
+          <p:cNvPr id="27" name="Connector 26"/>
+          <p:cNvCxnSpPr/>
+          <p:nvPr/>
+        </p:nvCxnSpPr>
+        <p:spPr>
+          <a:xfrm>
+            <a:off x="7059168" y="1133856"/>
+            <a:ext cx="0" cy="4672584"/>
+          </a:xfrm>
+          <a:prstGeom prst="line">
+            <a:avLst/>
+          </a:prstGeom>
+          <a:ln w="11430">
+            <a:solidFill>
+              <a:srgbClr val="B5B3AC"/>
+            </a:solidFill>
+            <a:prstDash val="dash"/>
+          </a:ln>
+        </p:spPr>
+        <p:style>
+          <a:lnRef idx="2">
+            <a:schemeClr val="accent1"/>
+          </a:lnRef>
+          <a:fillRef idx="0">
+            <a:schemeClr val="accent1"/>
+          </a:fillRef>
+          <a:effectRef idx="1">
+            <a:schemeClr val="accent1"/>
+          </a:effectRef>
+          <a:fontRef idx="minor">
+            <a:schemeClr val="tx1"/>
+          </a:fontRef>
+        </p:style>
+      </p:cxnSp>
+      <p:sp>
+        <p:nvSpPr>
+          <p:cNvPr id="28" name="Rounded Rectangle 27"/>
+          <p:cNvSpPr/>
+          <p:nvPr/>
+        </p:nvSpPr>
+        <p:spPr>
+          <a:xfrm>
+            <a:off x="5358384" y="1481328"/>
+            <a:ext cx="1078992" cy="640080"/>
+          </a:xfrm>
+          <a:prstGeom prst="roundRect">
+            <a:avLst/>
+          </a:prstGeom>
+          <a:solidFill>
+            <a:srgbClr val="D9D9D9"/>
+          </a:solidFill>
+          <a:ln w="12700">
+            <a:solidFill>
+              <a:srgbClr val="A5A5A5"/>
+            </a:solidFill>
+          </a:ln>
+          <a:effectLst/>
+        </p:spPr>
+        <p:style>
+          <a:lnRef idx="1">
+            <a:schemeClr val="accent1"/>
+          </a:lnRef>
+          <a:fillRef idx="3">
+            <a:schemeClr val="accent1"/>
+          </a:fillRef>
+          <a:effectRef idx="2">
+            <a:schemeClr val="accent1"/>
+          </a:effectRef>
+          <a:fontRef idx="minor">
+            <a:schemeClr val="lt1"/>
+          </a:fontRef>
+        </p:style>
+        <p:txBody>
+          <a:bodyPr rtlCol="0" anchor="ctr"/>
+          <a:lstStyle/>
+          <a:p>
+            <a:pPr algn="ctr"/>
+          </a:p>
+        </p:txBody>
+      </p:sp>
+      <p:sp>
+        <p:nvSpPr>
+          <p:cNvPr id="29" name="TextBox 28"/>
+          <p:cNvSpPr txBox="1"/>
+          <p:nvPr/>
+        </p:nvSpPr>
+        <p:spPr>
+          <a:xfrm>
+            <a:off x="5440680" y="1545336"/>
+            <a:ext cx="914400" cy="530352"/>
+          </a:xfrm>
+          <a:prstGeom prst="rect">
+            <a:avLst/>
+          </a:prstGeom>
+          <a:noFill/>
+        </p:spPr>
+        <p:txBody>
+          <a:bodyPr wrap="square" lIns="0" rIns="0" tIns="0" bIns="0">
+            <a:spAutoFit/>
+          </a:bodyPr>
+          <a:lstStyle/>
+          <a:p>
+            <a:pPr algn="l">
+              <a:spcAft>
+                <a:spcPts val="100"/>
+              </a:spcAft>
+            </a:pPr>
+            <a:r>
+              <a:rPr sz="1250" b="0">
+                <a:solidFill>
+                  <a:srgbClr val="141414"/>
+                </a:solidFill>
+                <a:latin typeface="Arial"/>
+              </a:rPr>
+              <a:t>ASSY</a:t>
+            </a:r>
+          </a:p>
+        </p:txBody>
+      </p:sp>
+      <p:sp>
+        <p:nvSpPr>
+          <p:cNvPr id="30" name="Rectangle 29"/>
+          <p:cNvSpPr/>
+          <p:nvPr/>
+        </p:nvSpPr>
+        <p:spPr>
+          <a:xfrm>
+            <a:off x="6492240" y="1517904"/>
+            <a:ext cx="384048" cy="228600"/>
+          </a:xfrm>
+          <a:prstGeom prst="rect">
+            <a:avLst/>
+          </a:prstGeom>
+          <a:solidFill>
+            <a:srgbClr val="CFE2F3"/>
+          </a:solidFill>
+          <a:ln w="7620">
+            <a:solidFill>
+              <a:srgbClr val="8A8882"/>
+            </a:solidFill>
+          </a:ln>
+          <a:effectLst/>
+        </p:spPr>
+        <p:style>
+          <a:lnRef idx="1">
+            <a:schemeClr val="accent1"/>
+          </a:lnRef>
+          <a:fillRef idx="3">
+            <a:schemeClr val="accent1"/>
+          </a:fillRef>
+          <a:effectRef idx="2">
+            <a:schemeClr val="accent1"/>
+          </a:effectRef>
+          <a:fontRef idx="minor">
+            <a:schemeClr val="lt1"/>
+          </a:fontRef>
+        </p:style>
+        <p:txBody>
+          <a:bodyPr rtlCol="0" anchor="ctr"/>
+          <a:lstStyle/>
+          <a:p>
+            <a:pPr algn="ctr"/>
+          </a:p>
+        </p:txBody>
+      </p:sp>
+      <p:sp>
+        <p:nvSpPr>
+          <p:cNvPr id="31" name="TextBox 30"/>
+          <p:cNvSpPr txBox="1"/>
+          <p:nvPr/>
+        </p:nvSpPr>
+        <p:spPr>
+          <a:xfrm>
+            <a:off x="6492240" y="1545336"/>
+            <a:ext cx="384048" cy="182880"/>
+          </a:xfrm>
+          <a:prstGeom prst="rect">
+            <a:avLst/>
+          </a:prstGeom>
+          <a:noFill/>
+        </p:spPr>
+        <p:txBody>
+          <a:bodyPr wrap="square" lIns="0" rIns="0" tIns="0" bIns="0">
+            <a:spAutoFit/>
+          </a:bodyPr>
+          <a:lstStyle/>
+          <a:p>
+            <a:pPr algn="ctr">
+              <a:spcAft>
+                <a:spcPts val="0"/>
+              </a:spcAft>
+            </a:pPr>
+            <a:r>
+              <a:rPr sz="900" b="1">
+                <a:solidFill>
+                  <a:srgbClr val="141414"/>
+                </a:solidFill>
+                <a:latin typeface="Arial"/>
+              </a:rPr>
+              <a:t>4U</a:t>
+            </a:r>
+          </a:p>
+        </p:txBody>
+      </p:sp>
+      <p:sp>
+        <p:nvSpPr>
+          <p:cNvPr id="32" name="Rectangle 31"/>
+          <p:cNvSpPr/>
+          <p:nvPr/>
+        </p:nvSpPr>
+        <p:spPr>
+          <a:xfrm>
+            <a:off x="6492240" y="1801368"/>
+            <a:ext cx="384048" cy="228600"/>
+          </a:xfrm>
+          <a:prstGeom prst="rect">
+            <a:avLst/>
+          </a:prstGeom>
+          <a:solidFill>
+            <a:srgbClr val="FFF2CC"/>
+          </a:solidFill>
+          <a:ln w="7620">
+            <a:solidFill>
+              <a:srgbClr val="8A8882"/>
+            </a:solidFill>
+          </a:ln>
+          <a:effectLst/>
+        </p:spPr>
+        <p:style>
+          <a:lnRef idx="1">
+            <a:schemeClr val="accent1"/>
+          </a:lnRef>
+          <a:fillRef idx="3">
+            <a:schemeClr val="accent1"/>
+          </a:fillRef>
+          <a:effectRef idx="2">
+            <a:schemeClr val="accent1"/>
+          </a:effectRef>
+          <a:fontRef idx="minor">
+            <a:schemeClr val="lt1"/>
+          </a:fontRef>
+        </p:style>
+        <p:txBody>
+          <a:bodyPr rtlCol="0" anchor="ctr"/>
+          <a:lstStyle/>
+          <a:p>
+            <a:pPr algn="ctr"/>
+          </a:p>
+        </p:txBody>
+      </p:sp>
+      <p:sp>
+        <p:nvSpPr>
+          <p:cNvPr id="33" name="TextBox 32"/>
+          <p:cNvSpPr txBox="1"/>
+          <p:nvPr/>
+        </p:nvSpPr>
+        <p:spPr>
+          <a:xfrm>
+            <a:off x="6492240" y="1828800"/>
+            <a:ext cx="384048" cy="182880"/>
+          </a:xfrm>
+          <a:prstGeom prst="rect">
+            <a:avLst/>
+          </a:prstGeom>
+          <a:noFill/>
+        </p:spPr>
+        <p:txBody>
+          <a:bodyPr wrap="square" lIns="0" rIns="0" tIns="0" bIns="0">
+            <a:spAutoFit/>
+          </a:bodyPr>
+          <a:lstStyle/>
+          <a:p>
+            <a:pPr algn="ctr">
+              <a:spcAft>
+                <a:spcPts val="0"/>
+              </a:spcAft>
+            </a:pPr>
+            <a:r>
+              <a:rPr sz="900" b="1">
+                <a:solidFill>
+                  <a:srgbClr val="141414"/>
+                </a:solidFill>
+                <a:latin typeface="Arial"/>
+              </a:rPr>
+              <a:t>2U</a:t>
+            </a:r>
+          </a:p>
+        </p:txBody>
+      </p:sp>
+      <p:sp>
+        <p:nvSpPr>
+          <p:cNvPr id="34" name="TextBox 33"/>
+          <p:cNvSpPr txBox="1"/>
+          <p:nvPr/>
+        </p:nvSpPr>
+        <p:spPr>
+          <a:xfrm>
+            <a:off x="7242048" y="1188720"/>
+            <a:ext cx="2743200" cy="237744"/>
+          </a:xfrm>
+          <a:prstGeom prst="rect">
+            <a:avLst/>
+          </a:prstGeom>
+          <a:noFill/>
+        </p:spPr>
+        <p:txBody>
+          <a:bodyPr wrap="square" lIns="0" rIns="0" tIns="0" bIns="0">
+            <a:spAutoFit/>
+          </a:bodyPr>
+          <a:lstStyle/>
+          <a:p>
+            <a:pPr algn="l">
+              <a:spcAft>
+                <a:spcPts val="0"/>
+              </a:spcAft>
+            </a:pPr>
+            <a:r>
+              <a:rPr sz="1000" b="0">
+                <a:solidFill>
+                  <a:srgbClr val="6B6B6B"/>
+                </a:solidFill>
+                <a:latin typeface="Arial"/>
+              </a:rPr>
+              <a:t/>
+            </a:r>
+            <a:r>
+              <a:rPr sz="1250" b="1">
+                <a:solidFill>
+                  <a:srgbClr val="141414"/>
+                </a:solidFill>
+                <a:latin typeface="Arial"/>
+              </a:rPr>
+              <a:t>FATP L10 6U</a:t>
+            </a:r>
+          </a:p>
+        </p:txBody>
+      </p:sp>
+      <p:cxnSp>
+        <p:nvCxnSpPr>
+          <p:cNvPr id="35" name="Connector 34"/>
+          <p:cNvCxnSpPr/>
+          <p:nvPr/>
+        </p:nvCxnSpPr>
+        <p:spPr>
+          <a:xfrm>
+            <a:off x="10204704" y="1133856"/>
+            <a:ext cx="0" cy="4672584"/>
+          </a:xfrm>
+          <a:prstGeom prst="line">
+            <a:avLst/>
+          </a:prstGeom>
+          <a:ln w="11430">
+            <a:solidFill>
+              <a:srgbClr val="B5B3AC"/>
+            </a:solidFill>
+            <a:prstDash val="dash"/>
+          </a:ln>
+        </p:spPr>
+        <p:style>
+          <a:lnRef idx="2">
+            <a:schemeClr val="accent1"/>
+          </a:lnRef>
+          <a:fillRef idx="0">
+            <a:schemeClr val="accent1"/>
+          </a:fillRef>
+          <a:effectRef idx="1">
+            <a:schemeClr val="accent1"/>
+          </a:effectRef>
+          <a:fontRef idx="minor">
+            <a:schemeClr val="tx1"/>
+          </a:fontRef>
+        </p:style>
+      </p:cxnSp>
+      <p:sp>
+        <p:nvSpPr>
+          <p:cNvPr id="36" name="Rounded Rectangle 35"/>
+          <p:cNvSpPr/>
+          <p:nvPr/>
+        </p:nvSpPr>
+        <p:spPr>
+          <a:xfrm>
+            <a:off x="7242048" y="2322576"/>
+            <a:ext cx="1389888" cy="640080"/>
+          </a:xfrm>
+          <a:prstGeom prst="roundRect">
+            <a:avLst/>
+          </a:prstGeom>
+          <a:solidFill>
+            <a:srgbClr val="F2ECD9"/>
+          </a:solidFill>
+          <a:ln w="12700">
+            <a:solidFill>
+              <a:srgbClr val="C9B46B"/>
+            </a:solidFill>
+          </a:ln>
+          <a:effectLst/>
+        </p:spPr>
+        <p:style>
+          <a:lnRef idx="1">
+            <a:schemeClr val="accent1"/>
+          </a:lnRef>
+          <a:fillRef idx="3">
+            <a:schemeClr val="accent1"/>
+          </a:fillRef>
+          <a:effectRef idx="2">
+            <a:schemeClr val="accent1"/>
+          </a:effectRef>
+          <a:fontRef idx="minor">
+            <a:schemeClr val="lt1"/>
+          </a:fontRef>
+        </p:style>
+        <p:txBody>
+          <a:bodyPr rtlCol="0" anchor="ctr"/>
+          <a:lstStyle/>
+          <a:p>
+            <a:pPr algn="ctr"/>
+          </a:p>
+        </p:txBody>
+      </p:sp>
+      <p:sp>
+        <p:nvSpPr>
+          <p:cNvPr id="37" name="TextBox 36"/>
+          <p:cNvSpPr txBox="1"/>
+          <p:nvPr/>
+        </p:nvSpPr>
+        <p:spPr>
+          <a:xfrm>
+            <a:off x="7324344" y="2386584"/>
+            <a:ext cx="1225296" cy="530352"/>
+          </a:xfrm>
+          <a:prstGeom prst="rect">
+            <a:avLst/>
+          </a:prstGeom>
+          <a:noFill/>
+        </p:spPr>
+        <p:txBody>
+          <a:bodyPr wrap="square" lIns="0" rIns="0" tIns="0" bIns="0">
+            <a:spAutoFit/>
+          </a:bodyPr>
+          <a:lstStyle/>
+          <a:p>
+            <a:pPr algn="l">
+              <a:spcAft>
+                <a:spcPts val="100"/>
+              </a:spcAft>
+            </a:pPr>
+            <a:r>
+              <a:rPr sz="1250" b="1">
+                <a:solidFill>
+                  <a:srgbClr val="141414"/>
+                </a:solidFill>
+                <a:latin typeface="Arial"/>
+              </a:rPr>
+              <a:t>FAT / SFT</a:t>
+            </a:r>
+          </a:p>
+          <a:p>
+            <a:pPr algn="l">
+              <a:spcAft>
+                <a:spcPts val="100"/>
+              </a:spcAft>
+            </a:pPr>
+            <a:r>
+              <a:rPr sz="1100" b="1">
+                <a:solidFill>
+                  <a:srgbClr val="141414"/>
+                </a:solidFill>
+                <a:latin typeface="Arial"/>
+              </a:rPr>
+              <a:t>FAT 2u · SFT 1u</a:t>
+            </a:r>
+          </a:p>
+          <a:p>
+            <a:pPr algn="l">
+              <a:spcAft>
+                <a:spcPts val="100"/>
+              </a:spcAft>
+            </a:pPr>
+            <a:r>
+              <a:rPr sz="800" b="0">
+                <a:solidFill>
+                  <a:srgbClr val="6B6B6B"/>
+                </a:solidFill>
+                <a:latin typeface="Arial"/>
+              </a:rPr>
+              <a:t>quantity only</a:t>
+            </a:r>
+          </a:p>
+        </p:txBody>
+      </p:sp>
+      <p:sp>
+        <p:nvSpPr>
+          <p:cNvPr id="38" name="Rounded Rectangle 37"/>
+          <p:cNvSpPr/>
+          <p:nvPr/>
+        </p:nvSpPr>
+        <p:spPr>
+          <a:xfrm>
+            <a:off x="7242048" y="3163824"/>
+            <a:ext cx="1389888" cy="640080"/>
+          </a:xfrm>
+          <a:prstGeom prst="roundRect">
+            <a:avLst/>
+          </a:prstGeom>
+          <a:solidFill>
+            <a:srgbClr val="F2ECD9"/>
+          </a:solidFill>
+          <a:ln w="12700">
+            <a:solidFill>
+              <a:srgbClr val="C9B46B"/>
+            </a:solidFill>
+          </a:ln>
+          <a:effectLst/>
+        </p:spPr>
+        <p:style>
+          <a:lnRef idx="1">
+            <a:schemeClr val="accent1"/>
+          </a:lnRef>
+          <a:fillRef idx="3">
+            <a:schemeClr val="accent1"/>
+          </a:fillRef>
+          <a:effectRef idx="2">
+            <a:schemeClr val="accent1"/>
+          </a:effectRef>
+          <a:fontRef idx="minor">
+            <a:schemeClr val="lt1"/>
+          </a:fontRef>
+        </p:style>
+        <p:txBody>
+          <a:bodyPr rtlCol="0" anchor="ctr"/>
+          <a:lstStyle/>
+          <a:p>
+            <a:pPr algn="ctr"/>
+          </a:p>
+        </p:txBody>
+      </p:sp>
+      <p:sp>
+        <p:nvSpPr>
+          <p:cNvPr id="39" name="TextBox 38"/>
+          <p:cNvSpPr txBox="1"/>
+          <p:nvPr/>
+        </p:nvSpPr>
+        <p:spPr>
+          <a:xfrm>
+            <a:off x="7324344" y="3227832"/>
+            <a:ext cx="1225296" cy="530352"/>
+          </a:xfrm>
+          <a:prstGeom prst="rect">
+            <a:avLst/>
+          </a:prstGeom>
+          <a:noFill/>
+        </p:spPr>
+        <p:txBody>
+          <a:bodyPr wrap="square" lIns="0" rIns="0" tIns="0" bIns="0">
+            <a:spAutoFit/>
+          </a:bodyPr>
+          <a:lstStyle/>
+          <a:p>
+            <a:pPr algn="l">
+              <a:spcAft>
+                <a:spcPts val="100"/>
+              </a:spcAft>
+            </a:pPr>
+            <a:r>
+              <a:rPr sz="1250" b="1">
+                <a:solidFill>
+                  <a:srgbClr val="141414"/>
+                </a:solidFill>
+                <a:latin typeface="Arial"/>
+              </a:rPr>
+              <a:t>2U</a:t>
+            </a:r>
+          </a:p>
+          <a:p>
+            <a:pPr algn="l">
+              <a:spcAft>
+                <a:spcPts val="100"/>
+              </a:spcAft>
+            </a:pPr>
+            <a:r>
+              <a:rPr sz="1300" b="1">
+                <a:solidFill>
+                  <a:srgbClr val="141414"/>
+                </a:solidFill>
+                <a:latin typeface="Arial"/>
+              </a:rPr>
+              <a:t>3 units</a:t>
+            </a:r>
+          </a:p>
+          <a:p>
+            <a:pPr algn="l">
+              <a:spcAft>
+                <a:spcPts val="100"/>
+              </a:spcAft>
+            </a:pPr>
+            <a:r>
+              <a:rPr sz="800" b="0">
+                <a:solidFill>
+                  <a:srgbClr val="6B6B6B"/>
+                </a:solidFill>
+                <a:latin typeface="Arial"/>
+              </a:rPr>
+              <a:t>quantity only</a:t>
+            </a:r>
+          </a:p>
+        </p:txBody>
+      </p:sp>
+      <p:sp>
+        <p:nvSpPr>
+          <p:cNvPr id="40" name="Rounded Rectangle 39"/>
+          <p:cNvSpPr/>
+          <p:nvPr/>
+        </p:nvSpPr>
+        <p:spPr>
+          <a:xfrm>
+            <a:off x="7242048" y="4005072"/>
+            <a:ext cx="1389888" cy="640080"/>
+          </a:xfrm>
+          <a:prstGeom prst="roundRect">
+            <a:avLst/>
+          </a:prstGeom>
+          <a:solidFill>
+            <a:srgbClr val="D9D9D9"/>
+          </a:solidFill>
+          <a:ln w="12700">
+            <a:solidFill>
+              <a:srgbClr val="A5A5A5"/>
+            </a:solidFill>
+          </a:ln>
+          <a:effectLst/>
+        </p:spPr>
+        <p:style>
+          <a:lnRef idx="1">
+            <a:schemeClr val="accent1"/>
+          </a:lnRef>
+          <a:fillRef idx="3">
+            <a:schemeClr val="accent1"/>
+          </a:fillRef>
+          <a:effectRef idx="2">
+            <a:schemeClr val="accent1"/>
+          </a:effectRef>
+          <a:fontRef idx="minor">
+            <a:schemeClr val="lt1"/>
+          </a:fontRef>
+        </p:style>
+        <p:txBody>
+          <a:bodyPr rtlCol="0" anchor="ctr"/>
+          <a:lstStyle/>
+          <a:p>
+            <a:pPr algn="ctr"/>
+          </a:p>
+        </p:txBody>
+      </p:sp>
+      <p:sp>
+        <p:nvSpPr>
+          <p:cNvPr id="41" name="TextBox 40"/>
+          <p:cNvSpPr txBox="1"/>
+          <p:nvPr/>
+        </p:nvSpPr>
+        <p:spPr>
+          <a:xfrm>
+            <a:off x="7324344" y="4069080"/>
+            <a:ext cx="1225296" cy="530352"/>
+          </a:xfrm>
+          <a:prstGeom prst="rect">
+            <a:avLst/>
+          </a:prstGeom>
+          <a:noFill/>
+        </p:spPr>
+        <p:txBody>
+          <a:bodyPr wrap="square" lIns="0" rIns="0" tIns="0" bIns="0">
+            <a:spAutoFit/>
+          </a:bodyPr>
+          <a:lstStyle/>
+          <a:p>
+            <a:pPr algn="l">
+              <a:spcAft>
+                <a:spcPts val="100"/>
+              </a:spcAft>
+            </a:pPr>
+            <a:r>
+              <a:rPr sz="1250" b="0">
+                <a:solidFill>
+                  <a:srgbClr val="141414"/>
+                </a:solidFill>
+                <a:latin typeface="Arial"/>
+              </a:rPr>
+              <a:t>ASSY</a:t>
+            </a:r>
+          </a:p>
+        </p:txBody>
+      </p:sp>
+      <p:sp>
+        <p:nvSpPr>
+          <p:cNvPr id="42" name="Rounded Rectangle 41"/>
+          <p:cNvSpPr/>
+          <p:nvPr/>
+        </p:nvSpPr>
+        <p:spPr>
+          <a:xfrm>
+            <a:off x="8741664" y="2322576"/>
+            <a:ext cx="1298448" cy="640080"/>
+          </a:xfrm>
+          <a:prstGeom prst="roundRect">
+            <a:avLst/>
+          </a:prstGeom>
+          <a:solidFill>
+            <a:srgbClr val="F2ECD9"/>
+          </a:solidFill>
+          <a:ln w="12700">
+            <a:solidFill>
+              <a:srgbClr val="C9B46B"/>
+            </a:solidFill>
+          </a:ln>
+          <a:effectLst/>
+        </p:spPr>
+        <p:style>
+          <a:lnRef idx="1">
+            <a:schemeClr val="accent1"/>
+          </a:lnRef>
+          <a:fillRef idx="3">
+            <a:schemeClr val="accent1"/>
+          </a:fillRef>
+          <a:effectRef idx="2">
+            <a:schemeClr val="accent1"/>
+          </a:effectRef>
+          <a:fontRef idx="minor">
+            <a:schemeClr val="lt1"/>
+          </a:fontRef>
+        </p:style>
+        <p:txBody>
+          <a:bodyPr rtlCol="0" anchor="ctr"/>
+          <a:lstStyle/>
+          <a:p>
+            <a:pPr algn="ctr"/>
+          </a:p>
+        </p:txBody>
+      </p:sp>
+      <p:sp>
+        <p:nvSpPr>
+          <p:cNvPr id="43" name="TextBox 42"/>
+          <p:cNvSpPr txBox="1"/>
+          <p:nvPr/>
+        </p:nvSpPr>
+        <p:spPr>
+          <a:xfrm>
+            <a:off x="8823960" y="2386584"/>
+            <a:ext cx="1133856" cy="530352"/>
+          </a:xfrm>
+          <a:prstGeom prst="rect">
+            <a:avLst/>
+          </a:prstGeom>
+          <a:noFill/>
+        </p:spPr>
+        <p:txBody>
+          <a:bodyPr wrap="square" lIns="0" rIns="0" tIns="0" bIns="0">
+            <a:spAutoFit/>
+          </a:bodyPr>
+          <a:lstStyle/>
+          <a:p>
+            <a:pPr algn="l">
+              <a:spcAft>
+                <a:spcPts val="100"/>
+              </a:spcAft>
+            </a:pPr>
+            <a:r>
+              <a:rPr sz="1250" b="1">
+                <a:solidFill>
+                  <a:srgbClr val="141414"/>
+                </a:solidFill>
+                <a:latin typeface="Arial"/>
+              </a:rPr>
+              <a:t>Runin</a:t>
+            </a:r>
+          </a:p>
+          <a:p>
+            <a:pPr algn="l">
+              <a:spcAft>
+                <a:spcPts val="100"/>
+              </a:spcAft>
+            </a:pPr>
+            <a:r>
+              <a:rPr sz="1300" b="1">
+                <a:solidFill>
+                  <a:srgbClr val="141414"/>
+                </a:solidFill>
+                <a:latin typeface="Arial"/>
+              </a:rPr>
+              <a:t>1 unit</a:t>
+            </a:r>
+          </a:p>
+          <a:p>
+            <a:pPr algn="l">
+              <a:spcAft>
+                <a:spcPts val="100"/>
+              </a:spcAft>
+            </a:pPr>
+            <a:r>
+              <a:rPr sz="800" b="0">
+                <a:solidFill>
+                  <a:srgbClr val="6B6B6B"/>
+                </a:solidFill>
+                <a:latin typeface="Arial"/>
+              </a:rPr>
+              <a:t>quantity only</a:t>
+            </a:r>
+          </a:p>
+        </p:txBody>
+      </p:sp>
+      <p:sp>
+        <p:nvSpPr>
+          <p:cNvPr id="44" name="TextBox 43"/>
+          <p:cNvSpPr txBox="1"/>
+          <p:nvPr/>
+        </p:nvSpPr>
+        <p:spPr>
+          <a:xfrm>
+            <a:off x="10369296" y="1188720"/>
+            <a:ext cx="1655064" cy="237744"/>
+          </a:xfrm>
+          <a:prstGeom prst="rect">
+            <a:avLst/>
+          </a:prstGeom>
+          <a:noFill/>
+        </p:spPr>
+        <p:txBody>
+          <a:bodyPr wrap="square" lIns="0" rIns="0" tIns="0" bIns="0">
+            <a:spAutoFit/>
+          </a:bodyPr>
+          <a:lstStyle/>
+          <a:p>
+            <a:pPr algn="l">
+              <a:spcAft>
+                <a:spcPts val="0"/>
+              </a:spcAft>
+            </a:pPr>
+            <a:r>
+              <a:rPr sz="1000" b="0">
+                <a:solidFill>
+                  <a:srgbClr val="6B6B6B"/>
+                </a:solidFill>
+                <a:latin typeface="Arial"/>
+              </a:rPr>
+              <a:t/>
+            </a:r>
+            <a:r>
+              <a:rPr sz="1250" b="1">
+                <a:solidFill>
+                  <a:srgbClr val="141414"/>
+                </a:solidFill>
+                <a:latin typeface="Arial"/>
+              </a:rPr>
+              <a:t>Rack L11</a:t>
+            </a:r>
+          </a:p>
+        </p:txBody>
+      </p:sp>
+      <p:sp>
+        <p:nvSpPr>
+          <p:cNvPr id="45" name="Rounded Rectangle 44"/>
+          <p:cNvSpPr/>
+          <p:nvPr/>
+        </p:nvSpPr>
+        <p:spPr>
+          <a:xfrm>
+            <a:off x="10369296" y="2322576"/>
+            <a:ext cx="1389888" cy="640080"/>
+          </a:xfrm>
+          <a:prstGeom prst="roundRect">
+            <a:avLst/>
+          </a:prstGeom>
+          <a:solidFill>
+            <a:srgbClr val="D9D9D9"/>
+          </a:solidFill>
+          <a:ln w="12700">
+            <a:solidFill>
+              <a:srgbClr val="A5A5A5"/>
+            </a:solidFill>
+          </a:ln>
+          <a:effectLst/>
+        </p:spPr>
+        <p:style>
+          <a:lnRef idx="1">
+            <a:schemeClr val="accent1"/>
+          </a:lnRef>
+          <a:fillRef idx="3">
+            <a:schemeClr val="accent1"/>
+          </a:fillRef>
+          <a:effectRef idx="2">
+            <a:schemeClr val="accent1"/>
+          </a:effectRef>
+          <a:fontRef idx="minor">
+            <a:schemeClr val="lt1"/>
+          </a:fontRef>
+        </p:style>
+        <p:txBody>
+          <a:bodyPr rtlCol="0" anchor="ctr"/>
+          <a:lstStyle/>
+          <a:p>
+            <a:pPr algn="ctr"/>
+          </a:p>
+        </p:txBody>
+      </p:sp>
+      <p:sp>
+        <p:nvSpPr>
+          <p:cNvPr id="46" name="TextBox 45"/>
+          <p:cNvSpPr txBox="1"/>
+          <p:nvPr/>
+        </p:nvSpPr>
+        <p:spPr>
+          <a:xfrm>
+            <a:off x="10451592" y="2386584"/>
+            <a:ext cx="1225296" cy="530352"/>
+          </a:xfrm>
+          <a:prstGeom prst="rect">
+            <a:avLst/>
+          </a:prstGeom>
+          <a:noFill/>
+        </p:spPr>
+        <p:txBody>
+          <a:bodyPr wrap="square" lIns="0" rIns="0" tIns="0" bIns="0">
+            <a:spAutoFit/>
+          </a:bodyPr>
+          <a:lstStyle/>
+          <a:p>
+            <a:pPr algn="l">
+              <a:spcAft>
+                <a:spcPts val="100"/>
+              </a:spcAft>
+            </a:pPr>
+            <a:r>
+              <a:rPr sz="1250" b="0">
+                <a:solidFill>
+                  <a:srgbClr val="141414"/>
+                </a:solidFill>
+                <a:latin typeface="Arial"/>
+              </a:rPr>
+              <a:t>ASSY</a:t>
+            </a:r>
+          </a:p>
+        </p:txBody>
+      </p:sp>
+      <p:sp>
+        <p:nvSpPr>
+          <p:cNvPr id="47" name="Rounded Rectangle 46"/>
+          <p:cNvSpPr/>
+          <p:nvPr/>
+        </p:nvSpPr>
+        <p:spPr>
+          <a:xfrm>
+            <a:off x="10369296" y="3163824"/>
+            <a:ext cx="1389888" cy="640080"/>
+          </a:xfrm>
+          <a:prstGeom prst="roundRect">
+            <a:avLst/>
+          </a:prstGeom>
+          <a:solidFill>
+            <a:srgbClr val="F2ECD9"/>
+          </a:solidFill>
+          <a:ln w="12700">
+            <a:solidFill>
+              <a:srgbClr val="C9B46B"/>
+            </a:solidFill>
+          </a:ln>
+          <a:effectLst/>
+        </p:spPr>
+        <p:style>
+          <a:lnRef idx="1">
+            <a:schemeClr val="accent1"/>
+          </a:lnRef>
+          <a:fillRef idx="3">
+            <a:schemeClr val="accent1"/>
+          </a:fillRef>
+          <a:effectRef idx="2">
+            <a:schemeClr val="accent1"/>
+          </a:effectRef>
+          <a:fontRef idx="minor">
+            <a:schemeClr val="lt1"/>
+          </a:fontRef>
+        </p:style>
+        <p:txBody>
+          <a:bodyPr rtlCol="0" anchor="ctr"/>
+          <a:lstStyle/>
+          <a:p>
+            <a:pPr algn="ctr"/>
+          </a:p>
+        </p:txBody>
+      </p:sp>
+      <p:sp>
+        <p:nvSpPr>
+          <p:cNvPr id="48" name="TextBox 47"/>
+          <p:cNvSpPr txBox="1"/>
+          <p:nvPr/>
+        </p:nvSpPr>
+        <p:spPr>
+          <a:xfrm>
+            <a:off x="10451592" y="3227832"/>
+            <a:ext cx="1225296" cy="530352"/>
+          </a:xfrm>
+          <a:prstGeom prst="rect">
+            <a:avLst/>
+          </a:prstGeom>
+          <a:noFill/>
+        </p:spPr>
+        <p:txBody>
+          <a:bodyPr wrap="square" lIns="0" rIns="0" tIns="0" bIns="0">
+            <a:spAutoFit/>
+          </a:bodyPr>
+          <a:lstStyle/>
+          <a:p>
+            <a:pPr algn="l">
+              <a:spcAft>
+                <a:spcPts val="100"/>
+              </a:spcAft>
+            </a:pPr>
+            <a:r>
+              <a:rPr sz="1250" b="1">
+                <a:solidFill>
+                  <a:srgbClr val="141414"/>
+                </a:solidFill>
+                <a:latin typeface="Arial"/>
+              </a:rPr>
+              <a:t>FAT / SFT</a:t>
+            </a:r>
+          </a:p>
+          <a:p>
+            <a:pPr algn="l">
+              <a:spcAft>
+                <a:spcPts val="100"/>
+              </a:spcAft>
+            </a:pPr>
+            <a:r>
+              <a:rPr sz="1300" b="1">
+                <a:solidFill>
+                  <a:srgbClr val="141414"/>
+                </a:solidFill>
+                <a:latin typeface="Arial"/>
+              </a:rPr>
+              <a:t>2 units</a:t>
+            </a:r>
+          </a:p>
+          <a:p>
+            <a:pPr algn="l">
+              <a:spcAft>
+                <a:spcPts val="100"/>
+              </a:spcAft>
+            </a:pPr>
+            <a:r>
+              <a:rPr sz="800" b="0">
+                <a:solidFill>
+                  <a:srgbClr val="6B6B6B"/>
+                </a:solidFill>
+                <a:latin typeface="Arial"/>
+              </a:rPr>
+              <a:t>quantity only</a:t>
+            </a:r>
+          </a:p>
+        </p:txBody>
+      </p:sp>
+      <p:sp>
+        <p:nvSpPr>
+          <p:cNvPr id="49" name="Rounded Rectangle 48"/>
+          <p:cNvSpPr/>
+          <p:nvPr/>
+        </p:nvSpPr>
+        <p:spPr>
+          <a:xfrm>
+            <a:off x="10369296" y="4005072"/>
+            <a:ext cx="1389888" cy="640080"/>
+          </a:xfrm>
+          <a:prstGeom prst="roundRect">
+            <a:avLst/>
+          </a:prstGeom>
+          <a:solidFill>
+            <a:srgbClr val="D9D9D9"/>
+          </a:solidFill>
+          <a:ln w="12700">
+            <a:solidFill>
+              <a:srgbClr val="A5A5A5"/>
+            </a:solidFill>
+          </a:ln>
+          <a:effectLst/>
+        </p:spPr>
+        <p:style>
+          <a:lnRef idx="1">
+            <a:schemeClr val="accent1"/>
+          </a:lnRef>
+          <a:fillRef idx="3">
+            <a:schemeClr val="accent1"/>
+          </a:fillRef>
+          <a:effectRef idx="2">
+            <a:schemeClr val="accent1"/>
+          </a:effectRef>
+          <a:fontRef idx="minor">
+            <a:schemeClr val="lt1"/>
+          </a:fontRef>
+        </p:style>
+        <p:txBody>
+          <a:bodyPr rtlCol="0" anchor="ctr"/>
+          <a:lstStyle/>
+          <a:p>
+            <a:pPr algn="ctr"/>
+          </a:p>
+        </p:txBody>
+      </p:sp>
+      <p:sp>
+        <p:nvSpPr>
+          <p:cNvPr id="50" name="TextBox 49"/>
+          <p:cNvSpPr txBox="1"/>
+          <p:nvPr/>
+        </p:nvSpPr>
+        <p:spPr>
+          <a:xfrm>
+            <a:off x="10451592" y="4069080"/>
+            <a:ext cx="1225296" cy="530352"/>
+          </a:xfrm>
+          <a:prstGeom prst="rect">
+            <a:avLst/>
+          </a:prstGeom>
+          <a:noFill/>
+        </p:spPr>
+        <p:txBody>
+          <a:bodyPr wrap="square" lIns="0" rIns="0" tIns="0" bIns="0">
+            <a:spAutoFit/>
+          </a:bodyPr>
+          <a:lstStyle/>
+          <a:p>
+            <a:pPr algn="l">
+              <a:spcAft>
+                <a:spcPts val="100"/>
+              </a:spcAft>
+            </a:pPr>
+            <a:r>
+              <a:rPr sz="1250" b="1">
+                <a:solidFill>
+                  <a:srgbClr val="141414"/>
+                </a:solidFill>
+                <a:latin typeface="Arial"/>
+              </a:rPr>
+              <a:t>Runin</a:t>
+            </a:r>
+          </a:p>
+          <a:p>
+            <a:pPr algn="l">
+              <a:spcAft>
+                <a:spcPts val="100"/>
+              </a:spcAft>
+            </a:pPr>
+            <a:r>
+              <a:rPr sz="850" b="0">
+                <a:solidFill>
+                  <a:srgbClr val="6B6B6B"/>
+                </a:solidFill>
+                <a:latin typeface="Arial"/>
+              </a:rPr>
+              <a:t>counted with FAT / SFT</a:t>
+            </a:r>
+          </a:p>
+        </p:txBody>
+      </p:sp>
+      <p:sp>
+        <p:nvSpPr>
+          <p:cNvPr id="51" name="Rounded Rectangle 50"/>
+          <p:cNvSpPr/>
+          <p:nvPr/>
+        </p:nvSpPr>
+        <p:spPr>
+          <a:xfrm>
+            <a:off x="10369296" y="4846320"/>
+            <a:ext cx="1389888" cy="640080"/>
+          </a:xfrm>
+          <a:prstGeom prst="roundRect">
+            <a:avLst/>
+          </a:prstGeom>
+          <a:solidFill>
+            <a:srgbClr val="DAE8FC"/>
+          </a:solidFill>
+          <a:ln w="12700">
+            <a:solidFill>
+              <a:srgbClr val="7EA6D9"/>
+            </a:solidFill>
+          </a:ln>
+          <a:effectLst/>
+        </p:spPr>
+        <p:style>
+          <a:lnRef idx="1">
+            <a:schemeClr val="accent1"/>
+          </a:lnRef>
+          <a:fillRef idx="3">
+            <a:schemeClr val="accent1"/>
+          </a:fillRef>
+          <a:effectRef idx="2">
+            <a:schemeClr val="accent1"/>
+          </a:effectRef>
+          <a:fontRef idx="minor">
+            <a:schemeClr val="lt1"/>
+          </a:fontRef>
+        </p:style>
+        <p:txBody>
+          <a:bodyPr rtlCol="0" anchor="ctr"/>
+          <a:lstStyle/>
+          <a:p>
+            <a:pPr algn="ctr"/>
+          </a:p>
+        </p:txBody>
+      </p:sp>
+      <p:sp>
+        <p:nvSpPr>
+          <p:cNvPr id="52" name="TextBox 51"/>
+          <p:cNvSpPr txBox="1"/>
+          <p:nvPr/>
+        </p:nvSpPr>
+        <p:spPr>
+          <a:xfrm>
+            <a:off x="10451592" y="4910328"/>
+            <a:ext cx="1225296" cy="530352"/>
+          </a:xfrm>
+          <a:prstGeom prst="rect">
+            <a:avLst/>
+          </a:prstGeom>
+          <a:noFill/>
+        </p:spPr>
+        <p:txBody>
+          <a:bodyPr wrap="square" lIns="0" rIns="0" tIns="0" bIns="0">
+            <a:spAutoFit/>
+          </a:bodyPr>
+          <a:lstStyle/>
+          <a:p>
+            <a:pPr algn="l">
+              <a:spcAft>
+                <a:spcPts val="100"/>
+              </a:spcAft>
+            </a:pPr>
+            <a:r>
+              <a:rPr sz="1250" b="0">
+                <a:solidFill>
+                  <a:srgbClr val="141414"/>
+                </a:solidFill>
+                <a:latin typeface="Arial"/>
+              </a:rPr>
+              <a:t>Pack</a:t>
+            </a:r>
+          </a:p>
+        </p:txBody>
+      </p:sp>
+      <p:cxnSp>
+        <p:nvCxnSpPr>
+          <p:cNvPr id="53" name="Connector 52"/>
+          <p:cNvCxnSpPr/>
+          <p:nvPr/>
+        </p:nvCxnSpPr>
+        <p:spPr>
+          <a:xfrm>
+            <a:off x="1307592" y="2121408"/>
+            <a:ext cx="0" cy="201168"/>
+          </a:xfrm>
+          <a:prstGeom prst="line">
+            <a:avLst/>
+          </a:prstGeom>
+          <a:ln w="13970">
+            <a:solidFill>
+              <a:srgbClr val="8A8882"/>
+            </a:solidFill>
+            <a:tailEnd type="triangle" w="sm" len="sm"/>
+          </a:ln>
+        </p:spPr>
+        <p:style>
+          <a:lnRef idx="2">
+            <a:schemeClr val="accent1"/>
+          </a:lnRef>
+          <a:fillRef idx="0">
+            <a:schemeClr val="accent1"/>
+          </a:fillRef>
+          <a:effectRef idx="1">
+            <a:schemeClr val="accent1"/>
+          </a:effectRef>
+          <a:fontRef idx="minor">
+            <a:schemeClr val="tx1"/>
+          </a:fontRef>
+        </p:style>
+      </p:cxnSp>
+      <p:cxnSp>
+        <p:nvCxnSpPr>
+          <p:cNvPr id="54" name="Connector 53"/>
+          <p:cNvCxnSpPr/>
+          <p:nvPr/>
+        </p:nvCxnSpPr>
+        <p:spPr>
+          <a:xfrm>
+            <a:off x="1307592" y="2962656"/>
+            <a:ext cx="0" cy="201168"/>
+          </a:xfrm>
+          <a:prstGeom prst="line">
+            <a:avLst/>
+          </a:prstGeom>
+          <a:ln w="13970">
+            <a:solidFill>
+              <a:srgbClr val="8A8882"/>
+            </a:solidFill>
+            <a:tailEnd type="triangle" w="sm" len="sm"/>
+          </a:ln>
+        </p:spPr>
+        <p:style>
+          <a:lnRef idx="2">
+            <a:schemeClr val="accent1"/>
+          </a:lnRef>
+          <a:fillRef idx="0">
+            <a:schemeClr val="accent1"/>
+          </a:fillRef>
+          <a:effectRef idx="1">
+            <a:schemeClr val="accent1"/>
+          </a:effectRef>
+          <a:fontRef idx="minor">
+            <a:schemeClr val="tx1"/>
+          </a:fontRef>
+        </p:style>
+      </p:cxnSp>
+      <p:cxnSp>
+        <p:nvCxnSpPr>
+          <p:cNvPr id="55" name="Connector 54"/>
+          <p:cNvCxnSpPr/>
+          <p:nvPr/>
+        </p:nvCxnSpPr>
+        <p:spPr>
+          <a:xfrm>
+            <a:off x="1307592" y="3803904"/>
+            <a:ext cx="0" cy="201168"/>
+          </a:xfrm>
+          <a:prstGeom prst="line">
+            <a:avLst/>
+          </a:prstGeom>
+          <a:ln w="13970">
+            <a:solidFill>
+              <a:srgbClr val="8A8882"/>
+            </a:solidFill>
+            <a:tailEnd type="triangle" w="sm" len="sm"/>
+          </a:ln>
+        </p:spPr>
+        <p:style>
+          <a:lnRef idx="2">
+            <a:schemeClr val="accent1"/>
+          </a:lnRef>
+          <a:fillRef idx="0">
+            <a:schemeClr val="accent1"/>
+          </a:fillRef>
+          <a:effectRef idx="1">
+            <a:schemeClr val="accent1"/>
+          </a:effectRef>
+          <a:fontRef idx="minor">
+            <a:schemeClr val="tx1"/>
+          </a:fontRef>
+        </p:style>
+      </p:cxnSp>
+      <p:cxnSp>
+        <p:nvCxnSpPr>
+          <p:cNvPr id="56" name="Connector 55"/>
+          <p:cNvCxnSpPr/>
+          <p:nvPr/>
+        </p:nvCxnSpPr>
+        <p:spPr>
+          <a:xfrm>
+            <a:off x="1956815" y="3483864"/>
+            <a:ext cx="1069849" cy="0"/>
+          </a:xfrm>
+          <a:prstGeom prst="line">
+            <a:avLst/>
+          </a:prstGeom>
+          <a:ln w="13970">
+            <a:solidFill>
+              <a:srgbClr val="8A8882"/>
+            </a:solidFill>
+          </a:ln>
+        </p:spPr>
+        <p:style>
+          <a:lnRef idx="2">
+            <a:schemeClr val="accent1"/>
+          </a:lnRef>
+          <a:fillRef idx="0">
+            <a:schemeClr val="accent1"/>
+          </a:fillRef>
+          <a:effectRef idx="1">
+            <a:schemeClr val="accent1"/>
+          </a:effectRef>
+          <a:fontRef idx="minor">
+            <a:schemeClr val="tx1"/>
+          </a:fontRef>
+        </p:style>
+      </p:cxnSp>
+      <p:cxnSp>
+        <p:nvCxnSpPr>
+          <p:cNvPr id="57" name="Connector 56"/>
+          <p:cNvCxnSpPr/>
+          <p:nvPr/>
+        </p:nvCxnSpPr>
+        <p:spPr>
+          <a:xfrm flipV="1">
+            <a:off x="3026664" y="2121408"/>
+            <a:ext cx="0" cy="1362456"/>
+          </a:xfrm>
+          <a:prstGeom prst="line">
+            <a:avLst/>
+          </a:prstGeom>
+          <a:ln w="13970">
+            <a:solidFill>
+              <a:srgbClr val="8A8882"/>
+            </a:solidFill>
+            <a:tailEnd type="triangle" w="sm" len="sm"/>
+          </a:ln>
+        </p:spPr>
+        <p:style>
+          <a:lnRef idx="2">
+            <a:schemeClr val="accent1"/>
+          </a:lnRef>
+          <a:fillRef idx="0">
+            <a:schemeClr val="accent1"/>
+          </a:fillRef>
+          <a:effectRef idx="1">
+            <a:schemeClr val="accent1"/>
+          </a:effectRef>
+          <a:fontRef idx="minor">
+            <a:schemeClr val="tx1"/>
+          </a:fontRef>
+        </p:style>
+      </p:cxnSp>
+      <p:cxnSp>
+        <p:nvCxnSpPr>
+          <p:cNvPr id="58" name="Connector 57"/>
+          <p:cNvCxnSpPr/>
+          <p:nvPr/>
+        </p:nvCxnSpPr>
+        <p:spPr>
+          <a:xfrm>
+            <a:off x="3026664" y="2121408"/>
+            <a:ext cx="0" cy="1883664"/>
+          </a:xfrm>
+          <a:prstGeom prst="line">
+            <a:avLst/>
+          </a:prstGeom>
+          <a:ln w="13970">
+            <a:solidFill>
+              <a:srgbClr val="8A8882"/>
+            </a:solidFill>
+            <a:tailEnd type="triangle" w="sm" len="sm"/>
+          </a:ln>
+        </p:spPr>
+        <p:style>
+          <a:lnRef idx="2">
+            <a:schemeClr val="accent1"/>
+          </a:lnRef>
+          <a:fillRef idx="0">
+            <a:schemeClr val="accent1"/>
+          </a:fillRef>
+          <a:effectRef idx="1">
+            <a:schemeClr val="accent1"/>
+          </a:effectRef>
+          <a:fontRef idx="minor">
+            <a:schemeClr val="tx1"/>
+          </a:fontRef>
+        </p:style>
+      </p:cxnSp>
+      <p:sp>
+        <p:nvSpPr>
+          <p:cNvPr id="59" name="TextBox 58"/>
+          <p:cNvSpPr txBox="1"/>
+          <p:nvPr/>
+        </p:nvSpPr>
+        <p:spPr>
+          <a:xfrm>
+            <a:off x="3072384" y="3822192"/>
+            <a:ext cx="822960" cy="182880"/>
+          </a:xfrm>
+          <a:prstGeom prst="rect">
+            <a:avLst/>
+          </a:prstGeom>
+          <a:noFill/>
+        </p:spPr>
+        <p:txBody>
+          <a:bodyPr wrap="square" lIns="0" rIns="0" tIns="0" bIns="0">
+            <a:spAutoFit/>
+          </a:bodyPr>
+          <a:lstStyle/>
+          <a:p>
+            <a:pPr algn="l">
+              <a:spcAft>
+                <a:spcPts val="0"/>
+              </a:spcAft>
+            </a:pPr>
+            <a:r>
+              <a:rPr sz="850" b="0">
+                <a:solidFill>
+                  <a:srgbClr val="6B6B6B"/>
+                </a:solidFill>
+                <a:latin typeface="Arial"/>
+              </a:rPr>
+              <a:t>VBB</a:t>
+            </a:r>
+          </a:p>
+        </p:txBody>
+      </p:sp>
+      <p:cxnSp>
+        <p:nvCxnSpPr>
+          <p:cNvPr id="60" name="Connector 59"/>
+          <p:cNvCxnSpPr/>
+          <p:nvPr/>
+        </p:nvCxnSpPr>
+        <p:spPr>
+          <a:xfrm>
+            <a:off x="3675887" y="4325112"/>
+            <a:ext cx="813817" cy="0"/>
+          </a:xfrm>
+          <a:prstGeom prst="line">
+            <a:avLst/>
+          </a:prstGeom>
+          <a:ln w="13970">
+            <a:solidFill>
+              <a:srgbClr val="8A8882"/>
+            </a:solidFill>
+          </a:ln>
+        </p:spPr>
+        <p:style>
+          <a:lnRef idx="2">
+            <a:schemeClr val="accent1"/>
+          </a:lnRef>
+          <a:fillRef idx="0">
+            <a:schemeClr val="accent1"/>
+          </a:fillRef>
+          <a:effectRef idx="1">
+            <a:schemeClr val="accent1"/>
+          </a:effectRef>
+          <a:fontRef idx="minor">
+            <a:schemeClr val="tx1"/>
+          </a:fontRef>
+        </p:style>
+      </p:cxnSp>
+      <p:cxnSp>
+        <p:nvCxnSpPr>
+          <p:cNvPr id="61" name="Connector 60"/>
+          <p:cNvCxnSpPr/>
+          <p:nvPr/>
+        </p:nvCxnSpPr>
+        <p:spPr>
+          <a:xfrm flipV="1">
+            <a:off x="4489704" y="3803904"/>
+            <a:ext cx="0" cy="521208"/>
+          </a:xfrm>
+          <a:prstGeom prst="line">
+            <a:avLst/>
+          </a:prstGeom>
+          <a:ln w="13970">
+            <a:solidFill>
+              <a:srgbClr val="8A8882"/>
+            </a:solidFill>
+            <a:tailEnd type="triangle" w="sm" len="sm"/>
+          </a:ln>
+        </p:spPr>
+        <p:style>
+          <a:lnRef idx="2">
+            <a:schemeClr val="accent1"/>
+          </a:lnRef>
+          <a:fillRef idx="0">
+            <a:schemeClr val="accent1"/>
+          </a:fillRef>
+          <a:effectRef idx="1">
+            <a:schemeClr val="accent1"/>
+          </a:effectRef>
+          <a:fontRef idx="minor">
+            <a:schemeClr val="tx1"/>
+          </a:fontRef>
+        </p:style>
+      </p:cxnSp>
+      <p:cxnSp>
+        <p:nvCxnSpPr>
+          <p:cNvPr id="62" name="Connector 61"/>
+          <p:cNvCxnSpPr/>
+          <p:nvPr/>
+        </p:nvCxnSpPr>
+        <p:spPr>
+          <a:xfrm flipV="1">
+            <a:off x="4489704" y="2962656"/>
+            <a:ext cx="0" cy="201168"/>
+          </a:xfrm>
+          <a:prstGeom prst="line">
+            <a:avLst/>
+          </a:prstGeom>
+          <a:ln w="13970">
+            <a:solidFill>
+              <a:srgbClr val="8A8882"/>
+            </a:solidFill>
+            <a:tailEnd type="triangle" w="sm" len="sm"/>
+          </a:ln>
+        </p:spPr>
+        <p:style>
+          <a:lnRef idx="2">
+            <a:schemeClr val="accent1"/>
+          </a:lnRef>
+          <a:fillRef idx="0">
+            <a:schemeClr val="accent1"/>
+          </a:fillRef>
+          <a:effectRef idx="1">
+            <a:schemeClr val="accent1"/>
+          </a:effectRef>
+          <a:fontRef idx="minor">
+            <a:schemeClr val="tx1"/>
+          </a:fontRef>
+        </p:style>
+      </p:cxnSp>
+      <p:cxnSp>
+        <p:nvCxnSpPr>
+          <p:cNvPr id="63" name="Connector 62"/>
+          <p:cNvCxnSpPr/>
+          <p:nvPr/>
+        </p:nvCxnSpPr>
+        <p:spPr>
+          <a:xfrm flipV="1">
+            <a:off x="4489704" y="2121408"/>
+            <a:ext cx="0" cy="201168"/>
+          </a:xfrm>
+          <a:prstGeom prst="line">
+            <a:avLst/>
+          </a:prstGeom>
+          <a:ln w="13970">
+            <a:solidFill>
+              <a:srgbClr val="8A8882"/>
+            </a:solidFill>
+            <a:tailEnd type="triangle" w="sm" len="sm"/>
+          </a:ln>
+        </p:spPr>
+        <p:style>
+          <a:lnRef idx="2">
+            <a:schemeClr val="accent1"/>
+          </a:lnRef>
+          <a:fillRef idx="0">
+            <a:schemeClr val="accent1"/>
+          </a:fillRef>
+          <a:effectRef idx="1">
+            <a:schemeClr val="accent1"/>
+          </a:effectRef>
+          <a:fontRef idx="minor">
+            <a:schemeClr val="tx1"/>
+          </a:fontRef>
+        </p:style>
+      </p:cxnSp>
+      <p:cxnSp>
+        <p:nvCxnSpPr>
+          <p:cNvPr id="64" name="Connector 63"/>
+          <p:cNvCxnSpPr/>
+          <p:nvPr/>
+        </p:nvCxnSpPr>
+        <p:spPr>
+          <a:xfrm>
+            <a:off x="5138928" y="1801368"/>
+            <a:ext cx="219456" cy="0"/>
+          </a:xfrm>
+          <a:prstGeom prst="line">
+            <a:avLst/>
+          </a:prstGeom>
+          <a:ln w="13970">
+            <a:solidFill>
+              <a:srgbClr val="8A8882"/>
+            </a:solidFill>
+            <a:tailEnd type="triangle" w="sm" len="sm"/>
+          </a:ln>
+        </p:spPr>
+        <p:style>
+          <a:lnRef idx="2">
+            <a:schemeClr val="accent1"/>
+          </a:lnRef>
+          <a:fillRef idx="0">
+            <a:schemeClr val="accent1"/>
+          </a:fillRef>
+          <a:effectRef idx="1">
+            <a:schemeClr val="accent1"/>
+          </a:effectRef>
+          <a:fontRef idx="minor">
+            <a:schemeClr val="tx1"/>
+          </a:fontRef>
+        </p:style>
+      </p:cxnSp>
+      <p:cxnSp>
+        <p:nvCxnSpPr>
+          <p:cNvPr id="65" name="Connector 64"/>
+          <p:cNvCxnSpPr/>
+          <p:nvPr/>
+        </p:nvCxnSpPr>
+        <p:spPr>
+          <a:xfrm>
+            <a:off x="6437376" y="1801368"/>
+            <a:ext cx="1499616" cy="0"/>
+          </a:xfrm>
+          <a:prstGeom prst="line">
+            <a:avLst/>
+          </a:prstGeom>
+          <a:ln w="13970">
+            <a:solidFill>
+              <a:srgbClr val="8A8882"/>
+            </a:solidFill>
+          </a:ln>
+        </p:spPr>
+        <p:style>
+          <a:lnRef idx="2">
+            <a:schemeClr val="accent1"/>
+          </a:lnRef>
+          <a:fillRef idx="0">
+            <a:schemeClr val="accent1"/>
+          </a:fillRef>
+          <a:effectRef idx="1">
+            <a:schemeClr val="accent1"/>
+          </a:effectRef>
+          <a:fontRef idx="minor">
+            <a:schemeClr val="tx1"/>
+          </a:fontRef>
+        </p:style>
+      </p:cxnSp>
+      <p:cxnSp>
+        <p:nvCxnSpPr>
+          <p:cNvPr id="66" name="Connector 65"/>
+          <p:cNvCxnSpPr/>
+          <p:nvPr/>
+        </p:nvCxnSpPr>
+        <p:spPr>
+          <a:xfrm>
+            <a:off x="7936992" y="1801368"/>
+            <a:ext cx="0" cy="521208"/>
+          </a:xfrm>
+          <a:prstGeom prst="line">
+            <a:avLst/>
+          </a:prstGeom>
+          <a:ln w="13970">
+            <a:solidFill>
+              <a:srgbClr val="8A8882"/>
+            </a:solidFill>
+            <a:tailEnd type="triangle" w="sm" len="sm"/>
+          </a:ln>
+        </p:spPr>
+        <p:style>
+          <a:lnRef idx="2">
+            <a:schemeClr val="accent1"/>
+          </a:lnRef>
+          <a:fillRef idx="0">
+            <a:schemeClr val="accent1"/>
+          </a:fillRef>
+          <a:effectRef idx="1">
+            <a:schemeClr val="accent1"/>
+          </a:effectRef>
+          <a:fontRef idx="minor">
+            <a:schemeClr val="tx1"/>
+          </a:fontRef>
+        </p:style>
+      </p:cxnSp>
+      <p:cxnSp>
+        <p:nvCxnSpPr>
+          <p:cNvPr id="67" name="Connector 66"/>
+          <p:cNvCxnSpPr/>
+          <p:nvPr/>
+        </p:nvCxnSpPr>
+        <p:spPr>
+          <a:xfrm>
+            <a:off x="5897880" y="2121408"/>
+            <a:ext cx="0" cy="2203704"/>
+          </a:xfrm>
+          <a:prstGeom prst="line">
+            <a:avLst/>
+          </a:prstGeom>
+          <a:ln w="13970">
+            <a:solidFill>
+              <a:srgbClr val="8A8882"/>
+            </a:solidFill>
+          </a:ln>
+        </p:spPr>
+        <p:style>
+          <a:lnRef idx="2">
+            <a:schemeClr val="accent1"/>
+          </a:lnRef>
+          <a:fillRef idx="0">
+            <a:schemeClr val="accent1"/>
+          </a:fillRef>
+          <a:effectRef idx="1">
+            <a:schemeClr val="accent1"/>
+          </a:effectRef>
+          <a:fontRef idx="minor">
+            <a:schemeClr val="tx1"/>
+          </a:fontRef>
+        </p:style>
+      </p:cxnSp>
+      <p:cxnSp>
+        <p:nvCxnSpPr>
+          <p:cNvPr id="68" name="Connector 67"/>
+          <p:cNvCxnSpPr/>
+          <p:nvPr/>
+        </p:nvCxnSpPr>
+        <p:spPr>
+          <a:xfrm>
+            <a:off x="5897880" y="4325112"/>
+            <a:ext cx="1344168" cy="0"/>
+          </a:xfrm>
+          <a:prstGeom prst="line">
+            <a:avLst/>
+          </a:prstGeom>
+          <a:ln w="13970">
+            <a:solidFill>
+              <a:srgbClr val="8A8882"/>
+            </a:solidFill>
+            <a:tailEnd type="triangle" w="sm" len="sm"/>
+          </a:ln>
+        </p:spPr>
+        <p:style>
+          <a:lnRef idx="2">
+            <a:schemeClr val="accent1"/>
+          </a:lnRef>
+          <a:fillRef idx="0">
+            <a:schemeClr val="accent1"/>
+          </a:fillRef>
+          <a:effectRef idx="1">
+            <a:schemeClr val="accent1"/>
+          </a:effectRef>
+          <a:fontRef idx="minor">
+            <a:schemeClr val="tx1"/>
+          </a:fontRef>
+        </p:style>
+      </p:cxnSp>
+      <p:cxnSp>
+        <p:nvCxnSpPr>
+          <p:cNvPr id="69" name="Connector 68"/>
+          <p:cNvCxnSpPr/>
+          <p:nvPr/>
+        </p:nvCxnSpPr>
+        <p:spPr>
+          <a:xfrm flipV="1">
+            <a:off x="7936992" y="3803904"/>
+            <a:ext cx="0" cy="201168"/>
+          </a:xfrm>
+          <a:prstGeom prst="line">
+            <a:avLst/>
+          </a:prstGeom>
+          <a:ln w="13970">
+            <a:solidFill>
+              <a:srgbClr val="8A8882"/>
+            </a:solidFill>
+            <a:tailEnd type="triangle" w="sm" len="sm"/>
+          </a:ln>
+        </p:spPr>
+        <p:style>
+          <a:lnRef idx="2">
+            <a:schemeClr val="accent1"/>
+          </a:lnRef>
+          <a:fillRef idx="0">
+            <a:schemeClr val="accent1"/>
+          </a:fillRef>
+          <a:effectRef idx="1">
+            <a:schemeClr val="accent1"/>
+          </a:effectRef>
+          <a:fontRef idx="minor">
+            <a:schemeClr val="tx1"/>
+          </a:fontRef>
+        </p:style>
+      </p:cxnSp>
+      <p:cxnSp>
+        <p:nvCxnSpPr>
+          <p:cNvPr id="70" name="Connector 69"/>
+          <p:cNvCxnSpPr/>
+          <p:nvPr/>
+        </p:nvCxnSpPr>
+        <p:spPr>
+          <a:xfrm flipV="1">
+            <a:off x="7936992" y="2962656"/>
+            <a:ext cx="0" cy="201168"/>
+          </a:xfrm>
+          <a:prstGeom prst="line">
+            <a:avLst/>
+          </a:prstGeom>
+          <a:ln w="13970">
+            <a:solidFill>
+              <a:srgbClr val="8A8882"/>
+            </a:solidFill>
+            <a:tailEnd type="triangle" w="sm" len="sm"/>
+          </a:ln>
+        </p:spPr>
+        <p:style>
+          <a:lnRef idx="2">
+            <a:schemeClr val="accent1"/>
+          </a:lnRef>
+          <a:fillRef idx="0">
+            <a:schemeClr val="accent1"/>
+          </a:fillRef>
+          <a:effectRef idx="1">
+            <a:schemeClr val="accent1"/>
+          </a:effectRef>
+          <a:fontRef idx="minor">
+            <a:schemeClr val="tx1"/>
+          </a:fontRef>
+        </p:style>
+      </p:cxnSp>
+      <p:cxnSp>
+        <p:nvCxnSpPr>
+          <p:cNvPr id="71" name="Connector 70"/>
+          <p:cNvCxnSpPr/>
+          <p:nvPr/>
+        </p:nvCxnSpPr>
+        <p:spPr>
+          <a:xfrm>
+            <a:off x="8631936" y="2642616"/>
+            <a:ext cx="109728" cy="0"/>
+          </a:xfrm>
+          <a:prstGeom prst="line">
+            <a:avLst/>
+          </a:prstGeom>
+          <a:ln w="13970">
+            <a:solidFill>
+              <a:srgbClr val="8A8882"/>
+            </a:solidFill>
+            <a:tailEnd type="triangle" w="sm" len="sm"/>
+          </a:ln>
+        </p:spPr>
+        <p:style>
+          <a:lnRef idx="2">
+            <a:schemeClr val="accent1"/>
+          </a:lnRef>
+          <a:fillRef idx="0">
+            <a:schemeClr val="accent1"/>
+          </a:fillRef>
+          <a:effectRef idx="1">
+            <a:schemeClr val="accent1"/>
+          </a:effectRef>
+          <a:fontRef idx="minor">
+            <a:schemeClr val="tx1"/>
+          </a:fontRef>
+        </p:style>
+      </p:cxnSp>
+      <p:cxnSp>
+        <p:nvCxnSpPr>
+          <p:cNvPr id="72" name="Connector 71"/>
+          <p:cNvCxnSpPr/>
+          <p:nvPr/>
+        </p:nvCxnSpPr>
+        <p:spPr>
+          <a:xfrm>
+            <a:off x="10040112" y="2642616"/>
+            <a:ext cx="329184" cy="0"/>
+          </a:xfrm>
+          <a:prstGeom prst="line">
+            <a:avLst/>
+          </a:prstGeom>
+          <a:ln w="13970">
+            <a:solidFill>
+              <a:srgbClr val="8A8882"/>
+            </a:solidFill>
+            <a:tailEnd type="triangle" w="sm" len="sm"/>
+          </a:ln>
+        </p:spPr>
+        <p:style>
+          <a:lnRef idx="2">
+            <a:schemeClr val="accent1"/>
+          </a:lnRef>
+          <a:fillRef idx="0">
+            <a:schemeClr val="accent1"/>
+          </a:fillRef>
+          <a:effectRef idx="1">
+            <a:schemeClr val="accent1"/>
+          </a:effectRef>
+          <a:fontRef idx="minor">
+            <a:schemeClr val="tx1"/>
+          </a:fontRef>
+        </p:style>
+      </p:cxnSp>
+      <p:cxnSp>
+        <p:nvCxnSpPr>
+          <p:cNvPr id="73" name="Connector 72"/>
+          <p:cNvCxnSpPr/>
+          <p:nvPr/>
+        </p:nvCxnSpPr>
+        <p:spPr>
+          <a:xfrm>
+            <a:off x="11064240" y="2962656"/>
+            <a:ext cx="0" cy="201168"/>
+          </a:xfrm>
+          <a:prstGeom prst="line">
+            <a:avLst/>
+          </a:prstGeom>
+          <a:ln w="13970">
+            <a:solidFill>
+              <a:srgbClr val="8A8882"/>
+            </a:solidFill>
+            <a:tailEnd type="triangle" w="sm" len="sm"/>
+          </a:ln>
+        </p:spPr>
+        <p:style>
+          <a:lnRef idx="2">
+            <a:schemeClr val="accent1"/>
+          </a:lnRef>
+          <a:fillRef idx="0">
+            <a:schemeClr val="accent1"/>
+          </a:fillRef>
+          <a:effectRef idx="1">
+            <a:schemeClr val="accent1"/>
+          </a:effectRef>
+          <a:fontRef idx="minor">
+            <a:schemeClr val="tx1"/>
+          </a:fontRef>
+        </p:style>
+      </p:cxnSp>
+      <p:cxnSp>
+        <p:nvCxnSpPr>
+          <p:cNvPr id="74" name="Connector 73"/>
+          <p:cNvCxnSpPr/>
+          <p:nvPr/>
+        </p:nvCxnSpPr>
+        <p:spPr>
+          <a:xfrm>
+            <a:off x="11064240" y="3803904"/>
+            <a:ext cx="0" cy="201168"/>
+          </a:xfrm>
+          <a:prstGeom prst="line">
+            <a:avLst/>
+          </a:prstGeom>
+          <a:ln w="13970">
+            <a:solidFill>
+              <a:srgbClr val="8A8882"/>
+            </a:solidFill>
+            <a:tailEnd type="triangle" w="sm" len="sm"/>
+          </a:ln>
+        </p:spPr>
+        <p:style>
+          <a:lnRef idx="2">
+            <a:schemeClr val="accent1"/>
+          </a:lnRef>
+          <a:fillRef idx="0">
+            <a:schemeClr val="accent1"/>
+          </a:fillRef>
+          <a:effectRef idx="1">
+            <a:schemeClr val="accent1"/>
+          </a:effectRef>
+          <a:fontRef idx="minor">
+            <a:schemeClr val="tx1"/>
+          </a:fontRef>
+        </p:style>
+      </p:cxnSp>
+      <p:cxnSp>
+        <p:nvCxnSpPr>
+          <p:cNvPr id="75" name="Connector 74"/>
+          <p:cNvCxnSpPr/>
+          <p:nvPr/>
+        </p:nvCxnSpPr>
+        <p:spPr>
+          <a:xfrm>
+            <a:off x="11064240" y="4645152"/>
+            <a:ext cx="0" cy="201168"/>
+          </a:xfrm>
+          <a:prstGeom prst="line">
+            <a:avLst/>
+          </a:prstGeom>
+          <a:ln w="13970">
+            <a:solidFill>
+              <a:srgbClr val="8A8882"/>
+            </a:solidFill>
+            <a:tailEnd type="triangle" w="sm" len="sm"/>
+          </a:ln>
+        </p:spPr>
+        <p:style>
+          <a:lnRef idx="2">
+            <a:schemeClr val="accent1"/>
+          </a:lnRef>
+          <a:fillRef idx="0">
+            <a:schemeClr val="accent1"/>
+          </a:fillRef>
+          <a:effectRef idx="1">
+            <a:schemeClr val="accent1"/>
+          </a:effectRef>
+          <a:fontRef idx="minor">
+            <a:schemeClr val="tx1"/>
+          </a:fontRef>
+        </p:style>
+      </p:cxnSp>
+      <p:sp>
+        <p:nvSpPr>
+          <p:cNvPr id="76" name="TextBox 75"/>
+          <p:cNvSpPr txBox="1"/>
+          <p:nvPr/>
+        </p:nvSpPr>
+        <p:spPr>
+          <a:xfrm>
+            <a:off x="658368" y="5989320"/>
+            <a:ext cx="10911535" cy="731520"/>
+          </a:xfrm>
+          <a:prstGeom prst="rect">
+            <a:avLst/>
+          </a:prstGeom>
+          <a:noFill/>
+        </p:spPr>
+        <p:txBody>
+          <a:bodyPr wrap="square" lIns="0" rIns="0" tIns="0" bIns="0">
+            <a:spAutoFit/>
+          </a:bodyPr>
+          <a:lstStyle/>
+          <a:p>
+            <a:pPr algn="l">
+              <a:spcAft>
+                <a:spcPts val="100"/>
+              </a:spcAft>
+            </a:pPr>
+            <a:r>
+              <a:rPr sz="950" b="1">
+                <a:solidFill>
+                  <a:srgbClr val="6B6B6B"/>
+                </a:solidFill>
+                <a:latin typeface="Arial"/>
+              </a:rPr>
+              <a:t>Green</a:t>
+            </a:r>
+            <a:r>
+              <a:rPr sz="950" b="0">
+                <a:solidFill>
+                  <a:srgbClr val="6B6B6B"/>
+                </a:solidFill>
+                <a:latin typeface="Arial"/>
+              </a:rPr>
+              <a:t> = yields, and we measure it.   </a:t>
+            </a:r>
+            <a:r>
+              <a:rPr sz="950" b="1">
+                <a:solidFill>
+                  <a:srgbClr val="6B6B6B"/>
+                </a:solidFill>
+                <a:latin typeface="Arial"/>
+              </a:rPr>
+              <a:t>Amber</a:t>
+            </a:r>
+            <a:r>
+              <a:rPr sz="950" b="0">
+                <a:solidFill>
+                  <a:srgbClr val="6B6B6B"/>
+                </a:solidFill>
+                <a:latin typeface="Arial"/>
+              </a:rPr>
+              <a:t> = quantity only, no yield reported.   </a:t>
+            </a:r>
+            <a:r>
+              <a:rPr sz="950" b="1">
+                <a:solidFill>
+                  <a:srgbClr val="6B6B6B"/>
+                </a:solidFill>
+                <a:latin typeface="Arial"/>
+              </a:rPr>
+              <a:t>Grey</a:t>
+            </a:r>
+            <a:r>
+              <a:rPr sz="950" b="0">
+                <a:solidFill>
+                  <a:srgbClr val="6B6B6B"/>
+                </a:solidFill>
+                <a:latin typeface="Arial"/>
+              </a:rPr>
+              <a:t> = builds, moves, or measured elsewhere.</a:t>
+            </a:r>
+          </a:p>
+          <a:p>
+            <a:pPr algn="l">
+              <a:spcAft>
+                <a:spcPts val="100"/>
+              </a:spcAft>
+            </a:pPr>
+            <a:r>
+              <a:rPr sz="850" b="0">
+                <a:solidFill>
+                  <a:srgbClr val="6B6B6B"/>
+                </a:solidFill>
+                <a:latin typeface="Arial"/>
+              </a:rPr>
+              <a:t>Quantity only: L10 FAT, L10 SFT, L10 RIN, L10 2U, L11 Test. L10 and L11 are chassis and rack level and in bring-up — a percentage over three chassis swings 33 points on one unit, so the counts are published and the yields are not.</a:t>
+            </a:r>
+          </a:p>
+          <a:p>
+            <a:pPr algn="l">
+              <a:spcAft>
+                <a:spcPts val="100"/>
+              </a:spcAft>
+            </a:pPr>
+            <a:r>
+              <a:rPr sz="850" b="0">
+                <a:solidFill>
+                  <a:srgbClr val="6B6B6B"/>
+                </a:solidFill>
+                <a:latin typeface="Arial"/>
+              </a:rPr>
+              <a:t>Source: pega2 – pega5 (ESVM), one row per unit. WST and FT reported by Sigurd. VBB provisioning drawn for the flow but left out of the yield view.</a:t>
+            </a:r>
+          </a:p>
+        </p:txBody>
+      </p:sp>
+    </p:spTree>
+  </p:cSld>
+  <p:clrMapOvr>
+    <a:masterClrMapping/>
+  </p:clrMapOvr>
+</p:sld>
+</file>
+
+<file path=ppt/slides/slide3.xml><?xml version="1.0" encoding="utf-8"?>
+<p:sld xmlns:a="http://schemas.openxmlformats.org/drawingml/2006/main" xmlns:p="http://schemas.openxmlformats.org/presentationml/2006/main" xmlns:r="http://schemas.openxmlformats.org/officeDocument/2006/relationships">
+  <p:cSld>
+    <p:spTree>
+      <p:nvGrpSpPr>
+        <p:cNvPr id="1" name=""/>
+        <p:cNvGrpSpPr/>
+        <p:nvPr/>
+      </p:nvGrpSpPr>
+      <p:grpSpPr/>
+      <p:sp>
+        <p:nvSpPr>
+          <p:cNvPr id="2" name="TextBox 1"/>
+          <p:cNvSpPr txBox="1"/>
+          <p:nvPr/>
+        </p:nvSpPr>
+        <p:spPr>
+          <a:xfrm>
+            <a:off x="502920" y="310896"/>
+            <a:ext cx="11185855" cy="731520"/>
+          </a:xfrm>
+          <a:prstGeom prst="rect">
+            <a:avLst/>
+          </a:prstGeom>
+          <a:noFill/>
+        </p:spPr>
+        <p:txBody>
+          <a:bodyPr wrap="square" lIns="0" rIns="0" tIns="0" bIns="0">
+            <a:spAutoFit/>
+          </a:bodyPr>
+          <a:lstStyle/>
+          <a:p>
+            <a:pPr algn="l">
+              <a:spcAft>
+                <a:spcPts val="100"/>
+              </a:spcAft>
+            </a:pPr>
+            <a:r>
+              <a:rPr sz="2700" b="1">
+                <a:solidFill>
+                  <a:srgbClr val="141414"/>
+                </a:solidFill>
+                <a:latin typeface="Arial"/>
+              </a:rPr>
+              <a:t>Every step, with the retest rate</a:t>
+            </a:r>
+          </a:p>
+          <a:p>
+            <a:pPr algn="l">
+              <a:spcAft>
+                <a:spcPts val="100"/>
+              </a:spcAft>
+            </a:pPr>
+            <a:r>
+              <a:rPr sz="1250" b="0">
+                <a:solidFill>
+                  <a:srgbClr val="6B6B6B"/>
+                </a:solidFill>
+                <a:latin typeface="Arial"/>
+              </a:rPr>
+              <a:t>2026-W33 · retest rate is the share of units that had to be run again</a:t>
+            </a:r>
+          </a:p>
+        </p:txBody>
+      </p:sp>
+      <p:sp>
+        <p:nvSpPr>
+          <p:cNvPr id="3" name="Rectangle 2"/>
+          <p:cNvSpPr/>
+          <p:nvPr/>
+        </p:nvSpPr>
+        <p:spPr>
+          <a:xfrm>
+            <a:off x="502920" y="1170432"/>
+            <a:ext cx="11185855" cy="13970"/>
+          </a:xfrm>
+          <a:prstGeom prst="rect">
+            <a:avLst/>
+          </a:prstGeom>
+          <a:solidFill>
+            <a:srgbClr val="D8D6CF"/>
+          </a:solidFill>
+          <a:ln>
+            <a:noFill/>
+          </a:ln>
+          <a:effectLst/>
+        </p:spPr>
+        <p:style>
+          <a:lnRef idx="1">
+            <a:schemeClr val="accent1"/>
+          </a:lnRef>
+          <a:fillRef idx="3">
+            <a:schemeClr val="accent1"/>
+          </a:fillRef>
+          <a:effectRef idx="2">
+            <a:schemeClr val="accent1"/>
+          </a:effectRef>
+          <a:fontRef idx="minor">
+            <a:schemeClr val="lt1"/>
+          </a:fontRef>
+        </p:style>
+        <p:txBody>
+          <a:bodyPr rtlCol="0" anchor="ctr"/>
+          <a:lstStyle/>
+          <a:p>
+            <a:pPr algn="ctr"/>
+          </a:p>
+        </p:txBody>
+      </p:sp>
+      <p:sp>
+        <p:nvSpPr>
+          <p:cNvPr id="4" name="TextBox 3"/>
+          <p:cNvSpPr txBox="1"/>
+          <p:nvPr/>
+        </p:nvSpPr>
+        <p:spPr>
+          <a:xfrm>
             <a:off x="502920" y="1417320"/>
             <a:ext cx="2194560" cy="274320"/>
           </a:xfrm>
@@ -9295,6 +9932,1215 @@
                 <a:latin typeface="Arial"/>
               </a:rPr>
               <a:t>Steps under 20 first-time units report counts only. Full unit-level source data, every serial and release with a link to its run: 32x-production.i.etched.com/week.html#week=2026-W33</a:t>
+            </a:r>
+          </a:p>
+        </p:txBody>
+      </p:sp>
+    </p:spTree>
+  </p:cSld>
+  <p:clrMapOvr>
+    <a:masterClrMapping/>
+  </p:clrMapOvr>
+</p:sld>
+</file>
+
+<file path=ppt/slides/slide4.xml><?xml version="1.0" encoding="utf-8"?>
+<p:sld xmlns:a="http://schemas.openxmlformats.org/drawingml/2006/main" xmlns:p="http://schemas.openxmlformats.org/presentationml/2006/main" xmlns:r="http://schemas.openxmlformats.org/officeDocument/2006/relationships">
+  <p:cSld>
+    <p:spTree>
+      <p:nvGrpSpPr>
+        <p:cNvPr id="1" name=""/>
+        <p:cNvGrpSpPr/>
+        <p:nvPr/>
+      </p:nvGrpSpPr>
+      <p:grpSpPr/>
+      <p:sp>
+        <p:nvSpPr>
+          <p:cNvPr id="2" name="TextBox 1"/>
+          <p:cNvSpPr txBox="1"/>
+          <p:nvPr/>
+        </p:nvSpPr>
+        <p:spPr>
+          <a:xfrm>
+            <a:off x="502920" y="310896"/>
+            <a:ext cx="11185855" cy="731520"/>
+          </a:xfrm>
+          <a:prstGeom prst="rect">
+            <a:avLst/>
+          </a:prstGeom>
+          <a:noFill/>
+        </p:spPr>
+        <p:txBody>
+          <a:bodyPr wrap="square" lIns="0" rIns="0" tIns="0" bIns="0">
+            <a:spAutoFit/>
+          </a:bodyPr>
+          <a:lstStyle/>
+          <a:p>
+            <a:pPr algn="l">
+              <a:spcAft>
+                <a:spcPts val="100"/>
+              </a:spcAft>
+            </a:pPr>
+            <a:r>
+              <a:rPr sz="2700" b="1">
+                <a:solidFill>
+                  <a:srgbClr val="141414"/>
+                </a:solidFill>
+                <a:latin typeface="Arial"/>
+              </a:rPr>
+              <a:t>Appendix — where the data comes from</a:t>
+            </a:r>
+          </a:p>
+          <a:p>
+            <a:pPr algn="l">
+              <a:spcAft>
+                <a:spcPts val="100"/>
+              </a:spcAft>
+            </a:pPr>
+            <a:r>
+              <a:rPr sz="1250" b="0">
+                <a:solidFill>
+                  <a:srgbClr val="6B6B6B"/>
+                </a:solidFill>
+                <a:latin typeface="Arial"/>
+              </a:rPr>
+              <a:t>every figure on this deck traces to one of these; the first one lists the units behind it</a:t>
+            </a:r>
+          </a:p>
+        </p:txBody>
+      </p:sp>
+      <p:sp>
+        <p:nvSpPr>
+          <p:cNvPr id="3" name="Rectangle 2"/>
+          <p:cNvSpPr/>
+          <p:nvPr/>
+        </p:nvSpPr>
+        <p:spPr>
+          <a:xfrm>
+            <a:off x="502920" y="1170432"/>
+            <a:ext cx="11185855" cy="13970"/>
+          </a:xfrm>
+          <a:prstGeom prst="rect">
+            <a:avLst/>
+          </a:prstGeom>
+          <a:solidFill>
+            <a:srgbClr val="D8D6CF"/>
+          </a:solidFill>
+          <a:ln>
+            <a:noFill/>
+          </a:ln>
+          <a:effectLst/>
+        </p:spPr>
+        <p:style>
+          <a:lnRef idx="1">
+            <a:schemeClr val="accent1"/>
+          </a:lnRef>
+          <a:fillRef idx="3">
+            <a:schemeClr val="accent1"/>
+          </a:fillRef>
+          <a:effectRef idx="2">
+            <a:schemeClr val="accent1"/>
+          </a:effectRef>
+          <a:fontRef idx="minor">
+            <a:schemeClr val="lt1"/>
+          </a:fontRef>
+        </p:style>
+        <p:txBody>
+          <a:bodyPr rtlCol="0" anchor="ctr"/>
+          <a:lstStyle/>
+          <a:p>
+            <a:pPr algn="ctr"/>
+          </a:p>
+        </p:txBody>
+      </p:sp>
+      <p:sp>
+        <p:nvSpPr>
+          <p:cNvPr id="4" name="TextBox 3"/>
+          <p:cNvSpPr txBox="1"/>
+          <p:nvPr/>
+        </p:nvSpPr>
+        <p:spPr>
+          <a:xfrm>
+            <a:off x="566928" y="1417320"/>
+            <a:ext cx="5486400" cy="237744"/>
+          </a:xfrm>
+          <a:prstGeom prst="rect">
+            <a:avLst/>
+          </a:prstGeom>
+          <a:noFill/>
+        </p:spPr>
+        <p:txBody>
+          <a:bodyPr wrap="square" lIns="0" rIns="0" tIns="0" bIns="0">
+            <a:spAutoFit/>
+          </a:bodyPr>
+          <a:lstStyle/>
+          <a:p>
+            <a:pPr algn="l">
+              <a:spcAft>
+                <a:spcPts val="0"/>
+              </a:spcAft>
+            </a:pPr>
+            <a:r>
+              <a:rPr sz="1200" b="1">
+                <a:solidFill>
+                  <a:srgbClr val="1C62B8"/>
+                </a:solidFill>
+                <a:latin typeface="Arial"/>
+              </a:rPr>
+              <a:t>This week, unit by unit</a:t>
+            </a:r>
+          </a:p>
+        </p:txBody>
+      </p:sp>
+      <p:sp>
+        <p:nvSpPr>
+          <p:cNvPr id="5" name="TextBox 4"/>
+          <p:cNvSpPr txBox="1"/>
+          <p:nvPr/>
+        </p:nvSpPr>
+        <p:spPr>
+          <a:xfrm>
+            <a:off x="731520" y="1709928"/>
+            <a:ext cx="6035040" cy="237744"/>
+          </a:xfrm>
+          <a:prstGeom prst="rect">
+            <a:avLst/>
+          </a:prstGeom>
+          <a:noFill/>
+        </p:spPr>
+        <p:txBody>
+          <a:bodyPr wrap="square" lIns="0" rIns="0" tIns="0" bIns="0">
+            <a:spAutoFit/>
+          </a:bodyPr>
+          <a:lstStyle/>
+          <a:p>
+            <a:pPr algn="l">
+              <a:spcAft>
+                <a:spcPts val="0"/>
+              </a:spcAft>
+            </a:pPr>
+            <a:r>
+              <a:rPr sz="1100" b="0">
+                <a:solidFill>
+                  <a:srgbClr val="141414"/>
+                </a:solidFill>
+                <a:latin typeface="Arial"/>
+              </a:rPr>
+              <a:t>Source data for 2026-W33 — every DUT serial, software release, verdict and a link to its run</a:t>
+            </a:r>
+          </a:p>
+        </p:txBody>
+      </p:sp>
+      <p:sp>
+        <p:nvSpPr>
+          <p:cNvPr id="6" name="TextBox 5"/>
+          <p:cNvSpPr txBox="1"/>
+          <p:nvPr/>
+        </p:nvSpPr>
+        <p:spPr>
+          <a:xfrm>
+            <a:off x="6858000" y="1709928"/>
+            <a:ext cx="4846320" cy="237744"/>
+          </a:xfrm>
+          <a:prstGeom prst="rect">
+            <a:avLst/>
+          </a:prstGeom>
+          <a:noFill/>
+        </p:spPr>
+        <p:txBody>
+          <a:bodyPr wrap="square" lIns="0" rIns="0" tIns="0" bIns="0">
+            <a:spAutoFit/>
+          </a:bodyPr>
+          <a:lstStyle/>
+          <a:p>
+            <a:pPr algn="l">
+              <a:spcAft>
+                <a:spcPts val="0"/>
+              </a:spcAft>
+            </a:pPr>
+            <a:r>
+              <a:rPr sz="1050" b="0">
+                <a:solidFill>
+                  <a:srgbClr val="6B6B6B"/>
+                </a:solidFill>
+                <a:latin typeface="Courier New"/>
+              </a:rPr>
+              <a:t>32x-production.i.etched.com/week.html#week=2026-W33</a:t>
+            </a:r>
+          </a:p>
+        </p:txBody>
+      </p:sp>
+      <p:sp>
+        <p:nvSpPr>
+          <p:cNvPr id="7" name="TextBox 6"/>
+          <p:cNvSpPr txBox="1"/>
+          <p:nvPr/>
+        </p:nvSpPr>
+        <p:spPr>
+          <a:xfrm>
+            <a:off x="731520" y="1984248"/>
+            <a:ext cx="6035040" cy="237744"/>
+          </a:xfrm>
+          <a:prstGeom prst="rect">
+            <a:avLst/>
+          </a:prstGeom>
+          <a:noFill/>
+        </p:spPr>
+        <p:txBody>
+          <a:bodyPr wrap="square" lIns="0" rIns="0" tIns="0" bIns="0">
+            <a:spAutoFit/>
+          </a:bodyPr>
+          <a:lstStyle/>
+          <a:p>
+            <a:pPr algn="l">
+              <a:spcAft>
+                <a:spcPts val="0"/>
+              </a:spcAft>
+            </a:pPr>
+            <a:r>
+              <a:rPr sz="1100" b="0">
+                <a:solidFill>
+                  <a:srgbClr val="141414"/>
+                </a:solidFill>
+                <a:latin typeface="Arial"/>
+              </a:rPr>
+              <a:t>Every week since collection began, one row each</a:t>
+            </a:r>
+          </a:p>
+        </p:txBody>
+      </p:sp>
+      <p:sp>
+        <p:nvSpPr>
+          <p:cNvPr id="8" name="TextBox 7"/>
+          <p:cNvSpPr txBox="1"/>
+          <p:nvPr/>
+        </p:nvSpPr>
+        <p:spPr>
+          <a:xfrm>
+            <a:off x="6858000" y="1984248"/>
+            <a:ext cx="4846320" cy="237744"/>
+          </a:xfrm>
+          <a:prstGeom prst="rect">
+            <a:avLst/>
+          </a:prstGeom>
+          <a:noFill/>
+        </p:spPr>
+        <p:txBody>
+          <a:bodyPr wrap="square" lIns="0" rIns="0" tIns="0" bIns="0">
+            <a:spAutoFit/>
+          </a:bodyPr>
+          <a:lstStyle/>
+          <a:p>
+            <a:pPr algn="l">
+              <a:spcAft>
+                <a:spcPts val="0"/>
+              </a:spcAft>
+            </a:pPr>
+            <a:r>
+              <a:rPr sz="1050" b="0">
+                <a:solidFill>
+                  <a:srgbClr val="6B6B6B"/>
+                </a:solidFill>
+                <a:latin typeface="Courier New"/>
+              </a:rPr>
+              <a:t>32x-production.i.etched.com/weekly.html</a:t>
+            </a:r>
+          </a:p>
+        </p:txBody>
+      </p:sp>
+      <p:sp>
+        <p:nvSpPr>
+          <p:cNvPr id="9" name="TextBox 8"/>
+          <p:cNvSpPr txBox="1"/>
+          <p:nvPr/>
+        </p:nvSpPr>
+        <p:spPr>
+          <a:xfrm>
+            <a:off x="566928" y="2386584"/>
+            <a:ext cx="5486400" cy="237744"/>
+          </a:xfrm>
+          <a:prstGeom prst="rect">
+            <a:avLst/>
+          </a:prstGeom>
+          <a:noFill/>
+        </p:spPr>
+        <p:txBody>
+          <a:bodyPr wrap="square" lIns="0" rIns="0" tIns="0" bIns="0">
+            <a:spAutoFit/>
+          </a:bodyPr>
+          <a:lstStyle/>
+          <a:p>
+            <a:pPr algn="l">
+              <a:spcAft>
+                <a:spcPts val="0"/>
+              </a:spcAft>
+            </a:pPr>
+            <a:r>
+              <a:rPr sz="1200" b="1">
+                <a:solidFill>
+                  <a:srgbClr val="1C62B8"/>
+                </a:solidFill>
+                <a:latin typeface="Arial"/>
+              </a:rPr>
+              <a:t>The rest of the dashboard</a:t>
+            </a:r>
+          </a:p>
+        </p:txBody>
+      </p:sp>
+      <p:sp>
+        <p:nvSpPr>
+          <p:cNvPr id="10" name="TextBox 9"/>
+          <p:cNvSpPr txBox="1"/>
+          <p:nvPr/>
+        </p:nvSpPr>
+        <p:spPr>
+          <a:xfrm>
+            <a:off x="731520" y="2679192"/>
+            <a:ext cx="6035040" cy="237744"/>
+          </a:xfrm>
+          <a:prstGeom prst="rect">
+            <a:avLst/>
+          </a:prstGeom>
+          <a:noFill/>
+        </p:spPr>
+        <p:txBody>
+          <a:bodyPr wrap="square" lIns="0" rIns="0" tIns="0" bIns="0">
+            <a:spAutoFit/>
+          </a:bodyPr>
+          <a:lstStyle/>
+          <a:p>
+            <a:pPr algn="l">
+              <a:spcAft>
+                <a:spcPts val="0"/>
+              </a:spcAft>
+            </a:pPr>
+            <a:r>
+              <a:rPr sz="1100" b="0">
+                <a:solidFill>
+                  <a:srgbClr val="141414"/>
+                </a:solidFill>
+                <a:latin typeface="Arial"/>
+              </a:rPr>
+              <a:t>Daily tracker — the line's own MLT/HTT tabs, rebuilt from pega3</a:t>
+            </a:r>
+          </a:p>
+        </p:txBody>
+      </p:sp>
+      <p:sp>
+        <p:nvSpPr>
+          <p:cNvPr id="11" name="TextBox 10"/>
+          <p:cNvSpPr txBox="1"/>
+          <p:nvPr/>
+        </p:nvSpPr>
+        <p:spPr>
+          <a:xfrm>
+            <a:off x="6858000" y="2679192"/>
+            <a:ext cx="4846320" cy="237744"/>
+          </a:xfrm>
+          <a:prstGeom prst="rect">
+            <a:avLst/>
+          </a:prstGeom>
+          <a:noFill/>
+        </p:spPr>
+        <p:txBody>
+          <a:bodyPr wrap="square" lIns="0" rIns="0" tIns="0" bIns="0">
+            <a:spAutoFit/>
+          </a:bodyPr>
+          <a:lstStyle/>
+          <a:p>
+            <a:pPr algn="l">
+              <a:spcAft>
+                <a:spcPts val="0"/>
+              </a:spcAft>
+            </a:pPr>
+            <a:r>
+              <a:rPr sz="1050" b="0">
+                <a:solidFill>
+                  <a:srgbClr val="6B6B6B"/>
+                </a:solidFill>
+                <a:latin typeface="Courier New"/>
+              </a:rPr>
+              <a:t>32x-production.i.etched.com/dailyexcel.html</a:t>
+            </a:r>
+          </a:p>
+        </p:txBody>
+      </p:sp>
+      <p:sp>
+        <p:nvSpPr>
+          <p:cNvPr id="12" name="TextBox 11"/>
+          <p:cNvSpPr txBox="1"/>
+          <p:nvPr/>
+        </p:nvSpPr>
+        <p:spPr>
+          <a:xfrm>
+            <a:off x="731520" y="2953512"/>
+            <a:ext cx="6035040" cy="237744"/>
+          </a:xfrm>
+          <a:prstGeom prst="rect">
+            <a:avLst/>
+          </a:prstGeom>
+          <a:noFill/>
+        </p:spPr>
+        <p:txBody>
+          <a:bodyPr wrap="square" lIns="0" rIns="0" tIns="0" bIns="0">
+            <a:spAutoFit/>
+          </a:bodyPr>
+          <a:lstStyle/>
+          <a:p>
+            <a:pPr algn="l">
+              <a:spcAft>
+                <a:spcPts val="0"/>
+              </a:spcAft>
+            </a:pPr>
+            <a:r>
+              <a:rPr sz="1100" b="0">
+                <a:solidFill>
+                  <a:srgbClr val="141414"/>
+                </a:solidFill>
+                <a:latin typeface="Arial"/>
+              </a:rPr>
+              <a:t>L10 daily tracker — FAT, SFT, RIN, 2U from pega4</a:t>
+            </a:r>
+          </a:p>
+        </p:txBody>
+      </p:sp>
+      <p:sp>
+        <p:nvSpPr>
+          <p:cNvPr id="13" name="TextBox 12"/>
+          <p:cNvSpPr txBox="1"/>
+          <p:nvPr/>
+        </p:nvSpPr>
+        <p:spPr>
+          <a:xfrm>
+            <a:off x="6858000" y="2953512"/>
+            <a:ext cx="4846320" cy="237744"/>
+          </a:xfrm>
+          <a:prstGeom prst="rect">
+            <a:avLst/>
+          </a:prstGeom>
+          <a:noFill/>
+        </p:spPr>
+        <p:txBody>
+          <a:bodyPr wrap="square" lIns="0" rIns="0" tIns="0" bIns="0">
+            <a:spAutoFit/>
+          </a:bodyPr>
+          <a:lstStyle/>
+          <a:p>
+            <a:pPr algn="l">
+              <a:spcAft>
+                <a:spcPts val="0"/>
+              </a:spcAft>
+            </a:pPr>
+            <a:r>
+              <a:rPr sz="1050" b="0">
+                <a:solidFill>
+                  <a:srgbClr val="6B6B6B"/>
+                </a:solidFill>
+                <a:latin typeface="Courier New"/>
+              </a:rPr>
+              <a:t>32x-production.i.etched.com/l10.html</a:t>
+            </a:r>
+          </a:p>
+        </p:txBody>
+      </p:sp>
+      <p:sp>
+        <p:nvSpPr>
+          <p:cNvPr id="14" name="TextBox 13"/>
+          <p:cNvSpPr txBox="1"/>
+          <p:nvPr/>
+        </p:nvSpPr>
+        <p:spPr>
+          <a:xfrm>
+            <a:off x="731520" y="3227832"/>
+            <a:ext cx="6035040" cy="237744"/>
+          </a:xfrm>
+          <a:prstGeom prst="rect">
+            <a:avLst/>
+          </a:prstGeom>
+          <a:noFill/>
+        </p:spPr>
+        <p:txBody>
+          <a:bodyPr wrap="square" lIns="0" rIns="0" tIns="0" bIns="0">
+            <a:spAutoFit/>
+          </a:bodyPr>
+          <a:lstStyle/>
+          <a:p>
+            <a:pPr algn="l">
+              <a:spcAft>
+                <a:spcPts val="0"/>
+              </a:spcAft>
+            </a:pPr>
+            <a:r>
+              <a:rPr sz="1100" b="0">
+                <a:solidFill>
+                  <a:srgbClr val="141414"/>
+                </a:solidFill>
+                <a:latin typeface="Arial"/>
+              </a:rPr>
+              <a:t>Station yield, from the controllers</a:t>
+            </a:r>
+          </a:p>
+        </p:txBody>
+      </p:sp>
+      <p:sp>
+        <p:nvSpPr>
+          <p:cNvPr id="15" name="TextBox 14"/>
+          <p:cNvSpPr txBox="1"/>
+          <p:nvPr/>
+        </p:nvSpPr>
+        <p:spPr>
+          <a:xfrm>
+            <a:off x="6858000" y="3227832"/>
+            <a:ext cx="4846320" cy="237744"/>
+          </a:xfrm>
+          <a:prstGeom prst="rect">
+            <a:avLst/>
+          </a:prstGeom>
+          <a:noFill/>
+        </p:spPr>
+        <p:txBody>
+          <a:bodyPr wrap="square" lIns="0" rIns="0" tIns="0" bIns="0">
+            <a:spAutoFit/>
+          </a:bodyPr>
+          <a:lstStyle/>
+          <a:p>
+            <a:pPr algn="l">
+              <a:spcAft>
+                <a:spcPts val="0"/>
+              </a:spcAft>
+            </a:pPr>
+            <a:r>
+              <a:rPr sz="1050" b="0">
+                <a:solidFill>
+                  <a:srgbClr val="6B6B6B"/>
+                </a:solidFill>
+                <a:latin typeface="Courier New"/>
+              </a:rPr>
+              <a:t>32x-production.i.etched.com/direct.html</a:t>
+            </a:r>
+          </a:p>
+        </p:txBody>
+      </p:sp>
+      <p:sp>
+        <p:nvSpPr>
+          <p:cNvPr id="16" name="TextBox 15"/>
+          <p:cNvSpPr txBox="1"/>
+          <p:nvPr/>
+        </p:nvSpPr>
+        <p:spPr>
+          <a:xfrm>
+            <a:off x="731520" y="3502152"/>
+            <a:ext cx="6035040" cy="237744"/>
+          </a:xfrm>
+          <a:prstGeom prst="rect">
+            <a:avLst/>
+          </a:prstGeom>
+          <a:noFill/>
+        </p:spPr>
+        <p:txBody>
+          <a:bodyPr wrap="square" lIns="0" rIns="0" tIns="0" bIns="0">
+            <a:spAutoFit/>
+          </a:bodyPr>
+          <a:lstStyle/>
+          <a:p>
+            <a:pPr algn="l">
+              <a:spcAft>
+                <a:spcPts val="0"/>
+              </a:spcAft>
+            </a:pPr>
+            <a:r>
+              <a:rPr sz="1100" b="0">
+                <a:solidFill>
+                  <a:srgbClr val="141414"/>
+                </a:solidFill>
+                <a:latin typeface="Arial"/>
+              </a:rPr>
+              <a:t>Station yield, from OCP Logs — and the measured gap between them</a:t>
+            </a:r>
+          </a:p>
+        </p:txBody>
+      </p:sp>
+      <p:sp>
+        <p:nvSpPr>
+          <p:cNvPr id="17" name="TextBox 16"/>
+          <p:cNvSpPr txBox="1"/>
+          <p:nvPr/>
+        </p:nvSpPr>
+        <p:spPr>
+          <a:xfrm>
+            <a:off x="6858000" y="3502152"/>
+            <a:ext cx="4846320" cy="237744"/>
+          </a:xfrm>
+          <a:prstGeom prst="rect">
+            <a:avLst/>
+          </a:prstGeom>
+          <a:noFill/>
+        </p:spPr>
+        <p:txBody>
+          <a:bodyPr wrap="square" lIns="0" rIns="0" tIns="0" bIns="0">
+            <a:spAutoFit/>
+          </a:bodyPr>
+          <a:lstStyle/>
+          <a:p>
+            <a:pPr algn="l">
+              <a:spcAft>
+                <a:spcPts val="0"/>
+              </a:spcAft>
+            </a:pPr>
+            <a:r>
+              <a:rPr sz="1050" b="0">
+                <a:solidFill>
+                  <a:srgbClr val="6B6B6B"/>
+                </a:solidFill>
+                <a:latin typeface="Courier New"/>
+              </a:rPr>
+              <a:t>32x-production.i.etched.com/index.html</a:t>
+            </a:r>
+          </a:p>
+        </p:txBody>
+      </p:sp>
+      <p:sp>
+        <p:nvSpPr>
+          <p:cNvPr id="18" name="TextBox 17"/>
+          <p:cNvSpPr txBox="1"/>
+          <p:nvPr/>
+        </p:nvSpPr>
+        <p:spPr>
+          <a:xfrm>
+            <a:off x="731520" y="3776472"/>
+            <a:ext cx="6035040" cy="237744"/>
+          </a:xfrm>
+          <a:prstGeom prst="rect">
+            <a:avLst/>
+          </a:prstGeom>
+          <a:noFill/>
+        </p:spPr>
+        <p:txBody>
+          <a:bodyPr wrap="square" lIns="0" rIns="0" tIns="0" bIns="0">
+            <a:spAutoFit/>
+          </a:bodyPr>
+          <a:lstStyle/>
+          <a:p>
+            <a:pPr algn="l">
+              <a:spcAft>
+                <a:spcPts val="0"/>
+              </a:spcAft>
+            </a:pPr>
+            <a:r>
+              <a:rPr sz="1100" b="0">
+                <a:solidFill>
+                  <a:srgbClr val="141414"/>
+                </a:solidFill>
+                <a:latin typeface="Arial"/>
+              </a:rPr>
+              <a:t>Run drill-down, any serial or test name</a:t>
+            </a:r>
+          </a:p>
+        </p:txBody>
+      </p:sp>
+      <p:sp>
+        <p:nvSpPr>
+          <p:cNvPr id="19" name="TextBox 18"/>
+          <p:cNvSpPr txBox="1"/>
+          <p:nvPr/>
+        </p:nvSpPr>
+        <p:spPr>
+          <a:xfrm>
+            <a:off x="6858000" y="3776472"/>
+            <a:ext cx="4846320" cy="237744"/>
+          </a:xfrm>
+          <a:prstGeom prst="rect">
+            <a:avLst/>
+          </a:prstGeom>
+          <a:noFill/>
+        </p:spPr>
+        <p:txBody>
+          <a:bodyPr wrap="square" lIns="0" rIns="0" tIns="0" bIns="0">
+            <a:spAutoFit/>
+          </a:bodyPr>
+          <a:lstStyle/>
+          <a:p>
+            <a:pPr algn="l">
+              <a:spcAft>
+                <a:spcPts val="0"/>
+              </a:spcAft>
+            </a:pPr>
+            <a:r>
+              <a:rPr sz="1050" b="0">
+                <a:solidFill>
+                  <a:srgbClr val="6B6B6B"/>
+                </a:solidFill>
+                <a:latin typeface="Courier New"/>
+              </a:rPr>
+              <a:t>32x-production.i.etched.com/runs.html</a:t>
+            </a:r>
+          </a:p>
+        </p:txBody>
+      </p:sp>
+      <p:sp>
+        <p:nvSpPr>
+          <p:cNvPr id="20" name="TextBox 19"/>
+          <p:cNvSpPr txBox="1"/>
+          <p:nvPr/>
+        </p:nvSpPr>
+        <p:spPr>
+          <a:xfrm>
+            <a:off x="731520" y="4050792"/>
+            <a:ext cx="6035040" cy="237744"/>
+          </a:xfrm>
+          <a:prstGeom prst="rect">
+            <a:avLst/>
+          </a:prstGeom>
+          <a:noFill/>
+        </p:spPr>
+        <p:txBody>
+          <a:bodyPr wrap="square" lIns="0" rIns="0" tIns="0" bIns="0">
+            <a:spAutoFit/>
+          </a:bodyPr>
+          <a:lstStyle/>
+          <a:p>
+            <a:pPr algn="l">
+              <a:spcAft>
+                <a:spcPts val="0"/>
+              </a:spcAft>
+            </a:pPr>
+            <a:r>
+              <a:rPr sz="1100" b="0">
+                <a:solidFill>
+                  <a:srgbClr val="141414"/>
+                </a:solidFill>
+                <a:latin typeface="Arial"/>
+              </a:rPr>
+              <a:t>Production test flow, with coverage</a:t>
+            </a:r>
+          </a:p>
+        </p:txBody>
+      </p:sp>
+      <p:sp>
+        <p:nvSpPr>
+          <p:cNvPr id="21" name="TextBox 20"/>
+          <p:cNvSpPr txBox="1"/>
+          <p:nvPr/>
+        </p:nvSpPr>
+        <p:spPr>
+          <a:xfrm>
+            <a:off x="6858000" y="4050792"/>
+            <a:ext cx="4846320" cy="237744"/>
+          </a:xfrm>
+          <a:prstGeom prst="rect">
+            <a:avLst/>
+          </a:prstGeom>
+          <a:noFill/>
+        </p:spPr>
+        <p:txBody>
+          <a:bodyPr wrap="square" lIns="0" rIns="0" tIns="0" bIns="0">
+            <a:spAutoFit/>
+          </a:bodyPr>
+          <a:lstStyle/>
+          <a:p>
+            <a:pPr algn="l">
+              <a:spcAft>
+                <a:spcPts val="0"/>
+              </a:spcAft>
+            </a:pPr>
+            <a:r>
+              <a:rPr sz="1050" b="0">
+                <a:solidFill>
+                  <a:srgbClr val="6B6B6B"/>
+                </a:solidFill>
+                <a:latin typeface="Courier New"/>
+              </a:rPr>
+              <a:t>32x-production.i.etched.com/flow.html</a:t>
+            </a:r>
+          </a:p>
+        </p:txBody>
+      </p:sp>
+      <p:sp>
+        <p:nvSpPr>
+          <p:cNvPr id="22" name="TextBox 21"/>
+          <p:cNvSpPr txBox="1"/>
+          <p:nvPr/>
+        </p:nvSpPr>
+        <p:spPr>
+          <a:xfrm>
+            <a:off x="566928" y="4453128"/>
+            <a:ext cx="5486400" cy="237744"/>
+          </a:xfrm>
+          <a:prstGeom prst="rect">
+            <a:avLst/>
+          </a:prstGeom>
+          <a:noFill/>
+        </p:spPr>
+        <p:txBody>
+          <a:bodyPr wrap="square" lIns="0" rIns="0" tIns="0" bIns="0">
+            <a:spAutoFit/>
+          </a:bodyPr>
+          <a:lstStyle/>
+          <a:p>
+            <a:pPr algn="l">
+              <a:spcAft>
+                <a:spcPts val="0"/>
+              </a:spcAft>
+            </a:pPr>
+            <a:r>
+              <a:rPr sz="1200" b="1">
+                <a:solidFill>
+                  <a:srgbClr val="1C62B8"/>
+                </a:solidFill>
+                <a:latin typeface="Arial"/>
+              </a:rPr>
+              <a:t>Upstream of the dashboard</a:t>
+            </a:r>
+          </a:p>
+        </p:txBody>
+      </p:sp>
+      <p:sp>
+        <p:nvSpPr>
+          <p:cNvPr id="23" name="TextBox 22"/>
+          <p:cNvSpPr txBox="1"/>
+          <p:nvPr/>
+        </p:nvSpPr>
+        <p:spPr>
+          <a:xfrm>
+            <a:off x="731520" y="4745736"/>
+            <a:ext cx="6035040" cy="237744"/>
+          </a:xfrm>
+          <a:prstGeom prst="rect">
+            <a:avLst/>
+          </a:prstGeom>
+          <a:noFill/>
+        </p:spPr>
+        <p:txBody>
+          <a:bodyPr wrap="square" lIns="0" rIns="0" tIns="0" bIns="0">
+            <a:spAutoFit/>
+          </a:bodyPr>
+          <a:lstStyle/>
+          <a:p>
+            <a:pPr algn="l">
+              <a:spcAft>
+                <a:spcPts val="0"/>
+              </a:spcAft>
+            </a:pPr>
+            <a:r>
+              <a:rPr sz="1100" b="0">
+                <a:solidFill>
+                  <a:srgbClr val="141414"/>
+                </a:solidFill>
+                <a:latin typeface="Arial"/>
+              </a:rPr>
+              <a:t>The controllers themselves — ESVM login admin / admin</a:t>
+            </a:r>
+          </a:p>
+        </p:txBody>
+      </p:sp>
+      <p:sp>
+        <p:nvSpPr>
+          <p:cNvPr id="24" name="TextBox 23"/>
+          <p:cNvSpPr txBox="1"/>
+          <p:nvPr/>
+        </p:nvSpPr>
+        <p:spPr>
+          <a:xfrm>
+            <a:off x="6858000" y="4745736"/>
+            <a:ext cx="4846320" cy="237744"/>
+          </a:xfrm>
+          <a:prstGeom prst="rect">
+            <a:avLst/>
+          </a:prstGeom>
+          <a:noFill/>
+        </p:spPr>
+        <p:txBody>
+          <a:bodyPr wrap="square" lIns="0" rIns="0" tIns="0" bIns="0">
+            <a:spAutoFit/>
+          </a:bodyPr>
+          <a:lstStyle/>
+          <a:p>
+            <a:pPr algn="l">
+              <a:spcAft>
+                <a:spcPts val="0"/>
+              </a:spcAft>
+            </a:pPr>
+            <a:r>
+              <a:rPr sz="1050" b="0">
+                <a:solidFill>
+                  <a:srgbClr val="6B6B6B"/>
+                </a:solidFill>
+                <a:latin typeface="Courier New"/>
+              </a:rPr>
+              <a:t>pega2:3000 · pega3:3000 · pega4:3000 · pega5:3000</a:t>
+            </a:r>
+          </a:p>
+        </p:txBody>
+      </p:sp>
+      <p:sp>
+        <p:nvSpPr>
+          <p:cNvPr id="25" name="TextBox 24"/>
+          <p:cNvSpPr txBox="1"/>
+          <p:nvPr/>
+        </p:nvSpPr>
+        <p:spPr>
+          <a:xfrm>
+            <a:off x="731520" y="5020056"/>
+            <a:ext cx="6035040" cy="237744"/>
+          </a:xfrm>
+          <a:prstGeom prst="rect">
+            <a:avLst/>
+          </a:prstGeom>
+          <a:noFill/>
+        </p:spPr>
+        <p:txBody>
+          <a:bodyPr wrap="square" lIns="0" rIns="0" tIns="0" bIns="0">
+            <a:spAutoFit/>
+          </a:bodyPr>
+          <a:lstStyle/>
+          <a:p>
+            <a:pPr algn="l">
+              <a:spcAft>
+                <a:spcPts val="0"/>
+              </a:spcAft>
+            </a:pPr>
+            <a:r>
+              <a:rPr sz="1100" b="0">
+                <a:solidFill>
+                  <a:srgbClr val="141414"/>
+                </a:solidFill>
+                <a:latin typeface="Arial"/>
+              </a:rPr>
+              <a:t>OCP Logs / EOS, the other side of the discrepancy</a:t>
+            </a:r>
+          </a:p>
+        </p:txBody>
+      </p:sp>
+      <p:sp>
+        <p:nvSpPr>
+          <p:cNvPr id="26" name="TextBox 25"/>
+          <p:cNvSpPr txBox="1"/>
+          <p:nvPr/>
+        </p:nvSpPr>
+        <p:spPr>
+          <a:xfrm>
+            <a:off x="6858000" y="5020056"/>
+            <a:ext cx="4846320" cy="237744"/>
+          </a:xfrm>
+          <a:prstGeom prst="rect">
+            <a:avLst/>
+          </a:prstGeom>
+          <a:noFill/>
+        </p:spPr>
+        <p:txBody>
+          <a:bodyPr wrap="square" lIns="0" rIns="0" tIns="0" bIns="0">
+            <a:spAutoFit/>
+          </a:bodyPr>
+          <a:lstStyle/>
+          <a:p>
+            <a:pPr algn="l">
+              <a:spcAft>
+                <a:spcPts val="0"/>
+              </a:spcAft>
+            </a:pPr>
+            <a:r>
+              <a:rPr sz="1050" b="0">
+                <a:solidFill>
+                  <a:srgbClr val="6B6B6B"/>
+                </a:solidFill>
+                <a:latin typeface="Courier New"/>
+              </a:rPr>
+              <a:t>ocplogs.core.etched.com</a:t>
+            </a:r>
+          </a:p>
+        </p:txBody>
+      </p:sp>
+      <p:sp>
+        <p:nvSpPr>
+          <p:cNvPr id="27" name="TextBox 26"/>
+          <p:cNvSpPr txBox="1"/>
+          <p:nvPr/>
+        </p:nvSpPr>
+        <p:spPr>
+          <a:xfrm>
+            <a:off x="731520" y="5294376"/>
+            <a:ext cx="6035040" cy="237744"/>
+          </a:xfrm>
+          <a:prstGeom prst="rect">
+            <a:avLst/>
+          </a:prstGeom>
+          <a:noFill/>
+        </p:spPr>
+        <p:txBody>
+          <a:bodyPr wrap="square" lIns="0" rIns="0" tIns="0" bIns="0">
+            <a:spAutoFit/>
+          </a:bodyPr>
+          <a:lstStyle/>
+          <a:p>
+            <a:pPr algn="l">
+              <a:spcAft>
+                <a:spcPts val="0"/>
+              </a:spcAft>
+            </a:pPr>
+            <a:r>
+              <a:rPr sz="1100" b="0">
+                <a:solidFill>
+                  <a:srgbClr val="141414"/>
+                </a:solidFill>
+                <a:latin typeface="Arial"/>
+              </a:rPr>
+              <a:t>WST and FT — Sigurd's STDF and SPLM, asked for weekly in #production-test-eng</a:t>
+            </a:r>
+          </a:p>
+        </p:txBody>
+      </p:sp>
+      <p:sp>
+        <p:nvSpPr>
+          <p:cNvPr id="28" name="TextBox 27"/>
+          <p:cNvSpPr txBox="1"/>
+          <p:nvPr/>
+        </p:nvSpPr>
+        <p:spPr>
+          <a:xfrm>
+            <a:off x="6858000" y="5294376"/>
+            <a:ext cx="4846320" cy="237744"/>
+          </a:xfrm>
+          <a:prstGeom prst="rect">
+            <a:avLst/>
+          </a:prstGeom>
+          <a:noFill/>
+        </p:spPr>
+        <p:txBody>
+          <a:bodyPr wrap="square" lIns="0" rIns="0" tIns="0" bIns="0">
+            <a:spAutoFit/>
+          </a:bodyPr>
+          <a:lstStyle/>
+          <a:p>
+            <a:pPr algn="l">
+              <a:spcAft>
+                <a:spcPts val="0"/>
+              </a:spcAft>
+            </a:pPr>
+            <a:r>
+              <a:rPr sz="1050" b="0">
+                <a:solidFill>
+                  <a:srgbClr val="6B6B6B"/>
+                </a:solidFill>
+                <a:latin typeface="Courier New"/>
+              </a:rPr>
+              <a:t>strata6.sv9.i.etched.com:8235 · splm.i.etched.com</a:t>
+            </a:r>
+          </a:p>
+        </p:txBody>
+      </p:sp>
+      <p:sp>
+        <p:nvSpPr>
+          <p:cNvPr id="29" name="TextBox 28"/>
+          <p:cNvSpPr txBox="1"/>
+          <p:nvPr/>
+        </p:nvSpPr>
+        <p:spPr>
+          <a:xfrm>
+            <a:off x="731520" y="5568696"/>
+            <a:ext cx="6035040" cy="237744"/>
+          </a:xfrm>
+          <a:prstGeom prst="rect">
+            <a:avLst/>
+          </a:prstGeom>
+          <a:noFill/>
+        </p:spPr>
+        <p:txBody>
+          <a:bodyPr wrap="square" lIns="0" rIns="0" tIns="0" bIns="0">
+            <a:spAutoFit/>
+          </a:bodyPr>
+          <a:lstStyle/>
+          <a:p>
+            <a:pPr algn="l">
+              <a:spcAft>
+                <a:spcPts val="0"/>
+              </a:spcAft>
+            </a:pPr>
+            <a:r>
+              <a:rPr sz="1100" b="0">
+                <a:solidFill>
+                  <a:srgbClr val="141414"/>
+                </a:solidFill>
+                <a:latin typeface="Arial"/>
+              </a:rPr>
+              <a:t>This deck, the pipeline that built it, and every archived week</a:t>
+            </a:r>
+          </a:p>
+        </p:txBody>
+      </p:sp>
+      <p:sp>
+        <p:nvSpPr>
+          <p:cNvPr id="30" name="TextBox 29"/>
+          <p:cNvSpPr txBox="1"/>
+          <p:nvPr/>
+        </p:nvSpPr>
+        <p:spPr>
+          <a:xfrm>
+            <a:off x="6858000" y="5568696"/>
+            <a:ext cx="4846320" cy="237744"/>
+          </a:xfrm>
+          <a:prstGeom prst="rect">
+            <a:avLst/>
+          </a:prstGeom>
+          <a:noFill/>
+        </p:spPr>
+        <p:txBody>
+          <a:bodyPr wrap="square" lIns="0" rIns="0" tIns="0" bIns="0">
+            <a:spAutoFit/>
+          </a:bodyPr>
+          <a:lstStyle/>
+          <a:p>
+            <a:pPr algn="l">
+              <a:spcAft>
+                <a:spcPts val="0"/>
+              </a:spcAft>
+            </a:pPr>
+            <a:r>
+              <a:rPr sz="1050" b="0">
+                <a:solidFill>
+                  <a:srgbClr val="6B6B6B"/>
+                </a:solidFill>
+                <a:latin typeface="Courier New"/>
+              </a:rPr>
+              <a:t>github.com/etched-ai/factory_data_analysis · weekly/2026-W33/</a:t>
+            </a:r>
+          </a:p>
+        </p:txBody>
+      </p:sp>
+      <p:sp>
+        <p:nvSpPr>
+          <p:cNvPr id="31" name="TextBox 30"/>
+          <p:cNvSpPr txBox="1"/>
+          <p:nvPr/>
+        </p:nvSpPr>
+        <p:spPr>
+          <a:xfrm>
+            <a:off x="566928" y="6327648"/>
+            <a:ext cx="11057839" cy="365760"/>
+          </a:xfrm>
+          <a:prstGeom prst="rect">
+            <a:avLst/>
+          </a:prstGeom>
+          <a:noFill/>
+        </p:spPr>
+        <p:txBody>
+          <a:bodyPr wrap="square" lIns="0" rIns="0" tIns="0" bIns="0">
+            <a:spAutoFit/>
+          </a:bodyPr>
+          <a:lstStyle/>
+          <a:p>
+            <a:pPr algn="l">
+              <a:spcAft>
+                <a:spcPts val="0"/>
+              </a:spcAft>
+            </a:pPr>
+            <a:r>
+              <a:rPr sz="950" b="0">
+                <a:solidFill>
+                  <a:srgbClr val="6B6B6B"/>
+                </a:solidFill>
+                <a:latin typeface="Arial"/>
+              </a:rPr>
+              <a:t>All addresses are on the factory network. The dashboard rebuilds hourly; the archived copy of 2026-W33 under weekly/ does not change.</a:t>
             </a:r>
           </a:p>
         </p:txBody>
